--- a/static/ppts/G6_Sci_T2_States_of_Matter.pptx
+++ b/static/ppts/G6_Sci_T2_States_of_Matter.pptx
@@ -9,11 +9,9 @@
     <p:sldId id="257" r:id="rId3"/>
     <p:sldId id="258" r:id="rId4"/>
     <p:sldId id="259" r:id="rId5"/>
-    <p:sldId id="260" r:id="rId6"/>
-    <p:sldId id="261" r:id="rId7"/>
   </p:sldIdLst>
   <p:notesMasterIdLst>
-    <p:notesMasterId r:id="rId8"/>
+    <p:notesMasterId r:id="rId6"/>
   </p:notesMasterIdLst>
   <p:sldSz cx="9144000" cy="5143500"/>
   <p:notesSz cx="5143500" cy="9144000"/>
@@ -813,182 +811,6 @@
 </p:notes>
 </file>
 
-<file path=ppt/notesSlides/notesSlide5.xml><?xml version="1.0" encoding="utf-8"?>
-<p:notes xmlns:a="http://schemas.openxmlformats.org/drawingml/2006/main" xmlns:r="http://schemas.openxmlformats.org/officeDocument/2006/relationships" xmlns:p="http://schemas.openxmlformats.org/presentationml/2006/main">
-  <p:cSld>
-    <p:spTree>
-      <p:nvGrpSpPr>
-        <p:cNvPr id="1" name=""/>
-        <p:cNvGrpSpPr/>
-        <p:nvPr/>
-      </p:nvGrpSpPr>
-      <p:grpSpPr>
-        <a:xfrm>
-          <a:off x="0" y="0"/>
-          <a:ext cx="0" cy="0"/>
-          <a:chOff x="0" y="0"/>
-          <a:chExt cx="0" cy="0"/>
-        </a:xfrm>
-      </p:grpSpPr>
-      <p:sp>
-        <p:nvSpPr>
-          <p:cNvPr id="2" name="Slide Image Placeholder 1"/>
-          <p:cNvSpPr>
-            <a:spLocks noGrp="1" noRot="1" noChangeAspect="1"/>
-          </p:cNvSpPr>
-          <p:nvPr>
-            <p:ph type="sldImg"/>
-          </p:nvPr>
-        </p:nvSpPr>
-        <p:spPr/>
-      </p:sp>
-      <p:sp>
-        <p:nvSpPr>
-          <p:cNvPr id="3" name="Notes Placeholder 2"/>
-          <p:cNvSpPr>
-            <a:spLocks noGrp="1"/>
-          </p:cNvSpPr>
-          <p:nvPr>
-            <p:ph type="body" idx="1"/>
-          </p:nvPr>
-        </p:nvSpPr>
-        <p:spPr/>
-        <p:txBody>
-          <a:bodyPr/>
-          <a:lstStyle/>
-          <a:p>
-            <a:r>
-              <a:rPr lang="en-US" dirty="0"/>
-              <a:t/>
-            </a:r>
-            <a:endParaRPr lang="en-US" dirty="0"/>
-          </a:p>
-        </p:txBody>
-      </p:sp>
-      <p:sp>
-        <p:nvSpPr>
-          <p:cNvPr id="4" name="Slide Number Placeholder 3"/>
-          <p:cNvSpPr>
-            <a:spLocks noGrp="1"/>
-          </p:cNvSpPr>
-          <p:nvPr>
-            <p:ph type="sldNum" sz="quarter" idx="10"/>
-          </p:nvPr>
-        </p:nvSpPr>
-        <p:spPr/>
-        <p:txBody>
-          <a:bodyPr/>
-          <a:lstStyle/>
-          <a:p>
-            <a:fld id="{F7021451-1387-4CA6-816F-3879F97B5CBC}" type="slidenum">
-              <a:rPr lang="en-US"/>
-              <a:t>5</a:t>
-            </a:fld>
-            <a:endParaRPr lang="en-US"/>
-          </a:p>
-        </p:txBody>
-      </p:sp>
-    </p:spTree>
-    <p:extLst>
-      <p:ext uri="{BB962C8B-B14F-4D97-AF65-F5344CB8AC3E}">
-        <p14:creationId xmlns:p14="http://schemas.microsoft.com/office/powerpoint/2010/main" val="1024086991"/>
-      </p:ext>
-    </p:extLst>
-  </p:cSld>
-  <p:clrMapOvr>
-    <a:masterClrMapping/>
-  </p:clrMapOvr>
-</p:notes>
-</file>
-
-<file path=ppt/notesSlides/notesSlide6.xml><?xml version="1.0" encoding="utf-8"?>
-<p:notes xmlns:a="http://schemas.openxmlformats.org/drawingml/2006/main" xmlns:r="http://schemas.openxmlformats.org/officeDocument/2006/relationships" xmlns:p="http://schemas.openxmlformats.org/presentationml/2006/main">
-  <p:cSld>
-    <p:spTree>
-      <p:nvGrpSpPr>
-        <p:cNvPr id="1" name=""/>
-        <p:cNvGrpSpPr/>
-        <p:nvPr/>
-      </p:nvGrpSpPr>
-      <p:grpSpPr>
-        <a:xfrm>
-          <a:off x="0" y="0"/>
-          <a:ext cx="0" cy="0"/>
-          <a:chOff x="0" y="0"/>
-          <a:chExt cx="0" cy="0"/>
-        </a:xfrm>
-      </p:grpSpPr>
-      <p:sp>
-        <p:nvSpPr>
-          <p:cNvPr id="2" name="Slide Image Placeholder 1"/>
-          <p:cNvSpPr>
-            <a:spLocks noGrp="1" noRot="1" noChangeAspect="1"/>
-          </p:cNvSpPr>
-          <p:nvPr>
-            <p:ph type="sldImg"/>
-          </p:nvPr>
-        </p:nvSpPr>
-        <p:spPr/>
-      </p:sp>
-      <p:sp>
-        <p:nvSpPr>
-          <p:cNvPr id="3" name="Notes Placeholder 2"/>
-          <p:cNvSpPr>
-            <a:spLocks noGrp="1"/>
-          </p:cNvSpPr>
-          <p:nvPr>
-            <p:ph type="body" idx="1"/>
-          </p:nvPr>
-        </p:nvSpPr>
-        <p:spPr/>
-        <p:txBody>
-          <a:bodyPr/>
-          <a:lstStyle/>
-          <a:p>
-            <a:r>
-              <a:rPr lang="en-US" dirty="0"/>
-              <a:t/>
-            </a:r>
-            <a:endParaRPr lang="en-US" dirty="0"/>
-          </a:p>
-        </p:txBody>
-      </p:sp>
-      <p:sp>
-        <p:nvSpPr>
-          <p:cNvPr id="4" name="Slide Number Placeholder 3"/>
-          <p:cNvSpPr>
-            <a:spLocks noGrp="1"/>
-          </p:cNvSpPr>
-          <p:nvPr>
-            <p:ph type="sldNum" sz="quarter" idx="10"/>
-          </p:nvPr>
-        </p:nvSpPr>
-        <p:spPr/>
-        <p:txBody>
-          <a:bodyPr/>
-          <a:lstStyle/>
-          <a:p>
-            <a:fld id="{F7021451-1387-4CA6-816F-3879F97B5CBC}" type="slidenum">
-              <a:rPr lang="en-US"/>
-              <a:t>6</a:t>
-            </a:fld>
-            <a:endParaRPr lang="en-US"/>
-          </a:p>
-        </p:txBody>
-      </p:sp>
-    </p:spTree>
-    <p:extLst>
-      <p:ext uri="{BB962C8B-B14F-4D97-AF65-F5344CB8AC3E}">
-        <p14:creationId xmlns:p14="http://schemas.microsoft.com/office/powerpoint/2010/main" val="1024086991"/>
-      </p:ext>
-    </p:extLst>
-  </p:cSld>
-  <p:clrMapOvr>
-    <a:masterClrMapping/>
-  </p:clrMapOvr>
-</p:notes>
-</file>
-
 <file path=ppt/slideLayouts/slideLayout1.xml><?xml version="1.0" encoding="utf-8"?>
 <p:sldLayout xmlns:a="http://schemas.openxmlformats.org/drawingml/2006/main" xmlns:r="http://schemas.openxmlformats.org/officeDocument/2006/relationships" xmlns:p="http://schemas.openxmlformats.org/presentationml/2006/main" preserve="1">
   <p:cSld name="DEFAULT">
@@ -1302,7 +1124,7 @@
     <p:bg>
       <p:bgPr>
         <a:solidFill>
-          <a:srgbClr val="7C3AED"/>
+          <a:srgbClr val="1B2A4A"/>
         </a:solidFill>
       </p:bgPr>
     </p:bg>
@@ -1322,14 +1144,34 @@
       </p:grpSpPr>
       <p:sp>
         <p:nvSpPr>
-          <p:cNvPr id="2" name="Text 0"/>
-          <p:cNvSpPr/>
-          <p:nvPr/>
-        </p:nvSpPr>
-        <p:spPr>
-          <a:xfrm>
-            <a:off x="731520" y="1371600"/>
-            <a:ext cx="7680960" cy="1371600"/>
+          <p:cNvPr id="2" name="Shape 0"/>
+          <p:cNvSpPr/>
+          <p:nvPr/>
+        </p:nvSpPr>
+        <p:spPr>
+          <a:xfrm>
+            <a:off x="0" y="0"/>
+            <a:ext cx="109728" cy="5143500"/>
+          </a:xfrm>
+          <a:prstGeom prst="rect">
+            <a:avLst/>
+          </a:prstGeom>
+          <a:solidFill>
+            <a:srgbClr val="2A9D8F"/>
+          </a:solidFill>
+          <a:ln/>
+        </p:spPr>
+      </p:sp>
+      <p:sp>
+        <p:nvSpPr>
+          <p:cNvPr id="3" name="Text 1"/>
+          <p:cNvSpPr/>
+          <p:nvPr/>
+        </p:nvSpPr>
+        <p:spPr>
+          <a:xfrm>
+            <a:off x="731520" y="1280160"/>
+            <a:ext cx="7772400" cy="1371600"/>
           </a:xfrm>
           <a:prstGeom prst="rect">
             <a:avLst/>
@@ -1345,30 +1187,69 @@
               <a:buNone/>
             </a:pPr>
             <a:r>
-              <a:rPr lang="en-US" sz="4000" b="1" dirty="0">
+              <a:rPr lang="en-US" sz="3600" b="1" dirty="0">
                 <a:solidFill>
                   <a:srgbClr val="FFFFFF"/>
+                </a:solidFill>
+                <a:latin typeface="Georgia" pitchFamily="34" charset="0"/>
+                <a:ea typeface="Georgia" pitchFamily="34" charset="-122"/>
+                <a:cs typeface="Georgia" pitchFamily="34" charset="-120"/>
+              </a:rPr>
+              <a:t>States of Matter</a:t>
+            </a:r>
+            <a:endParaRPr lang="en-US" sz="3600" dirty="0"/>
+          </a:p>
+        </p:txBody>
+      </p:sp>
+      <p:sp>
+        <p:nvSpPr>
+          <p:cNvPr id="4" name="Text 2"/>
+          <p:cNvSpPr/>
+          <p:nvPr/>
+        </p:nvSpPr>
+        <p:spPr>
+          <a:xfrm>
+            <a:off x="731520" y="2743200"/>
+            <a:ext cx="7772400" cy="548640"/>
+          </a:xfrm>
+          <a:prstGeom prst="rect">
+            <a:avLst/>
+          </a:prstGeom>
+          <a:noFill/>
+          <a:ln/>
+        </p:spPr>
+        <p:txBody>
+          <a:bodyPr wrap="square" rtlCol="0" anchor="ctr"/>
+          <a:lstStyle/>
+          <a:p>
+            <a:pPr indent="0" marL="0">
+              <a:buNone/>
+            </a:pPr>
+            <a:r>
+              <a:rPr lang="en-US" sz="1600" dirty="0">
+                <a:solidFill>
+                  <a:srgbClr val="9B9690"/>
                 </a:solidFill>
                 <a:latin typeface="Calibri" pitchFamily="34" charset="0"/>
                 <a:ea typeface="Calibri" pitchFamily="34" charset="-122"/>
                 <a:cs typeface="Calibri" pitchFamily="34" charset="-120"/>
               </a:rPr>
-              <a:t>States of Matter</a:t>
-            </a:r>
-            <a:endParaRPr lang="en-US" sz="4000" dirty="0"/>
-          </a:p>
-        </p:txBody>
-      </p:sp>
-      <p:sp>
-        <p:nvSpPr>
-          <p:cNvPr id="3" name="Text 1"/>
-          <p:cNvSpPr/>
-          <p:nvPr/>
-        </p:nvSpPr>
-        <p:spPr>
-          <a:xfrm>
-            <a:off x="731520" y="2926080"/>
-            <a:ext cx="7680960" cy="548640"/>
+              <a:t>G6 Science · Chemistry</a:t>
+            </a:r>
+            <a:endParaRPr lang="en-US" sz="1600" dirty="0"/>
+          </a:p>
+        </p:txBody>
+      </p:sp>
+      <p:sp>
+        <p:nvSpPr>
+          <p:cNvPr id="5" name="Text 3"/>
+          <p:cNvSpPr/>
+          <p:nvPr/>
+        </p:nvSpPr>
+        <p:spPr>
+          <a:xfrm>
+            <a:off x="731520" y="4389120"/>
+            <a:ext cx="7772400" cy="457200"/>
           </a:xfrm>
           <a:prstGeom prst="rect">
             <a:avLst/>
@@ -1384,17 +1265,17 @@
               <a:buNone/>
             </a:pPr>
             <a:r>
-              <a:rPr lang="en-US" sz="1600" i="1" dirty="0">
-                <a:solidFill>
-                  <a:srgbClr val="FFFFFF"/>
+              <a:rPr lang="en-US" sz="1000" dirty="0">
+                <a:solidFill>
+                  <a:srgbClr val="6B6660"/>
                 </a:solidFill>
                 <a:latin typeface="Calibri" pitchFamily="34" charset="0"/>
                 <a:ea typeface="Calibri" pitchFamily="34" charset="-122"/>
                 <a:cs typeface="Calibri" pitchFamily="34" charset="-120"/>
               </a:rPr>
-              <a:t>Grade 6 Science · Mr Zocchi</a:t>
-            </a:r>
-            <a:endParaRPr lang="en-US" sz="1600" dirty="0"/>
+              <a:t>Mr Zocchi · mrzocchi.com</a:t>
+            </a:r>
+            <a:endParaRPr lang="en-US" sz="1000" dirty="0"/>
           </a:p>
         </p:txBody>
       </p:sp>
@@ -1409,6 +1290,13 @@
 <file path=ppt/slides/slide2.xml><?xml version="1.0" encoding="utf-8"?>
 <p:sld xmlns:a="http://schemas.openxmlformats.org/drawingml/2006/main" xmlns:r="http://schemas.openxmlformats.org/officeDocument/2006/relationships" xmlns:p="http://schemas.openxmlformats.org/presentationml/2006/main">
   <p:cSld name="Slide 2">
+    <p:bg>
+      <p:bgPr>
+        <a:solidFill>
+          <a:srgbClr val="FFFFFF"/>
+        </a:solidFill>
+      </p:bgPr>
+    </p:bg>
     <p:spTree>
       <p:nvGrpSpPr>
         <p:cNvPr id="1" name=""/>
@@ -1432,13 +1320,13 @@
         <p:spPr>
           <a:xfrm>
             <a:off x="0" y="0"/>
-            <a:ext cx="9144000" cy="548640"/>
-          </a:xfrm>
-          <a:prstGeom prst="rect">
-            <a:avLst/>
-          </a:prstGeom>
-          <a:solidFill>
-            <a:srgbClr val="7C3AED"/>
+            <a:ext cx="9144000" cy="54864"/>
+          </a:xfrm>
+          <a:prstGeom prst="rect">
+            <a:avLst/>
+          </a:prstGeom>
+          <a:solidFill>
+            <a:srgbClr val="2A9D8F"/>
           </a:solidFill>
           <a:ln/>
         </p:spPr>
@@ -1451,8 +1339,8 @@
         </p:nvSpPr>
         <p:spPr>
           <a:xfrm>
-            <a:off x="457200" y="45720"/>
-            <a:ext cx="8229600" cy="457200"/>
+            <a:off x="548640" y="274320"/>
+            <a:ext cx="8046720" cy="640080"/>
           </a:xfrm>
           <a:prstGeom prst="rect">
             <a:avLst/>
@@ -1461,125 +1349,186 @@
           <a:ln/>
         </p:spPr>
         <p:txBody>
-          <a:bodyPr wrap="square" rtlCol="0" anchor="ctr"/>
+          <a:bodyPr wrap="square" lIns="0" tIns="0" rIns="0" bIns="0" rtlCol="0" anchor="ctr"/>
           <a:lstStyle/>
           <a:p>
             <a:pPr indent="0" marL="0">
               <a:buNone/>
             </a:pPr>
             <a:r>
-              <a:rPr lang="en-US" sz="1800" b="1" dirty="0">
-                <a:solidFill>
-                  <a:srgbClr val="FFFFFF"/>
+              <a:rPr lang="en-US" sz="2600" b="1" dirty="0">
+                <a:solidFill>
+                  <a:srgbClr val="1B2A4A"/>
+                </a:solidFill>
+                <a:latin typeface="Georgia" pitchFamily="34" charset="0"/>
+                <a:ea typeface="Georgia" pitchFamily="34" charset="-122"/>
+                <a:cs typeface="Georgia" pitchFamily="34" charset="-120"/>
+              </a:rPr>
+              <a:t>Three States of Matter</a:t>
+            </a:r>
+            <a:endParaRPr lang="en-US" sz="2600" dirty="0"/>
+          </a:p>
+        </p:txBody>
+      </p:sp>
+      <p:sp>
+        <p:nvSpPr>
+          <p:cNvPr id="4" name="Text 2"/>
+          <p:cNvSpPr/>
+          <p:nvPr/>
+        </p:nvSpPr>
+        <p:spPr>
+          <a:xfrm>
+            <a:off x="548640" y="1097280"/>
+            <a:ext cx="8046720" cy="3474720"/>
+          </a:xfrm>
+          <a:prstGeom prst="rect">
+            <a:avLst/>
+          </a:prstGeom>
+          <a:noFill/>
+          <a:ln/>
+        </p:spPr>
+        <p:txBody>
+          <a:bodyPr wrap="square" rtlCol="0" anchor="t"/>
+          <a:lstStyle/>
+          <a:p>
+            <a:pPr marL="342900" indent="-342900">
+              <a:spcAft>
+                <a:spcPts val="800"/>
+              </a:spcAft>
+              <a:buSzPct val="100000"/>
+              <a:buChar char="•"/>
+            </a:pPr>
+            <a:r>
+              <a:rPr lang="en-US" sz="1500" dirty="0">
+                <a:solidFill>
+                  <a:srgbClr val="3D3A36"/>
                 </a:solidFill>
                 <a:latin typeface="Calibri" pitchFamily="34" charset="0"/>
                 <a:ea typeface="Calibri" pitchFamily="34" charset="-122"/>
                 <a:cs typeface="Calibri" pitchFamily="34" charset="-120"/>
               </a:rPr>
-              <a:t>Solids</a:t>
-            </a:r>
-            <a:endParaRPr lang="en-US" sz="1800" dirty="0"/>
-          </a:p>
-        </p:txBody>
-      </p:sp>
-      <p:sp>
-        <p:nvSpPr>
-          <p:cNvPr id="4" name="Text 2"/>
-          <p:cNvSpPr/>
-          <p:nvPr/>
-        </p:nvSpPr>
-        <p:spPr>
-          <a:xfrm>
-            <a:off x="731520" y="1097280"/>
-            <a:ext cx="7680960" cy="3200400"/>
-          </a:xfrm>
-          <a:prstGeom prst="rect">
-            <a:avLst/>
-          </a:prstGeom>
-          <a:noFill/>
-          <a:ln/>
-        </p:spPr>
-        <p:txBody>
-          <a:bodyPr wrap="square" rtlCol="0" anchor="ctr"/>
-          <a:lstStyle/>
-          <a:p>
-            <a:pPr indent="0" marL="0">
-              <a:buNone/>
-            </a:pPr>
-            <a:r>
-              <a:rPr lang="en-US" sz="1600" dirty="0">
-                <a:solidFill>
-                  <a:srgbClr val="363636"/>
+              <a:t>SOLID — fixed shape, fixed volume, particles vibrate in place</a:t>
+            </a:r>
+            <a:endParaRPr lang="en-US" sz="1500" dirty="0"/>
+          </a:p>
+          <a:p>
+            <a:pPr marL="342900" indent="-342900">
+              <a:spcAft>
+                <a:spcPts val="800"/>
+              </a:spcAft>
+              <a:buSzPct val="100000"/>
+              <a:buChar char="•"/>
+            </a:pPr>
+            <a:r>
+              <a:rPr lang="en-US" sz="1500" dirty="0">
+                <a:solidFill>
+                  <a:srgbClr val="3D3A36"/>
                 </a:solidFill>
                 <a:latin typeface="Calibri" pitchFamily="34" charset="0"/>
                 <a:ea typeface="Calibri" pitchFamily="34" charset="-122"/>
                 <a:cs typeface="Calibri" pitchFamily="34" charset="-120"/>
               </a:rPr>
-              <a:t>Content for: Solids</a:t>
-            </a:r>
-            <a:endParaRPr lang="en-US" sz="1600" dirty="0"/>
-          </a:p>
-          <a:p>
-            <a:pPr indent="0" marL="0">
-              <a:buNone/>
-            </a:pPr>
-            <a:endParaRPr lang="en-US" sz="1600" dirty="0"/>
-          </a:p>
-          <a:p>
-            <a:pPr indent="0" marL="0">
-              <a:buNone/>
-            </a:pPr>
-            <a:r>
-              <a:rPr lang="en-US" sz="1600" dirty="0">
-                <a:solidFill>
-                  <a:srgbClr val="363636"/>
+              <a:t>LIQUID — takes shape of container, fixed volume, particles slide</a:t>
+            </a:r>
+            <a:endParaRPr lang="en-US" sz="1500" dirty="0"/>
+          </a:p>
+          <a:p>
+            <a:pPr marL="342900" indent="-342900">
+              <a:spcAft>
+                <a:spcPts val="800"/>
+              </a:spcAft>
+              <a:buSzPct val="100000"/>
+              <a:buChar char="•"/>
+            </a:pPr>
+            <a:r>
+              <a:rPr lang="en-US" sz="1500" dirty="0">
+                <a:solidFill>
+                  <a:srgbClr val="3D3A36"/>
                 </a:solidFill>
                 <a:latin typeface="Calibri" pitchFamily="34" charset="0"/>
                 <a:ea typeface="Calibri" pitchFamily="34" charset="-122"/>
                 <a:cs typeface="Calibri" pitchFamily="34" charset="-120"/>
               </a:rPr>
-              <a:t>Key points will be covered in class.</a:t>
-            </a:r>
-            <a:endParaRPr lang="en-US" sz="1600" dirty="0"/>
-          </a:p>
-        </p:txBody>
-      </p:sp>
-      <p:sp>
-        <p:nvSpPr>
-          <p:cNvPr id="5" name="Text 3"/>
-          <p:cNvSpPr/>
-          <p:nvPr/>
-        </p:nvSpPr>
-        <p:spPr>
-          <a:xfrm>
-            <a:off x="7772400" y="4663440"/>
-            <a:ext cx="1097280" cy="365760"/>
-          </a:xfrm>
-          <a:prstGeom prst="rect">
-            <a:avLst/>
-          </a:prstGeom>
-          <a:noFill/>
-          <a:ln/>
-        </p:spPr>
-        <p:txBody>
-          <a:bodyPr wrap="square" rtlCol="0" anchor="ctr"/>
-          <a:lstStyle/>
-          <a:p>
-            <a:pPr algn="r" indent="0" marL="0">
-              <a:buNone/>
-            </a:pPr>
-            <a:r>
-              <a:rPr lang="en-US" sz="1000" dirty="0">
-                <a:solidFill>
-                  <a:srgbClr val="999999"/>
+              <a:t>GAS — fills any container, no fixed volume, particles move freely</a:t>
+            </a:r>
+            <a:endParaRPr lang="en-US" sz="1500" dirty="0"/>
+          </a:p>
+          <a:p>
+            <a:pPr marL="342900" indent="-342900">
+              <a:spcAft>
+                <a:spcPts val="800"/>
+              </a:spcAft>
+              <a:buSzPct val="100000"/>
+              <a:buChar char="•"/>
+            </a:pPr>
+            <a:r>
+              <a:rPr lang="en-US" sz="1500" dirty="0">
+                <a:solidFill>
+                  <a:srgbClr val="3D3A36"/>
                 </a:solidFill>
                 <a:latin typeface="Calibri" pitchFamily="34" charset="0"/>
                 <a:ea typeface="Calibri" pitchFamily="34" charset="-122"/>
                 <a:cs typeface="Calibri" pitchFamily="34" charset="-120"/>
               </a:rPr>
-              <a:t>2 / 6</a:t>
-            </a:r>
-            <a:endParaRPr lang="en-US" sz="1000" dirty="0"/>
+              <a:t>Most substances can exist in all three states depending on temperature</a:t>
+            </a:r>
+            <a:endParaRPr lang="en-US" sz="1500" dirty="0"/>
+          </a:p>
+        </p:txBody>
+      </p:sp>
+      <p:sp>
+        <p:nvSpPr>
+          <p:cNvPr id="5" name="Shape 3"/>
+          <p:cNvSpPr/>
+          <p:nvPr/>
+        </p:nvSpPr>
+        <p:spPr>
+          <a:xfrm>
+            <a:off x="548640" y="4754880"/>
+            <a:ext cx="8046720" cy="9144"/>
+          </a:xfrm>
+          <a:prstGeom prst="rect">
+            <a:avLst/>
+          </a:prstGeom>
+          <a:solidFill>
+            <a:srgbClr val="F3F1EE"/>
+          </a:solidFill>
+          <a:ln/>
+        </p:spPr>
+      </p:sp>
+      <p:sp>
+        <p:nvSpPr>
+          <p:cNvPr id="6" name="Text 4"/>
+          <p:cNvSpPr/>
+          <p:nvPr/>
+        </p:nvSpPr>
+        <p:spPr>
+          <a:xfrm>
+            <a:off x="548640" y="4800600"/>
+            <a:ext cx="3657600" cy="274320"/>
+          </a:xfrm>
+          <a:prstGeom prst="rect">
+            <a:avLst/>
+          </a:prstGeom>
+          <a:noFill/>
+          <a:ln/>
+        </p:spPr>
+        <p:txBody>
+          <a:bodyPr wrap="square" rtlCol="0" anchor="ctr"/>
+          <a:lstStyle/>
+          <a:p>
+            <a:pPr indent="0" marL="0">
+              <a:buNone/>
+            </a:pPr>
+            <a:r>
+              <a:rPr lang="en-US" sz="800" dirty="0">
+                <a:solidFill>
+                  <a:srgbClr val="9B9690"/>
+                </a:solidFill>
+              </a:rPr>
+              <a:t>mrzocchi.com</a:t>
+            </a:r>
+            <a:endParaRPr lang="en-US" sz="800" dirty="0"/>
           </a:p>
         </p:txBody>
       </p:sp>
@@ -1594,6 +1543,13 @@
 <file path=ppt/slides/slide3.xml><?xml version="1.0" encoding="utf-8"?>
 <p:sld xmlns:a="http://schemas.openxmlformats.org/drawingml/2006/main" xmlns:r="http://schemas.openxmlformats.org/officeDocument/2006/relationships" xmlns:p="http://schemas.openxmlformats.org/presentationml/2006/main">
   <p:cSld name="Slide 3">
+    <p:bg>
+      <p:bgPr>
+        <a:solidFill>
+          <a:srgbClr val="FAF8F5"/>
+        </a:solidFill>
+      </p:bgPr>
+    </p:bg>
     <p:spTree>
       <p:nvGrpSpPr>
         <p:cNvPr id="1" name=""/>
@@ -1617,13 +1573,13 @@
         <p:spPr>
           <a:xfrm>
             <a:off x="0" y="0"/>
-            <a:ext cx="9144000" cy="548640"/>
-          </a:xfrm>
-          <a:prstGeom prst="rect">
-            <a:avLst/>
-          </a:prstGeom>
-          <a:solidFill>
-            <a:srgbClr val="7C3AED"/>
+            <a:ext cx="9144000" cy="54864"/>
+          </a:xfrm>
+          <a:prstGeom prst="rect">
+            <a:avLst/>
+          </a:prstGeom>
+          <a:solidFill>
+            <a:srgbClr val="2A9D8F"/>
           </a:solidFill>
           <a:ln/>
         </p:spPr>
@@ -1636,8 +1592,94 @@
         </p:nvSpPr>
         <p:spPr>
           <a:xfrm>
-            <a:off x="457200" y="45720"/>
-            <a:ext cx="8229600" cy="457200"/>
+            <a:off x="548640" y="274320"/>
+            <a:ext cx="8046720" cy="640080"/>
+          </a:xfrm>
+          <a:prstGeom prst="rect">
+            <a:avLst/>
+          </a:prstGeom>
+          <a:noFill/>
+          <a:ln/>
+        </p:spPr>
+        <p:txBody>
+          <a:bodyPr wrap="square" lIns="0" tIns="0" rIns="0" bIns="0" rtlCol="0" anchor="ctr"/>
+          <a:lstStyle/>
+          <a:p>
+            <a:pPr indent="0" marL="0">
+              <a:buNone/>
+            </a:pPr>
+            <a:r>
+              <a:rPr lang="en-US" sz="2600" b="1" dirty="0">
+                <a:solidFill>
+                  <a:srgbClr val="1B2A4A"/>
+                </a:solidFill>
+                <a:latin typeface="Georgia" pitchFamily="34" charset="0"/>
+                <a:ea typeface="Georgia" pitchFamily="34" charset="-122"/>
+                <a:cs typeface="Georgia" pitchFamily="34" charset="-120"/>
+              </a:rPr>
+              <a:t>Properties</a:t>
+            </a:r>
+            <a:endParaRPr lang="en-US" sz="2600" dirty="0"/>
+          </a:p>
+        </p:txBody>
+      </p:sp>
+      <p:sp>
+        <p:nvSpPr>
+          <p:cNvPr id="4" name="Shape 2"/>
+          <p:cNvSpPr/>
+          <p:nvPr/>
+        </p:nvSpPr>
+        <p:spPr>
+          <a:xfrm>
+            <a:off x="548640" y="1097280"/>
+            <a:ext cx="3749040" cy="594360"/>
+          </a:xfrm>
+          <a:prstGeom prst="rect">
+            <a:avLst/>
+          </a:prstGeom>
+          <a:solidFill>
+            <a:srgbClr val="FFFFFF"/>
+          </a:solidFill>
+          <a:ln/>
+          <a:effectLst>
+            <a:outerShdw sx="100000" sy="100000" kx="0" ky="0" algn="bl" rotWithShape="0" blurRad="50800" dist="25400" dir="8100000">
+              <a:srgbClr val="000000">
+                <a:alpha val="10000"/>
+              </a:srgbClr>
+            </a:outerShdw>
+          </a:effectLst>
+        </p:spPr>
+      </p:sp>
+      <p:sp>
+        <p:nvSpPr>
+          <p:cNvPr id="5" name="Shape 3"/>
+          <p:cNvSpPr/>
+          <p:nvPr/>
+        </p:nvSpPr>
+        <p:spPr>
+          <a:xfrm>
+            <a:off x="548640" y="1097280"/>
+            <a:ext cx="54864" cy="594360"/>
+          </a:xfrm>
+          <a:prstGeom prst="rect">
+            <a:avLst/>
+          </a:prstGeom>
+          <a:solidFill>
+            <a:srgbClr val="2A9D8F"/>
+          </a:solidFill>
+          <a:ln/>
+        </p:spPr>
+      </p:sp>
+      <p:sp>
+        <p:nvSpPr>
+          <p:cNvPr id="6" name="Text 4"/>
+          <p:cNvSpPr/>
+          <p:nvPr/>
+        </p:nvSpPr>
+        <p:spPr>
+          <a:xfrm>
+            <a:off x="685800" y="1143000"/>
+            <a:ext cx="3520440" cy="502920"/>
           </a:xfrm>
           <a:prstGeom prst="rect">
             <a:avLst/>
@@ -1653,30 +1695,88 @@
               <a:buNone/>
             </a:pPr>
             <a:r>
-              <a:rPr lang="en-US" sz="1800" b="1" dirty="0">
-                <a:solidFill>
-                  <a:srgbClr val="FFFFFF"/>
-                </a:solidFill>
-                <a:latin typeface="Calibri" pitchFamily="34" charset="0"/>
-                <a:ea typeface="Calibri" pitchFamily="34" charset="-122"/>
-                <a:cs typeface="Calibri" pitchFamily="34" charset="-120"/>
-              </a:rPr>
-              <a:t>Liquids</a:t>
-            </a:r>
-            <a:endParaRPr lang="en-US" sz="1800" dirty="0"/>
-          </a:p>
-        </p:txBody>
-      </p:sp>
-      <p:sp>
-        <p:nvSpPr>
-          <p:cNvPr id="4" name="Text 2"/>
-          <p:cNvSpPr/>
-          <p:nvPr/>
-        </p:nvSpPr>
-        <p:spPr>
-          <a:xfrm>
-            <a:off x="731520" y="1097280"/>
-            <a:ext cx="7680960" cy="3200400"/>
+              <a:rPr lang="en-US" sz="1200" b="1" dirty="0">
+                <a:solidFill>
+                  <a:srgbClr val="1B2A4A"/>
+                </a:solidFill>
+              </a:rPr>
+              <a:t>Solid</a:t>
+            </a:r>
+            <a:endParaRPr lang="en-US" sz="1200" dirty="0"/>
+          </a:p>
+          <a:p>
+            <a:pPr indent="0" marL="0">
+              <a:buNone/>
+            </a:pPr>
+            <a:r>
+              <a:rPr lang="en-US" sz="1000" dirty="0">
+                <a:solidFill>
+                  <a:srgbClr val="6B6660"/>
+                </a:solidFill>
+              </a:rPr>
+              <a:t>Hard, fixed shape, cannot be compressed</a:t>
+            </a:r>
+            <a:endParaRPr lang="en-US" sz="1200" dirty="0"/>
+          </a:p>
+        </p:txBody>
+      </p:sp>
+      <p:sp>
+        <p:nvSpPr>
+          <p:cNvPr id="7" name="Shape 5"/>
+          <p:cNvSpPr/>
+          <p:nvPr/>
+        </p:nvSpPr>
+        <p:spPr>
+          <a:xfrm>
+            <a:off x="4480560" y="1097280"/>
+            <a:ext cx="3749040" cy="594360"/>
+          </a:xfrm>
+          <a:prstGeom prst="rect">
+            <a:avLst/>
+          </a:prstGeom>
+          <a:solidFill>
+            <a:srgbClr val="FFFFFF"/>
+          </a:solidFill>
+          <a:ln/>
+          <a:effectLst>
+            <a:outerShdw sx="100000" sy="100000" kx="0" ky="0" algn="bl" rotWithShape="0" blurRad="50800" dist="25400" dir="8100000">
+              <a:srgbClr val="000000">
+                <a:alpha val="10000"/>
+              </a:srgbClr>
+            </a:outerShdw>
+          </a:effectLst>
+        </p:spPr>
+      </p:sp>
+      <p:sp>
+        <p:nvSpPr>
+          <p:cNvPr id="8" name="Shape 6"/>
+          <p:cNvSpPr/>
+          <p:nvPr/>
+        </p:nvSpPr>
+        <p:spPr>
+          <a:xfrm>
+            <a:off x="4480560" y="1097280"/>
+            <a:ext cx="54864" cy="594360"/>
+          </a:xfrm>
+          <a:prstGeom prst="rect">
+            <a:avLst/>
+          </a:prstGeom>
+          <a:solidFill>
+            <a:srgbClr val="2A9D8F"/>
+          </a:solidFill>
+          <a:ln/>
+        </p:spPr>
+      </p:sp>
+      <p:sp>
+        <p:nvSpPr>
+          <p:cNvPr id="9" name="Text 7"/>
+          <p:cNvSpPr/>
+          <p:nvPr/>
+        </p:nvSpPr>
+        <p:spPr>
+          <a:xfrm>
+            <a:off x="4617720" y="1143000"/>
+            <a:ext cx="3520440" cy="502920"/>
           </a:xfrm>
           <a:prstGeom prst="rect">
             <a:avLst/>
@@ -1692,53 +1792,185 @@
               <a:buNone/>
             </a:pPr>
             <a:r>
-              <a:rPr lang="en-US" sz="1600" dirty="0">
-                <a:solidFill>
-                  <a:srgbClr val="363636"/>
-                </a:solidFill>
-                <a:latin typeface="Calibri" pitchFamily="34" charset="0"/>
-                <a:ea typeface="Calibri" pitchFamily="34" charset="-122"/>
-                <a:cs typeface="Calibri" pitchFamily="34" charset="-120"/>
-              </a:rPr>
-              <a:t>Content for: Liquids</a:t>
-            </a:r>
-            <a:endParaRPr lang="en-US" sz="1600" dirty="0"/>
+              <a:rPr lang="en-US" sz="1200" b="1" dirty="0">
+                <a:solidFill>
+                  <a:srgbClr val="1B2A4A"/>
+                </a:solidFill>
+              </a:rPr>
+              <a:t>Liquid</a:t>
+            </a:r>
+            <a:endParaRPr lang="en-US" sz="1200" dirty="0"/>
           </a:p>
           <a:p>
             <a:pPr indent="0" marL="0">
               <a:buNone/>
             </a:pPr>
-            <a:endParaRPr lang="en-US" sz="1600" dirty="0"/>
-          </a:p>
+            <a:r>
+              <a:rPr lang="en-US" sz="1000" dirty="0">
+                <a:solidFill>
+                  <a:srgbClr val="6B6660"/>
+                </a:solidFill>
+              </a:rPr>
+              <a:t>Flows, takes container shape, cannot be compressed easily</a:t>
+            </a:r>
+            <a:endParaRPr lang="en-US" sz="1200" dirty="0"/>
+          </a:p>
+        </p:txBody>
+      </p:sp>
+      <p:sp>
+        <p:nvSpPr>
+          <p:cNvPr id="10" name="Shape 8"/>
+          <p:cNvSpPr/>
+          <p:nvPr/>
+        </p:nvSpPr>
+        <p:spPr>
+          <a:xfrm>
+            <a:off x="548640" y="1828800"/>
+            <a:ext cx="3749040" cy="594360"/>
+          </a:xfrm>
+          <a:prstGeom prst="rect">
+            <a:avLst/>
+          </a:prstGeom>
+          <a:solidFill>
+            <a:srgbClr val="FFFFFF"/>
+          </a:solidFill>
+          <a:ln/>
+          <a:effectLst>
+            <a:outerShdw sx="100000" sy="100000" kx="0" ky="0" algn="bl" rotWithShape="0" blurRad="50800" dist="25400" dir="8100000">
+              <a:srgbClr val="000000">
+                <a:alpha val="10000"/>
+              </a:srgbClr>
+            </a:outerShdw>
+          </a:effectLst>
+        </p:spPr>
+      </p:sp>
+      <p:sp>
+        <p:nvSpPr>
+          <p:cNvPr id="11" name="Shape 9"/>
+          <p:cNvSpPr/>
+          <p:nvPr/>
+        </p:nvSpPr>
+        <p:spPr>
+          <a:xfrm>
+            <a:off x="548640" y="1828800"/>
+            <a:ext cx="54864" cy="594360"/>
+          </a:xfrm>
+          <a:prstGeom prst="rect">
+            <a:avLst/>
+          </a:prstGeom>
+          <a:solidFill>
+            <a:srgbClr val="2A9D8F"/>
+          </a:solidFill>
+          <a:ln/>
+        </p:spPr>
+      </p:sp>
+      <p:sp>
+        <p:nvSpPr>
+          <p:cNvPr id="12" name="Text 10"/>
+          <p:cNvSpPr/>
+          <p:nvPr/>
+        </p:nvSpPr>
+        <p:spPr>
+          <a:xfrm>
+            <a:off x="685800" y="1874520"/>
+            <a:ext cx="3520440" cy="502920"/>
+          </a:xfrm>
+          <a:prstGeom prst="rect">
+            <a:avLst/>
+          </a:prstGeom>
+          <a:noFill/>
+          <a:ln/>
+        </p:spPr>
+        <p:txBody>
+          <a:bodyPr wrap="square" rtlCol="0" anchor="ctr"/>
+          <a:lstStyle/>
           <a:p>
             <a:pPr indent="0" marL="0">
               <a:buNone/>
             </a:pPr>
             <a:r>
-              <a:rPr lang="en-US" sz="1600" dirty="0">
-                <a:solidFill>
-                  <a:srgbClr val="363636"/>
-                </a:solidFill>
-                <a:latin typeface="Calibri" pitchFamily="34" charset="0"/>
-                <a:ea typeface="Calibri" pitchFamily="34" charset="-122"/>
-                <a:cs typeface="Calibri" pitchFamily="34" charset="-120"/>
-              </a:rPr>
-              <a:t>Key points will be covered in class.</a:t>
-            </a:r>
-            <a:endParaRPr lang="en-US" sz="1600" dirty="0"/>
-          </a:p>
-        </p:txBody>
-      </p:sp>
-      <p:sp>
-        <p:nvSpPr>
-          <p:cNvPr id="5" name="Text 3"/>
-          <p:cNvSpPr/>
-          <p:nvPr/>
-        </p:nvSpPr>
-        <p:spPr>
-          <a:xfrm>
-            <a:off x="7772400" y="4663440"/>
-            <a:ext cx="1097280" cy="365760"/>
+              <a:rPr lang="en-US" sz="1200" b="1" dirty="0">
+                <a:solidFill>
+                  <a:srgbClr val="1B2A4A"/>
+                </a:solidFill>
+              </a:rPr>
+              <a:t>Gas</a:t>
+            </a:r>
+            <a:endParaRPr lang="en-US" sz="1200" dirty="0"/>
+          </a:p>
+          <a:p>
+            <a:pPr indent="0" marL="0">
+              <a:buNone/>
+            </a:pPr>
+            <a:r>
+              <a:rPr lang="en-US" sz="1000" dirty="0">
+                <a:solidFill>
+                  <a:srgbClr val="6B6660"/>
+                </a:solidFill>
+              </a:rPr>
+              <a:t>Spreads out, fills all space, can be compressed</a:t>
+            </a:r>
+            <a:endParaRPr lang="en-US" sz="1200" dirty="0"/>
+          </a:p>
+        </p:txBody>
+      </p:sp>
+      <p:sp>
+        <p:nvSpPr>
+          <p:cNvPr id="13" name="Shape 11"/>
+          <p:cNvSpPr/>
+          <p:nvPr/>
+        </p:nvSpPr>
+        <p:spPr>
+          <a:xfrm>
+            <a:off x="4480560" y="1828800"/>
+            <a:ext cx="3749040" cy="594360"/>
+          </a:xfrm>
+          <a:prstGeom prst="rect">
+            <a:avLst/>
+          </a:prstGeom>
+          <a:solidFill>
+            <a:srgbClr val="FFFFFF"/>
+          </a:solidFill>
+          <a:ln/>
+          <a:effectLst>
+            <a:outerShdw sx="100000" sy="100000" kx="0" ky="0" algn="bl" rotWithShape="0" blurRad="50800" dist="25400" dir="8100000">
+              <a:srgbClr val="000000">
+                <a:alpha val="10000"/>
+              </a:srgbClr>
+            </a:outerShdw>
+          </a:effectLst>
+        </p:spPr>
+      </p:sp>
+      <p:sp>
+        <p:nvSpPr>
+          <p:cNvPr id="14" name="Shape 12"/>
+          <p:cNvSpPr/>
+          <p:nvPr/>
+        </p:nvSpPr>
+        <p:spPr>
+          <a:xfrm>
+            <a:off x="4480560" y="1828800"/>
+            <a:ext cx="54864" cy="594360"/>
+          </a:xfrm>
+          <a:prstGeom prst="rect">
+            <a:avLst/>
+          </a:prstGeom>
+          <a:solidFill>
+            <a:srgbClr val="2A9D8F"/>
+          </a:solidFill>
+          <a:ln/>
+        </p:spPr>
+      </p:sp>
+      <p:sp>
+        <p:nvSpPr>
+          <p:cNvPr id="15" name="Text 13"/>
+          <p:cNvSpPr/>
+          <p:nvPr/>
+        </p:nvSpPr>
+        <p:spPr>
+          <a:xfrm>
+            <a:off x="4617720" y="1874520"/>
+            <a:ext cx="3520440" cy="502920"/>
           </a:xfrm>
           <a:prstGeom prst="rect">
             <a:avLst/>
@@ -1750,21 +1982,262 @@
           <a:bodyPr wrap="square" rtlCol="0" anchor="ctr"/>
           <a:lstStyle/>
           <a:p>
-            <a:pPr algn="r" indent="0" marL="0">
+            <a:pPr indent="0" marL="0">
               <a:buNone/>
             </a:pPr>
             <a:r>
+              <a:rPr lang="en-US" sz="1200" b="1" dirty="0">
+                <a:solidFill>
+                  <a:srgbClr val="1B2A4A"/>
+                </a:solidFill>
+              </a:rPr>
+              <a:t>Density</a:t>
+            </a:r>
+            <a:endParaRPr lang="en-US" sz="1200" dirty="0"/>
+          </a:p>
+          <a:p>
+            <a:pPr indent="0" marL="0">
+              <a:buNone/>
+            </a:pPr>
+            <a:r>
               <a:rPr lang="en-US" sz="1000" dirty="0">
                 <a:solidFill>
-                  <a:srgbClr val="999999"/>
-                </a:solidFill>
-                <a:latin typeface="Calibri" pitchFamily="34" charset="0"/>
-                <a:ea typeface="Calibri" pitchFamily="34" charset="-122"/>
-                <a:cs typeface="Calibri" pitchFamily="34" charset="-120"/>
-              </a:rPr>
-              <a:t>3 / 6</a:t>
-            </a:r>
-            <a:endParaRPr lang="en-US" sz="1000" dirty="0"/>
+                  <a:srgbClr val="6B6660"/>
+                </a:solidFill>
+              </a:rPr>
+              <a:t>How tightly packed particles are (solid &gt; liquid &gt; gas)</a:t>
+            </a:r>
+            <a:endParaRPr lang="en-US" sz="1200" dirty="0"/>
+          </a:p>
+        </p:txBody>
+      </p:sp>
+      <p:sp>
+        <p:nvSpPr>
+          <p:cNvPr id="16" name="Shape 14"/>
+          <p:cNvSpPr/>
+          <p:nvPr/>
+        </p:nvSpPr>
+        <p:spPr>
+          <a:xfrm>
+            <a:off x="548640" y="2560320"/>
+            <a:ext cx="3749040" cy="594360"/>
+          </a:xfrm>
+          <a:prstGeom prst="rect">
+            <a:avLst/>
+          </a:prstGeom>
+          <a:solidFill>
+            <a:srgbClr val="FFFFFF"/>
+          </a:solidFill>
+          <a:ln/>
+          <a:effectLst>
+            <a:outerShdw sx="100000" sy="100000" kx="0" ky="0" algn="bl" rotWithShape="0" blurRad="50800" dist="25400" dir="8100000">
+              <a:srgbClr val="000000">
+                <a:alpha val="10000"/>
+              </a:srgbClr>
+            </a:outerShdw>
+          </a:effectLst>
+        </p:spPr>
+      </p:sp>
+      <p:sp>
+        <p:nvSpPr>
+          <p:cNvPr id="17" name="Shape 15"/>
+          <p:cNvSpPr/>
+          <p:nvPr/>
+        </p:nvSpPr>
+        <p:spPr>
+          <a:xfrm>
+            <a:off x="548640" y="2560320"/>
+            <a:ext cx="54864" cy="594360"/>
+          </a:xfrm>
+          <a:prstGeom prst="rect">
+            <a:avLst/>
+          </a:prstGeom>
+          <a:solidFill>
+            <a:srgbClr val="2A9D8F"/>
+          </a:solidFill>
+          <a:ln/>
+        </p:spPr>
+      </p:sp>
+      <p:sp>
+        <p:nvSpPr>
+          <p:cNvPr id="18" name="Text 16"/>
+          <p:cNvSpPr/>
+          <p:nvPr/>
+        </p:nvSpPr>
+        <p:spPr>
+          <a:xfrm>
+            <a:off x="685800" y="2606040"/>
+            <a:ext cx="3520440" cy="502920"/>
+          </a:xfrm>
+          <a:prstGeom prst="rect">
+            <a:avLst/>
+          </a:prstGeom>
+          <a:noFill/>
+          <a:ln/>
+        </p:spPr>
+        <p:txBody>
+          <a:bodyPr wrap="square" rtlCol="0" anchor="ctr"/>
+          <a:lstStyle/>
+          <a:p>
+            <a:pPr indent="0" marL="0">
+              <a:buNone/>
+            </a:pPr>
+            <a:r>
+              <a:rPr lang="en-US" sz="1200" b="1" dirty="0">
+                <a:solidFill>
+                  <a:srgbClr val="1B2A4A"/>
+                </a:solidFill>
+              </a:rPr>
+              <a:t>Diffusion</a:t>
+            </a:r>
+            <a:endParaRPr lang="en-US" sz="1200" dirty="0"/>
+          </a:p>
+          <a:p>
+            <a:pPr indent="0" marL="0">
+              <a:buNone/>
+            </a:pPr>
+            <a:r>
+              <a:rPr lang="en-US" sz="1000" dirty="0">
+                <a:solidFill>
+                  <a:srgbClr val="6B6660"/>
+                </a:solidFill>
+              </a:rPr>
+              <a:t>Particles spreading from high to low concentration</a:t>
+            </a:r>
+            <a:endParaRPr lang="en-US" sz="1200" dirty="0"/>
+          </a:p>
+        </p:txBody>
+      </p:sp>
+      <p:sp>
+        <p:nvSpPr>
+          <p:cNvPr id="19" name="Shape 17"/>
+          <p:cNvSpPr/>
+          <p:nvPr/>
+        </p:nvSpPr>
+        <p:spPr>
+          <a:xfrm>
+            <a:off x="4480560" y="2560320"/>
+            <a:ext cx="3749040" cy="594360"/>
+          </a:xfrm>
+          <a:prstGeom prst="rect">
+            <a:avLst/>
+          </a:prstGeom>
+          <a:solidFill>
+            <a:srgbClr val="FFFFFF"/>
+          </a:solidFill>
+          <a:ln/>
+          <a:effectLst>
+            <a:outerShdw sx="100000" sy="100000" kx="0" ky="0" algn="bl" rotWithShape="0" blurRad="50800" dist="25400" dir="8100000">
+              <a:srgbClr val="000000">
+                <a:alpha val="10000"/>
+              </a:srgbClr>
+            </a:outerShdw>
+          </a:effectLst>
+        </p:spPr>
+      </p:sp>
+      <p:sp>
+        <p:nvSpPr>
+          <p:cNvPr id="20" name="Shape 18"/>
+          <p:cNvSpPr/>
+          <p:nvPr/>
+        </p:nvSpPr>
+        <p:spPr>
+          <a:xfrm>
+            <a:off x="4480560" y="2560320"/>
+            <a:ext cx="54864" cy="594360"/>
+          </a:xfrm>
+          <a:prstGeom prst="rect">
+            <a:avLst/>
+          </a:prstGeom>
+          <a:solidFill>
+            <a:srgbClr val="2A9D8F"/>
+          </a:solidFill>
+          <a:ln/>
+        </p:spPr>
+      </p:sp>
+      <p:sp>
+        <p:nvSpPr>
+          <p:cNvPr id="21" name="Text 19"/>
+          <p:cNvSpPr/>
+          <p:nvPr/>
+        </p:nvSpPr>
+        <p:spPr>
+          <a:xfrm>
+            <a:off x="4617720" y="2606040"/>
+            <a:ext cx="3520440" cy="502920"/>
+          </a:xfrm>
+          <a:prstGeom prst="rect">
+            <a:avLst/>
+          </a:prstGeom>
+          <a:noFill/>
+          <a:ln/>
+        </p:spPr>
+        <p:txBody>
+          <a:bodyPr wrap="square" rtlCol="0" anchor="ctr"/>
+          <a:lstStyle/>
+          <a:p>
+            <a:pPr indent="0" marL="0">
+              <a:buNone/>
+            </a:pPr>
+            <a:r>
+              <a:rPr lang="en-US" sz="1200" b="1" dirty="0">
+                <a:solidFill>
+                  <a:srgbClr val="1B2A4A"/>
+                </a:solidFill>
+              </a:rPr>
+              <a:t>Compression</a:t>
+            </a:r>
+            <a:endParaRPr lang="en-US" sz="1200" dirty="0"/>
+          </a:p>
+          <a:p>
+            <a:pPr indent="0" marL="0">
+              <a:buNone/>
+            </a:pPr>
+            <a:r>
+              <a:rPr lang="en-US" sz="1000" dirty="0">
+                <a:solidFill>
+                  <a:srgbClr val="6B6660"/>
+                </a:solidFill>
+              </a:rPr>
+              <a:t>Squeezing particles closer together (only gases)</a:t>
+            </a:r>
+            <a:endParaRPr lang="en-US" sz="1200" dirty="0"/>
+          </a:p>
+        </p:txBody>
+      </p:sp>
+      <p:sp>
+        <p:nvSpPr>
+          <p:cNvPr id="22" name="Text 20"/>
+          <p:cNvSpPr/>
+          <p:nvPr/>
+        </p:nvSpPr>
+        <p:spPr>
+          <a:xfrm>
+            <a:off x="548640" y="4800600"/>
+            <a:ext cx="3657600" cy="274320"/>
+          </a:xfrm>
+          <a:prstGeom prst="rect">
+            <a:avLst/>
+          </a:prstGeom>
+          <a:noFill/>
+          <a:ln/>
+        </p:spPr>
+        <p:txBody>
+          <a:bodyPr wrap="square" rtlCol="0" anchor="ctr"/>
+          <a:lstStyle/>
+          <a:p>
+            <a:pPr indent="0" marL="0">
+              <a:buNone/>
+            </a:pPr>
+            <a:r>
+              <a:rPr lang="en-US" sz="800" dirty="0">
+                <a:solidFill>
+                  <a:srgbClr val="9B9690"/>
+                </a:solidFill>
+              </a:rPr>
+              <a:t>mrzocchi.com</a:t>
+            </a:r>
+            <a:endParaRPr lang="en-US" sz="800" dirty="0"/>
           </a:p>
         </p:txBody>
       </p:sp>
@@ -1779,6 +2252,13 @@
 <file path=ppt/slides/slide4.xml><?xml version="1.0" encoding="utf-8"?>
 <p:sld xmlns:a="http://schemas.openxmlformats.org/drawingml/2006/main" xmlns:r="http://schemas.openxmlformats.org/officeDocument/2006/relationships" xmlns:p="http://schemas.openxmlformats.org/presentationml/2006/main">
   <p:cSld name="Slide 4">
+    <p:bg>
+      <p:bgPr>
+        <a:solidFill>
+          <a:srgbClr val="1B2A4A"/>
+        </a:solidFill>
+      </p:bgPr>
+    </p:bg>
     <p:spTree>
       <p:nvGrpSpPr>
         <p:cNvPr id="1" name=""/>
@@ -1802,13 +2282,13 @@
         <p:spPr>
           <a:xfrm>
             <a:off x="0" y="0"/>
-            <a:ext cx="9144000" cy="548640"/>
-          </a:xfrm>
-          <a:prstGeom prst="rect">
-            <a:avLst/>
-          </a:prstGeom>
-          <a:solidFill>
-            <a:srgbClr val="7C3AED"/>
+            <a:ext cx="9144000" cy="54864"/>
+          </a:xfrm>
+          <a:prstGeom prst="rect">
+            <a:avLst/>
+          </a:prstGeom>
+          <a:solidFill>
+            <a:srgbClr val="2A9D8F"/>
           </a:solidFill>
           <a:ln/>
         </p:spPr>
@@ -1821,8 +2301,8 @@
         </p:nvSpPr>
         <p:spPr>
           <a:xfrm>
-            <a:off x="457200" y="45720"/>
-            <a:ext cx="8229600" cy="457200"/>
+            <a:off x="548640" y="457200"/>
+            <a:ext cx="8046720" cy="640080"/>
           </a:xfrm>
           <a:prstGeom prst="rect">
             <a:avLst/>
@@ -1838,176 +2318,136 @@
               <a:buNone/>
             </a:pPr>
             <a:r>
-              <a:rPr lang="en-US" sz="1800" b="1" dirty="0">
+              <a:rPr lang="en-US" sz="2800" b="1" dirty="0">
                 <a:solidFill>
                   <a:srgbClr val="FFFFFF"/>
+                </a:solidFill>
+                <a:latin typeface="Georgia" pitchFamily="34" charset="0"/>
+                <a:ea typeface="Georgia" pitchFamily="34" charset="-122"/>
+                <a:cs typeface="Georgia" pitchFamily="34" charset="-120"/>
+              </a:rPr>
+              <a:t>Key Takeaways</a:t>
+            </a:r>
+            <a:endParaRPr lang="en-US" sz="2800" dirty="0"/>
+          </a:p>
+        </p:txBody>
+      </p:sp>
+      <p:sp>
+        <p:nvSpPr>
+          <p:cNvPr id="4" name="Text 2"/>
+          <p:cNvSpPr/>
+          <p:nvPr/>
+        </p:nvSpPr>
+        <p:spPr>
+          <a:xfrm>
+            <a:off x="731520" y="1371600"/>
+            <a:ext cx="7680960" cy="3200400"/>
+          </a:xfrm>
+          <a:prstGeom prst="rect">
+            <a:avLst/>
+          </a:prstGeom>
+          <a:noFill/>
+          <a:ln/>
+        </p:spPr>
+        <p:txBody>
+          <a:bodyPr wrap="square" rtlCol="0" anchor="t"/>
+          <a:lstStyle/>
+          <a:p>
+            <a:pPr marL="342900" indent="-342900">
+              <a:spcAft>
+                <a:spcPts val="1000"/>
+              </a:spcAft>
+              <a:buSzPct val="100000"/>
+              <a:buChar char="•"/>
+            </a:pPr>
+            <a:r>
+              <a:rPr lang="en-US" sz="1600" dirty="0">
+                <a:solidFill>
+                  <a:srgbClr val="CADCFC"/>
                 </a:solidFill>
                 <a:latin typeface="Calibri" pitchFamily="34" charset="0"/>
                 <a:ea typeface="Calibri" pitchFamily="34" charset="-122"/>
                 <a:cs typeface="Calibri" pitchFamily="34" charset="-120"/>
               </a:rPr>
-              <a:t>Gases</a:t>
-            </a:r>
-            <a:endParaRPr lang="en-US" sz="1800" dirty="0"/>
-          </a:p>
-        </p:txBody>
-      </p:sp>
-      <p:sp>
-        <p:nvSpPr>
-          <p:cNvPr id="4" name="Text 2"/>
-          <p:cNvSpPr/>
-          <p:nvPr/>
-        </p:nvSpPr>
-        <p:spPr>
-          <a:xfrm>
-            <a:off x="731520" y="1097280"/>
-            <a:ext cx="7680960" cy="3200400"/>
-          </a:xfrm>
-          <a:prstGeom prst="rect">
-            <a:avLst/>
-          </a:prstGeom>
-          <a:noFill/>
-          <a:ln/>
-        </p:spPr>
-        <p:txBody>
-          <a:bodyPr wrap="square" rtlCol="0" anchor="ctr"/>
-          <a:lstStyle/>
-          <a:p>
-            <a:pPr indent="0" marL="0">
-              <a:buNone/>
+              <a:t>Three states: solid, liquid, gas — determined by particle arrangement</a:t>
+            </a:r>
+            <a:endParaRPr lang="en-US" sz="1600" dirty="0"/>
+          </a:p>
+          <a:p>
+            <a:pPr marL="342900" indent="-342900">
+              <a:spcAft>
+                <a:spcPts val="1000"/>
+              </a:spcAft>
+              <a:buSzPct val="100000"/>
+              <a:buChar char="•"/>
             </a:pPr>
             <a:r>
               <a:rPr lang="en-US" sz="1600" dirty="0">
                 <a:solidFill>
-                  <a:srgbClr val="363636"/>
+                  <a:srgbClr val="CADCFC"/>
                 </a:solidFill>
                 <a:latin typeface="Calibri" pitchFamily="34" charset="0"/>
                 <a:ea typeface="Calibri" pitchFamily="34" charset="-122"/>
                 <a:cs typeface="Calibri" pitchFamily="34" charset="-120"/>
               </a:rPr>
-              <a:t>Content for: Gases</a:t>
+              <a:t>Solids hold shape, liquids flow, gases spread and compress</a:t>
             </a:r>
             <a:endParaRPr lang="en-US" sz="1600" dirty="0"/>
           </a:p>
           <a:p>
-            <a:pPr indent="0" marL="0">
-              <a:buNone/>
-            </a:pPr>
-            <a:endParaRPr lang="en-US" sz="1600" dirty="0"/>
-          </a:p>
-          <a:p>
-            <a:pPr indent="0" marL="0">
-              <a:buNone/>
+            <a:pPr marL="342900" indent="-342900">
+              <a:spcAft>
+                <a:spcPts val="1000"/>
+              </a:spcAft>
+              <a:buSzPct val="100000"/>
+              <a:buChar char="•"/>
             </a:pPr>
             <a:r>
               <a:rPr lang="en-US" sz="1600" dirty="0">
                 <a:solidFill>
-                  <a:srgbClr val="363636"/>
+                  <a:srgbClr val="CADCFC"/>
                 </a:solidFill>
                 <a:latin typeface="Calibri" pitchFamily="34" charset="0"/>
                 <a:ea typeface="Calibri" pitchFamily="34" charset="-122"/>
                 <a:cs typeface="Calibri" pitchFamily="34" charset="-120"/>
               </a:rPr>
-              <a:t>Key points will be covered in class.</a:t>
+              <a:t>Adding energy (heat) makes particles move faster</a:t>
             </a:r>
             <a:endParaRPr lang="en-US" sz="1600" dirty="0"/>
           </a:p>
-        </p:txBody>
-      </p:sp>
-      <p:sp>
-        <p:nvSpPr>
-          <p:cNvPr id="5" name="Text 3"/>
-          <p:cNvSpPr/>
-          <p:nvPr/>
-        </p:nvSpPr>
-        <p:spPr>
-          <a:xfrm>
-            <a:off x="7772400" y="4663440"/>
-            <a:ext cx="1097280" cy="365760"/>
-          </a:xfrm>
-          <a:prstGeom prst="rect">
-            <a:avLst/>
-          </a:prstGeom>
-          <a:noFill/>
-          <a:ln/>
-        </p:spPr>
-        <p:txBody>
-          <a:bodyPr wrap="square" rtlCol="0" anchor="ctr"/>
-          <a:lstStyle/>
-          <a:p>
-            <a:pPr algn="r" indent="0" marL="0">
-              <a:buNone/>
-            </a:pPr>
-            <a:r>
-              <a:rPr lang="en-US" sz="1000" dirty="0">
-                <a:solidFill>
-                  <a:srgbClr val="999999"/>
+          <a:p>
+            <a:pPr marL="342900" indent="-342900">
+              <a:spcAft>
+                <a:spcPts val="1000"/>
+              </a:spcAft>
+              <a:buSzPct val="100000"/>
+              <a:buChar char="•"/>
+            </a:pPr>
+            <a:r>
+              <a:rPr lang="en-US" sz="1600" dirty="0">
+                <a:solidFill>
+                  <a:srgbClr val="CADCFC"/>
                 </a:solidFill>
                 <a:latin typeface="Calibri" pitchFamily="34" charset="0"/>
                 <a:ea typeface="Calibri" pitchFamily="34" charset="-122"/>
                 <a:cs typeface="Calibri" pitchFamily="34" charset="-120"/>
               </a:rPr>
-              <a:t>4 / 6</a:t>
-            </a:r>
-            <a:endParaRPr lang="en-US" sz="1000" dirty="0"/>
-          </a:p>
-        </p:txBody>
-      </p:sp>
-    </p:spTree>
-  </p:cSld>
-  <p:clrMapOvr>
-    <a:masterClrMapping/>
-  </p:clrMapOvr>
-</p:sld>
-</file>
-
-<file path=ppt/slides/slide5.xml><?xml version="1.0" encoding="utf-8"?>
-<p:sld xmlns:a="http://schemas.openxmlformats.org/drawingml/2006/main" xmlns:r="http://schemas.openxmlformats.org/officeDocument/2006/relationships" xmlns:p="http://schemas.openxmlformats.org/presentationml/2006/main">
-  <p:cSld name="Slide 5">
-    <p:spTree>
-      <p:nvGrpSpPr>
-        <p:cNvPr id="1" name=""/>
-        <p:cNvGrpSpPr/>
-        <p:nvPr/>
-      </p:nvGrpSpPr>
-      <p:grpSpPr>
-        <a:xfrm>
-          <a:off x="0" y="0"/>
-          <a:ext cx="0" cy="0"/>
-          <a:chOff x="0" y="0"/>
-          <a:chExt cx="0" cy="0"/>
-        </a:xfrm>
-      </p:grpSpPr>
-      <p:sp>
-        <p:nvSpPr>
-          <p:cNvPr id="2" name="Shape 0"/>
-          <p:cNvSpPr/>
-          <p:nvPr/>
-        </p:nvSpPr>
-        <p:spPr>
-          <a:xfrm>
-            <a:off x="0" y="0"/>
-            <a:ext cx="9144000" cy="548640"/>
-          </a:xfrm>
-          <a:prstGeom prst="rect">
-            <a:avLst/>
-          </a:prstGeom>
-          <a:solidFill>
-            <a:srgbClr val="7C3AED"/>
-          </a:solidFill>
-          <a:ln/>
-        </p:spPr>
-      </p:sp>
-      <p:sp>
-        <p:nvSpPr>
-          <p:cNvPr id="3" name="Text 1"/>
-          <p:cNvSpPr/>
-          <p:nvPr/>
-        </p:nvSpPr>
-        <p:spPr>
-          <a:xfrm>
-            <a:off x="457200" y="45720"/>
-            <a:ext cx="8229600" cy="457200"/>
+              <a:t>Diffusion happens because particles are always moving</a:t>
+            </a:r>
+            <a:endParaRPr lang="en-US" sz="1600" dirty="0"/>
+          </a:p>
+        </p:txBody>
+      </p:sp>
+      <p:sp>
+        <p:nvSpPr>
+          <p:cNvPr id="5" name="Text 3"/>
+          <p:cNvSpPr/>
+          <p:nvPr/>
+        </p:nvSpPr>
+        <p:spPr>
+          <a:xfrm>
+            <a:off x="548640" y="4572000"/>
+            <a:ext cx="3657600" cy="274320"/>
           </a:xfrm>
           <a:prstGeom prst="rect">
             <a:avLst/>
@@ -2023,301 +2463,12 @@
               <a:buNone/>
             </a:pPr>
             <a:r>
-              <a:rPr lang="en-US" sz="1800" b="1" dirty="0">
-                <a:solidFill>
-                  <a:srgbClr val="FFFFFF"/>
-                </a:solidFill>
-                <a:latin typeface="Calibri" pitchFamily="34" charset="0"/>
-                <a:ea typeface="Calibri" pitchFamily="34" charset="-122"/>
-                <a:cs typeface="Calibri" pitchFamily="34" charset="-120"/>
-              </a:rPr>
-              <a:t>Comparing the three states</a:t>
-            </a:r>
-            <a:endParaRPr lang="en-US" sz="1800" dirty="0"/>
-          </a:p>
-        </p:txBody>
-      </p:sp>
-      <p:sp>
-        <p:nvSpPr>
-          <p:cNvPr id="4" name="Text 2"/>
-          <p:cNvSpPr/>
-          <p:nvPr/>
-        </p:nvSpPr>
-        <p:spPr>
-          <a:xfrm>
-            <a:off x="731520" y="1097280"/>
-            <a:ext cx="7680960" cy="3200400"/>
-          </a:xfrm>
-          <a:prstGeom prst="rect">
-            <a:avLst/>
-          </a:prstGeom>
-          <a:noFill/>
-          <a:ln/>
-        </p:spPr>
-        <p:txBody>
-          <a:bodyPr wrap="square" rtlCol="0" anchor="ctr"/>
-          <a:lstStyle/>
-          <a:p>
-            <a:pPr indent="0" marL="0">
-              <a:buNone/>
-            </a:pPr>
-            <a:r>
-              <a:rPr lang="en-US" sz="1600" dirty="0">
-                <a:solidFill>
-                  <a:srgbClr val="363636"/>
-                </a:solidFill>
-                <a:latin typeface="Calibri" pitchFamily="34" charset="0"/>
-                <a:ea typeface="Calibri" pitchFamily="34" charset="-122"/>
-                <a:cs typeface="Calibri" pitchFamily="34" charset="-120"/>
-              </a:rPr>
-              <a:t>Content for: Comparing the three states</a:t>
-            </a:r>
-            <a:endParaRPr lang="en-US" sz="1600" dirty="0"/>
-          </a:p>
-          <a:p>
-            <a:pPr indent="0" marL="0">
-              <a:buNone/>
-            </a:pPr>
-            <a:endParaRPr lang="en-US" sz="1600" dirty="0"/>
-          </a:p>
-          <a:p>
-            <a:pPr indent="0" marL="0">
-              <a:buNone/>
-            </a:pPr>
-            <a:r>
-              <a:rPr lang="en-US" sz="1600" dirty="0">
-                <a:solidFill>
-                  <a:srgbClr val="363636"/>
-                </a:solidFill>
-                <a:latin typeface="Calibri" pitchFamily="34" charset="0"/>
-                <a:ea typeface="Calibri" pitchFamily="34" charset="-122"/>
-                <a:cs typeface="Calibri" pitchFamily="34" charset="-120"/>
-              </a:rPr>
-              <a:t>Key points will be covered in class.</a:t>
-            </a:r>
-            <a:endParaRPr lang="en-US" sz="1600" dirty="0"/>
-          </a:p>
-        </p:txBody>
-      </p:sp>
-      <p:sp>
-        <p:nvSpPr>
-          <p:cNvPr id="5" name="Text 3"/>
-          <p:cNvSpPr/>
-          <p:nvPr/>
-        </p:nvSpPr>
-        <p:spPr>
-          <a:xfrm>
-            <a:off x="7772400" y="4663440"/>
-            <a:ext cx="1097280" cy="365760"/>
-          </a:xfrm>
-          <a:prstGeom prst="rect">
-            <a:avLst/>
-          </a:prstGeom>
-          <a:noFill/>
-          <a:ln/>
-        </p:spPr>
-        <p:txBody>
-          <a:bodyPr wrap="square" rtlCol="0" anchor="ctr"/>
-          <a:lstStyle/>
-          <a:p>
-            <a:pPr algn="r" indent="0" marL="0">
-              <a:buNone/>
-            </a:pPr>
-            <a:r>
               <a:rPr lang="en-US" sz="1000" dirty="0">
                 <a:solidFill>
-                  <a:srgbClr val="999999"/>
-                </a:solidFill>
-                <a:latin typeface="Calibri" pitchFamily="34" charset="0"/>
-                <a:ea typeface="Calibri" pitchFamily="34" charset="-122"/>
-                <a:cs typeface="Calibri" pitchFamily="34" charset="-120"/>
-              </a:rPr>
-              <a:t>5 / 6</a:t>
-            </a:r>
-            <a:endParaRPr lang="en-US" sz="1000" dirty="0"/>
-          </a:p>
-        </p:txBody>
-      </p:sp>
-    </p:spTree>
-  </p:cSld>
-  <p:clrMapOvr>
-    <a:masterClrMapping/>
-  </p:clrMapOvr>
-</p:sld>
-</file>
-
-<file path=ppt/slides/slide6.xml><?xml version="1.0" encoding="utf-8"?>
-<p:sld xmlns:a="http://schemas.openxmlformats.org/drawingml/2006/main" xmlns:r="http://schemas.openxmlformats.org/officeDocument/2006/relationships" xmlns:p="http://schemas.openxmlformats.org/presentationml/2006/main">
-  <p:cSld name="Slide 6">
-    <p:spTree>
-      <p:nvGrpSpPr>
-        <p:cNvPr id="1" name=""/>
-        <p:cNvGrpSpPr/>
-        <p:nvPr/>
-      </p:nvGrpSpPr>
-      <p:grpSpPr>
-        <a:xfrm>
-          <a:off x="0" y="0"/>
-          <a:ext cx="0" cy="0"/>
-          <a:chOff x="0" y="0"/>
-          <a:chExt cx="0" cy="0"/>
-        </a:xfrm>
-      </p:grpSpPr>
-      <p:sp>
-        <p:nvSpPr>
-          <p:cNvPr id="2" name="Shape 0"/>
-          <p:cNvSpPr/>
-          <p:nvPr/>
-        </p:nvSpPr>
-        <p:spPr>
-          <a:xfrm>
-            <a:off x="0" y="0"/>
-            <a:ext cx="9144000" cy="548640"/>
-          </a:xfrm>
-          <a:prstGeom prst="rect">
-            <a:avLst/>
-          </a:prstGeom>
-          <a:solidFill>
-            <a:srgbClr val="7C3AED"/>
-          </a:solidFill>
-          <a:ln/>
-        </p:spPr>
-      </p:sp>
-      <p:sp>
-        <p:nvSpPr>
-          <p:cNvPr id="3" name="Text 1"/>
-          <p:cNvSpPr/>
-          <p:nvPr/>
-        </p:nvSpPr>
-        <p:spPr>
-          <a:xfrm>
-            <a:off x="457200" y="45720"/>
-            <a:ext cx="8229600" cy="457200"/>
-          </a:xfrm>
-          <a:prstGeom prst="rect">
-            <a:avLst/>
-          </a:prstGeom>
-          <a:noFill/>
-          <a:ln/>
-        </p:spPr>
-        <p:txBody>
-          <a:bodyPr wrap="square" rtlCol="0" anchor="ctr"/>
-          <a:lstStyle/>
-          <a:p>
-            <a:pPr indent="0" marL="0">
-              <a:buNone/>
-            </a:pPr>
-            <a:r>
-              <a:rPr lang="en-US" sz="1800" b="1" dirty="0">
-                <a:solidFill>
-                  <a:srgbClr val="FFFFFF"/>
-                </a:solidFill>
-                <a:latin typeface="Calibri" pitchFamily="34" charset="0"/>
-                <a:ea typeface="Calibri" pitchFamily="34" charset="-122"/>
-                <a:cs typeface="Calibri" pitchFamily="34" charset="-120"/>
-              </a:rPr>
-              <a:t>Properties table</a:t>
-            </a:r>
-            <a:endParaRPr lang="en-US" sz="1800" dirty="0"/>
-          </a:p>
-        </p:txBody>
-      </p:sp>
-      <p:sp>
-        <p:nvSpPr>
-          <p:cNvPr id="4" name="Text 2"/>
-          <p:cNvSpPr/>
-          <p:nvPr/>
-        </p:nvSpPr>
-        <p:spPr>
-          <a:xfrm>
-            <a:off x="731520" y="1097280"/>
-            <a:ext cx="7680960" cy="3200400"/>
-          </a:xfrm>
-          <a:prstGeom prst="rect">
-            <a:avLst/>
-          </a:prstGeom>
-          <a:noFill/>
-          <a:ln/>
-        </p:spPr>
-        <p:txBody>
-          <a:bodyPr wrap="square" rtlCol="0" anchor="ctr"/>
-          <a:lstStyle/>
-          <a:p>
-            <a:pPr indent="0" marL="0">
-              <a:buNone/>
-            </a:pPr>
-            <a:r>
-              <a:rPr lang="en-US" sz="1600" dirty="0">
-                <a:solidFill>
-                  <a:srgbClr val="363636"/>
-                </a:solidFill>
-                <a:latin typeface="Calibri" pitchFamily="34" charset="0"/>
-                <a:ea typeface="Calibri" pitchFamily="34" charset="-122"/>
-                <a:cs typeface="Calibri" pitchFamily="34" charset="-120"/>
-              </a:rPr>
-              <a:t>Content for: Properties table</a:t>
-            </a:r>
-            <a:endParaRPr lang="en-US" sz="1600" dirty="0"/>
-          </a:p>
-          <a:p>
-            <a:pPr indent="0" marL="0">
-              <a:buNone/>
-            </a:pPr>
-            <a:endParaRPr lang="en-US" sz="1600" dirty="0"/>
-          </a:p>
-          <a:p>
-            <a:pPr indent="0" marL="0">
-              <a:buNone/>
-            </a:pPr>
-            <a:r>
-              <a:rPr lang="en-US" sz="1600" dirty="0">
-                <a:solidFill>
-                  <a:srgbClr val="363636"/>
-                </a:solidFill>
-                <a:latin typeface="Calibri" pitchFamily="34" charset="0"/>
-                <a:ea typeface="Calibri" pitchFamily="34" charset="-122"/>
-                <a:cs typeface="Calibri" pitchFamily="34" charset="-120"/>
-              </a:rPr>
-              <a:t>Key points will be covered in class.</a:t>
-            </a:r>
-            <a:endParaRPr lang="en-US" sz="1600" dirty="0"/>
-          </a:p>
-        </p:txBody>
-      </p:sp>
-      <p:sp>
-        <p:nvSpPr>
-          <p:cNvPr id="5" name="Text 3"/>
-          <p:cNvSpPr/>
-          <p:nvPr/>
-        </p:nvSpPr>
-        <p:spPr>
-          <a:xfrm>
-            <a:off x="7772400" y="4663440"/>
-            <a:ext cx="1097280" cy="365760"/>
-          </a:xfrm>
-          <a:prstGeom prst="rect">
-            <a:avLst/>
-          </a:prstGeom>
-          <a:noFill/>
-          <a:ln/>
-        </p:spPr>
-        <p:txBody>
-          <a:bodyPr wrap="square" rtlCol="0" anchor="ctr"/>
-          <a:lstStyle/>
-          <a:p>
-            <a:pPr algn="r" indent="0" marL="0">
-              <a:buNone/>
-            </a:pPr>
-            <a:r>
-              <a:rPr lang="en-US" sz="1000" dirty="0">
-                <a:solidFill>
-                  <a:srgbClr val="999999"/>
-                </a:solidFill>
-                <a:latin typeface="Calibri" pitchFamily="34" charset="0"/>
-                <a:ea typeface="Calibri" pitchFamily="34" charset="-122"/>
-                <a:cs typeface="Calibri" pitchFamily="34" charset="-120"/>
-              </a:rPr>
-              <a:t>6 / 6</a:t>
+                  <a:srgbClr val="6B6660"/>
+                </a:solidFill>
+              </a:rPr>
+              <a:t>mrzocchi.com</a:t>
             </a:r>
             <a:endParaRPr lang="en-US" sz="1000" dirty="0"/>
           </a:p>

--- a/static/ppts/G6_Sci_T2_States_of_Matter.pptx
+++ b/static/ppts/G6_Sci_T2_States_of_Matter.pptx
@@ -9,9 +9,10 @@
     <p:sldId id="257" r:id="rId3"/>
     <p:sldId id="258" r:id="rId4"/>
     <p:sldId id="259" r:id="rId5"/>
+    <p:sldId id="260" r:id="rId6"/>
   </p:sldIdLst>
   <p:notesMasterIdLst>
-    <p:notesMasterId r:id="rId6"/>
+    <p:notesMasterId r:id="rId7"/>
   </p:notesMasterIdLst>
   <p:sldSz cx="9144000" cy="5143500"/>
   <p:notesSz cx="5143500" cy="9144000"/>
@@ -811,6 +812,94 @@
 </p:notes>
 </file>
 
+<file path=ppt/notesSlides/notesSlide5.xml><?xml version="1.0" encoding="utf-8"?>
+<p:notes xmlns:a="http://schemas.openxmlformats.org/drawingml/2006/main" xmlns:r="http://schemas.openxmlformats.org/officeDocument/2006/relationships" xmlns:p="http://schemas.openxmlformats.org/presentationml/2006/main">
+  <p:cSld>
+    <p:spTree>
+      <p:nvGrpSpPr>
+        <p:cNvPr id="1" name=""/>
+        <p:cNvGrpSpPr/>
+        <p:nvPr/>
+      </p:nvGrpSpPr>
+      <p:grpSpPr>
+        <a:xfrm>
+          <a:off x="0" y="0"/>
+          <a:ext cx="0" cy="0"/>
+          <a:chOff x="0" y="0"/>
+          <a:chExt cx="0" cy="0"/>
+        </a:xfrm>
+      </p:grpSpPr>
+      <p:sp>
+        <p:nvSpPr>
+          <p:cNvPr id="2" name="Slide Image Placeholder 1"/>
+          <p:cNvSpPr>
+            <a:spLocks noGrp="1" noRot="1" noChangeAspect="1"/>
+          </p:cNvSpPr>
+          <p:nvPr>
+            <p:ph type="sldImg"/>
+          </p:nvPr>
+        </p:nvSpPr>
+        <p:spPr/>
+      </p:sp>
+      <p:sp>
+        <p:nvSpPr>
+          <p:cNvPr id="3" name="Notes Placeholder 2"/>
+          <p:cNvSpPr>
+            <a:spLocks noGrp="1"/>
+          </p:cNvSpPr>
+          <p:nvPr>
+            <p:ph type="body" idx="1"/>
+          </p:nvPr>
+        </p:nvSpPr>
+        <p:spPr/>
+        <p:txBody>
+          <a:bodyPr/>
+          <a:lstStyle/>
+          <a:p>
+            <a:r>
+              <a:rPr lang="en-US" dirty="0"/>
+              <a:t/>
+            </a:r>
+            <a:endParaRPr lang="en-US" dirty="0"/>
+          </a:p>
+        </p:txBody>
+      </p:sp>
+      <p:sp>
+        <p:nvSpPr>
+          <p:cNvPr id="4" name="Slide Number Placeholder 3"/>
+          <p:cNvSpPr>
+            <a:spLocks noGrp="1"/>
+          </p:cNvSpPr>
+          <p:nvPr>
+            <p:ph type="sldNum" sz="quarter" idx="10"/>
+          </p:nvPr>
+        </p:nvSpPr>
+        <p:spPr/>
+        <p:txBody>
+          <a:bodyPr/>
+          <a:lstStyle/>
+          <a:p>
+            <a:fld id="{F7021451-1387-4CA6-816F-3879F97B5CBC}" type="slidenum">
+              <a:rPr lang="en-US"/>
+              <a:t>5</a:t>
+            </a:fld>
+            <a:endParaRPr lang="en-US"/>
+          </a:p>
+        </p:txBody>
+      </p:sp>
+    </p:spTree>
+    <p:extLst>
+      <p:ext uri="{BB962C8B-B14F-4D97-AF65-F5344CB8AC3E}">
+        <p14:creationId xmlns:p14="http://schemas.microsoft.com/office/powerpoint/2010/main" val="1024086991"/>
+      </p:ext>
+    </p:extLst>
+  </p:cSld>
+  <p:clrMapOvr>
+    <a:masterClrMapping/>
+  </p:clrMapOvr>
+</p:notes>
+</file>
+
 <file path=ppt/slideLayouts/slideLayout1.xml><?xml version="1.0" encoding="utf-8"?>
 <p:sldLayout xmlns:a="http://schemas.openxmlformats.org/drawingml/2006/main" xmlns:r="http://schemas.openxmlformats.org/officeDocument/2006/relationships" xmlns:p="http://schemas.openxmlformats.org/presentationml/2006/main" preserve="1">
   <p:cSld name="DEFAULT">
@@ -1170,7 +1259,7 @@
         </p:nvSpPr>
         <p:spPr>
           <a:xfrm>
-            <a:off x="731520" y="1280160"/>
+            <a:off x="731520" y="1097280"/>
             <a:ext cx="7772400" cy="1371600"/>
           </a:xfrm>
           <a:prstGeom prst="rect">
@@ -1187,7 +1276,7 @@
               <a:buNone/>
             </a:pPr>
             <a:r>
-              <a:rPr lang="en-US" sz="3600" b="1" dirty="0">
+              <a:rPr lang="en-US" sz="4000" b="1" dirty="0">
                 <a:solidFill>
                   <a:srgbClr val="FFFFFF"/>
                 </a:solidFill>
@@ -1197,7 +1286,7 @@
               </a:rPr>
               <a:t>States of Matter</a:t>
             </a:r>
-            <a:endParaRPr lang="en-US" sz="3600" dirty="0"/>
+            <a:endParaRPr lang="en-US" sz="4000" dirty="0"/>
           </a:p>
         </p:txBody>
       </p:sp>
@@ -1209,7 +1298,7 @@
         </p:nvSpPr>
         <p:spPr>
           <a:xfrm>
-            <a:off x="731520" y="2743200"/>
+            <a:off x="731520" y="2560320"/>
             <a:ext cx="7772400" cy="548640"/>
           </a:xfrm>
           <a:prstGeom prst="rect">
@@ -1228,13 +1317,13 @@
             <a:r>
               <a:rPr lang="en-US" sz="1600" dirty="0">
                 <a:solidFill>
-                  <a:srgbClr val="9B9690"/>
-                </a:solidFill>
-                <a:latin typeface="Calibri" pitchFamily="34" charset="0"/>
-                <a:ea typeface="Calibri" pitchFamily="34" charset="-122"/>
-                <a:cs typeface="Calibri" pitchFamily="34" charset="-120"/>
-              </a:rPr>
-              <a:t>G6 Science · Chemistry</a:t>
+                  <a:srgbClr val="E9C46A"/>
+                </a:solidFill>
+                <a:latin typeface="Calibri" pitchFamily="34" charset="0"/>
+                <a:ea typeface="Calibri" pitchFamily="34" charset="-122"/>
+                <a:cs typeface="Calibri" pitchFamily="34" charset="-120"/>
+              </a:rPr>
+              <a:t>Grade 6 Science · Mr Zocchi</a:t>
             </a:r>
             <a:endParaRPr lang="en-US" sz="1600" dirty="0"/>
           </a:p>
@@ -1242,14 +1331,36 @@
       </p:sp>
       <p:sp>
         <p:nvSpPr>
-          <p:cNvPr id="5" name="Text 3"/>
-          <p:cNvSpPr/>
-          <p:nvPr/>
-        </p:nvSpPr>
-        <p:spPr>
-          <a:xfrm>
-            <a:off x="731520" y="4389120"/>
-            <a:ext cx="7772400" cy="457200"/>
+          <p:cNvPr id="5" name="Shape 3"/>
+          <p:cNvSpPr/>
+          <p:nvPr/>
+        </p:nvSpPr>
+        <p:spPr>
+          <a:xfrm>
+            <a:off x="731520" y="3474720"/>
+            <a:ext cx="2011680" cy="411480"/>
+          </a:xfrm>
+          <a:prstGeom prst="roundRect">
+            <a:avLst>
+              <a:gd name="adj" fmla="val 17778"/>
+            </a:avLst>
+          </a:prstGeom>
+          <a:solidFill>
+            <a:srgbClr val="2A9D8F"/>
+          </a:solidFill>
+          <a:ln/>
+        </p:spPr>
+      </p:sp>
+      <p:sp>
+        <p:nvSpPr>
+          <p:cNvPr id="6" name="Text 4"/>
+          <p:cNvSpPr/>
+          <p:nvPr/>
+        </p:nvSpPr>
+        <p:spPr>
+          <a:xfrm>
+            <a:off x="731520" y="3474720"/>
+            <a:ext cx="2011680" cy="411480"/>
           </a:xfrm>
           <a:prstGeom prst="rect">
             <a:avLst/>
@@ -1261,21 +1372,21 @@
           <a:bodyPr wrap="square" rtlCol="0" anchor="ctr"/>
           <a:lstStyle/>
           <a:p>
-            <a:pPr indent="0" marL="0">
+            <a:pPr algn="ctr" indent="0" marL="0">
               <a:buNone/>
             </a:pPr>
             <a:r>
-              <a:rPr lang="en-US" sz="1000" dirty="0">
-                <a:solidFill>
-                  <a:srgbClr val="6B6660"/>
-                </a:solidFill>
-                <a:latin typeface="Calibri" pitchFamily="34" charset="0"/>
-                <a:ea typeface="Calibri" pitchFamily="34" charset="-122"/>
-                <a:cs typeface="Calibri" pitchFamily="34" charset="-120"/>
-              </a:rPr>
-              <a:t>Mr Zocchi · mrzocchi.com</a:t>
-            </a:r>
-            <a:endParaRPr lang="en-US" sz="1000" dirty="0"/>
+              <a:rPr lang="en-US" sz="1200" b="1" dirty="0">
+                <a:solidFill>
+                  <a:srgbClr val="FFFFFF"/>
+                </a:solidFill>
+                <a:latin typeface="Calibri" pitchFamily="34" charset="0"/>
+                <a:ea typeface="Calibri" pitchFamily="34" charset="-122"/>
+                <a:cs typeface="Calibri" pitchFamily="34" charset="-120"/>
+              </a:rPr>
+              <a:t>Term 2 · Chemistry</a:t>
+            </a:r>
+            <a:endParaRPr lang="en-US" sz="1200" dirty="0"/>
           </a:p>
         </p:txBody>
       </p:sp>
@@ -1293,7 +1404,7 @@
     <p:bg>
       <p:bgPr>
         <a:solidFill>
-          <a:srgbClr val="FFFFFF"/>
+          <a:srgbClr val="FAF8F5"/>
         </a:solidFill>
       </p:bgPr>
     </p:bg>
@@ -1339,8 +1450,8 @@
         </p:nvSpPr>
         <p:spPr>
           <a:xfrm>
-            <a:off x="548640" y="274320"/>
-            <a:ext cx="8046720" cy="640080"/>
+            <a:off x="7772400" y="4709160"/>
+            <a:ext cx="1097280" cy="320040"/>
           </a:xfrm>
           <a:prstGeom prst="rect">
             <a:avLst/>
@@ -1349,7 +1460,46 @@
           <a:ln/>
         </p:spPr>
         <p:txBody>
-          <a:bodyPr wrap="square" lIns="0" tIns="0" rIns="0" bIns="0" rtlCol="0" anchor="ctr"/>
+          <a:bodyPr wrap="square" rtlCol="0" anchor="ctr"/>
+          <a:lstStyle/>
+          <a:p>
+            <a:pPr algn="r" indent="0" marL="0">
+              <a:buNone/>
+            </a:pPr>
+            <a:r>
+              <a:rPr lang="en-US" sz="900" dirty="0">
+                <a:solidFill>
+                  <a:srgbClr val="6B6660"/>
+                </a:solidFill>
+                <a:latin typeface="Calibri" pitchFamily="34" charset="0"/>
+                <a:ea typeface="Calibri" pitchFamily="34" charset="-122"/>
+                <a:cs typeface="Calibri" pitchFamily="34" charset="-120"/>
+              </a:rPr>
+              <a:t>2 / 5</a:t>
+            </a:r>
+            <a:endParaRPr lang="en-US" sz="900" dirty="0"/>
+          </a:p>
+        </p:txBody>
+      </p:sp>
+      <p:sp>
+        <p:nvSpPr>
+          <p:cNvPr id="4" name="Text 2"/>
+          <p:cNvSpPr/>
+          <p:nvPr/>
+        </p:nvSpPr>
+        <p:spPr>
+          <a:xfrm>
+            <a:off x="457200" y="274320"/>
+            <a:ext cx="8229600" cy="640080"/>
+          </a:xfrm>
+          <a:prstGeom prst="rect">
+            <a:avLst/>
+          </a:prstGeom>
+          <a:noFill/>
+          <a:ln/>
+        </p:spPr>
+        <p:txBody>
+          <a:bodyPr wrap="square" rtlCol="0" anchor="ctr"/>
           <a:lstStyle/>
           <a:p>
             <a:pPr indent="0" marL="0">
@@ -1372,14 +1522,66 @@
       </p:sp>
       <p:sp>
         <p:nvSpPr>
-          <p:cNvPr id="4" name="Text 2"/>
-          <p:cNvSpPr/>
-          <p:nvPr/>
-        </p:nvSpPr>
-        <p:spPr>
-          <a:xfrm>
-            <a:off x="548640" y="1097280"/>
-            <a:ext cx="8046720" cy="3474720"/>
+          <p:cNvPr id="5" name="Shape 3"/>
+          <p:cNvSpPr/>
+          <p:nvPr/>
+        </p:nvSpPr>
+        <p:spPr>
+          <a:xfrm>
+            <a:off x="457200" y="1188720"/>
+            <a:ext cx="2560320" cy="1828800"/>
+          </a:xfrm>
+          <a:prstGeom prst="rect">
+            <a:avLst/>
+          </a:prstGeom>
+          <a:solidFill>
+            <a:srgbClr val="FFFFFF"/>
+          </a:solidFill>
+          <a:ln w="12700">
+            <a:solidFill>
+              <a:srgbClr val="E5E2DC"/>
+            </a:solidFill>
+            <a:prstDash val="solid"/>
+          </a:ln>
+          <a:effectLst>
+            <a:outerShdw sx="100000" sy="100000" kx="0" ky="0" algn="bl" rotWithShape="0" blurRad="50800" dist="25400" dir="8100000">
+              <a:srgbClr val="000000">
+                <a:alpha val="10000"/>
+              </a:srgbClr>
+            </a:outerShdw>
+          </a:effectLst>
+        </p:spPr>
+      </p:sp>
+      <p:sp>
+        <p:nvSpPr>
+          <p:cNvPr id="6" name="Shape 4"/>
+          <p:cNvSpPr/>
+          <p:nvPr/>
+        </p:nvSpPr>
+        <p:spPr>
+          <a:xfrm>
+            <a:off x="457200" y="1188720"/>
+            <a:ext cx="2560320" cy="54864"/>
+          </a:xfrm>
+          <a:prstGeom prst="rect">
+            <a:avLst/>
+          </a:prstGeom>
+          <a:solidFill>
+            <a:srgbClr val="2A9D8F"/>
+          </a:solidFill>
+          <a:ln/>
+        </p:spPr>
+      </p:sp>
+      <p:sp>
+        <p:nvSpPr>
+          <p:cNvPr id="7" name="Text 5"/>
+          <p:cNvSpPr/>
+          <p:nvPr/>
+        </p:nvSpPr>
+        <p:spPr>
+          <a:xfrm>
+            <a:off x="594360" y="1325880"/>
+            <a:ext cx="2286000" cy="365760"/>
           </a:xfrm>
           <a:prstGeom prst="rect">
             <a:avLst/>
@@ -1388,18 +1590,53 @@
           <a:ln/>
         </p:spPr>
         <p:txBody>
+          <a:bodyPr wrap="square" rtlCol="0" anchor="ctr"/>
+          <a:lstStyle/>
+          <a:p>
+            <a:pPr indent="0" marL="0">
+              <a:buNone/>
+            </a:pPr>
+            <a:r>
+              <a:rPr lang="en-US" sz="1400" b="1" dirty="0">
+                <a:solidFill>
+                  <a:srgbClr val="1B2A4A"/>
+                </a:solidFill>
+                <a:latin typeface="Calibri" pitchFamily="34" charset="0"/>
+                <a:ea typeface="Calibri" pitchFamily="34" charset="-122"/>
+                <a:cs typeface="Calibri" pitchFamily="34" charset="-120"/>
+              </a:rPr>
+              <a:t>Solid</a:t>
+            </a:r>
+            <a:endParaRPr lang="en-US" sz="1400" dirty="0"/>
+          </a:p>
+        </p:txBody>
+      </p:sp>
+      <p:sp>
+        <p:nvSpPr>
+          <p:cNvPr id="8" name="Text 6"/>
+          <p:cNvSpPr/>
+          <p:nvPr/>
+        </p:nvSpPr>
+        <p:spPr>
+          <a:xfrm>
+            <a:off x="594360" y="1737360"/>
+            <a:ext cx="2286000" cy="1097280"/>
+          </a:xfrm>
+          <a:prstGeom prst="rect">
+            <a:avLst/>
+          </a:prstGeom>
+          <a:noFill/>
+          <a:ln/>
+        </p:spPr>
+        <p:txBody>
           <a:bodyPr wrap="square" rtlCol="0" anchor="t"/>
           <a:lstStyle/>
           <a:p>
-            <a:pPr marL="342900" indent="-342900">
-              <a:spcAft>
-                <a:spcPts val="800"/>
-              </a:spcAft>
-              <a:buSzPct val="100000"/>
-              <a:buChar char="•"/>
-            </a:pPr>
-            <a:r>
-              <a:rPr lang="en-US" sz="1500" dirty="0">
+            <a:pPr indent="0" marL="0">
+              <a:buNone/>
+            </a:pPr>
+            <a:r>
+              <a:rPr lang="en-US" sz="1100" dirty="0">
                 <a:solidFill>
                   <a:srgbClr val="3D3A36"/>
                 </a:solidFill>
@@ -1407,105 +1644,74 @@
                 <a:ea typeface="Calibri" pitchFamily="34" charset="-122"/>
                 <a:cs typeface="Calibri" pitchFamily="34" charset="-120"/>
               </a:rPr>
-              <a:t>SOLID — fixed shape, fixed volume, particles vibrate in place</a:t>
-            </a:r>
-            <a:endParaRPr lang="en-US" sz="1500" dirty="0"/>
-          </a:p>
-          <a:p>
-            <a:pPr marL="342900" indent="-342900">
-              <a:spcAft>
-                <a:spcPts val="800"/>
-              </a:spcAft>
-              <a:buSzPct val="100000"/>
-              <a:buChar char="•"/>
-            </a:pPr>
-            <a:r>
-              <a:rPr lang="en-US" sz="1500" dirty="0">
-                <a:solidFill>
-                  <a:srgbClr val="3D3A36"/>
-                </a:solidFill>
-                <a:latin typeface="Calibri" pitchFamily="34" charset="0"/>
-                <a:ea typeface="Calibri" pitchFamily="34" charset="-122"/>
-                <a:cs typeface="Calibri" pitchFamily="34" charset="-120"/>
-              </a:rPr>
-              <a:t>LIQUID — takes shape of container, fixed volume, particles slide</a:t>
-            </a:r>
-            <a:endParaRPr lang="en-US" sz="1500" dirty="0"/>
-          </a:p>
-          <a:p>
-            <a:pPr marL="342900" indent="-342900">
-              <a:spcAft>
-                <a:spcPts val="800"/>
-              </a:spcAft>
-              <a:buSzPct val="100000"/>
-              <a:buChar char="•"/>
-            </a:pPr>
-            <a:r>
-              <a:rPr lang="en-US" sz="1500" dirty="0">
-                <a:solidFill>
-                  <a:srgbClr val="3D3A36"/>
-                </a:solidFill>
-                <a:latin typeface="Calibri" pitchFamily="34" charset="0"/>
-                <a:ea typeface="Calibri" pitchFamily="34" charset="-122"/>
-                <a:cs typeface="Calibri" pitchFamily="34" charset="-120"/>
-              </a:rPr>
-              <a:t>GAS — fills any container, no fixed volume, particles move freely</a:t>
-            </a:r>
-            <a:endParaRPr lang="en-US" sz="1500" dirty="0"/>
-          </a:p>
-          <a:p>
-            <a:pPr marL="342900" indent="-342900">
-              <a:spcAft>
-                <a:spcPts val="800"/>
-              </a:spcAft>
-              <a:buSzPct val="100000"/>
-              <a:buChar char="•"/>
-            </a:pPr>
-            <a:r>
-              <a:rPr lang="en-US" sz="1500" dirty="0">
-                <a:solidFill>
-                  <a:srgbClr val="3D3A36"/>
-                </a:solidFill>
-                <a:latin typeface="Calibri" pitchFamily="34" charset="0"/>
-                <a:ea typeface="Calibri" pitchFamily="34" charset="-122"/>
-                <a:cs typeface="Calibri" pitchFamily="34" charset="-120"/>
-              </a:rPr>
-              <a:t>Most substances can exist in all three states depending on temperature</a:t>
-            </a:r>
-            <a:endParaRPr lang="en-US" sz="1500" dirty="0"/>
-          </a:p>
-        </p:txBody>
-      </p:sp>
-      <p:sp>
-        <p:nvSpPr>
-          <p:cNvPr id="5" name="Shape 3"/>
-          <p:cNvSpPr/>
-          <p:nvPr/>
-        </p:nvSpPr>
-        <p:spPr>
-          <a:xfrm>
-            <a:off x="548640" y="4754880"/>
-            <a:ext cx="8046720" cy="9144"/>
-          </a:xfrm>
-          <a:prstGeom prst="rect">
-            <a:avLst/>
-          </a:prstGeom>
-          <a:solidFill>
-            <a:srgbClr val="F3F1EE"/>
+              <a:t>Fixed shape, fixed volume. Particles in regular arrangement, vibrating. Cannot be compressed. Examples: ice, wood, iron.</a:t>
+            </a:r>
+            <a:endParaRPr lang="en-US" sz="1100" dirty="0"/>
+          </a:p>
+        </p:txBody>
+      </p:sp>
+      <p:sp>
+        <p:nvSpPr>
+          <p:cNvPr id="9" name="Shape 7"/>
+          <p:cNvSpPr/>
+          <p:nvPr/>
+        </p:nvSpPr>
+        <p:spPr>
+          <a:xfrm>
+            <a:off x="3291840" y="1188720"/>
+            <a:ext cx="2560320" cy="1828800"/>
+          </a:xfrm>
+          <a:prstGeom prst="rect">
+            <a:avLst/>
+          </a:prstGeom>
+          <a:solidFill>
+            <a:srgbClr val="FFFFFF"/>
+          </a:solidFill>
+          <a:ln w="12700">
+            <a:solidFill>
+              <a:srgbClr val="E5E2DC"/>
+            </a:solidFill>
+            <a:prstDash val="solid"/>
+          </a:ln>
+          <a:effectLst>
+            <a:outerShdw sx="100000" sy="100000" kx="0" ky="0" algn="bl" rotWithShape="0" blurRad="50800" dist="25400" dir="8100000">
+              <a:srgbClr val="000000">
+                <a:alpha val="10000"/>
+              </a:srgbClr>
+            </a:outerShdw>
+          </a:effectLst>
+        </p:spPr>
+      </p:sp>
+      <p:sp>
+        <p:nvSpPr>
+          <p:cNvPr id="10" name="Shape 8"/>
+          <p:cNvSpPr/>
+          <p:nvPr/>
+        </p:nvSpPr>
+        <p:spPr>
+          <a:xfrm>
+            <a:off x="3291840" y="1188720"/>
+            <a:ext cx="2560320" cy="54864"/>
+          </a:xfrm>
+          <a:prstGeom prst="rect">
+            <a:avLst/>
+          </a:prstGeom>
+          <a:solidFill>
+            <a:srgbClr val="2A9D8F"/>
           </a:solidFill>
           <a:ln/>
         </p:spPr>
       </p:sp>
       <p:sp>
         <p:nvSpPr>
-          <p:cNvPr id="6" name="Text 4"/>
-          <p:cNvSpPr/>
-          <p:nvPr/>
-        </p:nvSpPr>
-        <p:spPr>
-          <a:xfrm>
-            <a:off x="548640" y="4800600"/>
-            <a:ext cx="3657600" cy="274320"/>
+          <p:cNvPr id="11" name="Text 9"/>
+          <p:cNvSpPr/>
+          <p:nvPr/>
+        </p:nvSpPr>
+        <p:spPr>
+          <a:xfrm>
+            <a:off x="3429000" y="1325880"/>
+            <a:ext cx="2286000" cy="365760"/>
           </a:xfrm>
           <a:prstGeom prst="rect">
             <a:avLst/>
@@ -1521,14 +1727,186 @@
               <a:buNone/>
             </a:pPr>
             <a:r>
-              <a:rPr lang="en-US" sz="800" dirty="0">
-                <a:solidFill>
-                  <a:srgbClr val="9B9690"/>
-                </a:solidFill>
-              </a:rPr>
-              <a:t>mrzocchi.com</a:t>
-            </a:r>
-            <a:endParaRPr lang="en-US" sz="800" dirty="0"/>
+              <a:rPr lang="en-US" sz="1400" b="1" dirty="0">
+                <a:solidFill>
+                  <a:srgbClr val="1B2A4A"/>
+                </a:solidFill>
+                <a:latin typeface="Calibri" pitchFamily="34" charset="0"/>
+                <a:ea typeface="Calibri" pitchFamily="34" charset="-122"/>
+                <a:cs typeface="Calibri" pitchFamily="34" charset="-120"/>
+              </a:rPr>
+              <a:t>Liquid</a:t>
+            </a:r>
+            <a:endParaRPr lang="en-US" sz="1400" dirty="0"/>
+          </a:p>
+        </p:txBody>
+      </p:sp>
+      <p:sp>
+        <p:nvSpPr>
+          <p:cNvPr id="12" name="Text 10"/>
+          <p:cNvSpPr/>
+          <p:nvPr/>
+        </p:nvSpPr>
+        <p:spPr>
+          <a:xfrm>
+            <a:off x="3429000" y="1737360"/>
+            <a:ext cx="2286000" cy="1097280"/>
+          </a:xfrm>
+          <a:prstGeom prst="rect">
+            <a:avLst/>
+          </a:prstGeom>
+          <a:noFill/>
+          <a:ln/>
+        </p:spPr>
+        <p:txBody>
+          <a:bodyPr wrap="square" rtlCol="0" anchor="t"/>
+          <a:lstStyle/>
+          <a:p>
+            <a:pPr indent="0" marL="0">
+              <a:buNone/>
+            </a:pPr>
+            <a:r>
+              <a:rPr lang="en-US" sz="1100" dirty="0">
+                <a:solidFill>
+                  <a:srgbClr val="3D3A36"/>
+                </a:solidFill>
+                <a:latin typeface="Calibri" pitchFamily="34" charset="0"/>
+                <a:ea typeface="Calibri" pitchFamily="34" charset="-122"/>
+                <a:cs typeface="Calibri" pitchFamily="34" charset="-120"/>
+              </a:rPr>
+              <a:t>No fixed shape, fixed volume. Takes shape of container. Can flow. Difficult to compress. Examples: water, milk, oil.</a:t>
+            </a:r>
+            <a:endParaRPr lang="en-US" sz="1100" dirty="0"/>
+          </a:p>
+        </p:txBody>
+      </p:sp>
+      <p:sp>
+        <p:nvSpPr>
+          <p:cNvPr id="13" name="Shape 11"/>
+          <p:cNvSpPr/>
+          <p:nvPr/>
+        </p:nvSpPr>
+        <p:spPr>
+          <a:xfrm>
+            <a:off x="6126480" y="1188720"/>
+            <a:ext cx="2560320" cy="1828800"/>
+          </a:xfrm>
+          <a:prstGeom prst="rect">
+            <a:avLst/>
+          </a:prstGeom>
+          <a:solidFill>
+            <a:srgbClr val="FFFFFF"/>
+          </a:solidFill>
+          <a:ln w="12700">
+            <a:solidFill>
+              <a:srgbClr val="E5E2DC"/>
+            </a:solidFill>
+            <a:prstDash val="solid"/>
+          </a:ln>
+          <a:effectLst>
+            <a:outerShdw sx="100000" sy="100000" kx="0" ky="0" algn="bl" rotWithShape="0" blurRad="50800" dist="25400" dir="8100000">
+              <a:srgbClr val="000000">
+                <a:alpha val="10000"/>
+              </a:srgbClr>
+            </a:outerShdw>
+          </a:effectLst>
+        </p:spPr>
+      </p:sp>
+      <p:sp>
+        <p:nvSpPr>
+          <p:cNvPr id="14" name="Shape 12"/>
+          <p:cNvSpPr/>
+          <p:nvPr/>
+        </p:nvSpPr>
+        <p:spPr>
+          <a:xfrm>
+            <a:off x="6126480" y="1188720"/>
+            <a:ext cx="2560320" cy="54864"/>
+          </a:xfrm>
+          <a:prstGeom prst="rect">
+            <a:avLst/>
+          </a:prstGeom>
+          <a:solidFill>
+            <a:srgbClr val="2A9D8F"/>
+          </a:solidFill>
+          <a:ln/>
+        </p:spPr>
+      </p:sp>
+      <p:sp>
+        <p:nvSpPr>
+          <p:cNvPr id="15" name="Text 13"/>
+          <p:cNvSpPr/>
+          <p:nvPr/>
+        </p:nvSpPr>
+        <p:spPr>
+          <a:xfrm>
+            <a:off x="6263640" y="1325880"/>
+            <a:ext cx="2286000" cy="365760"/>
+          </a:xfrm>
+          <a:prstGeom prst="rect">
+            <a:avLst/>
+          </a:prstGeom>
+          <a:noFill/>
+          <a:ln/>
+        </p:spPr>
+        <p:txBody>
+          <a:bodyPr wrap="square" rtlCol="0" anchor="ctr"/>
+          <a:lstStyle/>
+          <a:p>
+            <a:pPr indent="0" marL="0">
+              <a:buNone/>
+            </a:pPr>
+            <a:r>
+              <a:rPr lang="en-US" sz="1400" b="1" dirty="0">
+                <a:solidFill>
+                  <a:srgbClr val="1B2A4A"/>
+                </a:solidFill>
+                <a:latin typeface="Calibri" pitchFamily="34" charset="0"/>
+                <a:ea typeface="Calibri" pitchFamily="34" charset="-122"/>
+                <a:cs typeface="Calibri" pitchFamily="34" charset="-120"/>
+              </a:rPr>
+              <a:t>Gas</a:t>
+            </a:r>
+            <a:endParaRPr lang="en-US" sz="1400" dirty="0"/>
+          </a:p>
+        </p:txBody>
+      </p:sp>
+      <p:sp>
+        <p:nvSpPr>
+          <p:cNvPr id="16" name="Text 14"/>
+          <p:cNvSpPr/>
+          <p:nvPr/>
+        </p:nvSpPr>
+        <p:spPr>
+          <a:xfrm>
+            <a:off x="6263640" y="1737360"/>
+            <a:ext cx="2286000" cy="1097280"/>
+          </a:xfrm>
+          <a:prstGeom prst="rect">
+            <a:avLst/>
+          </a:prstGeom>
+          <a:noFill/>
+          <a:ln/>
+        </p:spPr>
+        <p:txBody>
+          <a:bodyPr wrap="square" rtlCol="0" anchor="t"/>
+          <a:lstStyle/>
+          <a:p>
+            <a:pPr indent="0" marL="0">
+              <a:buNone/>
+            </a:pPr>
+            <a:r>
+              <a:rPr lang="en-US" sz="1100" dirty="0">
+                <a:solidFill>
+                  <a:srgbClr val="3D3A36"/>
+                </a:solidFill>
+                <a:latin typeface="Calibri" pitchFamily="34" charset="0"/>
+                <a:ea typeface="Calibri" pitchFamily="34" charset="-122"/>
+                <a:cs typeface="Calibri" pitchFamily="34" charset="-120"/>
+              </a:rPr>
+              <a:t>No fixed shape, no fixed volume. Fills entire container. Easy to compress. Very low density. Examples: oxygen, steam, carbon dioxide.</a:t>
+            </a:r>
+            <a:endParaRPr lang="en-US" sz="1100" dirty="0"/>
           </a:p>
         </p:txBody>
       </p:sp>
@@ -1592,8 +1970,8 @@
         </p:nvSpPr>
         <p:spPr>
           <a:xfrm>
-            <a:off x="548640" y="274320"/>
-            <a:ext cx="8046720" cy="640080"/>
+            <a:off x="7772400" y="4709160"/>
+            <a:ext cx="1097280" cy="320040"/>
           </a:xfrm>
           <a:prstGeom prst="rect">
             <a:avLst/>
@@ -1602,7 +1980,46 @@
           <a:ln/>
         </p:spPr>
         <p:txBody>
-          <a:bodyPr wrap="square" lIns="0" tIns="0" rIns="0" bIns="0" rtlCol="0" anchor="ctr"/>
+          <a:bodyPr wrap="square" rtlCol="0" anchor="ctr"/>
+          <a:lstStyle/>
+          <a:p>
+            <a:pPr algn="r" indent="0" marL="0">
+              <a:buNone/>
+            </a:pPr>
+            <a:r>
+              <a:rPr lang="en-US" sz="900" dirty="0">
+                <a:solidFill>
+                  <a:srgbClr val="6B6660"/>
+                </a:solidFill>
+                <a:latin typeface="Calibri" pitchFamily="34" charset="0"/>
+                <a:ea typeface="Calibri" pitchFamily="34" charset="-122"/>
+                <a:cs typeface="Calibri" pitchFamily="34" charset="-120"/>
+              </a:rPr>
+              <a:t>3 / 5</a:t>
+            </a:r>
+            <a:endParaRPr lang="en-US" sz="900" dirty="0"/>
+          </a:p>
+        </p:txBody>
+      </p:sp>
+      <p:sp>
+        <p:nvSpPr>
+          <p:cNvPr id="4" name="Text 2"/>
+          <p:cNvSpPr/>
+          <p:nvPr/>
+        </p:nvSpPr>
+        <p:spPr>
+          <a:xfrm>
+            <a:off x="457200" y="274320"/>
+            <a:ext cx="8229600" cy="640080"/>
+          </a:xfrm>
+          <a:prstGeom prst="rect">
+            <a:avLst/>
+          </a:prstGeom>
+          <a:noFill/>
+          <a:ln/>
+        </p:spPr>
+        <p:txBody>
+          <a:bodyPr wrap="square" rtlCol="0" anchor="ctr"/>
           <a:lstStyle/>
           <a:p>
             <a:pPr indent="0" marL="0">
@@ -1617,7 +2034,7 @@
                 <a:ea typeface="Georgia" pitchFamily="34" charset="-122"/>
                 <a:cs typeface="Georgia" pitchFamily="34" charset="-120"/>
               </a:rPr>
-              <a:t>Properties</a:t>
+              <a:t>Comparing the States</a:t>
             </a:r>
             <a:endParaRPr lang="en-US" sz="2600" dirty="0"/>
           </a:p>
@@ -1625,14 +2042,141 @@
       </p:sp>
       <p:sp>
         <p:nvSpPr>
-          <p:cNvPr id="4" name="Shape 2"/>
-          <p:cNvSpPr/>
-          <p:nvPr/>
-        </p:nvSpPr>
-        <p:spPr>
-          <a:xfrm>
-            <a:off x="548640" y="1097280"/>
-            <a:ext cx="3749040" cy="594360"/>
+          <p:cNvPr id="5" name="Text 3"/>
+          <p:cNvSpPr/>
+          <p:nvPr/>
+        </p:nvSpPr>
+        <p:spPr>
+          <a:xfrm>
+            <a:off x="457200" y="1188720"/>
+            <a:ext cx="3840480" cy="3474720"/>
+          </a:xfrm>
+          <a:prstGeom prst="rect">
+            <a:avLst/>
+          </a:prstGeom>
+          <a:noFill/>
+          <a:ln/>
+        </p:spPr>
+        <p:txBody>
+          <a:bodyPr wrap="square" rtlCol="0" anchor="t"/>
+          <a:lstStyle/>
+          <a:p>
+            <a:pPr marL="342900" indent="-342900">
+              <a:spcAft>
+                <a:spcPts val="600"/>
+              </a:spcAft>
+              <a:buSzPct val="100000"/>
+              <a:buChar char="•"/>
+            </a:pPr>
+            <a:r>
+              <a:rPr lang="en-US" sz="1400" dirty="0">
+                <a:solidFill>
+                  <a:srgbClr val="3D3A36"/>
+                </a:solidFill>
+                <a:latin typeface="Calibri" pitchFamily="34" charset="0"/>
+                <a:ea typeface="Calibri" pitchFamily="34" charset="-122"/>
+                <a:cs typeface="Calibri" pitchFamily="34" charset="-120"/>
+              </a:rPr>
+              <a:t>Solids have the strongest forces between particles</a:t>
+            </a:r>
+            <a:endParaRPr lang="en-US" sz="1400" dirty="0"/>
+          </a:p>
+          <a:p>
+            <a:pPr marL="342900" indent="-342900">
+              <a:spcAft>
+                <a:spcPts val="600"/>
+              </a:spcAft>
+              <a:buSzPct val="100000"/>
+              <a:buChar char="•"/>
+            </a:pPr>
+            <a:r>
+              <a:rPr lang="en-US" sz="1400" dirty="0">
+                <a:solidFill>
+                  <a:srgbClr val="3D3A36"/>
+                </a:solidFill>
+                <a:latin typeface="Calibri" pitchFamily="34" charset="0"/>
+                <a:ea typeface="Calibri" pitchFamily="34" charset="-122"/>
+                <a:cs typeface="Calibri" pitchFamily="34" charset="-120"/>
+              </a:rPr>
+              <a:t>Liquids have moderate forces — enough to stay together but not enough for a fixed shape</a:t>
+            </a:r>
+            <a:endParaRPr lang="en-US" sz="1400" dirty="0"/>
+          </a:p>
+          <a:p>
+            <a:pPr marL="342900" indent="-342900">
+              <a:spcAft>
+                <a:spcPts val="600"/>
+              </a:spcAft>
+              <a:buSzPct val="100000"/>
+              <a:buChar char="•"/>
+            </a:pPr>
+            <a:r>
+              <a:rPr lang="en-US" sz="1400" dirty="0">
+                <a:solidFill>
+                  <a:srgbClr val="3D3A36"/>
+                </a:solidFill>
+                <a:latin typeface="Calibri" pitchFamily="34" charset="0"/>
+                <a:ea typeface="Calibri" pitchFamily="34" charset="-122"/>
+                <a:cs typeface="Calibri" pitchFamily="34" charset="-120"/>
+              </a:rPr>
+              <a:t>Gases have very weak forces — particles escape easily</a:t>
+            </a:r>
+            <a:endParaRPr lang="en-US" sz="1400" dirty="0"/>
+          </a:p>
+          <a:p>
+            <a:pPr marL="342900" indent="-342900">
+              <a:spcAft>
+                <a:spcPts val="600"/>
+              </a:spcAft>
+              <a:buSzPct val="100000"/>
+              <a:buChar char="•"/>
+            </a:pPr>
+            <a:r>
+              <a:rPr lang="en-US" sz="1400" dirty="0">
+                <a:solidFill>
+                  <a:srgbClr val="3D3A36"/>
+                </a:solidFill>
+                <a:latin typeface="Calibri" pitchFamily="34" charset="0"/>
+                <a:ea typeface="Calibri" pitchFamily="34" charset="-122"/>
+                <a:cs typeface="Calibri" pitchFamily="34" charset="-120"/>
+              </a:rPr>
+              <a:t>Density: solid &gt; liquid &gt; gas (usually)</a:t>
+            </a:r>
+            <a:endParaRPr lang="en-US" sz="1400" dirty="0"/>
+          </a:p>
+          <a:p>
+            <a:pPr marL="342900" indent="-342900">
+              <a:spcAft>
+                <a:spcPts val="600"/>
+              </a:spcAft>
+              <a:buSzPct val="100000"/>
+              <a:buChar char="•"/>
+            </a:pPr>
+            <a:r>
+              <a:rPr lang="en-US" sz="1400" dirty="0">
+                <a:solidFill>
+                  <a:srgbClr val="3D3A36"/>
+                </a:solidFill>
+                <a:latin typeface="Calibri" pitchFamily="34" charset="0"/>
+                <a:ea typeface="Calibri" pitchFamily="34" charset="-122"/>
+                <a:cs typeface="Calibri" pitchFamily="34" charset="-120"/>
+              </a:rPr>
+              <a:t>Exception: ice is LESS dense than water — that's why ice floats!</a:t>
+            </a:r>
+            <a:endParaRPr lang="en-US" sz="1400" dirty="0"/>
+          </a:p>
+        </p:txBody>
+      </p:sp>
+      <p:sp>
+        <p:nvSpPr>
+          <p:cNvPr id="6" name="Shape 4"/>
+          <p:cNvSpPr/>
+          <p:nvPr/>
+        </p:nvSpPr>
+        <p:spPr>
+          <a:xfrm>
+            <a:off x="4846320" y="1188720"/>
+            <a:ext cx="3840480" cy="3474720"/>
           </a:xfrm>
           <a:prstGeom prst="rect">
             <a:avLst/>
@@ -1640,7 +2184,12 @@
           <a:solidFill>
             <a:srgbClr val="FFFFFF"/>
           </a:solidFill>
-          <a:ln/>
+          <a:ln w="12700">
+            <a:solidFill>
+              <a:srgbClr val="E5E2DC"/>
+            </a:solidFill>
+            <a:prstDash val="solid"/>
+          </a:ln>
           <a:effectLst>
             <a:outerShdw sx="100000" sy="100000" kx="0" ky="0" algn="bl" rotWithShape="0" blurRad="50800" dist="25400" dir="8100000">
               <a:srgbClr val="000000">
@@ -1652,14 +2201,14 @@
       </p:sp>
       <p:sp>
         <p:nvSpPr>
-          <p:cNvPr id="5" name="Shape 3"/>
-          <p:cNvSpPr/>
-          <p:nvPr/>
-        </p:nvSpPr>
-        <p:spPr>
-          <a:xfrm>
-            <a:off x="548640" y="1097280"/>
-            <a:ext cx="54864" cy="594360"/>
+          <p:cNvPr id="7" name="Shape 5"/>
+          <p:cNvSpPr/>
+          <p:nvPr/>
+        </p:nvSpPr>
+        <p:spPr>
+          <a:xfrm>
+            <a:off x="4846320" y="1188720"/>
+            <a:ext cx="3840480" cy="54864"/>
           </a:xfrm>
           <a:prstGeom prst="rect">
             <a:avLst/>
@@ -1672,14 +2221,14 @@
       </p:sp>
       <p:sp>
         <p:nvSpPr>
-          <p:cNvPr id="6" name="Text 4"/>
-          <p:cNvSpPr/>
-          <p:nvPr/>
-        </p:nvSpPr>
-        <p:spPr>
-          <a:xfrm>
-            <a:off x="685800" y="1143000"/>
-            <a:ext cx="3520440" cy="502920"/>
+          <p:cNvPr id="8" name="Text 6"/>
+          <p:cNvSpPr/>
+          <p:nvPr/>
+        </p:nvSpPr>
+        <p:spPr>
+          <a:xfrm>
+            <a:off x="5120640" y="1371600"/>
+            <a:ext cx="3291840" cy="3108960"/>
           </a:xfrm>
           <a:prstGeom prst="rect">
             <a:avLst/>
@@ -1688,556 +2237,136 @@
           <a:ln/>
         </p:spPr>
         <p:txBody>
-          <a:bodyPr wrap="square" rtlCol="0" anchor="ctr"/>
+          <a:bodyPr wrap="square" rtlCol="0" anchor="t"/>
           <a:lstStyle/>
           <a:p>
             <a:pPr indent="0" marL="0">
+              <a:spcAft>
+                <a:spcPts val="400"/>
+              </a:spcAft>
               <a:buNone/>
             </a:pPr>
             <a:r>
-              <a:rPr lang="en-US" sz="1200" b="1" dirty="0">
+              <a:rPr lang="en-US" sz="1600" b="1" dirty="0">
                 <a:solidFill>
                   <a:srgbClr val="1B2A4A"/>
                 </a:solidFill>
-              </a:rPr>
-              <a:t>Solid</a:t>
-            </a:r>
-            <a:endParaRPr lang="en-US" sz="1200" dirty="0"/>
+                <a:latin typeface="Calibri" pitchFamily="34" charset="0"/>
+                <a:ea typeface="Calibri" pitchFamily="34" charset="-122"/>
+                <a:cs typeface="Calibri" pitchFamily="34" charset="-120"/>
+              </a:rPr>
+              <a:t>Key Properties</a:t>
+            </a:r>
+            <a:endParaRPr lang="en-US" sz="1600" dirty="0"/>
           </a:p>
           <a:p>
             <a:pPr indent="0" marL="0">
+              <a:spcAft>
+                <a:spcPts val="400"/>
+              </a:spcAft>
               <a:buNone/>
             </a:pPr>
-            <a:r>
-              <a:rPr lang="en-US" sz="1000" dirty="0">
-                <a:solidFill>
-                  <a:srgbClr val="6B6660"/>
-                </a:solidFill>
-              </a:rPr>
-              <a:t>Hard, fixed shape, cannot be compressed</a:t>
-            </a:r>
-            <a:endParaRPr lang="en-US" sz="1200" dirty="0"/>
-          </a:p>
-        </p:txBody>
-      </p:sp>
-      <p:sp>
-        <p:nvSpPr>
-          <p:cNvPr id="7" name="Shape 5"/>
-          <p:cNvSpPr/>
-          <p:nvPr/>
-        </p:nvSpPr>
-        <p:spPr>
-          <a:xfrm>
-            <a:off x="4480560" y="1097280"/>
-            <a:ext cx="3749040" cy="594360"/>
-          </a:xfrm>
-          <a:prstGeom prst="rect">
-            <a:avLst/>
-          </a:prstGeom>
-          <a:solidFill>
-            <a:srgbClr val="FFFFFF"/>
-          </a:solidFill>
-          <a:ln/>
-          <a:effectLst>
-            <a:outerShdw sx="100000" sy="100000" kx="0" ky="0" algn="bl" rotWithShape="0" blurRad="50800" dist="25400" dir="8100000">
-              <a:srgbClr val="000000">
-                <a:alpha val="10000"/>
-              </a:srgbClr>
-            </a:outerShdw>
-          </a:effectLst>
-        </p:spPr>
-      </p:sp>
-      <p:sp>
-        <p:nvSpPr>
-          <p:cNvPr id="8" name="Shape 6"/>
-          <p:cNvSpPr/>
-          <p:nvPr/>
-        </p:nvSpPr>
-        <p:spPr>
-          <a:xfrm>
-            <a:off x="4480560" y="1097280"/>
-            <a:ext cx="54864" cy="594360"/>
-          </a:xfrm>
-          <a:prstGeom prst="rect">
-            <a:avLst/>
-          </a:prstGeom>
-          <a:solidFill>
-            <a:srgbClr val="2A9D8F"/>
-          </a:solidFill>
-          <a:ln/>
-        </p:spPr>
-      </p:sp>
-      <p:sp>
-        <p:nvSpPr>
-          <p:cNvPr id="9" name="Text 7"/>
-          <p:cNvSpPr/>
-          <p:nvPr/>
-        </p:nvSpPr>
-        <p:spPr>
-          <a:xfrm>
-            <a:off x="4617720" y="1143000"/>
-            <a:ext cx="3520440" cy="502920"/>
-          </a:xfrm>
-          <a:prstGeom prst="rect">
-            <a:avLst/>
-          </a:prstGeom>
-          <a:noFill/>
-          <a:ln/>
-        </p:spPr>
-        <p:txBody>
-          <a:bodyPr wrap="square" rtlCol="0" anchor="ctr"/>
-          <a:lstStyle/>
+            <a:endParaRPr lang="en-US" sz="1600" dirty="0"/>
+          </a:p>
           <a:p>
             <a:pPr indent="0" marL="0">
+              <a:spcAft>
+                <a:spcPts val="400"/>
+              </a:spcAft>
               <a:buNone/>
             </a:pPr>
             <a:r>
-              <a:rPr lang="en-US" sz="1200" b="1" dirty="0">
-                <a:solidFill>
-                  <a:srgbClr val="1B2A4A"/>
-                </a:solidFill>
-              </a:rPr>
-              <a:t>Liquid</a:t>
-            </a:r>
-            <a:endParaRPr lang="en-US" sz="1200" dirty="0"/>
+              <a:rPr lang="en-US" sz="1300" dirty="0">
+                <a:solidFill>
+                  <a:srgbClr val="3D3A36"/>
+                </a:solidFill>
+                <a:latin typeface="Calibri" pitchFamily="34" charset="0"/>
+                <a:ea typeface="Calibri" pitchFamily="34" charset="-122"/>
+                <a:cs typeface="Calibri" pitchFamily="34" charset="-120"/>
+              </a:rPr>
+              <a:t>Compressibility: only gases can be compressed easily (large spaces between particles)</a:t>
+            </a:r>
+            <a:endParaRPr lang="en-US" sz="1600" dirty="0"/>
           </a:p>
           <a:p>
             <a:pPr indent="0" marL="0">
+              <a:spcAft>
+                <a:spcPts val="400"/>
+              </a:spcAft>
               <a:buNone/>
             </a:pPr>
             <a:r>
-              <a:rPr lang="en-US" sz="1000" dirty="0">
-                <a:solidFill>
-                  <a:srgbClr val="6B6660"/>
-                </a:solidFill>
-              </a:rPr>
-              <a:t>Flows, takes container shape, cannot be compressed easily</a:t>
-            </a:r>
-            <a:endParaRPr lang="en-US" sz="1200" dirty="0"/>
-          </a:p>
-        </p:txBody>
-      </p:sp>
-      <p:sp>
-        <p:nvSpPr>
-          <p:cNvPr id="10" name="Shape 8"/>
-          <p:cNvSpPr/>
-          <p:nvPr/>
-        </p:nvSpPr>
-        <p:spPr>
-          <a:xfrm>
-            <a:off x="548640" y="1828800"/>
-            <a:ext cx="3749040" cy="594360"/>
-          </a:xfrm>
-          <a:prstGeom prst="rect">
-            <a:avLst/>
-          </a:prstGeom>
-          <a:solidFill>
-            <a:srgbClr val="FFFFFF"/>
-          </a:solidFill>
-          <a:ln/>
-          <a:effectLst>
-            <a:outerShdw sx="100000" sy="100000" kx="0" ky="0" algn="bl" rotWithShape="0" blurRad="50800" dist="25400" dir="8100000">
-              <a:srgbClr val="000000">
-                <a:alpha val="10000"/>
-              </a:srgbClr>
-            </a:outerShdw>
-          </a:effectLst>
-        </p:spPr>
-      </p:sp>
-      <p:sp>
-        <p:nvSpPr>
-          <p:cNvPr id="11" name="Shape 9"/>
-          <p:cNvSpPr/>
-          <p:nvPr/>
-        </p:nvSpPr>
-        <p:spPr>
-          <a:xfrm>
-            <a:off x="548640" y="1828800"/>
-            <a:ext cx="54864" cy="594360"/>
-          </a:xfrm>
-          <a:prstGeom prst="rect">
-            <a:avLst/>
-          </a:prstGeom>
-          <a:solidFill>
-            <a:srgbClr val="2A9D8F"/>
-          </a:solidFill>
-          <a:ln/>
-        </p:spPr>
-      </p:sp>
-      <p:sp>
-        <p:nvSpPr>
-          <p:cNvPr id="12" name="Text 10"/>
-          <p:cNvSpPr/>
-          <p:nvPr/>
-        </p:nvSpPr>
-        <p:spPr>
-          <a:xfrm>
-            <a:off x="685800" y="1874520"/>
-            <a:ext cx="3520440" cy="502920"/>
-          </a:xfrm>
-          <a:prstGeom prst="rect">
-            <a:avLst/>
-          </a:prstGeom>
-          <a:noFill/>
-          <a:ln/>
-        </p:spPr>
-        <p:txBody>
-          <a:bodyPr wrap="square" rtlCol="0" anchor="ctr"/>
-          <a:lstStyle/>
+              <a:rPr lang="en-US" sz="1300" dirty="0">
+                <a:solidFill>
+                  <a:srgbClr val="3D3A36"/>
+                </a:solidFill>
+                <a:latin typeface="Calibri" pitchFamily="34" charset="0"/>
+                <a:ea typeface="Calibri" pitchFamily="34" charset="-122"/>
+                <a:cs typeface="Calibri" pitchFamily="34" charset="-120"/>
+              </a:rPr>
+              <a:t>Flow: liquids and gases can flow; solids cannot</a:t>
+            </a:r>
+            <a:endParaRPr lang="en-US" sz="1600" dirty="0"/>
+          </a:p>
           <a:p>
             <a:pPr indent="0" marL="0">
+              <a:spcAft>
+                <a:spcPts val="400"/>
+              </a:spcAft>
               <a:buNone/>
             </a:pPr>
             <a:r>
-              <a:rPr lang="en-US" sz="1200" b="1" dirty="0">
-                <a:solidFill>
-                  <a:srgbClr val="1B2A4A"/>
-                </a:solidFill>
-              </a:rPr>
-              <a:t>Gas</a:t>
-            </a:r>
-            <a:endParaRPr lang="en-US" sz="1200" dirty="0"/>
+              <a:rPr lang="en-US" sz="1300" dirty="0">
+                <a:solidFill>
+                  <a:srgbClr val="3D3A36"/>
+                </a:solidFill>
+                <a:latin typeface="Calibri" pitchFamily="34" charset="0"/>
+                <a:ea typeface="Calibri" pitchFamily="34" charset="-122"/>
+                <a:cs typeface="Calibri" pitchFamily="34" charset="-120"/>
+              </a:rPr>
+              <a:t>Shape: only solids hold their shape</a:t>
+            </a:r>
+            <a:endParaRPr lang="en-US" sz="1600" dirty="0"/>
           </a:p>
           <a:p>
             <a:pPr indent="0" marL="0">
+              <a:spcAft>
+                <a:spcPts val="400"/>
+              </a:spcAft>
               <a:buNone/>
             </a:pPr>
             <a:r>
-              <a:rPr lang="en-US" sz="1000" dirty="0">
-                <a:solidFill>
-                  <a:srgbClr val="6B6660"/>
-                </a:solidFill>
-              </a:rPr>
-              <a:t>Spreads out, fills all space, can be compressed</a:t>
-            </a:r>
-            <a:endParaRPr lang="en-US" sz="1200" dirty="0"/>
-          </a:p>
-        </p:txBody>
-      </p:sp>
-      <p:sp>
-        <p:nvSpPr>
-          <p:cNvPr id="13" name="Shape 11"/>
-          <p:cNvSpPr/>
-          <p:nvPr/>
-        </p:nvSpPr>
-        <p:spPr>
-          <a:xfrm>
-            <a:off x="4480560" y="1828800"/>
-            <a:ext cx="3749040" cy="594360"/>
-          </a:xfrm>
-          <a:prstGeom prst="rect">
-            <a:avLst/>
-          </a:prstGeom>
-          <a:solidFill>
-            <a:srgbClr val="FFFFFF"/>
-          </a:solidFill>
-          <a:ln/>
-          <a:effectLst>
-            <a:outerShdw sx="100000" sy="100000" kx="0" ky="0" algn="bl" rotWithShape="0" blurRad="50800" dist="25400" dir="8100000">
-              <a:srgbClr val="000000">
-                <a:alpha val="10000"/>
-              </a:srgbClr>
-            </a:outerShdw>
-          </a:effectLst>
-        </p:spPr>
-      </p:sp>
-      <p:sp>
-        <p:nvSpPr>
-          <p:cNvPr id="14" name="Shape 12"/>
-          <p:cNvSpPr/>
-          <p:nvPr/>
-        </p:nvSpPr>
-        <p:spPr>
-          <a:xfrm>
-            <a:off x="4480560" y="1828800"/>
-            <a:ext cx="54864" cy="594360"/>
-          </a:xfrm>
-          <a:prstGeom prst="rect">
-            <a:avLst/>
-          </a:prstGeom>
-          <a:solidFill>
-            <a:srgbClr val="2A9D8F"/>
-          </a:solidFill>
-          <a:ln/>
-        </p:spPr>
-      </p:sp>
-      <p:sp>
-        <p:nvSpPr>
-          <p:cNvPr id="15" name="Text 13"/>
-          <p:cNvSpPr/>
-          <p:nvPr/>
-        </p:nvSpPr>
-        <p:spPr>
-          <a:xfrm>
-            <a:off x="4617720" y="1874520"/>
-            <a:ext cx="3520440" cy="502920"/>
-          </a:xfrm>
-          <a:prstGeom prst="rect">
-            <a:avLst/>
-          </a:prstGeom>
-          <a:noFill/>
-          <a:ln/>
-        </p:spPr>
-        <p:txBody>
-          <a:bodyPr wrap="square" rtlCol="0" anchor="ctr"/>
-          <a:lstStyle/>
+              <a:rPr lang="en-US" sz="1300" dirty="0">
+                <a:solidFill>
+                  <a:srgbClr val="3D3A36"/>
+                </a:solidFill>
+                <a:latin typeface="Calibri" pitchFamily="34" charset="0"/>
+                <a:ea typeface="Calibri" pitchFamily="34" charset="-122"/>
+                <a:cs typeface="Calibri" pitchFamily="34" charset="-120"/>
+              </a:rPr>
+              <a:t>Volume: solids and liquids have fixed volume; gases expand to fill space</a:t>
+            </a:r>
+            <a:endParaRPr lang="en-US" sz="1600" dirty="0"/>
+          </a:p>
           <a:p>
             <a:pPr indent="0" marL="0">
+              <a:spcAft>
+                <a:spcPts val="400"/>
+              </a:spcAft>
               <a:buNone/>
             </a:pPr>
             <a:r>
-              <a:rPr lang="en-US" sz="1200" b="1" dirty="0">
-                <a:solidFill>
-                  <a:srgbClr val="1B2A4A"/>
-                </a:solidFill>
-              </a:rPr>
-              <a:t>Density</a:t>
-            </a:r>
-            <a:endParaRPr lang="en-US" sz="1200" dirty="0"/>
-          </a:p>
-          <a:p>
-            <a:pPr indent="0" marL="0">
-              <a:buNone/>
-            </a:pPr>
-            <a:r>
-              <a:rPr lang="en-US" sz="1000" dirty="0">
-                <a:solidFill>
-                  <a:srgbClr val="6B6660"/>
-                </a:solidFill>
-              </a:rPr>
-              <a:t>How tightly packed particles are (solid &gt; liquid &gt; gas)</a:t>
-            </a:r>
-            <a:endParaRPr lang="en-US" sz="1200" dirty="0"/>
-          </a:p>
-        </p:txBody>
-      </p:sp>
-      <p:sp>
-        <p:nvSpPr>
-          <p:cNvPr id="16" name="Shape 14"/>
-          <p:cNvSpPr/>
-          <p:nvPr/>
-        </p:nvSpPr>
-        <p:spPr>
-          <a:xfrm>
-            <a:off x="548640" y="2560320"/>
-            <a:ext cx="3749040" cy="594360"/>
-          </a:xfrm>
-          <a:prstGeom prst="rect">
-            <a:avLst/>
-          </a:prstGeom>
-          <a:solidFill>
-            <a:srgbClr val="FFFFFF"/>
-          </a:solidFill>
-          <a:ln/>
-          <a:effectLst>
-            <a:outerShdw sx="100000" sy="100000" kx="0" ky="0" algn="bl" rotWithShape="0" blurRad="50800" dist="25400" dir="8100000">
-              <a:srgbClr val="000000">
-                <a:alpha val="10000"/>
-              </a:srgbClr>
-            </a:outerShdw>
-          </a:effectLst>
-        </p:spPr>
-      </p:sp>
-      <p:sp>
-        <p:nvSpPr>
-          <p:cNvPr id="17" name="Shape 15"/>
-          <p:cNvSpPr/>
-          <p:nvPr/>
-        </p:nvSpPr>
-        <p:spPr>
-          <a:xfrm>
-            <a:off x="548640" y="2560320"/>
-            <a:ext cx="54864" cy="594360"/>
-          </a:xfrm>
-          <a:prstGeom prst="rect">
-            <a:avLst/>
-          </a:prstGeom>
-          <a:solidFill>
-            <a:srgbClr val="2A9D8F"/>
-          </a:solidFill>
-          <a:ln/>
-        </p:spPr>
-      </p:sp>
-      <p:sp>
-        <p:nvSpPr>
-          <p:cNvPr id="18" name="Text 16"/>
-          <p:cNvSpPr/>
-          <p:nvPr/>
-        </p:nvSpPr>
-        <p:spPr>
-          <a:xfrm>
-            <a:off x="685800" y="2606040"/>
-            <a:ext cx="3520440" cy="502920"/>
-          </a:xfrm>
-          <a:prstGeom prst="rect">
-            <a:avLst/>
-          </a:prstGeom>
-          <a:noFill/>
-          <a:ln/>
-        </p:spPr>
-        <p:txBody>
-          <a:bodyPr wrap="square" rtlCol="0" anchor="ctr"/>
-          <a:lstStyle/>
-          <a:p>
-            <a:pPr indent="0" marL="0">
-              <a:buNone/>
-            </a:pPr>
-            <a:r>
-              <a:rPr lang="en-US" sz="1200" b="1" dirty="0">
-                <a:solidFill>
-                  <a:srgbClr val="1B2A4A"/>
-                </a:solidFill>
-              </a:rPr>
-              <a:t>Diffusion</a:t>
-            </a:r>
-            <a:endParaRPr lang="en-US" sz="1200" dirty="0"/>
-          </a:p>
-          <a:p>
-            <a:pPr indent="0" marL="0">
-              <a:buNone/>
-            </a:pPr>
-            <a:r>
-              <a:rPr lang="en-US" sz="1000" dirty="0">
-                <a:solidFill>
-                  <a:srgbClr val="6B6660"/>
-                </a:solidFill>
-              </a:rPr>
-              <a:t>Particles spreading from high to low concentration</a:t>
-            </a:r>
-            <a:endParaRPr lang="en-US" sz="1200" dirty="0"/>
-          </a:p>
-        </p:txBody>
-      </p:sp>
-      <p:sp>
-        <p:nvSpPr>
-          <p:cNvPr id="19" name="Shape 17"/>
-          <p:cNvSpPr/>
-          <p:nvPr/>
-        </p:nvSpPr>
-        <p:spPr>
-          <a:xfrm>
-            <a:off x="4480560" y="2560320"/>
-            <a:ext cx="3749040" cy="594360"/>
-          </a:xfrm>
-          <a:prstGeom prst="rect">
-            <a:avLst/>
-          </a:prstGeom>
-          <a:solidFill>
-            <a:srgbClr val="FFFFFF"/>
-          </a:solidFill>
-          <a:ln/>
-          <a:effectLst>
-            <a:outerShdw sx="100000" sy="100000" kx="0" ky="0" algn="bl" rotWithShape="0" blurRad="50800" dist="25400" dir="8100000">
-              <a:srgbClr val="000000">
-                <a:alpha val="10000"/>
-              </a:srgbClr>
-            </a:outerShdw>
-          </a:effectLst>
-        </p:spPr>
-      </p:sp>
-      <p:sp>
-        <p:nvSpPr>
-          <p:cNvPr id="20" name="Shape 18"/>
-          <p:cNvSpPr/>
-          <p:nvPr/>
-        </p:nvSpPr>
-        <p:spPr>
-          <a:xfrm>
-            <a:off x="4480560" y="2560320"/>
-            <a:ext cx="54864" cy="594360"/>
-          </a:xfrm>
-          <a:prstGeom prst="rect">
-            <a:avLst/>
-          </a:prstGeom>
-          <a:solidFill>
-            <a:srgbClr val="2A9D8F"/>
-          </a:solidFill>
-          <a:ln/>
-        </p:spPr>
-      </p:sp>
-      <p:sp>
-        <p:nvSpPr>
-          <p:cNvPr id="21" name="Text 19"/>
-          <p:cNvSpPr/>
-          <p:nvPr/>
-        </p:nvSpPr>
-        <p:spPr>
-          <a:xfrm>
-            <a:off x="4617720" y="2606040"/>
-            <a:ext cx="3520440" cy="502920"/>
-          </a:xfrm>
-          <a:prstGeom prst="rect">
-            <a:avLst/>
-          </a:prstGeom>
-          <a:noFill/>
-          <a:ln/>
-        </p:spPr>
-        <p:txBody>
-          <a:bodyPr wrap="square" rtlCol="0" anchor="ctr"/>
-          <a:lstStyle/>
-          <a:p>
-            <a:pPr indent="0" marL="0">
-              <a:buNone/>
-            </a:pPr>
-            <a:r>
-              <a:rPr lang="en-US" sz="1200" b="1" dirty="0">
-                <a:solidFill>
-                  <a:srgbClr val="1B2A4A"/>
-                </a:solidFill>
-              </a:rPr>
-              <a:t>Compression</a:t>
-            </a:r>
-            <a:endParaRPr lang="en-US" sz="1200" dirty="0"/>
-          </a:p>
-          <a:p>
-            <a:pPr indent="0" marL="0">
-              <a:buNone/>
-            </a:pPr>
-            <a:r>
-              <a:rPr lang="en-US" sz="1000" dirty="0">
-                <a:solidFill>
-                  <a:srgbClr val="6B6660"/>
-                </a:solidFill>
-              </a:rPr>
-              <a:t>Squeezing particles closer together (only gases)</a:t>
-            </a:r>
-            <a:endParaRPr lang="en-US" sz="1200" dirty="0"/>
-          </a:p>
-        </p:txBody>
-      </p:sp>
-      <p:sp>
-        <p:nvSpPr>
-          <p:cNvPr id="22" name="Text 20"/>
-          <p:cNvSpPr/>
-          <p:nvPr/>
-        </p:nvSpPr>
-        <p:spPr>
-          <a:xfrm>
-            <a:off x="548640" y="4800600"/>
-            <a:ext cx="3657600" cy="274320"/>
-          </a:xfrm>
-          <a:prstGeom prst="rect">
-            <a:avLst/>
-          </a:prstGeom>
-          <a:noFill/>
-          <a:ln/>
-        </p:spPr>
-        <p:txBody>
-          <a:bodyPr wrap="square" rtlCol="0" anchor="ctr"/>
-          <a:lstStyle/>
-          <a:p>
-            <a:pPr indent="0" marL="0">
-              <a:buNone/>
-            </a:pPr>
-            <a:r>
-              <a:rPr lang="en-US" sz="800" dirty="0">
-                <a:solidFill>
-                  <a:srgbClr val="9B9690"/>
-                </a:solidFill>
-              </a:rPr>
-              <a:t>mrzocchi.com</a:t>
-            </a:r>
-            <a:endParaRPr lang="en-US" sz="800" dirty="0"/>
+              <a:rPr lang="en-US" sz="1300" dirty="0">
+                <a:solidFill>
+                  <a:srgbClr val="3D3A36"/>
+                </a:solidFill>
+                <a:latin typeface="Calibri" pitchFamily="34" charset="0"/>
+                <a:ea typeface="Calibri" pitchFamily="34" charset="-122"/>
+                <a:cs typeface="Calibri" pitchFamily="34" charset="-120"/>
+              </a:rPr>
+              <a:t>Diffusion: fastest in gases, slower in liquids, doesn't occur in solids</a:t>
+            </a:r>
+            <a:endParaRPr lang="en-US" sz="1600" dirty="0"/>
           </a:p>
         </p:txBody>
       </p:sp>
@@ -2252,6 +2381,305 @@
 <file path=ppt/slides/slide4.xml><?xml version="1.0" encoding="utf-8"?>
 <p:sld xmlns:a="http://schemas.openxmlformats.org/drawingml/2006/main" xmlns:r="http://schemas.openxmlformats.org/officeDocument/2006/relationships" xmlns:p="http://schemas.openxmlformats.org/presentationml/2006/main">
   <p:cSld name="Slide 4">
+    <p:bg>
+      <p:bgPr>
+        <a:solidFill>
+          <a:srgbClr val="FAF8F5"/>
+        </a:solidFill>
+      </p:bgPr>
+    </p:bg>
+    <p:spTree>
+      <p:nvGrpSpPr>
+        <p:cNvPr id="1" name=""/>
+        <p:cNvGrpSpPr/>
+        <p:nvPr/>
+      </p:nvGrpSpPr>
+      <p:grpSpPr>
+        <a:xfrm>
+          <a:off x="0" y="0"/>
+          <a:ext cx="0" cy="0"/>
+          <a:chOff x="0" y="0"/>
+          <a:chExt cx="0" cy="0"/>
+        </a:xfrm>
+      </p:grpSpPr>
+      <p:sp>
+        <p:nvSpPr>
+          <p:cNvPr id="2" name="Shape 0"/>
+          <p:cNvSpPr/>
+          <p:nvPr/>
+        </p:nvSpPr>
+        <p:spPr>
+          <a:xfrm>
+            <a:off x="0" y="0"/>
+            <a:ext cx="9144000" cy="54864"/>
+          </a:xfrm>
+          <a:prstGeom prst="rect">
+            <a:avLst/>
+          </a:prstGeom>
+          <a:solidFill>
+            <a:srgbClr val="2A9D8F"/>
+          </a:solidFill>
+          <a:ln/>
+        </p:spPr>
+      </p:sp>
+      <p:sp>
+        <p:nvSpPr>
+          <p:cNvPr id="3" name="Text 1"/>
+          <p:cNvSpPr/>
+          <p:nvPr/>
+        </p:nvSpPr>
+        <p:spPr>
+          <a:xfrm>
+            <a:off x="7772400" y="4709160"/>
+            <a:ext cx="1097280" cy="320040"/>
+          </a:xfrm>
+          <a:prstGeom prst="rect">
+            <a:avLst/>
+          </a:prstGeom>
+          <a:noFill/>
+          <a:ln/>
+        </p:spPr>
+        <p:txBody>
+          <a:bodyPr wrap="square" rtlCol="0" anchor="ctr"/>
+          <a:lstStyle/>
+          <a:p>
+            <a:pPr algn="r" indent="0" marL="0">
+              <a:buNone/>
+            </a:pPr>
+            <a:r>
+              <a:rPr lang="en-US" sz="900" dirty="0">
+                <a:solidFill>
+                  <a:srgbClr val="6B6660"/>
+                </a:solidFill>
+                <a:latin typeface="Calibri" pitchFamily="34" charset="0"/>
+                <a:ea typeface="Calibri" pitchFamily="34" charset="-122"/>
+                <a:cs typeface="Calibri" pitchFamily="34" charset="-120"/>
+              </a:rPr>
+              <a:t>4 / 5</a:t>
+            </a:r>
+            <a:endParaRPr lang="en-US" sz="900" dirty="0"/>
+          </a:p>
+        </p:txBody>
+      </p:sp>
+      <p:sp>
+        <p:nvSpPr>
+          <p:cNvPr id="4" name="Text 2"/>
+          <p:cNvSpPr/>
+          <p:nvPr/>
+        </p:nvSpPr>
+        <p:spPr>
+          <a:xfrm>
+            <a:off x="457200" y="274320"/>
+            <a:ext cx="8229600" cy="640080"/>
+          </a:xfrm>
+          <a:prstGeom prst="rect">
+            <a:avLst/>
+          </a:prstGeom>
+          <a:noFill/>
+          <a:ln/>
+        </p:spPr>
+        <p:txBody>
+          <a:bodyPr wrap="square" rtlCol="0" anchor="ctr"/>
+          <a:lstStyle/>
+          <a:p>
+            <a:pPr indent="0" marL="0">
+              <a:buNone/>
+            </a:pPr>
+            <a:r>
+              <a:rPr lang="en-US" sz="2600" b="1" dirty="0">
+                <a:solidFill>
+                  <a:srgbClr val="1B2A4A"/>
+                </a:solidFill>
+                <a:latin typeface="Georgia" pitchFamily="34" charset="0"/>
+                <a:ea typeface="Georgia" pitchFamily="34" charset="-122"/>
+                <a:cs typeface="Georgia" pitchFamily="34" charset="-120"/>
+              </a:rPr>
+              <a:t>Density and the Particle Model</a:t>
+            </a:r>
+            <a:endParaRPr lang="en-US" sz="2600" dirty="0"/>
+          </a:p>
+        </p:txBody>
+      </p:sp>
+      <p:sp>
+        <p:nvSpPr>
+          <p:cNvPr id="5" name="Text 3"/>
+          <p:cNvSpPr/>
+          <p:nvPr/>
+        </p:nvSpPr>
+        <p:spPr>
+          <a:xfrm>
+            <a:off x="457200" y="1097280"/>
+            <a:ext cx="8229600" cy="3657600"/>
+          </a:xfrm>
+          <a:prstGeom prst="rect">
+            <a:avLst/>
+          </a:prstGeom>
+          <a:noFill/>
+          <a:ln/>
+        </p:spPr>
+        <p:txBody>
+          <a:bodyPr wrap="square" rtlCol="0" anchor="t"/>
+          <a:lstStyle/>
+          <a:p>
+            <a:pPr marL="342900" indent="-342900">
+              <a:spcAft>
+                <a:spcPts val="800"/>
+              </a:spcAft>
+              <a:buSzPct val="100000"/>
+              <a:buChar char="•"/>
+            </a:pPr>
+            <a:r>
+              <a:rPr lang="en-US" sz="1400" dirty="0">
+                <a:solidFill>
+                  <a:srgbClr val="3D3A36"/>
+                </a:solidFill>
+                <a:latin typeface="Calibri" pitchFamily="34" charset="0"/>
+                <a:ea typeface="Calibri" pitchFamily="34" charset="-122"/>
+                <a:cs typeface="Calibri" pitchFamily="34" charset="-120"/>
+              </a:rPr>
+              <a:t>Density = how much mass is packed into a given volume</a:t>
+            </a:r>
+            <a:endParaRPr lang="en-US" sz="1400" dirty="0"/>
+          </a:p>
+          <a:p>
+            <a:pPr marL="342900" indent="-342900">
+              <a:spcAft>
+                <a:spcPts val="800"/>
+              </a:spcAft>
+              <a:buSzPct val="100000"/>
+              <a:buChar char="•"/>
+            </a:pPr>
+            <a:r>
+              <a:rPr lang="en-US" sz="1400" dirty="0">
+                <a:solidFill>
+                  <a:srgbClr val="3D3A36"/>
+                </a:solidFill>
+                <a:latin typeface="Calibri" pitchFamily="34" charset="0"/>
+                <a:ea typeface="Calibri" pitchFamily="34" charset="-122"/>
+                <a:cs typeface="Calibri" pitchFamily="34" charset="-120"/>
+              </a:rPr>
+              <a:t>Density = mass ÷ volume (g/cm³ or kg/m³)</a:t>
+            </a:r>
+            <a:endParaRPr lang="en-US" sz="1400" dirty="0"/>
+          </a:p>
+          <a:p>
+            <a:pPr marL="342900" indent="-342900">
+              <a:spcAft>
+                <a:spcPts val="800"/>
+              </a:spcAft>
+              <a:buSzPct val="100000"/>
+              <a:buChar char="•"/>
+            </a:pPr>
+            <a:r>
+              <a:rPr lang="en-US" sz="1400" dirty="0">
+                <a:solidFill>
+                  <a:srgbClr val="3D3A36"/>
+                </a:solidFill>
+                <a:latin typeface="Calibri" pitchFamily="34" charset="0"/>
+                <a:ea typeface="Calibri" pitchFamily="34" charset="-122"/>
+                <a:cs typeface="Calibri" pitchFamily="34" charset="-120"/>
+              </a:rPr>
+              <a:t>Solids are usually the densest — particles tightly packed</a:t>
+            </a:r>
+            <a:endParaRPr lang="en-US" sz="1400" dirty="0"/>
+          </a:p>
+          <a:p>
+            <a:pPr marL="342900" indent="-342900">
+              <a:spcAft>
+                <a:spcPts val="800"/>
+              </a:spcAft>
+              <a:buSzPct val="100000"/>
+              <a:buChar char="•"/>
+            </a:pPr>
+            <a:r>
+              <a:rPr lang="en-US" sz="1400" dirty="0">
+                <a:solidFill>
+                  <a:srgbClr val="3D3A36"/>
+                </a:solidFill>
+                <a:latin typeface="Calibri" pitchFamily="34" charset="0"/>
+                <a:ea typeface="Calibri" pitchFamily="34" charset="-122"/>
+                <a:cs typeface="Calibri" pitchFamily="34" charset="-120"/>
+              </a:rPr>
+              <a:t>Gases are least dense — particles far apart</a:t>
+            </a:r>
+            <a:endParaRPr lang="en-US" sz="1400" dirty="0"/>
+          </a:p>
+          <a:p>
+            <a:pPr marL="342900" indent="-342900">
+              <a:spcAft>
+                <a:spcPts val="800"/>
+              </a:spcAft>
+              <a:buSzPct val="100000"/>
+              <a:buChar char="•"/>
+            </a:pPr>
+            <a:r>
+              <a:rPr lang="en-US" sz="1400" dirty="0">
+                <a:solidFill>
+                  <a:srgbClr val="3D3A36"/>
+                </a:solidFill>
+                <a:latin typeface="Calibri" pitchFamily="34" charset="0"/>
+                <a:ea typeface="Calibri" pitchFamily="34" charset="-122"/>
+                <a:cs typeface="Calibri" pitchFamily="34" charset="-120"/>
+              </a:rPr>
+              <a:t>Water is unusual: ice (solid) is LESS dense than liquid water</a:t>
+            </a:r>
+            <a:endParaRPr lang="en-US" sz="1400" dirty="0"/>
+          </a:p>
+          <a:p>
+            <a:pPr marL="342900" indent="-342900">
+              <a:spcAft>
+                <a:spcPts val="800"/>
+              </a:spcAft>
+              <a:buSzPct val="100000"/>
+              <a:buChar char="•"/>
+            </a:pPr>
+            <a:r>
+              <a:rPr lang="en-US" sz="1400" dirty="0">
+                <a:solidFill>
+                  <a:srgbClr val="3D3A36"/>
+                </a:solidFill>
+                <a:latin typeface="Calibri" pitchFamily="34" charset="0"/>
+                <a:ea typeface="Calibri" pitchFamily="34" charset="-122"/>
+                <a:cs typeface="Calibri" pitchFamily="34" charset="-120"/>
+              </a:rPr>
+              <a:t>This is because ice particles form a crystal structure with gaps</a:t>
+            </a:r>
+            <a:endParaRPr lang="en-US" sz="1400" dirty="0"/>
+          </a:p>
+          <a:p>
+            <a:pPr marL="342900" indent="-342900">
+              <a:spcAft>
+                <a:spcPts val="800"/>
+              </a:spcAft>
+              <a:buSzPct val="100000"/>
+              <a:buChar char="•"/>
+            </a:pPr>
+            <a:r>
+              <a:rPr lang="en-US" sz="1400" dirty="0">
+                <a:solidFill>
+                  <a:srgbClr val="3D3A36"/>
+                </a:solidFill>
+                <a:latin typeface="Calibri" pitchFamily="34" charset="0"/>
+                <a:ea typeface="Calibri" pitchFamily="34" charset="-122"/>
+                <a:cs typeface="Calibri" pitchFamily="34" charset="-120"/>
+              </a:rPr>
+              <a:t>This is why ice floats — and why ponds freeze from the top down</a:t>
+            </a:r>
+            <a:endParaRPr lang="en-US" sz="1400" dirty="0"/>
+          </a:p>
+        </p:txBody>
+      </p:sp>
+    </p:spTree>
+  </p:cSld>
+  <p:clrMapOvr>
+    <a:masterClrMapping/>
+  </p:clrMapOvr>
+</p:sld>
+</file>
+
+<file path=ppt/slides/slide5.xml><?xml version="1.0" encoding="utf-8"?>
+<p:sld xmlns:a="http://schemas.openxmlformats.org/drawingml/2006/main" xmlns:r="http://schemas.openxmlformats.org/officeDocument/2006/relationships" xmlns:p="http://schemas.openxmlformats.org/presentationml/2006/main">
+  <p:cSld name="Slide 5">
     <p:bg>
       <p:bgPr>
         <a:solidFill>
@@ -2282,13 +2710,13 @@
         <p:spPr>
           <a:xfrm>
             <a:off x="0" y="0"/>
-            <a:ext cx="9144000" cy="54864"/>
-          </a:xfrm>
-          <a:prstGeom prst="rect">
-            <a:avLst/>
-          </a:prstGeom>
-          <a:solidFill>
-            <a:srgbClr val="2A9D8F"/>
+            <a:ext cx="109728" cy="5143500"/>
+          </a:xfrm>
+          <a:prstGeom prst="rect">
+            <a:avLst/>
+          </a:prstGeom>
+          <a:solidFill>
+            <a:srgbClr val="E9C46A"/>
           </a:solidFill>
           <a:ln/>
         </p:spPr>
@@ -2301,8 +2729,8 @@
         </p:nvSpPr>
         <p:spPr>
           <a:xfrm>
-            <a:off x="548640" y="457200"/>
-            <a:ext cx="8046720" cy="640080"/>
+            <a:off x="731520" y="457200"/>
+            <a:ext cx="7772400" cy="731520"/>
           </a:xfrm>
           <a:prstGeom prst="rect">
             <a:avLst/>
@@ -2318,7 +2746,7 @@
               <a:buNone/>
             </a:pPr>
             <a:r>
-              <a:rPr lang="en-US" sz="2800" b="1" dirty="0">
+              <a:rPr lang="en-US" sz="3200" b="1" dirty="0">
                 <a:solidFill>
                   <a:srgbClr val="FFFFFF"/>
                 </a:solidFill>
@@ -2328,7 +2756,7 @@
               </a:rPr>
               <a:t>Key Takeaways</a:t>
             </a:r>
-            <a:endParaRPr lang="en-US" sz="2800" dirty="0"/>
+            <a:endParaRPr lang="en-US" sz="3200" dirty="0"/>
           </a:p>
         </p:txBody>
       </p:sp>
@@ -2340,8 +2768,8 @@
         </p:nvSpPr>
         <p:spPr>
           <a:xfrm>
-            <a:off x="731520" y="1371600"/>
-            <a:ext cx="7680960" cy="3200400"/>
+            <a:off x="731520" y="1463040"/>
+            <a:ext cx="7772400" cy="3200400"/>
           </a:xfrm>
           <a:prstGeom prst="rect">
             <a:avLst/>
@@ -2361,7 +2789,7 @@
               <a:buChar char="•"/>
             </a:pPr>
             <a:r>
-              <a:rPr lang="en-US" sz="1600" dirty="0">
+              <a:rPr lang="en-US" sz="1500" dirty="0">
                 <a:solidFill>
                   <a:srgbClr val="CADCFC"/>
                 </a:solidFill>
@@ -2369,9 +2797,9 @@
                 <a:ea typeface="Calibri" pitchFamily="34" charset="-122"/>
                 <a:cs typeface="Calibri" pitchFamily="34" charset="-120"/>
               </a:rPr>
-              <a:t>Three states: solid, liquid, gas — determined by particle arrangement</a:t>
-            </a:r>
-            <a:endParaRPr lang="en-US" sz="1600" dirty="0"/>
+              <a:t>Three states: solid (fixed shape + volume), liquid (fixed volume), gas (fills container)</a:t>
+            </a:r>
+            <a:endParaRPr lang="en-US" sz="1500" dirty="0"/>
           </a:p>
           <a:p>
             <a:pPr marL="342900" indent="-342900">
@@ -2382,7 +2810,7 @@
               <a:buChar char="•"/>
             </a:pPr>
             <a:r>
-              <a:rPr lang="en-US" sz="1600" dirty="0">
+              <a:rPr lang="en-US" sz="1500" dirty="0">
                 <a:solidFill>
                   <a:srgbClr val="CADCFC"/>
                 </a:solidFill>
@@ -2390,9 +2818,9 @@
                 <a:ea typeface="Calibri" pitchFamily="34" charset="-122"/>
                 <a:cs typeface="Calibri" pitchFamily="34" charset="-120"/>
               </a:rPr>
-              <a:t>Solids hold shape, liquids flow, gases spread and compress</a:t>
-            </a:r>
-            <a:endParaRPr lang="en-US" sz="1600" dirty="0"/>
+              <a:t>Forces between particles: solid strongest, gas weakest</a:t>
+            </a:r>
+            <a:endParaRPr lang="en-US" sz="1500" dirty="0"/>
           </a:p>
           <a:p>
             <a:pPr marL="342900" indent="-342900">
@@ -2403,7 +2831,7 @@
               <a:buChar char="•"/>
             </a:pPr>
             <a:r>
-              <a:rPr lang="en-US" sz="1600" dirty="0">
+              <a:rPr lang="en-US" sz="1500" dirty="0">
                 <a:solidFill>
                   <a:srgbClr val="CADCFC"/>
                 </a:solidFill>
@@ -2411,9 +2839,9 @@
                 <a:ea typeface="Calibri" pitchFamily="34" charset="-122"/>
                 <a:cs typeface="Calibri" pitchFamily="34" charset="-120"/>
               </a:rPr>
-              <a:t>Adding energy (heat) makes particles move faster</a:t>
-            </a:r>
-            <a:endParaRPr lang="en-US" sz="1600" dirty="0"/>
+              <a:t>Density = mass ÷ volume</a:t>
+            </a:r>
+            <a:endParaRPr lang="en-US" sz="1500" dirty="0"/>
           </a:p>
           <a:p>
             <a:pPr marL="342900" indent="-342900">
@@ -2424,7 +2852,7 @@
               <a:buChar char="•"/>
             </a:pPr>
             <a:r>
-              <a:rPr lang="en-US" sz="1600" dirty="0">
+              <a:rPr lang="en-US" sz="1500" dirty="0">
                 <a:solidFill>
                   <a:srgbClr val="CADCFC"/>
                 </a:solidFill>
@@ -2432,9 +2860,30 @@
                 <a:ea typeface="Calibri" pitchFamily="34" charset="-122"/>
                 <a:cs typeface="Calibri" pitchFamily="34" charset="-120"/>
               </a:rPr>
-              <a:t>Diffusion happens because particles are always moving</a:t>
-            </a:r>
-            <a:endParaRPr lang="en-US" sz="1600" dirty="0"/>
+              <a:t>Solids usually densest, gases least dense</a:t>
+            </a:r>
+            <a:endParaRPr lang="en-US" sz="1500" dirty="0"/>
+          </a:p>
+          <a:p>
+            <a:pPr marL="342900" indent="-342900">
+              <a:spcAft>
+                <a:spcPts val="1000"/>
+              </a:spcAft>
+              <a:buSzPct val="100000"/>
+              <a:buChar char="•"/>
+            </a:pPr>
+            <a:r>
+              <a:rPr lang="en-US" sz="1500" dirty="0">
+                <a:solidFill>
+                  <a:srgbClr val="CADCFC"/>
+                </a:solidFill>
+                <a:latin typeface="Calibri" pitchFamily="34" charset="0"/>
+                <a:ea typeface="Calibri" pitchFamily="34" charset="-122"/>
+                <a:cs typeface="Calibri" pitchFamily="34" charset="-120"/>
+              </a:rPr>
+              <a:t>Ice floats because it is less dense than liquid water</a:t>
+            </a:r>
+            <a:endParaRPr lang="en-US" sz="1500" dirty="0"/>
           </a:p>
         </p:txBody>
       </p:sp>
@@ -2446,8 +2895,8 @@
         </p:nvSpPr>
         <p:spPr>
           <a:xfrm>
-            <a:off x="548640" y="4572000"/>
-            <a:ext cx="3657600" cy="274320"/>
+            <a:off x="731520" y="4572000"/>
+            <a:ext cx="7772400" cy="365760"/>
           </a:xfrm>
           <a:prstGeom prst="rect">
             <a:avLst/>
@@ -2463,14 +2912,17 @@
               <a:buNone/>
             </a:pPr>
             <a:r>
-              <a:rPr lang="en-US" sz="1000" dirty="0">
-                <a:solidFill>
-                  <a:srgbClr val="6B6660"/>
-                </a:solidFill>
+              <a:rPr lang="en-US" sz="1100" dirty="0">
+                <a:solidFill>
+                  <a:srgbClr val="E9C46A"/>
+                </a:solidFill>
+                <a:latin typeface="Calibri" pitchFamily="34" charset="0"/>
+                <a:ea typeface="Calibri" pitchFamily="34" charset="-122"/>
+                <a:cs typeface="Calibri" pitchFamily="34" charset="-120"/>
               </a:rPr>
               <a:t>mrzocchi.com</a:t>
             </a:r>
-            <a:endParaRPr lang="en-US" sz="1000" dirty="0"/>
+            <a:endParaRPr lang="en-US" sz="1100" dirty="0"/>
           </a:p>
         </p:txBody>
       </p:sp>

--- a/static/ppts/G6_Sci_T2_States_of_Matter.pptx
+++ b/static/ppts/G6_Sci_T2_States_of_Matter.pptx
@@ -10,9 +10,12 @@
     <p:sldId id="258" r:id="rId4"/>
     <p:sldId id="259" r:id="rId5"/>
     <p:sldId id="260" r:id="rId6"/>
+    <p:sldId id="261" r:id="rId7"/>
+    <p:sldId id="262" r:id="rId8"/>
+    <p:sldId id="263" r:id="rId9"/>
   </p:sldIdLst>
   <p:notesMasterIdLst>
-    <p:notesMasterId r:id="rId7"/>
+    <p:notesMasterId r:id="rId10"/>
   </p:notesMasterIdLst>
   <p:sldSz cx="9144000" cy="5143500"/>
   <p:notesSz cx="5143500" cy="9144000"/>
@@ -882,6 +885,270 @@
             <a:fld id="{F7021451-1387-4CA6-816F-3879F97B5CBC}" type="slidenum">
               <a:rPr lang="en-US"/>
               <a:t>5</a:t>
+            </a:fld>
+            <a:endParaRPr lang="en-US"/>
+          </a:p>
+        </p:txBody>
+      </p:sp>
+    </p:spTree>
+    <p:extLst>
+      <p:ext uri="{BB962C8B-B14F-4D97-AF65-F5344CB8AC3E}">
+        <p14:creationId xmlns:p14="http://schemas.microsoft.com/office/powerpoint/2010/main" val="1024086991"/>
+      </p:ext>
+    </p:extLst>
+  </p:cSld>
+  <p:clrMapOvr>
+    <a:masterClrMapping/>
+  </p:clrMapOvr>
+</p:notes>
+</file>
+
+<file path=ppt/notesSlides/notesSlide6.xml><?xml version="1.0" encoding="utf-8"?>
+<p:notes xmlns:a="http://schemas.openxmlformats.org/drawingml/2006/main" xmlns:r="http://schemas.openxmlformats.org/officeDocument/2006/relationships" xmlns:p="http://schemas.openxmlformats.org/presentationml/2006/main">
+  <p:cSld>
+    <p:spTree>
+      <p:nvGrpSpPr>
+        <p:cNvPr id="1" name=""/>
+        <p:cNvGrpSpPr/>
+        <p:nvPr/>
+      </p:nvGrpSpPr>
+      <p:grpSpPr>
+        <a:xfrm>
+          <a:off x="0" y="0"/>
+          <a:ext cx="0" cy="0"/>
+          <a:chOff x="0" y="0"/>
+          <a:chExt cx="0" cy="0"/>
+        </a:xfrm>
+      </p:grpSpPr>
+      <p:sp>
+        <p:nvSpPr>
+          <p:cNvPr id="2" name="Slide Image Placeholder 1"/>
+          <p:cNvSpPr>
+            <a:spLocks noGrp="1" noRot="1" noChangeAspect="1"/>
+          </p:cNvSpPr>
+          <p:nvPr>
+            <p:ph type="sldImg"/>
+          </p:nvPr>
+        </p:nvSpPr>
+        <p:spPr/>
+      </p:sp>
+      <p:sp>
+        <p:nvSpPr>
+          <p:cNvPr id="3" name="Notes Placeholder 2"/>
+          <p:cNvSpPr>
+            <a:spLocks noGrp="1"/>
+          </p:cNvSpPr>
+          <p:nvPr>
+            <p:ph type="body" idx="1"/>
+          </p:nvPr>
+        </p:nvSpPr>
+        <p:spPr/>
+        <p:txBody>
+          <a:bodyPr/>
+          <a:lstStyle/>
+          <a:p>
+            <a:r>
+              <a:rPr lang="en-US" dirty="0"/>
+              <a:t/>
+            </a:r>
+            <a:endParaRPr lang="en-US" dirty="0"/>
+          </a:p>
+        </p:txBody>
+      </p:sp>
+      <p:sp>
+        <p:nvSpPr>
+          <p:cNvPr id="4" name="Slide Number Placeholder 3"/>
+          <p:cNvSpPr>
+            <a:spLocks noGrp="1"/>
+          </p:cNvSpPr>
+          <p:nvPr>
+            <p:ph type="sldNum" sz="quarter" idx="10"/>
+          </p:nvPr>
+        </p:nvSpPr>
+        <p:spPr/>
+        <p:txBody>
+          <a:bodyPr/>
+          <a:lstStyle/>
+          <a:p>
+            <a:fld id="{F7021451-1387-4CA6-816F-3879F97B5CBC}" type="slidenum">
+              <a:rPr lang="en-US"/>
+              <a:t>6</a:t>
+            </a:fld>
+            <a:endParaRPr lang="en-US"/>
+          </a:p>
+        </p:txBody>
+      </p:sp>
+    </p:spTree>
+    <p:extLst>
+      <p:ext uri="{BB962C8B-B14F-4D97-AF65-F5344CB8AC3E}">
+        <p14:creationId xmlns:p14="http://schemas.microsoft.com/office/powerpoint/2010/main" val="1024086991"/>
+      </p:ext>
+    </p:extLst>
+  </p:cSld>
+  <p:clrMapOvr>
+    <a:masterClrMapping/>
+  </p:clrMapOvr>
+</p:notes>
+</file>
+
+<file path=ppt/notesSlides/notesSlide7.xml><?xml version="1.0" encoding="utf-8"?>
+<p:notes xmlns:a="http://schemas.openxmlformats.org/drawingml/2006/main" xmlns:r="http://schemas.openxmlformats.org/officeDocument/2006/relationships" xmlns:p="http://schemas.openxmlformats.org/presentationml/2006/main">
+  <p:cSld>
+    <p:spTree>
+      <p:nvGrpSpPr>
+        <p:cNvPr id="1" name=""/>
+        <p:cNvGrpSpPr/>
+        <p:nvPr/>
+      </p:nvGrpSpPr>
+      <p:grpSpPr>
+        <a:xfrm>
+          <a:off x="0" y="0"/>
+          <a:ext cx="0" cy="0"/>
+          <a:chOff x="0" y="0"/>
+          <a:chExt cx="0" cy="0"/>
+        </a:xfrm>
+      </p:grpSpPr>
+      <p:sp>
+        <p:nvSpPr>
+          <p:cNvPr id="2" name="Slide Image Placeholder 1"/>
+          <p:cNvSpPr>
+            <a:spLocks noGrp="1" noRot="1" noChangeAspect="1"/>
+          </p:cNvSpPr>
+          <p:nvPr>
+            <p:ph type="sldImg"/>
+          </p:nvPr>
+        </p:nvSpPr>
+        <p:spPr/>
+      </p:sp>
+      <p:sp>
+        <p:nvSpPr>
+          <p:cNvPr id="3" name="Notes Placeholder 2"/>
+          <p:cNvSpPr>
+            <a:spLocks noGrp="1"/>
+          </p:cNvSpPr>
+          <p:nvPr>
+            <p:ph type="body" idx="1"/>
+          </p:nvPr>
+        </p:nvSpPr>
+        <p:spPr/>
+        <p:txBody>
+          <a:bodyPr/>
+          <a:lstStyle/>
+          <a:p>
+            <a:r>
+              <a:rPr lang="en-US" dirty="0"/>
+              <a:t/>
+            </a:r>
+            <a:endParaRPr lang="en-US" dirty="0"/>
+          </a:p>
+        </p:txBody>
+      </p:sp>
+      <p:sp>
+        <p:nvSpPr>
+          <p:cNvPr id="4" name="Slide Number Placeholder 3"/>
+          <p:cNvSpPr>
+            <a:spLocks noGrp="1"/>
+          </p:cNvSpPr>
+          <p:nvPr>
+            <p:ph type="sldNum" sz="quarter" idx="10"/>
+          </p:nvPr>
+        </p:nvSpPr>
+        <p:spPr/>
+        <p:txBody>
+          <a:bodyPr/>
+          <a:lstStyle/>
+          <a:p>
+            <a:fld id="{F7021451-1387-4CA6-816F-3879F97B5CBC}" type="slidenum">
+              <a:rPr lang="en-US"/>
+              <a:t>7</a:t>
+            </a:fld>
+            <a:endParaRPr lang="en-US"/>
+          </a:p>
+        </p:txBody>
+      </p:sp>
+    </p:spTree>
+    <p:extLst>
+      <p:ext uri="{BB962C8B-B14F-4D97-AF65-F5344CB8AC3E}">
+        <p14:creationId xmlns:p14="http://schemas.microsoft.com/office/powerpoint/2010/main" val="1024086991"/>
+      </p:ext>
+    </p:extLst>
+  </p:cSld>
+  <p:clrMapOvr>
+    <a:masterClrMapping/>
+  </p:clrMapOvr>
+</p:notes>
+</file>
+
+<file path=ppt/notesSlides/notesSlide8.xml><?xml version="1.0" encoding="utf-8"?>
+<p:notes xmlns:a="http://schemas.openxmlformats.org/drawingml/2006/main" xmlns:r="http://schemas.openxmlformats.org/officeDocument/2006/relationships" xmlns:p="http://schemas.openxmlformats.org/presentationml/2006/main">
+  <p:cSld>
+    <p:spTree>
+      <p:nvGrpSpPr>
+        <p:cNvPr id="1" name=""/>
+        <p:cNvGrpSpPr/>
+        <p:nvPr/>
+      </p:nvGrpSpPr>
+      <p:grpSpPr>
+        <a:xfrm>
+          <a:off x="0" y="0"/>
+          <a:ext cx="0" cy="0"/>
+          <a:chOff x="0" y="0"/>
+          <a:chExt cx="0" cy="0"/>
+        </a:xfrm>
+      </p:grpSpPr>
+      <p:sp>
+        <p:nvSpPr>
+          <p:cNvPr id="2" name="Slide Image Placeholder 1"/>
+          <p:cNvSpPr>
+            <a:spLocks noGrp="1" noRot="1" noChangeAspect="1"/>
+          </p:cNvSpPr>
+          <p:nvPr>
+            <p:ph type="sldImg"/>
+          </p:nvPr>
+        </p:nvSpPr>
+        <p:spPr/>
+      </p:sp>
+      <p:sp>
+        <p:nvSpPr>
+          <p:cNvPr id="3" name="Notes Placeholder 2"/>
+          <p:cNvSpPr>
+            <a:spLocks noGrp="1"/>
+          </p:cNvSpPr>
+          <p:nvPr>
+            <p:ph type="body" idx="1"/>
+          </p:nvPr>
+        </p:nvSpPr>
+        <p:spPr/>
+        <p:txBody>
+          <a:bodyPr/>
+          <a:lstStyle/>
+          <a:p>
+            <a:r>
+              <a:rPr lang="en-US" dirty="0"/>
+              <a:t/>
+            </a:r>
+            <a:endParaRPr lang="en-US" dirty="0"/>
+          </a:p>
+        </p:txBody>
+      </p:sp>
+      <p:sp>
+        <p:nvSpPr>
+          <p:cNvPr id="4" name="Slide Number Placeholder 3"/>
+          <p:cNvSpPr>
+            <a:spLocks noGrp="1"/>
+          </p:cNvSpPr>
+          <p:nvPr>
+            <p:ph type="sldNum" sz="quarter" idx="10"/>
+          </p:nvPr>
+        </p:nvSpPr>
+        <p:spPr/>
+        <p:txBody>
+          <a:bodyPr/>
+          <a:lstStyle/>
+          <a:p>
+            <a:fld id="{F7021451-1387-4CA6-816F-3879F97B5CBC}" type="slidenum">
+              <a:rPr lang="en-US"/>
+              <a:t>8</a:t>
             </a:fld>
             <a:endParaRPr lang="en-US"/>
           </a:p>
@@ -1210,13 +1477,6 @@
 <file path=ppt/slides/slide1.xml><?xml version="1.0" encoding="utf-8"?>
 <p:sld xmlns:a="http://schemas.openxmlformats.org/drawingml/2006/main" xmlns:r="http://schemas.openxmlformats.org/officeDocument/2006/relationships" xmlns:p="http://schemas.openxmlformats.org/presentationml/2006/main">
   <p:cSld name="Slide 1">
-    <p:bg>
-      <p:bgPr>
-        <a:solidFill>
-          <a:srgbClr val="1B2A4A"/>
-        </a:solidFill>
-      </p:bgPr>
-    </p:bg>
     <p:spTree>
       <p:nvGrpSpPr>
         <p:cNvPr id="1" name=""/>
@@ -1240,7 +1500,27 @@
         <p:spPr>
           <a:xfrm>
             <a:off x="0" y="0"/>
-            <a:ext cx="109728" cy="5143500"/>
+            <a:ext cx="9144000" cy="5143500"/>
+          </a:xfrm>
+          <a:prstGeom prst="rect">
+            <a:avLst/>
+          </a:prstGeom>
+          <a:solidFill>
+            <a:srgbClr val="1B2A4A"/>
+          </a:solidFill>
+          <a:ln/>
+        </p:spPr>
+      </p:sp>
+      <p:sp>
+        <p:nvSpPr>
+          <p:cNvPr id="3" name="Shape 1"/>
+          <p:cNvSpPr/>
+          <p:nvPr/>
+        </p:nvSpPr>
+        <p:spPr>
+          <a:xfrm>
+            <a:off x="0" y="4777740"/>
+            <a:ext cx="9144000" cy="365760"/>
           </a:xfrm>
           <a:prstGeom prst="rect">
             <a:avLst/>
@@ -1253,14 +1533,36 @@
       </p:sp>
       <p:sp>
         <p:nvSpPr>
-          <p:cNvPr id="3" name="Text 1"/>
-          <p:cNvSpPr/>
-          <p:nvPr/>
-        </p:nvSpPr>
-        <p:spPr>
-          <a:xfrm>
-            <a:off x="731520" y="1097280"/>
-            <a:ext cx="7772400" cy="1371600"/>
+          <p:cNvPr id="4" name="Shape 2"/>
+          <p:cNvSpPr/>
+          <p:nvPr/>
+        </p:nvSpPr>
+        <p:spPr>
+          <a:xfrm>
+            <a:off x="6858000" y="-1371600"/>
+            <a:ext cx="4572000" cy="4572000"/>
+          </a:xfrm>
+          <a:prstGeom prst="ellipse">
+            <a:avLst/>
+          </a:prstGeom>
+          <a:solidFill>
+            <a:srgbClr val="2A9D8F">
+              <a:alpha val="12000"/>
+            </a:srgbClr>
+          </a:solidFill>
+          <a:ln/>
+        </p:spPr>
+      </p:sp>
+      <p:sp>
+        <p:nvSpPr>
+          <p:cNvPr id="5" name="Text 3"/>
+          <p:cNvSpPr/>
+          <p:nvPr/>
+        </p:nvSpPr>
+        <p:spPr>
+          <a:xfrm>
+            <a:off x="731520" y="914400"/>
+            <a:ext cx="7680960" cy="457200"/>
           </a:xfrm>
           <a:prstGeom prst="rect">
             <a:avLst/>
@@ -1276,7 +1578,46 @@
               <a:buNone/>
             </a:pPr>
             <a:r>
-              <a:rPr lang="en-US" sz="4000" b="1" dirty="0">
+              <a:rPr lang="en-US" sz="1300" b="1" spc="500" kern="0" dirty="0">
+                <a:solidFill>
+                  <a:srgbClr val="2A9D8F"/>
+                </a:solidFill>
+                <a:latin typeface="Calibri" pitchFamily="34" charset="0"/>
+                <a:ea typeface="Calibri" pitchFamily="34" charset="-122"/>
+                <a:cs typeface="Calibri" pitchFamily="34" charset="-120"/>
+              </a:rPr>
+              <a:t>GRADE 6 SCIENCE</a:t>
+            </a:r>
+            <a:endParaRPr lang="en-US" sz="1300" dirty="0"/>
+          </a:p>
+        </p:txBody>
+      </p:sp>
+      <p:sp>
+        <p:nvSpPr>
+          <p:cNvPr id="6" name="Text 4"/>
+          <p:cNvSpPr/>
+          <p:nvPr/>
+        </p:nvSpPr>
+        <p:spPr>
+          <a:xfrm>
+            <a:off x="731520" y="1463040"/>
+            <a:ext cx="6858000" cy="1645920"/>
+          </a:xfrm>
+          <a:prstGeom prst="rect">
+            <a:avLst/>
+          </a:prstGeom>
+          <a:noFill/>
+          <a:ln/>
+        </p:spPr>
+        <p:txBody>
+          <a:bodyPr wrap="square" rtlCol="0" anchor="t"/>
+          <a:lstStyle/>
+          <a:p>
+            <a:pPr indent="0" marL="0">
+              <a:buNone/>
+            </a:pPr>
+            <a:r>
+              <a:rPr lang="en-US" sz="3800" b="1" dirty="0">
                 <a:solidFill>
                   <a:srgbClr val="FFFFFF"/>
                 </a:solidFill>
@@ -1286,20 +1627,20 @@
               </a:rPr>
               <a:t>States of Matter</a:t>
             </a:r>
-            <a:endParaRPr lang="en-US" sz="4000" dirty="0"/>
+            <a:endParaRPr lang="en-US" sz="3800" dirty="0"/>
           </a:p>
         </p:txBody>
       </p:sp>
       <p:sp>
         <p:nvSpPr>
-          <p:cNvPr id="4" name="Text 2"/>
-          <p:cNvSpPr/>
-          <p:nvPr/>
-        </p:nvSpPr>
-        <p:spPr>
-          <a:xfrm>
-            <a:off x="731520" y="2560320"/>
-            <a:ext cx="7772400" cy="548640"/>
+          <p:cNvPr id="7" name="Text 5"/>
+          <p:cNvSpPr/>
+          <p:nvPr/>
+        </p:nvSpPr>
+        <p:spPr>
+          <a:xfrm>
+            <a:off x="731520" y="3200400"/>
+            <a:ext cx="6400800" cy="548640"/>
           </a:xfrm>
           <a:prstGeom prst="rect">
             <a:avLst/>
@@ -1315,15 +1656,15 @@
               <a:buNone/>
             </a:pPr>
             <a:r>
-              <a:rPr lang="en-US" sz="1600" dirty="0">
+              <a:rPr lang="en-US" sz="1600" i="1" dirty="0">
                 <a:solidFill>
-                  <a:srgbClr val="E9C46A"/>
+                  <a:srgbClr val="9B9690"/>
                 </a:solidFill>
                 <a:latin typeface="Calibri" pitchFamily="34" charset="0"/>
                 <a:ea typeface="Calibri" pitchFamily="34" charset="-122"/>
                 <a:cs typeface="Calibri" pitchFamily="34" charset="-120"/>
               </a:rPr>
-              <a:t>Grade 6 Science · Mr Zocchi</a:t>
+              <a:t>Solids, liquids, and gases — and how they behave</a:t>
             </a:r>
             <a:endParaRPr lang="en-US" sz="1600" dirty="0"/>
           </a:p>
@@ -1331,36 +1672,14 @@
       </p:sp>
       <p:sp>
         <p:nvSpPr>
-          <p:cNvPr id="5" name="Shape 3"/>
-          <p:cNvSpPr/>
-          <p:nvPr/>
-        </p:nvSpPr>
-        <p:spPr>
-          <a:xfrm>
-            <a:off x="731520" y="3474720"/>
-            <a:ext cx="2011680" cy="411480"/>
-          </a:xfrm>
-          <a:prstGeom prst="roundRect">
-            <a:avLst>
-              <a:gd name="adj" fmla="val 17778"/>
-            </a:avLst>
-          </a:prstGeom>
-          <a:solidFill>
-            <a:srgbClr val="2A9D8F"/>
-          </a:solidFill>
-          <a:ln/>
-        </p:spPr>
-      </p:sp>
-      <p:sp>
-        <p:nvSpPr>
-          <p:cNvPr id="6" name="Text 4"/>
-          <p:cNvSpPr/>
-          <p:nvPr/>
-        </p:nvSpPr>
-        <p:spPr>
-          <a:xfrm>
-            <a:off x="731520" y="3474720"/>
-            <a:ext cx="2011680" cy="411480"/>
+          <p:cNvPr id="8" name="Text 6"/>
+          <p:cNvSpPr/>
+          <p:nvPr/>
+        </p:nvSpPr>
+        <p:spPr>
+          <a:xfrm>
+            <a:off x="731520" y="4297680"/>
+            <a:ext cx="2743200" cy="365760"/>
           </a:xfrm>
           <a:prstGeom prst="rect">
             <a:avLst/>
@@ -1372,21 +1691,21 @@
           <a:bodyPr wrap="square" rtlCol="0" anchor="ctr"/>
           <a:lstStyle/>
           <a:p>
-            <a:pPr algn="ctr" indent="0" marL="0">
+            <a:pPr indent="0" marL="0">
               <a:buNone/>
             </a:pPr>
             <a:r>
-              <a:rPr lang="en-US" sz="1200" b="1" dirty="0">
+              <a:rPr lang="en-US" sz="1100" dirty="0">
                 <a:solidFill>
-                  <a:srgbClr val="FFFFFF"/>
+                  <a:srgbClr val="9B9690"/>
                 </a:solidFill>
                 <a:latin typeface="Calibri" pitchFamily="34" charset="0"/>
                 <a:ea typeface="Calibri" pitchFamily="34" charset="-122"/>
                 <a:cs typeface="Calibri" pitchFamily="34" charset="-120"/>
               </a:rPr>
-              <a:t>Term 2 · Chemistry</a:t>
-            </a:r>
-            <a:endParaRPr lang="en-US" sz="1200" dirty="0"/>
+              <a:t>mrzocchi.com</a:t>
+            </a:r>
+            <a:endParaRPr lang="en-US" sz="1100" dirty="0"/>
           </a:p>
         </p:txBody>
       </p:sp>
@@ -1431,7 +1750,47 @@
         <p:spPr>
           <a:xfrm>
             <a:off x="0" y="0"/>
-            <a:ext cx="9144000" cy="54864"/>
+            <a:ext cx="9144000" cy="822960"/>
+          </a:xfrm>
+          <a:prstGeom prst="rect">
+            <a:avLst/>
+          </a:prstGeom>
+          <a:solidFill>
+            <a:srgbClr val="FFFFFF"/>
+          </a:solidFill>
+          <a:ln/>
+        </p:spPr>
+      </p:sp>
+      <p:sp>
+        <p:nvSpPr>
+          <p:cNvPr id="3" name="Shape 1"/>
+          <p:cNvSpPr/>
+          <p:nvPr/>
+        </p:nvSpPr>
+        <p:spPr>
+          <a:xfrm>
+            <a:off x="0" y="804672"/>
+            <a:ext cx="9144000" cy="27432"/>
+          </a:xfrm>
+          <a:prstGeom prst="rect">
+            <a:avLst/>
+          </a:prstGeom>
+          <a:solidFill>
+            <a:srgbClr val="E5E2DC"/>
+          </a:solidFill>
+          <a:ln/>
+        </p:spPr>
+      </p:sp>
+      <p:sp>
+        <p:nvSpPr>
+          <p:cNvPr id="4" name="Shape 2"/>
+          <p:cNvSpPr/>
+          <p:nvPr/>
+        </p:nvSpPr>
+        <p:spPr>
+          <a:xfrm>
+            <a:off x="548640" y="201168"/>
+            <a:ext cx="54864" cy="420624"/>
           </a:xfrm>
           <a:prstGeom prst="rect">
             <a:avLst/>
@@ -1444,14 +1803,14 @@
       </p:sp>
       <p:sp>
         <p:nvSpPr>
-          <p:cNvPr id="3" name="Text 1"/>
-          <p:cNvSpPr/>
-          <p:nvPr/>
-        </p:nvSpPr>
-        <p:spPr>
-          <a:xfrm>
-            <a:off x="7772400" y="4709160"/>
-            <a:ext cx="1097280" cy="320040"/>
+          <p:cNvPr id="5" name="Text 3"/>
+          <p:cNvSpPr/>
+          <p:nvPr/>
+        </p:nvSpPr>
+        <p:spPr>
+          <a:xfrm>
+            <a:off x="777240" y="137160"/>
+            <a:ext cx="7772400" cy="548640"/>
           </a:xfrm>
           <a:prstGeom prst="rect">
             <a:avLst/>
@@ -1460,14 +1819,139 @@
           <a:ln/>
         </p:spPr>
         <p:txBody>
-          <a:bodyPr wrap="square" rtlCol="0" anchor="ctr"/>
+          <a:bodyPr wrap="square" lIns="0" tIns="0" rIns="0" bIns="0" rtlCol="0" anchor="ctr"/>
           <a:lstStyle/>
           <a:p>
-            <a:pPr algn="r" indent="0" marL="0">
+            <a:pPr indent="0" marL="0">
               <a:buNone/>
             </a:pPr>
             <a:r>
-              <a:rPr lang="en-US" sz="900" dirty="0">
+              <a:rPr lang="en-US" sz="2000" b="1" dirty="0">
+                <a:solidFill>
+                  <a:srgbClr val="1B2A4A"/>
+                </a:solidFill>
+                <a:latin typeface="Georgia" pitchFamily="34" charset="0"/>
+                <a:ea typeface="Georgia" pitchFamily="34" charset="-122"/>
+                <a:cs typeface="Georgia" pitchFamily="34" charset="-120"/>
+              </a:rPr>
+              <a:t>Key Vocabulary</a:t>
+            </a:r>
+            <a:endParaRPr lang="en-US" sz="2000" dirty="0"/>
+          </a:p>
+        </p:txBody>
+      </p:sp>
+      <p:sp>
+        <p:nvSpPr>
+          <p:cNvPr id="6" name="Shape 4"/>
+          <p:cNvSpPr/>
+          <p:nvPr/>
+        </p:nvSpPr>
+        <p:spPr>
+          <a:xfrm>
+            <a:off x="731520" y="1051560"/>
+            <a:ext cx="3657600" cy="658368"/>
+          </a:xfrm>
+          <a:prstGeom prst="rect">
+            <a:avLst/>
+          </a:prstGeom>
+          <a:solidFill>
+            <a:srgbClr val="FFFFFF"/>
+          </a:solidFill>
+          <a:ln/>
+          <a:effectLst>
+            <a:outerShdw sx="100000" sy="100000" kx="0" ky="0" algn="bl" rotWithShape="0" blurRad="50800" dist="25400" dir="8100000">
+              <a:srgbClr val="000000">
+                <a:alpha val="10000"/>
+              </a:srgbClr>
+            </a:outerShdw>
+          </a:effectLst>
+        </p:spPr>
+      </p:sp>
+      <p:sp>
+        <p:nvSpPr>
+          <p:cNvPr id="7" name="Shape 5"/>
+          <p:cNvSpPr/>
+          <p:nvPr/>
+        </p:nvSpPr>
+        <p:spPr>
+          <a:xfrm>
+            <a:off x="731520" y="1051560"/>
+            <a:ext cx="54864" cy="658368"/>
+          </a:xfrm>
+          <a:prstGeom prst="rect">
+            <a:avLst/>
+          </a:prstGeom>
+          <a:solidFill>
+            <a:srgbClr val="2A9D8F"/>
+          </a:solidFill>
+          <a:ln/>
+        </p:spPr>
+      </p:sp>
+      <p:sp>
+        <p:nvSpPr>
+          <p:cNvPr id="8" name="Text 6"/>
+          <p:cNvSpPr/>
+          <p:nvPr/>
+        </p:nvSpPr>
+        <p:spPr>
+          <a:xfrm>
+            <a:off x="914400" y="1051560"/>
+            <a:ext cx="1463040" cy="658368"/>
+          </a:xfrm>
+          <a:prstGeom prst="rect">
+            <a:avLst/>
+          </a:prstGeom>
+          <a:noFill/>
+          <a:ln/>
+        </p:spPr>
+        <p:txBody>
+          <a:bodyPr wrap="square" lIns="0" tIns="0" rIns="0" bIns="0" rtlCol="0" anchor="ctr"/>
+          <a:lstStyle/>
+          <a:p>
+            <a:pPr indent="0" marL="0">
+              <a:buNone/>
+            </a:pPr>
+            <a:r>
+              <a:rPr lang="en-US" sz="1300" b="1" dirty="0">
+                <a:solidFill>
+                  <a:srgbClr val="1B2A4A"/>
+                </a:solidFill>
+                <a:latin typeface="Georgia" pitchFamily="34" charset="0"/>
+                <a:ea typeface="Georgia" pitchFamily="34" charset="-122"/>
+                <a:cs typeface="Georgia" pitchFamily="34" charset="-120"/>
+              </a:rPr>
+              <a:t>Solid</a:t>
+            </a:r>
+            <a:endParaRPr lang="en-US" sz="1300" dirty="0"/>
+          </a:p>
+        </p:txBody>
+      </p:sp>
+      <p:sp>
+        <p:nvSpPr>
+          <p:cNvPr id="9" name="Text 7"/>
+          <p:cNvSpPr/>
+          <p:nvPr/>
+        </p:nvSpPr>
+        <p:spPr>
+          <a:xfrm>
+            <a:off x="2377440" y="1051560"/>
+            <a:ext cx="1920240" cy="658368"/>
+          </a:xfrm>
+          <a:prstGeom prst="rect">
+            <a:avLst/>
+          </a:prstGeom>
+          <a:noFill/>
+          <a:ln/>
+        </p:spPr>
+        <p:txBody>
+          <a:bodyPr wrap="square" lIns="0" tIns="0" rIns="0" bIns="0" rtlCol="0" anchor="ctr"/>
+          <a:lstStyle/>
+          <a:p>
+            <a:pPr indent="0" marL="0">
+              <a:buNone/>
+            </a:pPr>
+            <a:r>
+              <a:rPr lang="en-US" sz="1100" dirty="0">
                 <a:solidFill>
                   <a:srgbClr val="6B6660"/>
                 </a:solidFill>
@@ -1475,22 +1959,69 @@
                 <a:ea typeface="Calibri" pitchFamily="34" charset="-122"/>
                 <a:cs typeface="Calibri" pitchFamily="34" charset="-120"/>
               </a:rPr>
-              <a:t>2 / 5</a:t>
-            </a:r>
-            <a:endParaRPr lang="en-US" sz="900" dirty="0"/>
+              <a:t>Fixed shape and volume</a:t>
+            </a:r>
+            <a:endParaRPr lang="en-US" sz="1100" dirty="0"/>
           </a:p>
         </p:txBody>
       </p:sp>
       <p:sp>
         <p:nvSpPr>
-          <p:cNvPr id="4" name="Text 2"/>
-          <p:cNvSpPr/>
-          <p:nvPr/>
-        </p:nvSpPr>
-        <p:spPr>
-          <a:xfrm>
-            <a:off x="457200" y="274320"/>
-            <a:ext cx="8229600" cy="640080"/>
+          <p:cNvPr id="10" name="Shape 8"/>
+          <p:cNvSpPr/>
+          <p:nvPr/>
+        </p:nvSpPr>
+        <p:spPr>
+          <a:xfrm>
+            <a:off x="4754880" y="1051560"/>
+            <a:ext cx="3657600" cy="658368"/>
+          </a:xfrm>
+          <a:prstGeom prst="rect">
+            <a:avLst/>
+          </a:prstGeom>
+          <a:solidFill>
+            <a:srgbClr val="FFFFFF"/>
+          </a:solidFill>
+          <a:ln/>
+          <a:effectLst>
+            <a:outerShdw sx="100000" sy="100000" kx="0" ky="0" algn="bl" rotWithShape="0" blurRad="50800" dist="25400" dir="8100000">
+              <a:srgbClr val="000000">
+                <a:alpha val="10000"/>
+              </a:srgbClr>
+            </a:outerShdw>
+          </a:effectLst>
+        </p:spPr>
+      </p:sp>
+      <p:sp>
+        <p:nvSpPr>
+          <p:cNvPr id="11" name="Shape 9"/>
+          <p:cNvSpPr/>
+          <p:nvPr/>
+        </p:nvSpPr>
+        <p:spPr>
+          <a:xfrm>
+            <a:off x="4754880" y="1051560"/>
+            <a:ext cx="54864" cy="658368"/>
+          </a:xfrm>
+          <a:prstGeom prst="rect">
+            <a:avLst/>
+          </a:prstGeom>
+          <a:solidFill>
+            <a:srgbClr val="2A9D8F"/>
+          </a:solidFill>
+          <a:ln/>
+        </p:spPr>
+      </p:sp>
+      <p:sp>
+        <p:nvSpPr>
+          <p:cNvPr id="12" name="Text 10"/>
+          <p:cNvSpPr/>
+          <p:nvPr/>
+        </p:nvSpPr>
+        <p:spPr>
+          <a:xfrm>
+            <a:off x="4937760" y="1051560"/>
+            <a:ext cx="1463040" cy="658368"/>
           </a:xfrm>
           <a:prstGeom prst="rect">
             <a:avLst/>
@@ -1499,14 +2030,14 @@
           <a:ln/>
         </p:spPr>
         <p:txBody>
-          <a:bodyPr wrap="square" rtlCol="0" anchor="ctr"/>
+          <a:bodyPr wrap="square" lIns="0" tIns="0" rIns="0" bIns="0" rtlCol="0" anchor="ctr"/>
           <a:lstStyle/>
           <a:p>
             <a:pPr indent="0" marL="0">
               <a:buNone/>
             </a:pPr>
             <a:r>
-              <a:rPr lang="en-US" sz="2600" b="1" dirty="0">
+              <a:rPr lang="en-US" sz="1300" b="1" dirty="0">
                 <a:solidFill>
                   <a:srgbClr val="1B2A4A"/>
                 </a:solidFill>
@@ -1514,22 +2045,61 @@
                 <a:ea typeface="Georgia" pitchFamily="34" charset="-122"/>
                 <a:cs typeface="Georgia" pitchFamily="34" charset="-120"/>
               </a:rPr>
-              <a:t>Three States of Matter</a:t>
-            </a:r>
-            <a:endParaRPr lang="en-US" sz="2600" dirty="0"/>
+              <a:t>Liquid</a:t>
+            </a:r>
+            <a:endParaRPr lang="en-US" sz="1300" dirty="0"/>
           </a:p>
         </p:txBody>
       </p:sp>
       <p:sp>
         <p:nvSpPr>
-          <p:cNvPr id="5" name="Shape 3"/>
-          <p:cNvSpPr/>
-          <p:nvPr/>
-        </p:nvSpPr>
-        <p:spPr>
-          <a:xfrm>
-            <a:off x="457200" y="1188720"/>
-            <a:ext cx="2560320" cy="1828800"/>
+          <p:cNvPr id="13" name="Text 11"/>
+          <p:cNvSpPr/>
+          <p:nvPr/>
+        </p:nvSpPr>
+        <p:spPr>
+          <a:xfrm>
+            <a:off x="6400800" y="1051560"/>
+            <a:ext cx="1920240" cy="658368"/>
+          </a:xfrm>
+          <a:prstGeom prst="rect">
+            <a:avLst/>
+          </a:prstGeom>
+          <a:noFill/>
+          <a:ln/>
+        </p:spPr>
+        <p:txBody>
+          <a:bodyPr wrap="square" lIns="0" tIns="0" rIns="0" bIns="0" rtlCol="0" anchor="ctr"/>
+          <a:lstStyle/>
+          <a:p>
+            <a:pPr indent="0" marL="0">
+              <a:buNone/>
+            </a:pPr>
+            <a:r>
+              <a:rPr lang="en-US" sz="1100" dirty="0">
+                <a:solidFill>
+                  <a:srgbClr val="6B6660"/>
+                </a:solidFill>
+                <a:latin typeface="Calibri" pitchFamily="34" charset="0"/>
+                <a:ea typeface="Calibri" pitchFamily="34" charset="-122"/>
+                <a:cs typeface="Calibri" pitchFamily="34" charset="-120"/>
+              </a:rPr>
+              <a:t>Fixed volume, takes container shape</a:t>
+            </a:r>
+            <a:endParaRPr lang="en-US" sz="1100" dirty="0"/>
+          </a:p>
+        </p:txBody>
+      </p:sp>
+      <p:sp>
+        <p:nvSpPr>
+          <p:cNvPr id="14" name="Shape 12"/>
+          <p:cNvSpPr/>
+          <p:nvPr/>
+        </p:nvSpPr>
+        <p:spPr>
+          <a:xfrm>
+            <a:off x="731520" y="1819656"/>
+            <a:ext cx="3657600" cy="658368"/>
           </a:xfrm>
           <a:prstGeom prst="rect">
             <a:avLst/>
@@ -1537,12 +2107,7 @@
           <a:solidFill>
             <a:srgbClr val="FFFFFF"/>
           </a:solidFill>
-          <a:ln w="12700">
-            <a:solidFill>
-              <a:srgbClr val="E5E2DC"/>
-            </a:solidFill>
-            <a:prstDash val="solid"/>
-          </a:ln>
+          <a:ln/>
           <a:effectLst>
             <a:outerShdw sx="100000" sy="100000" kx="0" ky="0" algn="bl" rotWithShape="0" blurRad="50800" dist="25400" dir="8100000">
               <a:srgbClr val="000000">
@@ -1554,14 +2119,14 @@
       </p:sp>
       <p:sp>
         <p:nvSpPr>
-          <p:cNvPr id="6" name="Shape 4"/>
-          <p:cNvSpPr/>
-          <p:nvPr/>
-        </p:nvSpPr>
-        <p:spPr>
-          <a:xfrm>
-            <a:off x="457200" y="1188720"/>
-            <a:ext cx="2560320" cy="54864"/>
+          <p:cNvPr id="15" name="Shape 13"/>
+          <p:cNvSpPr/>
+          <p:nvPr/>
+        </p:nvSpPr>
+        <p:spPr>
+          <a:xfrm>
+            <a:off x="731520" y="1819656"/>
+            <a:ext cx="54864" cy="658368"/>
           </a:xfrm>
           <a:prstGeom prst="rect">
             <a:avLst/>
@@ -1574,14 +2139,14 @@
       </p:sp>
       <p:sp>
         <p:nvSpPr>
-          <p:cNvPr id="7" name="Text 5"/>
-          <p:cNvSpPr/>
-          <p:nvPr/>
-        </p:nvSpPr>
-        <p:spPr>
-          <a:xfrm>
-            <a:off x="594360" y="1325880"/>
-            <a:ext cx="2286000" cy="365760"/>
+          <p:cNvPr id="16" name="Text 14"/>
+          <p:cNvSpPr/>
+          <p:nvPr/>
+        </p:nvSpPr>
+        <p:spPr>
+          <a:xfrm>
+            <a:off x="914400" y="1819656"/>
+            <a:ext cx="1463040" cy="658368"/>
           </a:xfrm>
           <a:prstGeom prst="rect">
             <a:avLst/>
@@ -1590,76 +2155,76 @@
           <a:ln/>
         </p:spPr>
         <p:txBody>
-          <a:bodyPr wrap="square" rtlCol="0" anchor="ctr"/>
+          <a:bodyPr wrap="square" lIns="0" tIns="0" rIns="0" bIns="0" rtlCol="0" anchor="ctr"/>
           <a:lstStyle/>
           <a:p>
             <a:pPr indent="0" marL="0">
               <a:buNone/>
             </a:pPr>
             <a:r>
-              <a:rPr lang="en-US" sz="1400" b="1" dirty="0">
+              <a:rPr lang="en-US" sz="1300" b="1" dirty="0">
                 <a:solidFill>
                   <a:srgbClr val="1B2A4A"/>
+                </a:solidFill>
+                <a:latin typeface="Georgia" pitchFamily="34" charset="0"/>
+                <a:ea typeface="Georgia" pitchFamily="34" charset="-122"/>
+                <a:cs typeface="Georgia" pitchFamily="34" charset="-120"/>
+              </a:rPr>
+              <a:t>Gas</a:t>
+            </a:r>
+            <a:endParaRPr lang="en-US" sz="1300" dirty="0"/>
+          </a:p>
+        </p:txBody>
+      </p:sp>
+      <p:sp>
+        <p:nvSpPr>
+          <p:cNvPr id="17" name="Text 15"/>
+          <p:cNvSpPr/>
+          <p:nvPr/>
+        </p:nvSpPr>
+        <p:spPr>
+          <a:xfrm>
+            <a:off x="2377440" y="1819656"/>
+            <a:ext cx="1920240" cy="658368"/>
+          </a:xfrm>
+          <a:prstGeom prst="rect">
+            <a:avLst/>
+          </a:prstGeom>
+          <a:noFill/>
+          <a:ln/>
+        </p:spPr>
+        <p:txBody>
+          <a:bodyPr wrap="square" lIns="0" tIns="0" rIns="0" bIns="0" rtlCol="0" anchor="ctr"/>
+          <a:lstStyle/>
+          <a:p>
+            <a:pPr indent="0" marL="0">
+              <a:buNone/>
+            </a:pPr>
+            <a:r>
+              <a:rPr lang="en-US" sz="1100" dirty="0">
+                <a:solidFill>
+                  <a:srgbClr val="6B6660"/>
                 </a:solidFill>
                 <a:latin typeface="Calibri" pitchFamily="34" charset="0"/>
                 <a:ea typeface="Calibri" pitchFamily="34" charset="-122"/>
                 <a:cs typeface="Calibri" pitchFamily="34" charset="-120"/>
               </a:rPr>
-              <a:t>Solid</a:t>
-            </a:r>
-            <a:endParaRPr lang="en-US" sz="1400" dirty="0"/>
+              <a:t>No fixed shape or volume</a:t>
+            </a:r>
+            <a:endParaRPr lang="en-US" sz="1100" dirty="0"/>
           </a:p>
         </p:txBody>
       </p:sp>
       <p:sp>
         <p:nvSpPr>
-          <p:cNvPr id="8" name="Text 6"/>
-          <p:cNvSpPr/>
-          <p:nvPr/>
-        </p:nvSpPr>
-        <p:spPr>
-          <a:xfrm>
-            <a:off x="594360" y="1737360"/>
-            <a:ext cx="2286000" cy="1097280"/>
-          </a:xfrm>
-          <a:prstGeom prst="rect">
-            <a:avLst/>
-          </a:prstGeom>
-          <a:noFill/>
-          <a:ln/>
-        </p:spPr>
-        <p:txBody>
-          <a:bodyPr wrap="square" rtlCol="0" anchor="t"/>
-          <a:lstStyle/>
-          <a:p>
-            <a:pPr indent="0" marL="0">
-              <a:buNone/>
-            </a:pPr>
-            <a:r>
-              <a:rPr lang="en-US" sz="1100" dirty="0">
-                <a:solidFill>
-                  <a:srgbClr val="3D3A36"/>
-                </a:solidFill>
-                <a:latin typeface="Calibri" pitchFamily="34" charset="0"/>
-                <a:ea typeface="Calibri" pitchFamily="34" charset="-122"/>
-                <a:cs typeface="Calibri" pitchFamily="34" charset="-120"/>
-              </a:rPr>
-              <a:t>Fixed shape, fixed volume. Particles in regular arrangement, vibrating. Cannot be compressed. Examples: ice, wood, iron.</a:t>
-            </a:r>
-            <a:endParaRPr lang="en-US" sz="1100" dirty="0"/>
-          </a:p>
-        </p:txBody>
-      </p:sp>
-      <p:sp>
-        <p:nvSpPr>
-          <p:cNvPr id="9" name="Shape 7"/>
-          <p:cNvSpPr/>
-          <p:nvPr/>
-        </p:nvSpPr>
-        <p:spPr>
-          <a:xfrm>
-            <a:off x="3291840" y="1188720"/>
-            <a:ext cx="2560320" cy="1828800"/>
+          <p:cNvPr id="18" name="Shape 16"/>
+          <p:cNvSpPr/>
+          <p:nvPr/>
+        </p:nvSpPr>
+        <p:spPr>
+          <a:xfrm>
+            <a:off x="4754880" y="1819656"/>
+            <a:ext cx="3657600" cy="658368"/>
           </a:xfrm>
           <a:prstGeom prst="rect">
             <a:avLst/>
@@ -1667,12 +2232,7 @@
           <a:solidFill>
             <a:srgbClr val="FFFFFF"/>
           </a:solidFill>
-          <a:ln w="12700">
-            <a:solidFill>
-              <a:srgbClr val="E5E2DC"/>
-            </a:solidFill>
-            <a:prstDash val="solid"/>
-          </a:ln>
+          <a:ln/>
           <a:effectLst>
             <a:outerShdw sx="100000" sy="100000" kx="0" ky="0" algn="bl" rotWithShape="0" blurRad="50800" dist="25400" dir="8100000">
               <a:srgbClr val="000000">
@@ -1684,14 +2244,14 @@
       </p:sp>
       <p:sp>
         <p:nvSpPr>
-          <p:cNvPr id="10" name="Shape 8"/>
-          <p:cNvSpPr/>
-          <p:nvPr/>
-        </p:nvSpPr>
-        <p:spPr>
-          <a:xfrm>
-            <a:off x="3291840" y="1188720"/>
-            <a:ext cx="2560320" cy="54864"/>
+          <p:cNvPr id="19" name="Shape 17"/>
+          <p:cNvSpPr/>
+          <p:nvPr/>
+        </p:nvSpPr>
+        <p:spPr>
+          <a:xfrm>
+            <a:off x="4754880" y="1819656"/>
+            <a:ext cx="54864" cy="658368"/>
           </a:xfrm>
           <a:prstGeom prst="rect">
             <a:avLst/>
@@ -1704,14 +2264,14 @@
       </p:sp>
       <p:sp>
         <p:nvSpPr>
-          <p:cNvPr id="11" name="Text 9"/>
-          <p:cNvSpPr/>
-          <p:nvPr/>
-        </p:nvSpPr>
-        <p:spPr>
-          <a:xfrm>
-            <a:off x="3429000" y="1325880"/>
-            <a:ext cx="2286000" cy="365760"/>
+          <p:cNvPr id="20" name="Text 18"/>
+          <p:cNvSpPr/>
+          <p:nvPr/>
+        </p:nvSpPr>
+        <p:spPr>
+          <a:xfrm>
+            <a:off x="4937760" y="1819656"/>
+            <a:ext cx="1463040" cy="658368"/>
           </a:xfrm>
           <a:prstGeom prst="rect">
             <a:avLst/>
@@ -1720,76 +2280,76 @@
           <a:ln/>
         </p:spPr>
         <p:txBody>
-          <a:bodyPr wrap="square" rtlCol="0" anchor="ctr"/>
+          <a:bodyPr wrap="square" lIns="0" tIns="0" rIns="0" bIns="0" rtlCol="0" anchor="ctr"/>
           <a:lstStyle/>
           <a:p>
             <a:pPr indent="0" marL="0">
               <a:buNone/>
             </a:pPr>
             <a:r>
-              <a:rPr lang="en-US" sz="1400" b="1" dirty="0">
+              <a:rPr lang="en-US" sz="1300" b="1" dirty="0">
                 <a:solidFill>
                   <a:srgbClr val="1B2A4A"/>
+                </a:solidFill>
+                <a:latin typeface="Georgia" pitchFamily="34" charset="0"/>
+                <a:ea typeface="Georgia" pitchFamily="34" charset="-122"/>
+                <a:cs typeface="Georgia" pitchFamily="34" charset="-120"/>
+              </a:rPr>
+              <a:t>Density</a:t>
+            </a:r>
+            <a:endParaRPr lang="en-US" sz="1300" dirty="0"/>
+          </a:p>
+        </p:txBody>
+      </p:sp>
+      <p:sp>
+        <p:nvSpPr>
+          <p:cNvPr id="21" name="Text 19"/>
+          <p:cNvSpPr/>
+          <p:nvPr/>
+        </p:nvSpPr>
+        <p:spPr>
+          <a:xfrm>
+            <a:off x="6400800" y="1819656"/>
+            <a:ext cx="1920240" cy="658368"/>
+          </a:xfrm>
+          <a:prstGeom prst="rect">
+            <a:avLst/>
+          </a:prstGeom>
+          <a:noFill/>
+          <a:ln/>
+        </p:spPr>
+        <p:txBody>
+          <a:bodyPr wrap="square" lIns="0" tIns="0" rIns="0" bIns="0" rtlCol="0" anchor="ctr"/>
+          <a:lstStyle/>
+          <a:p>
+            <a:pPr indent="0" marL="0">
+              <a:buNone/>
+            </a:pPr>
+            <a:r>
+              <a:rPr lang="en-US" sz="1100" dirty="0">
+                <a:solidFill>
+                  <a:srgbClr val="6B6660"/>
                 </a:solidFill>
                 <a:latin typeface="Calibri" pitchFamily="34" charset="0"/>
                 <a:ea typeface="Calibri" pitchFamily="34" charset="-122"/>
                 <a:cs typeface="Calibri" pitchFamily="34" charset="-120"/>
               </a:rPr>
-              <a:t>Liquid</a:t>
-            </a:r>
-            <a:endParaRPr lang="en-US" sz="1400" dirty="0"/>
+              <a:t>How much mass per unit volume</a:t>
+            </a:r>
+            <a:endParaRPr lang="en-US" sz="1100" dirty="0"/>
           </a:p>
         </p:txBody>
       </p:sp>
       <p:sp>
         <p:nvSpPr>
-          <p:cNvPr id="12" name="Text 10"/>
-          <p:cNvSpPr/>
-          <p:nvPr/>
-        </p:nvSpPr>
-        <p:spPr>
-          <a:xfrm>
-            <a:off x="3429000" y="1737360"/>
-            <a:ext cx="2286000" cy="1097280"/>
-          </a:xfrm>
-          <a:prstGeom prst="rect">
-            <a:avLst/>
-          </a:prstGeom>
-          <a:noFill/>
-          <a:ln/>
-        </p:spPr>
-        <p:txBody>
-          <a:bodyPr wrap="square" rtlCol="0" anchor="t"/>
-          <a:lstStyle/>
-          <a:p>
-            <a:pPr indent="0" marL="0">
-              <a:buNone/>
-            </a:pPr>
-            <a:r>
-              <a:rPr lang="en-US" sz="1100" dirty="0">
-                <a:solidFill>
-                  <a:srgbClr val="3D3A36"/>
-                </a:solidFill>
-                <a:latin typeface="Calibri" pitchFamily="34" charset="0"/>
-                <a:ea typeface="Calibri" pitchFamily="34" charset="-122"/>
-                <a:cs typeface="Calibri" pitchFamily="34" charset="-120"/>
-              </a:rPr>
-              <a:t>No fixed shape, fixed volume. Takes shape of container. Can flow. Difficult to compress. Examples: water, milk, oil.</a:t>
-            </a:r>
-            <a:endParaRPr lang="en-US" sz="1100" dirty="0"/>
-          </a:p>
-        </p:txBody>
-      </p:sp>
-      <p:sp>
-        <p:nvSpPr>
-          <p:cNvPr id="13" name="Shape 11"/>
-          <p:cNvSpPr/>
-          <p:nvPr/>
-        </p:nvSpPr>
-        <p:spPr>
-          <a:xfrm>
-            <a:off x="6126480" y="1188720"/>
-            <a:ext cx="2560320" cy="1828800"/>
+          <p:cNvPr id="22" name="Shape 20"/>
+          <p:cNvSpPr/>
+          <p:nvPr/>
+        </p:nvSpPr>
+        <p:spPr>
+          <a:xfrm>
+            <a:off x="731520" y="2587752"/>
+            <a:ext cx="3657600" cy="658368"/>
           </a:xfrm>
           <a:prstGeom prst="rect">
             <a:avLst/>
@@ -1797,12 +2357,7 @@
           <a:solidFill>
             <a:srgbClr val="FFFFFF"/>
           </a:solidFill>
-          <a:ln w="12700">
-            <a:solidFill>
-              <a:srgbClr val="E5E2DC"/>
-            </a:solidFill>
-            <a:prstDash val="solid"/>
-          </a:ln>
+          <a:ln/>
           <a:effectLst>
             <a:outerShdw sx="100000" sy="100000" kx="0" ky="0" algn="bl" rotWithShape="0" blurRad="50800" dist="25400" dir="8100000">
               <a:srgbClr val="000000">
@@ -1814,14 +2369,14 @@
       </p:sp>
       <p:sp>
         <p:nvSpPr>
-          <p:cNvPr id="14" name="Shape 12"/>
-          <p:cNvSpPr/>
-          <p:nvPr/>
-        </p:nvSpPr>
-        <p:spPr>
-          <a:xfrm>
-            <a:off x="6126480" y="1188720"/>
-            <a:ext cx="2560320" cy="54864"/>
+          <p:cNvPr id="23" name="Shape 21"/>
+          <p:cNvSpPr/>
+          <p:nvPr/>
+        </p:nvSpPr>
+        <p:spPr>
+          <a:xfrm>
+            <a:off x="731520" y="2587752"/>
+            <a:ext cx="54864" cy="658368"/>
           </a:xfrm>
           <a:prstGeom prst="rect">
             <a:avLst/>
@@ -1834,14 +2389,14 @@
       </p:sp>
       <p:sp>
         <p:nvSpPr>
-          <p:cNvPr id="15" name="Text 13"/>
-          <p:cNvSpPr/>
-          <p:nvPr/>
-        </p:nvSpPr>
-        <p:spPr>
-          <a:xfrm>
-            <a:off x="6263640" y="1325880"/>
-            <a:ext cx="2286000" cy="365760"/>
+          <p:cNvPr id="24" name="Text 22"/>
+          <p:cNvSpPr/>
+          <p:nvPr/>
+        </p:nvSpPr>
+        <p:spPr>
+          <a:xfrm>
+            <a:off x="914400" y="2587752"/>
+            <a:ext cx="1463040" cy="658368"/>
           </a:xfrm>
           <a:prstGeom prst="rect">
             <a:avLst/>
@@ -1850,37 +2405,123 @@
           <a:ln/>
         </p:spPr>
         <p:txBody>
-          <a:bodyPr wrap="square" rtlCol="0" anchor="ctr"/>
+          <a:bodyPr wrap="square" lIns="0" tIns="0" rIns="0" bIns="0" rtlCol="0" anchor="ctr"/>
           <a:lstStyle/>
           <a:p>
             <a:pPr indent="0" marL="0">
               <a:buNone/>
             </a:pPr>
             <a:r>
-              <a:rPr lang="en-US" sz="1400" b="1" dirty="0">
+              <a:rPr lang="en-US" sz="1300" b="1" dirty="0">
                 <a:solidFill>
                   <a:srgbClr val="1B2A4A"/>
+                </a:solidFill>
+                <a:latin typeface="Georgia" pitchFamily="34" charset="0"/>
+                <a:ea typeface="Georgia" pitchFamily="34" charset="-122"/>
+                <a:cs typeface="Georgia" pitchFamily="34" charset="-120"/>
+              </a:rPr>
+              <a:t>Compress</a:t>
+            </a:r>
+            <a:endParaRPr lang="en-US" sz="1300" dirty="0"/>
+          </a:p>
+        </p:txBody>
+      </p:sp>
+      <p:sp>
+        <p:nvSpPr>
+          <p:cNvPr id="25" name="Text 23"/>
+          <p:cNvSpPr/>
+          <p:nvPr/>
+        </p:nvSpPr>
+        <p:spPr>
+          <a:xfrm>
+            <a:off x="2377440" y="2587752"/>
+            <a:ext cx="1920240" cy="658368"/>
+          </a:xfrm>
+          <a:prstGeom prst="rect">
+            <a:avLst/>
+          </a:prstGeom>
+          <a:noFill/>
+          <a:ln/>
+        </p:spPr>
+        <p:txBody>
+          <a:bodyPr wrap="square" lIns="0" tIns="0" rIns="0" bIns="0" rtlCol="0" anchor="ctr"/>
+          <a:lstStyle/>
+          <a:p>
+            <a:pPr indent="0" marL="0">
+              <a:buNone/>
+            </a:pPr>
+            <a:r>
+              <a:rPr lang="en-US" sz="1100" dirty="0">
+                <a:solidFill>
+                  <a:srgbClr val="6B6660"/>
                 </a:solidFill>
                 <a:latin typeface="Calibri" pitchFamily="34" charset="0"/>
                 <a:ea typeface="Calibri" pitchFamily="34" charset="-122"/>
                 <a:cs typeface="Calibri" pitchFamily="34" charset="-120"/>
               </a:rPr>
-              <a:t>Gas</a:t>
-            </a:r>
-            <a:endParaRPr lang="en-US" sz="1400" dirty="0"/>
+              <a:t>Squeeze into a smaller space</a:t>
+            </a:r>
+            <a:endParaRPr lang="en-US" sz="1100" dirty="0"/>
           </a:p>
         </p:txBody>
       </p:sp>
       <p:sp>
         <p:nvSpPr>
-          <p:cNvPr id="16" name="Text 14"/>
-          <p:cNvSpPr/>
-          <p:nvPr/>
-        </p:nvSpPr>
-        <p:spPr>
-          <a:xfrm>
-            <a:off x="6263640" y="1737360"/>
-            <a:ext cx="2286000" cy="1097280"/>
+          <p:cNvPr id="26" name="Shape 24"/>
+          <p:cNvSpPr/>
+          <p:nvPr/>
+        </p:nvSpPr>
+        <p:spPr>
+          <a:xfrm>
+            <a:off x="4754880" y="2587752"/>
+            <a:ext cx="3657600" cy="658368"/>
+          </a:xfrm>
+          <a:prstGeom prst="rect">
+            <a:avLst/>
+          </a:prstGeom>
+          <a:solidFill>
+            <a:srgbClr val="FFFFFF"/>
+          </a:solidFill>
+          <a:ln/>
+          <a:effectLst>
+            <a:outerShdw sx="100000" sy="100000" kx="0" ky="0" algn="bl" rotWithShape="0" blurRad="50800" dist="25400" dir="8100000">
+              <a:srgbClr val="000000">
+                <a:alpha val="10000"/>
+              </a:srgbClr>
+            </a:outerShdw>
+          </a:effectLst>
+        </p:spPr>
+      </p:sp>
+      <p:sp>
+        <p:nvSpPr>
+          <p:cNvPr id="27" name="Shape 25"/>
+          <p:cNvSpPr/>
+          <p:nvPr/>
+        </p:nvSpPr>
+        <p:spPr>
+          <a:xfrm>
+            <a:off x="4754880" y="2587752"/>
+            <a:ext cx="54864" cy="658368"/>
+          </a:xfrm>
+          <a:prstGeom prst="rect">
+            <a:avLst/>
+          </a:prstGeom>
+          <a:solidFill>
+            <a:srgbClr val="2A9D8F"/>
+          </a:solidFill>
+          <a:ln/>
+        </p:spPr>
+      </p:sp>
+      <p:sp>
+        <p:nvSpPr>
+          <p:cNvPr id="28" name="Text 26"/>
+          <p:cNvSpPr/>
+          <p:nvPr/>
+        </p:nvSpPr>
+        <p:spPr>
+          <a:xfrm>
+            <a:off x="4937760" y="2587752"/>
+            <a:ext cx="1463040" cy="658368"/>
           </a:xfrm>
           <a:prstGeom prst="rect">
             <a:avLst/>
@@ -1889,22 +2530,61 @@
           <a:ln/>
         </p:spPr>
         <p:txBody>
-          <a:bodyPr wrap="square" rtlCol="0" anchor="t"/>
+          <a:bodyPr wrap="square" lIns="0" tIns="0" rIns="0" bIns="0" rtlCol="0" anchor="ctr"/>
           <a:lstStyle/>
           <a:p>
             <a:pPr indent="0" marL="0">
               <a:buNone/>
             </a:pPr>
             <a:r>
+              <a:rPr lang="en-US" sz="1300" b="1" dirty="0">
+                <a:solidFill>
+                  <a:srgbClr val="1B2A4A"/>
+                </a:solidFill>
+                <a:latin typeface="Georgia" pitchFamily="34" charset="0"/>
+                <a:ea typeface="Georgia" pitchFamily="34" charset="-122"/>
+                <a:cs typeface="Georgia" pitchFamily="34" charset="-120"/>
+              </a:rPr>
+              <a:t>Diffusion</a:t>
+            </a:r>
+            <a:endParaRPr lang="en-US" sz="1300" dirty="0"/>
+          </a:p>
+        </p:txBody>
+      </p:sp>
+      <p:sp>
+        <p:nvSpPr>
+          <p:cNvPr id="29" name="Text 27"/>
+          <p:cNvSpPr/>
+          <p:nvPr/>
+        </p:nvSpPr>
+        <p:spPr>
+          <a:xfrm>
+            <a:off x="6400800" y="2587752"/>
+            <a:ext cx="1920240" cy="658368"/>
+          </a:xfrm>
+          <a:prstGeom prst="rect">
+            <a:avLst/>
+          </a:prstGeom>
+          <a:noFill/>
+          <a:ln/>
+        </p:spPr>
+        <p:txBody>
+          <a:bodyPr wrap="square" lIns="0" tIns="0" rIns="0" bIns="0" rtlCol="0" anchor="ctr"/>
+          <a:lstStyle/>
+          <a:p>
+            <a:pPr indent="0" marL="0">
+              <a:buNone/>
+            </a:pPr>
+            <a:r>
               <a:rPr lang="en-US" sz="1100" dirty="0">
                 <a:solidFill>
-                  <a:srgbClr val="3D3A36"/>
+                  <a:srgbClr val="6B6660"/>
                 </a:solidFill>
                 <a:latin typeface="Calibri" pitchFamily="34" charset="0"/>
                 <a:ea typeface="Calibri" pitchFamily="34" charset="-122"/>
                 <a:cs typeface="Calibri" pitchFamily="34" charset="-120"/>
               </a:rPr>
-              <a:t>No fixed shape, no fixed volume. Fills entire container. Easy to compress. Very low density. Examples: oxygen, steam, carbon dioxide.</a:t>
+              <a:t>Particles spreading from high to low concentration</a:t>
             </a:r>
             <a:endParaRPr lang="en-US" sz="1100" dirty="0"/>
           </a:p>
@@ -1951,7 +2631,47 @@
         <p:spPr>
           <a:xfrm>
             <a:off x="0" y="0"/>
-            <a:ext cx="9144000" cy="54864"/>
+            <a:ext cx="9144000" cy="822960"/>
+          </a:xfrm>
+          <a:prstGeom prst="rect">
+            <a:avLst/>
+          </a:prstGeom>
+          <a:solidFill>
+            <a:srgbClr val="FFFFFF"/>
+          </a:solidFill>
+          <a:ln/>
+        </p:spPr>
+      </p:sp>
+      <p:sp>
+        <p:nvSpPr>
+          <p:cNvPr id="3" name="Shape 1"/>
+          <p:cNvSpPr/>
+          <p:nvPr/>
+        </p:nvSpPr>
+        <p:spPr>
+          <a:xfrm>
+            <a:off x="0" y="804672"/>
+            <a:ext cx="9144000" cy="27432"/>
+          </a:xfrm>
+          <a:prstGeom prst="rect">
+            <a:avLst/>
+          </a:prstGeom>
+          <a:solidFill>
+            <a:srgbClr val="E5E2DC"/>
+          </a:solidFill>
+          <a:ln/>
+        </p:spPr>
+      </p:sp>
+      <p:sp>
+        <p:nvSpPr>
+          <p:cNvPr id="4" name="Shape 2"/>
+          <p:cNvSpPr/>
+          <p:nvPr/>
+        </p:nvSpPr>
+        <p:spPr>
+          <a:xfrm>
+            <a:off x="548640" y="201168"/>
+            <a:ext cx="54864" cy="420624"/>
           </a:xfrm>
           <a:prstGeom prst="rect">
             <a:avLst/>
@@ -1964,14 +2684,14 @@
       </p:sp>
       <p:sp>
         <p:nvSpPr>
-          <p:cNvPr id="3" name="Text 1"/>
-          <p:cNvSpPr/>
-          <p:nvPr/>
-        </p:nvSpPr>
-        <p:spPr>
-          <a:xfrm>
-            <a:off x="7772400" y="4709160"/>
-            <a:ext cx="1097280" cy="320040"/>
+          <p:cNvPr id="5" name="Text 3"/>
+          <p:cNvSpPr/>
+          <p:nvPr/>
+        </p:nvSpPr>
+        <p:spPr>
+          <a:xfrm>
+            <a:off x="777240" y="137160"/>
+            <a:ext cx="7772400" cy="548640"/>
           </a:xfrm>
           <a:prstGeom prst="rect">
             <a:avLst/>
@@ -1980,53 +2700,14 @@
           <a:ln/>
         </p:spPr>
         <p:txBody>
-          <a:bodyPr wrap="square" rtlCol="0" anchor="ctr"/>
-          <a:lstStyle/>
-          <a:p>
-            <a:pPr algn="r" indent="0" marL="0">
-              <a:buNone/>
-            </a:pPr>
-            <a:r>
-              <a:rPr lang="en-US" sz="900" dirty="0">
-                <a:solidFill>
-                  <a:srgbClr val="6B6660"/>
-                </a:solidFill>
-                <a:latin typeface="Calibri" pitchFamily="34" charset="0"/>
-                <a:ea typeface="Calibri" pitchFamily="34" charset="-122"/>
-                <a:cs typeface="Calibri" pitchFamily="34" charset="-120"/>
-              </a:rPr>
-              <a:t>3 / 5</a:t>
-            </a:r>
-            <a:endParaRPr lang="en-US" sz="900" dirty="0"/>
-          </a:p>
-        </p:txBody>
-      </p:sp>
-      <p:sp>
-        <p:nvSpPr>
-          <p:cNvPr id="4" name="Text 2"/>
-          <p:cNvSpPr/>
-          <p:nvPr/>
-        </p:nvSpPr>
-        <p:spPr>
-          <a:xfrm>
-            <a:off x="457200" y="274320"/>
-            <a:ext cx="8229600" cy="640080"/>
-          </a:xfrm>
-          <a:prstGeom prst="rect">
-            <a:avLst/>
-          </a:prstGeom>
-          <a:noFill/>
-          <a:ln/>
-        </p:spPr>
-        <p:txBody>
-          <a:bodyPr wrap="square" rtlCol="0" anchor="ctr"/>
+          <a:bodyPr wrap="square" lIns="0" tIns="0" rIns="0" bIns="0" rtlCol="0" anchor="ctr"/>
           <a:lstStyle/>
           <a:p>
             <a:pPr indent="0" marL="0">
               <a:buNone/>
             </a:pPr>
             <a:r>
-              <a:rPr lang="en-US" sz="2600" b="1" dirty="0">
+              <a:rPr lang="en-US" sz="2000" b="1" dirty="0">
                 <a:solidFill>
                   <a:srgbClr val="1B2A4A"/>
                 </a:solidFill>
@@ -2034,342 +2715,1962 @@
                 <a:ea typeface="Georgia" pitchFamily="34" charset="-122"/>
                 <a:cs typeface="Georgia" pitchFamily="34" charset="-120"/>
               </a:rPr>
-              <a:t>Comparing the States</a:t>
-            </a:r>
-            <a:endParaRPr lang="en-US" sz="2600" dirty="0"/>
+              <a:t>Comparing the Three States</a:t>
+            </a:r>
+            <a:endParaRPr lang="en-US" sz="2000" dirty="0"/>
           </a:p>
         </p:txBody>
       </p:sp>
-      <p:sp>
-        <p:nvSpPr>
-          <p:cNvPr id="5" name="Text 3"/>
-          <p:cNvSpPr/>
-          <p:nvPr/>
-        </p:nvSpPr>
-        <p:spPr>
-          <a:xfrm>
-            <a:off x="457200" y="1188720"/>
-            <a:ext cx="3840480" cy="3474720"/>
-          </a:xfrm>
-          <a:prstGeom prst="rect">
-            <a:avLst/>
-          </a:prstGeom>
-          <a:noFill/>
-          <a:ln/>
-        </p:spPr>
-        <p:txBody>
-          <a:bodyPr wrap="square" rtlCol="0" anchor="t"/>
-          <a:lstStyle/>
-          <a:p>
-            <a:pPr marL="342900" indent="-342900">
-              <a:spcAft>
-                <a:spcPts val="600"/>
-              </a:spcAft>
-              <a:buSzPct val="100000"/>
-              <a:buChar char="•"/>
-            </a:pPr>
-            <a:r>
-              <a:rPr lang="en-US" sz="1400" dirty="0">
-                <a:solidFill>
-                  <a:srgbClr val="3D3A36"/>
-                </a:solidFill>
-                <a:latin typeface="Calibri" pitchFamily="34" charset="0"/>
-                <a:ea typeface="Calibri" pitchFamily="34" charset="-122"/>
-                <a:cs typeface="Calibri" pitchFamily="34" charset="-120"/>
-              </a:rPr>
-              <a:t>Solids have the strongest forces between particles</a:t>
-            </a:r>
-            <a:endParaRPr lang="en-US" sz="1400" dirty="0"/>
-          </a:p>
-          <a:p>
-            <a:pPr marL="342900" indent="-342900">
-              <a:spcAft>
-                <a:spcPts val="600"/>
-              </a:spcAft>
-              <a:buSzPct val="100000"/>
-              <a:buChar char="•"/>
-            </a:pPr>
-            <a:r>
-              <a:rPr lang="en-US" sz="1400" dirty="0">
-                <a:solidFill>
-                  <a:srgbClr val="3D3A36"/>
-                </a:solidFill>
-                <a:latin typeface="Calibri" pitchFamily="34" charset="0"/>
-                <a:ea typeface="Calibri" pitchFamily="34" charset="-122"/>
-                <a:cs typeface="Calibri" pitchFamily="34" charset="-120"/>
-              </a:rPr>
-              <a:t>Liquids have moderate forces — enough to stay together but not enough for a fixed shape</a:t>
-            </a:r>
-            <a:endParaRPr lang="en-US" sz="1400" dirty="0"/>
-          </a:p>
-          <a:p>
-            <a:pPr marL="342900" indent="-342900">
-              <a:spcAft>
-                <a:spcPts val="600"/>
-              </a:spcAft>
-              <a:buSzPct val="100000"/>
-              <a:buChar char="•"/>
-            </a:pPr>
-            <a:r>
-              <a:rPr lang="en-US" sz="1400" dirty="0">
-                <a:solidFill>
-                  <a:srgbClr val="3D3A36"/>
-                </a:solidFill>
-                <a:latin typeface="Calibri" pitchFamily="34" charset="0"/>
-                <a:ea typeface="Calibri" pitchFamily="34" charset="-122"/>
-                <a:cs typeface="Calibri" pitchFamily="34" charset="-120"/>
-              </a:rPr>
-              <a:t>Gases have very weak forces — particles escape easily</a:t>
-            </a:r>
-            <a:endParaRPr lang="en-US" sz="1400" dirty="0"/>
-          </a:p>
-          <a:p>
-            <a:pPr marL="342900" indent="-342900">
-              <a:spcAft>
-                <a:spcPts val="600"/>
-              </a:spcAft>
-              <a:buSzPct val="100000"/>
-              <a:buChar char="•"/>
-            </a:pPr>
-            <a:r>
-              <a:rPr lang="en-US" sz="1400" dirty="0">
-                <a:solidFill>
-                  <a:srgbClr val="3D3A36"/>
-                </a:solidFill>
-                <a:latin typeface="Calibri" pitchFamily="34" charset="0"/>
-                <a:ea typeface="Calibri" pitchFamily="34" charset="-122"/>
-                <a:cs typeface="Calibri" pitchFamily="34" charset="-120"/>
-              </a:rPr>
-              <a:t>Density: solid &gt; liquid &gt; gas (usually)</a:t>
-            </a:r>
-            <a:endParaRPr lang="en-US" sz="1400" dirty="0"/>
-          </a:p>
-          <a:p>
-            <a:pPr marL="342900" indent="-342900">
-              <a:spcAft>
-                <a:spcPts val="600"/>
-              </a:spcAft>
-              <a:buSzPct val="100000"/>
-              <a:buChar char="•"/>
-            </a:pPr>
-            <a:r>
-              <a:rPr lang="en-US" sz="1400" dirty="0">
-                <a:solidFill>
-                  <a:srgbClr val="3D3A36"/>
-                </a:solidFill>
-                <a:latin typeface="Calibri" pitchFamily="34" charset="0"/>
-                <a:ea typeface="Calibri" pitchFamily="34" charset="-122"/>
-                <a:cs typeface="Calibri" pitchFamily="34" charset="-120"/>
-              </a:rPr>
-              <a:t>Exception: ice is LESS dense than water — that's why ice floats!</a:t>
-            </a:r>
-            <a:endParaRPr lang="en-US" sz="1400" dirty="0"/>
-          </a:p>
-        </p:txBody>
-      </p:sp>
-      <p:sp>
-        <p:nvSpPr>
-          <p:cNvPr id="6" name="Shape 4"/>
-          <p:cNvSpPr/>
-          <p:nvPr/>
-        </p:nvSpPr>
-        <p:spPr>
-          <a:xfrm>
-            <a:off x="4846320" y="1188720"/>
-            <a:ext cx="3840480" cy="3474720"/>
-          </a:xfrm>
-          <a:prstGeom prst="rect">
-            <a:avLst/>
-          </a:prstGeom>
-          <a:solidFill>
-            <a:srgbClr val="FFFFFF"/>
-          </a:solidFill>
-          <a:ln w="12700">
-            <a:solidFill>
-              <a:srgbClr val="E5E2DC"/>
-            </a:solidFill>
-            <a:prstDash val="solid"/>
-          </a:ln>
-          <a:effectLst>
-            <a:outerShdw sx="100000" sy="100000" kx="0" ky="0" algn="bl" rotWithShape="0" blurRad="50800" dist="25400" dir="8100000">
-              <a:srgbClr val="000000">
-                <a:alpha val="10000"/>
-              </a:srgbClr>
-            </a:outerShdw>
-          </a:effectLst>
-        </p:spPr>
-      </p:sp>
-      <p:sp>
-        <p:nvSpPr>
-          <p:cNvPr id="7" name="Shape 5"/>
-          <p:cNvSpPr/>
-          <p:nvPr/>
-        </p:nvSpPr>
-        <p:spPr>
-          <a:xfrm>
-            <a:off x="4846320" y="1188720"/>
-            <a:ext cx="3840480" cy="54864"/>
-          </a:xfrm>
-          <a:prstGeom prst="rect">
-            <a:avLst/>
-          </a:prstGeom>
-          <a:solidFill>
-            <a:srgbClr val="2A9D8F"/>
-          </a:solidFill>
-          <a:ln/>
-        </p:spPr>
-      </p:sp>
-      <p:sp>
-        <p:nvSpPr>
-          <p:cNvPr id="8" name="Text 6"/>
-          <p:cNvSpPr/>
-          <p:nvPr/>
-        </p:nvSpPr>
-        <p:spPr>
-          <a:xfrm>
-            <a:off x="5120640" y="1371600"/>
-            <a:ext cx="3291840" cy="3108960"/>
-          </a:xfrm>
-          <a:prstGeom prst="rect">
-            <a:avLst/>
-          </a:prstGeom>
-          <a:noFill/>
-          <a:ln/>
-        </p:spPr>
-        <p:txBody>
-          <a:bodyPr wrap="square" rtlCol="0" anchor="t"/>
-          <a:lstStyle/>
-          <a:p>
-            <a:pPr indent="0" marL="0">
-              <a:spcAft>
-                <a:spcPts val="400"/>
-              </a:spcAft>
-              <a:buNone/>
-            </a:pPr>
-            <a:r>
-              <a:rPr lang="en-US" sz="1600" b="1" dirty="0">
-                <a:solidFill>
-                  <a:srgbClr val="1B2A4A"/>
-                </a:solidFill>
-                <a:latin typeface="Calibri" pitchFamily="34" charset="0"/>
-                <a:ea typeface="Calibri" pitchFamily="34" charset="-122"/>
-                <a:cs typeface="Calibri" pitchFamily="34" charset="-120"/>
-              </a:rPr>
-              <a:t>Key Properties</a:t>
-            </a:r>
-            <a:endParaRPr lang="en-US" sz="1600" dirty="0"/>
-          </a:p>
-          <a:p>
-            <a:pPr indent="0" marL="0">
-              <a:spcAft>
-                <a:spcPts val="400"/>
-              </a:spcAft>
-              <a:buNone/>
-            </a:pPr>
-            <a:endParaRPr lang="en-US" sz="1600" dirty="0"/>
-          </a:p>
-          <a:p>
-            <a:pPr indent="0" marL="0">
-              <a:spcAft>
-                <a:spcPts val="400"/>
-              </a:spcAft>
-              <a:buNone/>
-            </a:pPr>
-            <a:r>
-              <a:rPr lang="en-US" sz="1300" dirty="0">
-                <a:solidFill>
-                  <a:srgbClr val="3D3A36"/>
-                </a:solidFill>
-                <a:latin typeface="Calibri" pitchFamily="34" charset="0"/>
-                <a:ea typeface="Calibri" pitchFamily="34" charset="-122"/>
-                <a:cs typeface="Calibri" pitchFamily="34" charset="-120"/>
-              </a:rPr>
-              <a:t>Compressibility: only gases can be compressed easily (large spaces between particles)</a:t>
-            </a:r>
-            <a:endParaRPr lang="en-US" sz="1600" dirty="0"/>
-          </a:p>
-          <a:p>
-            <a:pPr indent="0" marL="0">
-              <a:spcAft>
-                <a:spcPts val="400"/>
-              </a:spcAft>
-              <a:buNone/>
-            </a:pPr>
-            <a:r>
-              <a:rPr lang="en-US" sz="1300" dirty="0">
-                <a:solidFill>
-                  <a:srgbClr val="3D3A36"/>
-                </a:solidFill>
-                <a:latin typeface="Calibri" pitchFamily="34" charset="0"/>
-                <a:ea typeface="Calibri" pitchFamily="34" charset="-122"/>
-                <a:cs typeface="Calibri" pitchFamily="34" charset="-120"/>
-              </a:rPr>
-              <a:t>Flow: liquids and gases can flow; solids cannot</a:t>
-            </a:r>
-            <a:endParaRPr lang="en-US" sz="1600" dirty="0"/>
-          </a:p>
-          <a:p>
-            <a:pPr indent="0" marL="0">
-              <a:spcAft>
-                <a:spcPts val="400"/>
-              </a:spcAft>
-              <a:buNone/>
-            </a:pPr>
-            <a:r>
-              <a:rPr lang="en-US" sz="1300" dirty="0">
-                <a:solidFill>
-                  <a:srgbClr val="3D3A36"/>
-                </a:solidFill>
-                <a:latin typeface="Calibri" pitchFamily="34" charset="0"/>
-                <a:ea typeface="Calibri" pitchFamily="34" charset="-122"/>
-                <a:cs typeface="Calibri" pitchFamily="34" charset="-120"/>
-              </a:rPr>
-              <a:t>Shape: only solids hold their shape</a:t>
-            </a:r>
-            <a:endParaRPr lang="en-US" sz="1600" dirty="0"/>
-          </a:p>
-          <a:p>
-            <a:pPr indent="0" marL="0">
-              <a:spcAft>
-                <a:spcPts val="400"/>
-              </a:spcAft>
-              <a:buNone/>
-            </a:pPr>
-            <a:r>
-              <a:rPr lang="en-US" sz="1300" dirty="0">
-                <a:solidFill>
-                  <a:srgbClr val="3D3A36"/>
-                </a:solidFill>
-                <a:latin typeface="Calibri" pitchFamily="34" charset="0"/>
-                <a:ea typeface="Calibri" pitchFamily="34" charset="-122"/>
-                <a:cs typeface="Calibri" pitchFamily="34" charset="-120"/>
-              </a:rPr>
-              <a:t>Volume: solids and liquids have fixed volume; gases expand to fill space</a:t>
-            </a:r>
-            <a:endParaRPr lang="en-US" sz="1600" dirty="0"/>
-          </a:p>
-          <a:p>
-            <a:pPr indent="0" marL="0">
-              <a:spcAft>
-                <a:spcPts val="400"/>
-              </a:spcAft>
-              <a:buNone/>
-            </a:pPr>
-            <a:r>
-              <a:rPr lang="en-US" sz="1300" dirty="0">
-                <a:solidFill>
-                  <a:srgbClr val="3D3A36"/>
-                </a:solidFill>
-                <a:latin typeface="Calibri" pitchFamily="34" charset="0"/>
-                <a:ea typeface="Calibri" pitchFamily="34" charset="-122"/>
-                <a:cs typeface="Calibri" pitchFamily="34" charset="-120"/>
-              </a:rPr>
-              <a:t>Diffusion: fastest in gases, slower in liquids, doesn't occur in solids</a:t>
-            </a:r>
-            <a:endParaRPr lang="en-US" sz="1600" dirty="0"/>
-          </a:p>
-        </p:txBody>
-      </p:sp>
+      <p:graphicFrame>
+        <p:nvGraphicFramePr>
+          <p:cNvPr id="4" name="Table 0"/>
+          <p:cNvGraphicFramePr>
+            <a:graphicFrameLocks noGrp="1"/>
+          </p:cNvGraphicFramePr>
+          <p:nvPr>
+            <p:extLst>
+              <p:ext uri="{D42A27DB-BD31-4B8C-83A1-F6EECF244321}">
+                <p14:modId xmlns:p14="http://schemas.microsoft.com/office/powerpoint/2010/main" val="1579011935"/>
+              </p:ext>
+            </p:extLst>
+          </p:nvPr>
+        </p:nvGraphicFramePr>
+        <p:xfrm>
+          <a:off x="640080" y="1051560"/>
+          <a:ext cx="7863840" cy="914400"/>
+        </p:xfrm>
+        <a:graphic>
+          <a:graphicData uri="http://schemas.openxmlformats.org/drawingml/2006/table">
+            <a:tbl>
+              <a:tblPr/>
+              <a:tblGrid>
+                <a:gridCol w="1965960"/>
+                <a:gridCol w="1965960"/>
+                <a:gridCol w="1965960"/>
+                <a:gridCol w="1965960"/>
+              </a:tblGrid>
+              <a:tr h="502920">
+                <a:tc>
+                  <a:txBody>
+                    <a:bodyPr/>
+                    <a:lstStyle/>
+                    <a:p>
+                      <a:pPr indent="0" marL="0">
+                        <a:buNone/>
+                      </a:pPr>
+                      <a:r>
+                        <a:rPr lang="en-US" sz="1200" b="1" dirty="0">
+                          <a:solidFill>
+                            <a:srgbClr val="FFFFFF"/>
+                          </a:solidFill>
+                          <a:latin typeface="Calibri" pitchFamily="34" charset="0"/>
+                          <a:ea typeface="Calibri" pitchFamily="34" charset="-122"/>
+                          <a:cs typeface="Calibri" pitchFamily="34" charset="-120"/>
+                        </a:rPr>
+                        <a:t>Property</a:t>
+                      </a:r>
+                      <a:endParaRPr lang="en-US" sz="1200" dirty="0">
+                        <a:latin typeface="Calibri" charset="0"/>
+                        <a:ea typeface="Calibri" charset="0"/>
+                        <a:cs typeface="Calibri" charset="0"/>
+                      </a:endParaRPr>
+                    </a:p>
+                  </a:txBody>
+                  <a:tcPr marL="91440" marR="91440" marT="45720" marB="45720">
+                    <a:lnL w="6350" cap="flat" cmpd="sng" algn="ctr">
+                      <a:solidFill>
+                        <a:srgbClr val="E5E2DC"/>
+                      </a:solidFill>
+                      <a:prstDash val="solid"/>
+                      <a:round/>
+                      <a:headEnd type="none" w="med" len="med"/>
+                      <a:tailEnd type="none" w="med" len="med"/>
+                    </a:lnL>
+                    <a:lnR w="6350" cap="flat" cmpd="sng" algn="ctr">
+                      <a:solidFill>
+                        <a:srgbClr val="E5E2DC"/>
+                      </a:solidFill>
+                      <a:prstDash val="solid"/>
+                      <a:round/>
+                      <a:headEnd type="none" w="med" len="med"/>
+                      <a:tailEnd type="none" w="med" len="med"/>
+                    </a:lnR>
+                    <a:lnT w="6350" cap="flat" cmpd="sng" algn="ctr">
+                      <a:solidFill>
+                        <a:srgbClr val="E5E2DC"/>
+                      </a:solidFill>
+                      <a:prstDash val="solid"/>
+                      <a:round/>
+                      <a:headEnd type="none" w="med" len="med"/>
+                      <a:tailEnd type="none" w="med" len="med"/>
+                    </a:lnT>
+                    <a:lnB w="6350" cap="flat" cmpd="sng" algn="ctr">
+                      <a:solidFill>
+                        <a:srgbClr val="E5E2DC"/>
+                      </a:solidFill>
+                      <a:prstDash val="solid"/>
+                      <a:round/>
+                      <a:headEnd type="none" w="med" len="med"/>
+                      <a:tailEnd type="none" w="med" len="med"/>
+                    </a:lnB>
+                    <a:solidFill>
+                      <a:srgbClr val="2A9D8F"/>
+                    </a:solidFill>
+                  </a:tcPr>
+                </a:tc>
+                <a:tc>
+                  <a:txBody>
+                    <a:bodyPr/>
+                    <a:lstStyle/>
+                    <a:p>
+                      <a:pPr indent="0" marL="0">
+                        <a:buNone/>
+                      </a:pPr>
+                      <a:r>
+                        <a:rPr lang="en-US" sz="1200" b="1" dirty="0">
+                          <a:solidFill>
+                            <a:srgbClr val="FFFFFF"/>
+                          </a:solidFill>
+                          <a:latin typeface="Calibri" pitchFamily="34" charset="0"/>
+                          <a:ea typeface="Calibri" pitchFamily="34" charset="-122"/>
+                          <a:cs typeface="Calibri" pitchFamily="34" charset="-120"/>
+                        </a:rPr>
+                        <a:t>Solid</a:t>
+                      </a:r>
+                      <a:endParaRPr lang="en-US" sz="1200" dirty="0">
+                        <a:latin typeface="Calibri" charset="0"/>
+                        <a:ea typeface="Calibri" charset="0"/>
+                        <a:cs typeface="Calibri" charset="0"/>
+                      </a:endParaRPr>
+                    </a:p>
+                  </a:txBody>
+                  <a:tcPr marL="91440" marR="91440" marT="45720" marB="45720">
+                    <a:lnL w="6350" cap="flat" cmpd="sng" algn="ctr">
+                      <a:solidFill>
+                        <a:srgbClr val="E5E2DC"/>
+                      </a:solidFill>
+                      <a:prstDash val="solid"/>
+                      <a:round/>
+                      <a:headEnd type="none" w="med" len="med"/>
+                      <a:tailEnd type="none" w="med" len="med"/>
+                    </a:lnL>
+                    <a:lnR w="6350" cap="flat" cmpd="sng" algn="ctr">
+                      <a:solidFill>
+                        <a:srgbClr val="E5E2DC"/>
+                      </a:solidFill>
+                      <a:prstDash val="solid"/>
+                      <a:round/>
+                      <a:headEnd type="none" w="med" len="med"/>
+                      <a:tailEnd type="none" w="med" len="med"/>
+                    </a:lnR>
+                    <a:lnT w="6350" cap="flat" cmpd="sng" algn="ctr">
+                      <a:solidFill>
+                        <a:srgbClr val="E5E2DC"/>
+                      </a:solidFill>
+                      <a:prstDash val="solid"/>
+                      <a:round/>
+                      <a:headEnd type="none" w="med" len="med"/>
+                      <a:tailEnd type="none" w="med" len="med"/>
+                    </a:lnT>
+                    <a:lnB w="6350" cap="flat" cmpd="sng" algn="ctr">
+                      <a:solidFill>
+                        <a:srgbClr val="E5E2DC"/>
+                      </a:solidFill>
+                      <a:prstDash val="solid"/>
+                      <a:round/>
+                      <a:headEnd type="none" w="med" len="med"/>
+                      <a:tailEnd type="none" w="med" len="med"/>
+                    </a:lnB>
+                    <a:solidFill>
+                      <a:srgbClr val="2A9D8F"/>
+                    </a:solidFill>
+                  </a:tcPr>
+                </a:tc>
+                <a:tc>
+                  <a:txBody>
+                    <a:bodyPr/>
+                    <a:lstStyle/>
+                    <a:p>
+                      <a:pPr indent="0" marL="0">
+                        <a:buNone/>
+                      </a:pPr>
+                      <a:r>
+                        <a:rPr lang="en-US" sz="1200" b="1" dirty="0">
+                          <a:solidFill>
+                            <a:srgbClr val="FFFFFF"/>
+                          </a:solidFill>
+                          <a:latin typeface="Calibri" pitchFamily="34" charset="0"/>
+                          <a:ea typeface="Calibri" pitchFamily="34" charset="-122"/>
+                          <a:cs typeface="Calibri" pitchFamily="34" charset="-120"/>
+                        </a:rPr>
+                        <a:t>Liquid</a:t>
+                      </a:r>
+                      <a:endParaRPr lang="en-US" sz="1200" dirty="0">
+                        <a:latin typeface="Calibri" charset="0"/>
+                        <a:ea typeface="Calibri" charset="0"/>
+                        <a:cs typeface="Calibri" charset="0"/>
+                      </a:endParaRPr>
+                    </a:p>
+                  </a:txBody>
+                  <a:tcPr marL="91440" marR="91440" marT="45720" marB="45720">
+                    <a:lnL w="6350" cap="flat" cmpd="sng" algn="ctr">
+                      <a:solidFill>
+                        <a:srgbClr val="E5E2DC"/>
+                      </a:solidFill>
+                      <a:prstDash val="solid"/>
+                      <a:round/>
+                      <a:headEnd type="none" w="med" len="med"/>
+                      <a:tailEnd type="none" w="med" len="med"/>
+                    </a:lnL>
+                    <a:lnR w="6350" cap="flat" cmpd="sng" algn="ctr">
+                      <a:solidFill>
+                        <a:srgbClr val="E5E2DC"/>
+                      </a:solidFill>
+                      <a:prstDash val="solid"/>
+                      <a:round/>
+                      <a:headEnd type="none" w="med" len="med"/>
+                      <a:tailEnd type="none" w="med" len="med"/>
+                    </a:lnR>
+                    <a:lnT w="6350" cap="flat" cmpd="sng" algn="ctr">
+                      <a:solidFill>
+                        <a:srgbClr val="E5E2DC"/>
+                      </a:solidFill>
+                      <a:prstDash val="solid"/>
+                      <a:round/>
+                      <a:headEnd type="none" w="med" len="med"/>
+                      <a:tailEnd type="none" w="med" len="med"/>
+                    </a:lnT>
+                    <a:lnB w="6350" cap="flat" cmpd="sng" algn="ctr">
+                      <a:solidFill>
+                        <a:srgbClr val="E5E2DC"/>
+                      </a:solidFill>
+                      <a:prstDash val="solid"/>
+                      <a:round/>
+                      <a:headEnd type="none" w="med" len="med"/>
+                      <a:tailEnd type="none" w="med" len="med"/>
+                    </a:lnB>
+                    <a:solidFill>
+                      <a:srgbClr val="2A9D8F"/>
+                    </a:solidFill>
+                  </a:tcPr>
+                </a:tc>
+                <a:tc>
+                  <a:txBody>
+                    <a:bodyPr/>
+                    <a:lstStyle/>
+                    <a:p>
+                      <a:pPr indent="0" marL="0">
+                        <a:buNone/>
+                      </a:pPr>
+                      <a:r>
+                        <a:rPr lang="en-US" sz="1200" b="1" dirty="0">
+                          <a:solidFill>
+                            <a:srgbClr val="FFFFFF"/>
+                          </a:solidFill>
+                          <a:latin typeface="Calibri" pitchFamily="34" charset="0"/>
+                          <a:ea typeface="Calibri" pitchFamily="34" charset="-122"/>
+                          <a:cs typeface="Calibri" pitchFamily="34" charset="-120"/>
+                        </a:rPr>
+                        <a:t>Gas</a:t>
+                      </a:r>
+                      <a:endParaRPr lang="en-US" sz="1200" dirty="0">
+                        <a:latin typeface="Calibri" charset="0"/>
+                        <a:ea typeface="Calibri" charset="0"/>
+                        <a:cs typeface="Calibri" charset="0"/>
+                      </a:endParaRPr>
+                    </a:p>
+                  </a:txBody>
+                  <a:tcPr marL="91440" marR="91440" marT="45720" marB="45720">
+                    <a:lnL w="6350" cap="flat" cmpd="sng" algn="ctr">
+                      <a:solidFill>
+                        <a:srgbClr val="E5E2DC"/>
+                      </a:solidFill>
+                      <a:prstDash val="solid"/>
+                      <a:round/>
+                      <a:headEnd type="none" w="med" len="med"/>
+                      <a:tailEnd type="none" w="med" len="med"/>
+                    </a:lnL>
+                    <a:lnR w="6350" cap="flat" cmpd="sng" algn="ctr">
+                      <a:solidFill>
+                        <a:srgbClr val="E5E2DC"/>
+                      </a:solidFill>
+                      <a:prstDash val="solid"/>
+                      <a:round/>
+                      <a:headEnd type="none" w="med" len="med"/>
+                      <a:tailEnd type="none" w="med" len="med"/>
+                    </a:lnR>
+                    <a:lnT w="6350" cap="flat" cmpd="sng" algn="ctr">
+                      <a:solidFill>
+                        <a:srgbClr val="E5E2DC"/>
+                      </a:solidFill>
+                      <a:prstDash val="solid"/>
+                      <a:round/>
+                      <a:headEnd type="none" w="med" len="med"/>
+                      <a:tailEnd type="none" w="med" len="med"/>
+                    </a:lnT>
+                    <a:lnB w="6350" cap="flat" cmpd="sng" algn="ctr">
+                      <a:solidFill>
+                        <a:srgbClr val="E5E2DC"/>
+                      </a:solidFill>
+                      <a:prstDash val="solid"/>
+                      <a:round/>
+                      <a:headEnd type="none" w="med" len="med"/>
+                      <a:tailEnd type="none" w="med" len="med"/>
+                    </a:lnB>
+                    <a:solidFill>
+                      <a:srgbClr val="2A9D8F"/>
+                    </a:solidFill>
+                  </a:tcPr>
+                </a:tc>
+              </a:tr>
+              <a:tr h="502920">
+                <a:tc>
+                  <a:txBody>
+                    <a:bodyPr/>
+                    <a:lstStyle/>
+                    <a:p>
+                      <a:pPr indent="0" marL="0">
+                        <a:buNone/>
+                      </a:pPr>
+                      <a:r>
+                        <a:rPr lang="en-US" sz="1200" dirty="0">
+                          <a:solidFill>
+                            <a:srgbClr val="3D3A36"/>
+                          </a:solidFill>
+                          <a:latin typeface="Calibri" pitchFamily="34" charset="0"/>
+                          <a:ea typeface="Calibri" pitchFamily="34" charset="-122"/>
+                          <a:cs typeface="Calibri" pitchFamily="34" charset="-120"/>
+                        </a:rPr>
+                        <a:t>Shape</a:t>
+                      </a:r>
+                      <a:endParaRPr lang="en-US" sz="1200" dirty="0">
+                        <a:latin typeface="Calibri" charset="0"/>
+                        <a:ea typeface="Calibri" charset="0"/>
+                        <a:cs typeface="Calibri" charset="0"/>
+                      </a:endParaRPr>
+                    </a:p>
+                  </a:txBody>
+                  <a:tcPr marL="91440" marR="91440" marT="45720" marB="45720">
+                    <a:lnL w="6350" cap="flat" cmpd="sng" algn="ctr">
+                      <a:solidFill>
+                        <a:srgbClr val="E5E2DC"/>
+                      </a:solidFill>
+                      <a:prstDash val="solid"/>
+                      <a:round/>
+                      <a:headEnd type="none" w="med" len="med"/>
+                      <a:tailEnd type="none" w="med" len="med"/>
+                    </a:lnL>
+                    <a:lnR w="6350" cap="flat" cmpd="sng" algn="ctr">
+                      <a:solidFill>
+                        <a:srgbClr val="E5E2DC"/>
+                      </a:solidFill>
+                      <a:prstDash val="solid"/>
+                      <a:round/>
+                      <a:headEnd type="none" w="med" len="med"/>
+                      <a:tailEnd type="none" w="med" len="med"/>
+                    </a:lnR>
+                    <a:lnT w="6350" cap="flat" cmpd="sng" algn="ctr">
+                      <a:solidFill>
+                        <a:srgbClr val="E5E2DC"/>
+                      </a:solidFill>
+                      <a:prstDash val="solid"/>
+                      <a:round/>
+                      <a:headEnd type="none" w="med" len="med"/>
+                      <a:tailEnd type="none" w="med" len="med"/>
+                    </a:lnT>
+                    <a:lnB w="6350" cap="flat" cmpd="sng" algn="ctr">
+                      <a:solidFill>
+                        <a:srgbClr val="E5E2DC"/>
+                      </a:solidFill>
+                      <a:prstDash val="solid"/>
+                      <a:round/>
+                      <a:headEnd type="none" w="med" len="med"/>
+                      <a:tailEnd type="none" w="med" len="med"/>
+                    </a:lnB>
+                    <a:solidFill>
+                      <a:srgbClr val="FFFFFF"/>
+                    </a:solidFill>
+                  </a:tcPr>
+                </a:tc>
+                <a:tc>
+                  <a:txBody>
+                    <a:bodyPr/>
+                    <a:lstStyle/>
+                    <a:p>
+                      <a:pPr indent="0" marL="0">
+                        <a:buNone/>
+                      </a:pPr>
+                      <a:r>
+                        <a:rPr lang="en-US" sz="1200" dirty="0">
+                          <a:solidFill>
+                            <a:srgbClr val="3D3A36"/>
+                          </a:solidFill>
+                          <a:latin typeface="Calibri" pitchFamily="34" charset="0"/>
+                          <a:ea typeface="Calibri" pitchFamily="34" charset="-122"/>
+                          <a:cs typeface="Calibri" pitchFamily="34" charset="-120"/>
+                        </a:rPr>
+                        <a:t>Fixed</a:t>
+                      </a:r>
+                      <a:endParaRPr lang="en-US" sz="1200" dirty="0">
+                        <a:latin typeface="Calibri" charset="0"/>
+                        <a:ea typeface="Calibri" charset="0"/>
+                        <a:cs typeface="Calibri" charset="0"/>
+                      </a:endParaRPr>
+                    </a:p>
+                  </a:txBody>
+                  <a:tcPr marL="91440" marR="91440" marT="45720" marB="45720">
+                    <a:lnL w="6350" cap="flat" cmpd="sng" algn="ctr">
+                      <a:solidFill>
+                        <a:srgbClr val="E5E2DC"/>
+                      </a:solidFill>
+                      <a:prstDash val="solid"/>
+                      <a:round/>
+                      <a:headEnd type="none" w="med" len="med"/>
+                      <a:tailEnd type="none" w="med" len="med"/>
+                    </a:lnL>
+                    <a:lnR w="6350" cap="flat" cmpd="sng" algn="ctr">
+                      <a:solidFill>
+                        <a:srgbClr val="E5E2DC"/>
+                      </a:solidFill>
+                      <a:prstDash val="solid"/>
+                      <a:round/>
+                      <a:headEnd type="none" w="med" len="med"/>
+                      <a:tailEnd type="none" w="med" len="med"/>
+                    </a:lnR>
+                    <a:lnT w="6350" cap="flat" cmpd="sng" algn="ctr">
+                      <a:solidFill>
+                        <a:srgbClr val="E5E2DC"/>
+                      </a:solidFill>
+                      <a:prstDash val="solid"/>
+                      <a:round/>
+                      <a:headEnd type="none" w="med" len="med"/>
+                      <a:tailEnd type="none" w="med" len="med"/>
+                    </a:lnT>
+                    <a:lnB w="6350" cap="flat" cmpd="sng" algn="ctr">
+                      <a:solidFill>
+                        <a:srgbClr val="E5E2DC"/>
+                      </a:solidFill>
+                      <a:prstDash val="solid"/>
+                      <a:round/>
+                      <a:headEnd type="none" w="med" len="med"/>
+                      <a:tailEnd type="none" w="med" len="med"/>
+                    </a:lnB>
+                    <a:solidFill>
+                      <a:srgbClr val="FFFFFF"/>
+                    </a:solidFill>
+                  </a:tcPr>
+                </a:tc>
+                <a:tc>
+                  <a:txBody>
+                    <a:bodyPr/>
+                    <a:lstStyle/>
+                    <a:p>
+                      <a:pPr indent="0" marL="0">
+                        <a:buNone/>
+                      </a:pPr>
+                      <a:r>
+                        <a:rPr lang="en-US" sz="1200" dirty="0">
+                          <a:solidFill>
+                            <a:srgbClr val="3D3A36"/>
+                          </a:solidFill>
+                          <a:latin typeface="Calibri" pitchFamily="34" charset="0"/>
+                          <a:ea typeface="Calibri" pitchFamily="34" charset="-122"/>
+                          <a:cs typeface="Calibri" pitchFamily="34" charset="-120"/>
+                        </a:rPr>
+                        <a:t>Takes container</a:t>
+                      </a:r>
+                      <a:endParaRPr lang="en-US" sz="1200" dirty="0">
+                        <a:latin typeface="Calibri" charset="0"/>
+                        <a:ea typeface="Calibri" charset="0"/>
+                        <a:cs typeface="Calibri" charset="0"/>
+                      </a:endParaRPr>
+                    </a:p>
+                  </a:txBody>
+                  <a:tcPr marL="91440" marR="91440" marT="45720" marB="45720">
+                    <a:lnL w="6350" cap="flat" cmpd="sng" algn="ctr">
+                      <a:solidFill>
+                        <a:srgbClr val="E5E2DC"/>
+                      </a:solidFill>
+                      <a:prstDash val="solid"/>
+                      <a:round/>
+                      <a:headEnd type="none" w="med" len="med"/>
+                      <a:tailEnd type="none" w="med" len="med"/>
+                    </a:lnL>
+                    <a:lnR w="6350" cap="flat" cmpd="sng" algn="ctr">
+                      <a:solidFill>
+                        <a:srgbClr val="E5E2DC"/>
+                      </a:solidFill>
+                      <a:prstDash val="solid"/>
+                      <a:round/>
+                      <a:headEnd type="none" w="med" len="med"/>
+                      <a:tailEnd type="none" w="med" len="med"/>
+                    </a:lnR>
+                    <a:lnT w="6350" cap="flat" cmpd="sng" algn="ctr">
+                      <a:solidFill>
+                        <a:srgbClr val="E5E2DC"/>
+                      </a:solidFill>
+                      <a:prstDash val="solid"/>
+                      <a:round/>
+                      <a:headEnd type="none" w="med" len="med"/>
+                      <a:tailEnd type="none" w="med" len="med"/>
+                    </a:lnT>
+                    <a:lnB w="6350" cap="flat" cmpd="sng" algn="ctr">
+                      <a:solidFill>
+                        <a:srgbClr val="E5E2DC"/>
+                      </a:solidFill>
+                      <a:prstDash val="solid"/>
+                      <a:round/>
+                      <a:headEnd type="none" w="med" len="med"/>
+                      <a:tailEnd type="none" w="med" len="med"/>
+                    </a:lnB>
+                    <a:solidFill>
+                      <a:srgbClr val="FFFFFF"/>
+                    </a:solidFill>
+                  </a:tcPr>
+                </a:tc>
+                <a:tc>
+                  <a:txBody>
+                    <a:bodyPr/>
+                    <a:lstStyle/>
+                    <a:p>
+                      <a:pPr indent="0" marL="0">
+                        <a:buNone/>
+                      </a:pPr>
+                      <a:r>
+                        <a:rPr lang="en-US" sz="1200" dirty="0">
+                          <a:solidFill>
+                            <a:srgbClr val="3D3A36"/>
+                          </a:solidFill>
+                          <a:latin typeface="Calibri" pitchFamily="34" charset="0"/>
+                          <a:ea typeface="Calibri" pitchFamily="34" charset="-122"/>
+                          <a:cs typeface="Calibri" pitchFamily="34" charset="-120"/>
+                        </a:rPr>
+                        <a:t>Fills container</a:t>
+                      </a:r>
+                      <a:endParaRPr lang="en-US" sz="1200" dirty="0">
+                        <a:latin typeface="Calibri" charset="0"/>
+                        <a:ea typeface="Calibri" charset="0"/>
+                        <a:cs typeface="Calibri" charset="0"/>
+                      </a:endParaRPr>
+                    </a:p>
+                  </a:txBody>
+                  <a:tcPr marL="91440" marR="91440" marT="45720" marB="45720">
+                    <a:lnL w="6350" cap="flat" cmpd="sng" algn="ctr">
+                      <a:solidFill>
+                        <a:srgbClr val="E5E2DC"/>
+                      </a:solidFill>
+                      <a:prstDash val="solid"/>
+                      <a:round/>
+                      <a:headEnd type="none" w="med" len="med"/>
+                      <a:tailEnd type="none" w="med" len="med"/>
+                    </a:lnL>
+                    <a:lnR w="6350" cap="flat" cmpd="sng" algn="ctr">
+                      <a:solidFill>
+                        <a:srgbClr val="E5E2DC"/>
+                      </a:solidFill>
+                      <a:prstDash val="solid"/>
+                      <a:round/>
+                      <a:headEnd type="none" w="med" len="med"/>
+                      <a:tailEnd type="none" w="med" len="med"/>
+                    </a:lnR>
+                    <a:lnT w="6350" cap="flat" cmpd="sng" algn="ctr">
+                      <a:solidFill>
+                        <a:srgbClr val="E5E2DC"/>
+                      </a:solidFill>
+                      <a:prstDash val="solid"/>
+                      <a:round/>
+                      <a:headEnd type="none" w="med" len="med"/>
+                      <a:tailEnd type="none" w="med" len="med"/>
+                    </a:lnT>
+                    <a:lnB w="6350" cap="flat" cmpd="sng" algn="ctr">
+                      <a:solidFill>
+                        <a:srgbClr val="E5E2DC"/>
+                      </a:solidFill>
+                      <a:prstDash val="solid"/>
+                      <a:round/>
+                      <a:headEnd type="none" w="med" len="med"/>
+                      <a:tailEnd type="none" w="med" len="med"/>
+                    </a:lnB>
+                    <a:solidFill>
+                      <a:srgbClr val="FFFFFF"/>
+                    </a:solidFill>
+                  </a:tcPr>
+                </a:tc>
+              </a:tr>
+              <a:tr h="502920">
+                <a:tc>
+                  <a:txBody>
+                    <a:bodyPr/>
+                    <a:lstStyle/>
+                    <a:p>
+                      <a:pPr indent="0" marL="0">
+                        <a:buNone/>
+                      </a:pPr>
+                      <a:r>
+                        <a:rPr lang="en-US" sz="1200" dirty="0">
+                          <a:solidFill>
+                            <a:srgbClr val="3D3A36"/>
+                          </a:solidFill>
+                          <a:latin typeface="Calibri" pitchFamily="34" charset="0"/>
+                          <a:ea typeface="Calibri" pitchFamily="34" charset="-122"/>
+                          <a:cs typeface="Calibri" pitchFamily="34" charset="-120"/>
+                        </a:rPr>
+                        <a:t>Volume</a:t>
+                      </a:r>
+                      <a:endParaRPr lang="en-US" sz="1200" dirty="0">
+                        <a:latin typeface="Calibri" charset="0"/>
+                        <a:ea typeface="Calibri" charset="0"/>
+                        <a:cs typeface="Calibri" charset="0"/>
+                      </a:endParaRPr>
+                    </a:p>
+                  </a:txBody>
+                  <a:tcPr marL="91440" marR="91440" marT="45720" marB="45720">
+                    <a:lnL w="6350" cap="flat" cmpd="sng" algn="ctr">
+                      <a:solidFill>
+                        <a:srgbClr val="E5E2DC"/>
+                      </a:solidFill>
+                      <a:prstDash val="solid"/>
+                      <a:round/>
+                      <a:headEnd type="none" w="med" len="med"/>
+                      <a:tailEnd type="none" w="med" len="med"/>
+                    </a:lnL>
+                    <a:lnR w="6350" cap="flat" cmpd="sng" algn="ctr">
+                      <a:solidFill>
+                        <a:srgbClr val="E5E2DC"/>
+                      </a:solidFill>
+                      <a:prstDash val="solid"/>
+                      <a:round/>
+                      <a:headEnd type="none" w="med" len="med"/>
+                      <a:tailEnd type="none" w="med" len="med"/>
+                    </a:lnR>
+                    <a:lnT w="6350" cap="flat" cmpd="sng" algn="ctr">
+                      <a:solidFill>
+                        <a:srgbClr val="E5E2DC"/>
+                      </a:solidFill>
+                      <a:prstDash val="solid"/>
+                      <a:round/>
+                      <a:headEnd type="none" w="med" len="med"/>
+                      <a:tailEnd type="none" w="med" len="med"/>
+                    </a:lnT>
+                    <a:lnB w="6350" cap="flat" cmpd="sng" algn="ctr">
+                      <a:solidFill>
+                        <a:srgbClr val="E5E2DC"/>
+                      </a:solidFill>
+                      <a:prstDash val="solid"/>
+                      <a:round/>
+                      <a:headEnd type="none" w="med" len="med"/>
+                      <a:tailEnd type="none" w="med" len="med"/>
+                    </a:lnB>
+                    <a:solidFill>
+                      <a:srgbClr val="F8F6F3"/>
+                    </a:solidFill>
+                  </a:tcPr>
+                </a:tc>
+                <a:tc>
+                  <a:txBody>
+                    <a:bodyPr/>
+                    <a:lstStyle/>
+                    <a:p>
+                      <a:pPr indent="0" marL="0">
+                        <a:buNone/>
+                      </a:pPr>
+                      <a:r>
+                        <a:rPr lang="en-US" sz="1200" dirty="0">
+                          <a:solidFill>
+                            <a:srgbClr val="3D3A36"/>
+                          </a:solidFill>
+                          <a:latin typeface="Calibri" pitchFamily="34" charset="0"/>
+                          <a:ea typeface="Calibri" pitchFamily="34" charset="-122"/>
+                          <a:cs typeface="Calibri" pitchFamily="34" charset="-120"/>
+                        </a:rPr>
+                        <a:t>Fixed</a:t>
+                      </a:r>
+                      <a:endParaRPr lang="en-US" sz="1200" dirty="0">
+                        <a:latin typeface="Calibri" charset="0"/>
+                        <a:ea typeface="Calibri" charset="0"/>
+                        <a:cs typeface="Calibri" charset="0"/>
+                      </a:endParaRPr>
+                    </a:p>
+                  </a:txBody>
+                  <a:tcPr marL="91440" marR="91440" marT="45720" marB="45720">
+                    <a:lnL w="6350" cap="flat" cmpd="sng" algn="ctr">
+                      <a:solidFill>
+                        <a:srgbClr val="E5E2DC"/>
+                      </a:solidFill>
+                      <a:prstDash val="solid"/>
+                      <a:round/>
+                      <a:headEnd type="none" w="med" len="med"/>
+                      <a:tailEnd type="none" w="med" len="med"/>
+                    </a:lnL>
+                    <a:lnR w="6350" cap="flat" cmpd="sng" algn="ctr">
+                      <a:solidFill>
+                        <a:srgbClr val="E5E2DC"/>
+                      </a:solidFill>
+                      <a:prstDash val="solid"/>
+                      <a:round/>
+                      <a:headEnd type="none" w="med" len="med"/>
+                      <a:tailEnd type="none" w="med" len="med"/>
+                    </a:lnR>
+                    <a:lnT w="6350" cap="flat" cmpd="sng" algn="ctr">
+                      <a:solidFill>
+                        <a:srgbClr val="E5E2DC"/>
+                      </a:solidFill>
+                      <a:prstDash val="solid"/>
+                      <a:round/>
+                      <a:headEnd type="none" w="med" len="med"/>
+                      <a:tailEnd type="none" w="med" len="med"/>
+                    </a:lnT>
+                    <a:lnB w="6350" cap="flat" cmpd="sng" algn="ctr">
+                      <a:solidFill>
+                        <a:srgbClr val="E5E2DC"/>
+                      </a:solidFill>
+                      <a:prstDash val="solid"/>
+                      <a:round/>
+                      <a:headEnd type="none" w="med" len="med"/>
+                      <a:tailEnd type="none" w="med" len="med"/>
+                    </a:lnB>
+                    <a:solidFill>
+                      <a:srgbClr val="F8F6F3"/>
+                    </a:solidFill>
+                  </a:tcPr>
+                </a:tc>
+                <a:tc>
+                  <a:txBody>
+                    <a:bodyPr/>
+                    <a:lstStyle/>
+                    <a:p>
+                      <a:pPr indent="0" marL="0">
+                        <a:buNone/>
+                      </a:pPr>
+                      <a:r>
+                        <a:rPr lang="en-US" sz="1200" dirty="0">
+                          <a:solidFill>
+                            <a:srgbClr val="3D3A36"/>
+                          </a:solidFill>
+                          <a:latin typeface="Calibri" pitchFamily="34" charset="0"/>
+                          <a:ea typeface="Calibri" pitchFamily="34" charset="-122"/>
+                          <a:cs typeface="Calibri" pitchFamily="34" charset="-120"/>
+                        </a:rPr>
+                        <a:t>Fixed</a:t>
+                      </a:r>
+                      <a:endParaRPr lang="en-US" sz="1200" dirty="0">
+                        <a:latin typeface="Calibri" charset="0"/>
+                        <a:ea typeface="Calibri" charset="0"/>
+                        <a:cs typeface="Calibri" charset="0"/>
+                      </a:endParaRPr>
+                    </a:p>
+                  </a:txBody>
+                  <a:tcPr marL="91440" marR="91440" marT="45720" marB="45720">
+                    <a:lnL w="6350" cap="flat" cmpd="sng" algn="ctr">
+                      <a:solidFill>
+                        <a:srgbClr val="E5E2DC"/>
+                      </a:solidFill>
+                      <a:prstDash val="solid"/>
+                      <a:round/>
+                      <a:headEnd type="none" w="med" len="med"/>
+                      <a:tailEnd type="none" w="med" len="med"/>
+                    </a:lnL>
+                    <a:lnR w="6350" cap="flat" cmpd="sng" algn="ctr">
+                      <a:solidFill>
+                        <a:srgbClr val="E5E2DC"/>
+                      </a:solidFill>
+                      <a:prstDash val="solid"/>
+                      <a:round/>
+                      <a:headEnd type="none" w="med" len="med"/>
+                      <a:tailEnd type="none" w="med" len="med"/>
+                    </a:lnR>
+                    <a:lnT w="6350" cap="flat" cmpd="sng" algn="ctr">
+                      <a:solidFill>
+                        <a:srgbClr val="E5E2DC"/>
+                      </a:solidFill>
+                      <a:prstDash val="solid"/>
+                      <a:round/>
+                      <a:headEnd type="none" w="med" len="med"/>
+                      <a:tailEnd type="none" w="med" len="med"/>
+                    </a:lnT>
+                    <a:lnB w="6350" cap="flat" cmpd="sng" algn="ctr">
+                      <a:solidFill>
+                        <a:srgbClr val="E5E2DC"/>
+                      </a:solidFill>
+                      <a:prstDash val="solid"/>
+                      <a:round/>
+                      <a:headEnd type="none" w="med" len="med"/>
+                      <a:tailEnd type="none" w="med" len="med"/>
+                    </a:lnB>
+                    <a:solidFill>
+                      <a:srgbClr val="F8F6F3"/>
+                    </a:solidFill>
+                  </a:tcPr>
+                </a:tc>
+                <a:tc>
+                  <a:txBody>
+                    <a:bodyPr/>
+                    <a:lstStyle/>
+                    <a:p>
+                      <a:pPr indent="0" marL="0">
+                        <a:buNone/>
+                      </a:pPr>
+                      <a:r>
+                        <a:rPr lang="en-US" sz="1200" dirty="0">
+                          <a:solidFill>
+                            <a:srgbClr val="3D3A36"/>
+                          </a:solidFill>
+                          <a:latin typeface="Calibri" pitchFamily="34" charset="0"/>
+                          <a:ea typeface="Calibri" pitchFamily="34" charset="-122"/>
+                          <a:cs typeface="Calibri" pitchFamily="34" charset="-120"/>
+                        </a:rPr>
+                        <a:t>Expands to fill</a:t>
+                      </a:r>
+                      <a:endParaRPr lang="en-US" sz="1200" dirty="0">
+                        <a:latin typeface="Calibri" charset="0"/>
+                        <a:ea typeface="Calibri" charset="0"/>
+                        <a:cs typeface="Calibri" charset="0"/>
+                      </a:endParaRPr>
+                    </a:p>
+                  </a:txBody>
+                  <a:tcPr marL="91440" marR="91440" marT="45720" marB="45720">
+                    <a:lnL w="6350" cap="flat" cmpd="sng" algn="ctr">
+                      <a:solidFill>
+                        <a:srgbClr val="E5E2DC"/>
+                      </a:solidFill>
+                      <a:prstDash val="solid"/>
+                      <a:round/>
+                      <a:headEnd type="none" w="med" len="med"/>
+                      <a:tailEnd type="none" w="med" len="med"/>
+                    </a:lnL>
+                    <a:lnR w="6350" cap="flat" cmpd="sng" algn="ctr">
+                      <a:solidFill>
+                        <a:srgbClr val="E5E2DC"/>
+                      </a:solidFill>
+                      <a:prstDash val="solid"/>
+                      <a:round/>
+                      <a:headEnd type="none" w="med" len="med"/>
+                      <a:tailEnd type="none" w="med" len="med"/>
+                    </a:lnR>
+                    <a:lnT w="6350" cap="flat" cmpd="sng" algn="ctr">
+                      <a:solidFill>
+                        <a:srgbClr val="E5E2DC"/>
+                      </a:solidFill>
+                      <a:prstDash val="solid"/>
+                      <a:round/>
+                      <a:headEnd type="none" w="med" len="med"/>
+                      <a:tailEnd type="none" w="med" len="med"/>
+                    </a:lnT>
+                    <a:lnB w="6350" cap="flat" cmpd="sng" algn="ctr">
+                      <a:solidFill>
+                        <a:srgbClr val="E5E2DC"/>
+                      </a:solidFill>
+                      <a:prstDash val="solid"/>
+                      <a:round/>
+                      <a:headEnd type="none" w="med" len="med"/>
+                      <a:tailEnd type="none" w="med" len="med"/>
+                    </a:lnB>
+                    <a:solidFill>
+                      <a:srgbClr val="F8F6F3"/>
+                    </a:solidFill>
+                  </a:tcPr>
+                </a:tc>
+              </a:tr>
+              <a:tr h="502920">
+                <a:tc>
+                  <a:txBody>
+                    <a:bodyPr/>
+                    <a:lstStyle/>
+                    <a:p>
+                      <a:pPr indent="0" marL="0">
+                        <a:buNone/>
+                      </a:pPr>
+                      <a:r>
+                        <a:rPr lang="en-US" sz="1200" dirty="0">
+                          <a:solidFill>
+                            <a:srgbClr val="3D3A36"/>
+                          </a:solidFill>
+                          <a:latin typeface="Calibri" pitchFamily="34" charset="0"/>
+                          <a:ea typeface="Calibri" pitchFamily="34" charset="-122"/>
+                          <a:cs typeface="Calibri" pitchFamily="34" charset="-120"/>
+                        </a:rPr>
+                        <a:t>Density</a:t>
+                      </a:r>
+                      <a:endParaRPr lang="en-US" sz="1200" dirty="0">
+                        <a:latin typeface="Calibri" charset="0"/>
+                        <a:ea typeface="Calibri" charset="0"/>
+                        <a:cs typeface="Calibri" charset="0"/>
+                      </a:endParaRPr>
+                    </a:p>
+                  </a:txBody>
+                  <a:tcPr marL="91440" marR="91440" marT="45720" marB="45720">
+                    <a:lnL w="6350" cap="flat" cmpd="sng" algn="ctr">
+                      <a:solidFill>
+                        <a:srgbClr val="E5E2DC"/>
+                      </a:solidFill>
+                      <a:prstDash val="solid"/>
+                      <a:round/>
+                      <a:headEnd type="none" w="med" len="med"/>
+                      <a:tailEnd type="none" w="med" len="med"/>
+                    </a:lnL>
+                    <a:lnR w="6350" cap="flat" cmpd="sng" algn="ctr">
+                      <a:solidFill>
+                        <a:srgbClr val="E5E2DC"/>
+                      </a:solidFill>
+                      <a:prstDash val="solid"/>
+                      <a:round/>
+                      <a:headEnd type="none" w="med" len="med"/>
+                      <a:tailEnd type="none" w="med" len="med"/>
+                    </a:lnR>
+                    <a:lnT w="6350" cap="flat" cmpd="sng" algn="ctr">
+                      <a:solidFill>
+                        <a:srgbClr val="E5E2DC"/>
+                      </a:solidFill>
+                      <a:prstDash val="solid"/>
+                      <a:round/>
+                      <a:headEnd type="none" w="med" len="med"/>
+                      <a:tailEnd type="none" w="med" len="med"/>
+                    </a:lnT>
+                    <a:lnB w="6350" cap="flat" cmpd="sng" algn="ctr">
+                      <a:solidFill>
+                        <a:srgbClr val="E5E2DC"/>
+                      </a:solidFill>
+                      <a:prstDash val="solid"/>
+                      <a:round/>
+                      <a:headEnd type="none" w="med" len="med"/>
+                      <a:tailEnd type="none" w="med" len="med"/>
+                    </a:lnB>
+                    <a:solidFill>
+                      <a:srgbClr val="FFFFFF"/>
+                    </a:solidFill>
+                  </a:tcPr>
+                </a:tc>
+                <a:tc>
+                  <a:txBody>
+                    <a:bodyPr/>
+                    <a:lstStyle/>
+                    <a:p>
+                      <a:pPr indent="0" marL="0">
+                        <a:buNone/>
+                      </a:pPr>
+                      <a:r>
+                        <a:rPr lang="en-US" sz="1200" dirty="0">
+                          <a:solidFill>
+                            <a:srgbClr val="3D3A36"/>
+                          </a:solidFill>
+                          <a:latin typeface="Calibri" pitchFamily="34" charset="0"/>
+                          <a:ea typeface="Calibri" pitchFamily="34" charset="-122"/>
+                          <a:cs typeface="Calibri" pitchFamily="34" charset="-120"/>
+                        </a:rPr>
+                        <a:t>High</a:t>
+                      </a:r>
+                      <a:endParaRPr lang="en-US" sz="1200" dirty="0">
+                        <a:latin typeface="Calibri" charset="0"/>
+                        <a:ea typeface="Calibri" charset="0"/>
+                        <a:cs typeface="Calibri" charset="0"/>
+                      </a:endParaRPr>
+                    </a:p>
+                  </a:txBody>
+                  <a:tcPr marL="91440" marR="91440" marT="45720" marB="45720">
+                    <a:lnL w="6350" cap="flat" cmpd="sng" algn="ctr">
+                      <a:solidFill>
+                        <a:srgbClr val="E5E2DC"/>
+                      </a:solidFill>
+                      <a:prstDash val="solid"/>
+                      <a:round/>
+                      <a:headEnd type="none" w="med" len="med"/>
+                      <a:tailEnd type="none" w="med" len="med"/>
+                    </a:lnL>
+                    <a:lnR w="6350" cap="flat" cmpd="sng" algn="ctr">
+                      <a:solidFill>
+                        <a:srgbClr val="E5E2DC"/>
+                      </a:solidFill>
+                      <a:prstDash val="solid"/>
+                      <a:round/>
+                      <a:headEnd type="none" w="med" len="med"/>
+                      <a:tailEnd type="none" w="med" len="med"/>
+                    </a:lnR>
+                    <a:lnT w="6350" cap="flat" cmpd="sng" algn="ctr">
+                      <a:solidFill>
+                        <a:srgbClr val="E5E2DC"/>
+                      </a:solidFill>
+                      <a:prstDash val="solid"/>
+                      <a:round/>
+                      <a:headEnd type="none" w="med" len="med"/>
+                      <a:tailEnd type="none" w="med" len="med"/>
+                    </a:lnT>
+                    <a:lnB w="6350" cap="flat" cmpd="sng" algn="ctr">
+                      <a:solidFill>
+                        <a:srgbClr val="E5E2DC"/>
+                      </a:solidFill>
+                      <a:prstDash val="solid"/>
+                      <a:round/>
+                      <a:headEnd type="none" w="med" len="med"/>
+                      <a:tailEnd type="none" w="med" len="med"/>
+                    </a:lnB>
+                    <a:solidFill>
+                      <a:srgbClr val="FFFFFF"/>
+                    </a:solidFill>
+                  </a:tcPr>
+                </a:tc>
+                <a:tc>
+                  <a:txBody>
+                    <a:bodyPr/>
+                    <a:lstStyle/>
+                    <a:p>
+                      <a:pPr indent="0" marL="0">
+                        <a:buNone/>
+                      </a:pPr>
+                      <a:r>
+                        <a:rPr lang="en-US" sz="1200" dirty="0">
+                          <a:solidFill>
+                            <a:srgbClr val="3D3A36"/>
+                          </a:solidFill>
+                          <a:latin typeface="Calibri" pitchFamily="34" charset="0"/>
+                          <a:ea typeface="Calibri" pitchFamily="34" charset="-122"/>
+                          <a:cs typeface="Calibri" pitchFamily="34" charset="-120"/>
+                        </a:rPr>
+                        <a:t>Medium</a:t>
+                      </a:r>
+                      <a:endParaRPr lang="en-US" sz="1200" dirty="0">
+                        <a:latin typeface="Calibri" charset="0"/>
+                        <a:ea typeface="Calibri" charset="0"/>
+                        <a:cs typeface="Calibri" charset="0"/>
+                      </a:endParaRPr>
+                    </a:p>
+                  </a:txBody>
+                  <a:tcPr marL="91440" marR="91440" marT="45720" marB="45720">
+                    <a:lnL w="6350" cap="flat" cmpd="sng" algn="ctr">
+                      <a:solidFill>
+                        <a:srgbClr val="E5E2DC"/>
+                      </a:solidFill>
+                      <a:prstDash val="solid"/>
+                      <a:round/>
+                      <a:headEnd type="none" w="med" len="med"/>
+                      <a:tailEnd type="none" w="med" len="med"/>
+                    </a:lnL>
+                    <a:lnR w="6350" cap="flat" cmpd="sng" algn="ctr">
+                      <a:solidFill>
+                        <a:srgbClr val="E5E2DC"/>
+                      </a:solidFill>
+                      <a:prstDash val="solid"/>
+                      <a:round/>
+                      <a:headEnd type="none" w="med" len="med"/>
+                      <a:tailEnd type="none" w="med" len="med"/>
+                    </a:lnR>
+                    <a:lnT w="6350" cap="flat" cmpd="sng" algn="ctr">
+                      <a:solidFill>
+                        <a:srgbClr val="E5E2DC"/>
+                      </a:solidFill>
+                      <a:prstDash val="solid"/>
+                      <a:round/>
+                      <a:headEnd type="none" w="med" len="med"/>
+                      <a:tailEnd type="none" w="med" len="med"/>
+                    </a:lnT>
+                    <a:lnB w="6350" cap="flat" cmpd="sng" algn="ctr">
+                      <a:solidFill>
+                        <a:srgbClr val="E5E2DC"/>
+                      </a:solidFill>
+                      <a:prstDash val="solid"/>
+                      <a:round/>
+                      <a:headEnd type="none" w="med" len="med"/>
+                      <a:tailEnd type="none" w="med" len="med"/>
+                    </a:lnB>
+                    <a:solidFill>
+                      <a:srgbClr val="FFFFFF"/>
+                    </a:solidFill>
+                  </a:tcPr>
+                </a:tc>
+                <a:tc>
+                  <a:txBody>
+                    <a:bodyPr/>
+                    <a:lstStyle/>
+                    <a:p>
+                      <a:pPr indent="0" marL="0">
+                        <a:buNone/>
+                      </a:pPr>
+                      <a:r>
+                        <a:rPr lang="en-US" sz="1200" dirty="0">
+                          <a:solidFill>
+                            <a:srgbClr val="3D3A36"/>
+                          </a:solidFill>
+                          <a:latin typeface="Calibri" pitchFamily="34" charset="0"/>
+                          <a:ea typeface="Calibri" pitchFamily="34" charset="-122"/>
+                          <a:cs typeface="Calibri" pitchFamily="34" charset="-120"/>
+                        </a:rPr>
+                        <a:t>Low</a:t>
+                      </a:r>
+                      <a:endParaRPr lang="en-US" sz="1200" dirty="0">
+                        <a:latin typeface="Calibri" charset="0"/>
+                        <a:ea typeface="Calibri" charset="0"/>
+                        <a:cs typeface="Calibri" charset="0"/>
+                      </a:endParaRPr>
+                    </a:p>
+                  </a:txBody>
+                  <a:tcPr marL="91440" marR="91440" marT="45720" marB="45720">
+                    <a:lnL w="6350" cap="flat" cmpd="sng" algn="ctr">
+                      <a:solidFill>
+                        <a:srgbClr val="E5E2DC"/>
+                      </a:solidFill>
+                      <a:prstDash val="solid"/>
+                      <a:round/>
+                      <a:headEnd type="none" w="med" len="med"/>
+                      <a:tailEnd type="none" w="med" len="med"/>
+                    </a:lnL>
+                    <a:lnR w="6350" cap="flat" cmpd="sng" algn="ctr">
+                      <a:solidFill>
+                        <a:srgbClr val="E5E2DC"/>
+                      </a:solidFill>
+                      <a:prstDash val="solid"/>
+                      <a:round/>
+                      <a:headEnd type="none" w="med" len="med"/>
+                      <a:tailEnd type="none" w="med" len="med"/>
+                    </a:lnR>
+                    <a:lnT w="6350" cap="flat" cmpd="sng" algn="ctr">
+                      <a:solidFill>
+                        <a:srgbClr val="E5E2DC"/>
+                      </a:solidFill>
+                      <a:prstDash val="solid"/>
+                      <a:round/>
+                      <a:headEnd type="none" w="med" len="med"/>
+                      <a:tailEnd type="none" w="med" len="med"/>
+                    </a:lnT>
+                    <a:lnB w="6350" cap="flat" cmpd="sng" algn="ctr">
+                      <a:solidFill>
+                        <a:srgbClr val="E5E2DC"/>
+                      </a:solidFill>
+                      <a:prstDash val="solid"/>
+                      <a:round/>
+                      <a:headEnd type="none" w="med" len="med"/>
+                      <a:tailEnd type="none" w="med" len="med"/>
+                    </a:lnB>
+                    <a:solidFill>
+                      <a:srgbClr val="FFFFFF"/>
+                    </a:solidFill>
+                  </a:tcPr>
+                </a:tc>
+              </a:tr>
+              <a:tr h="502920">
+                <a:tc>
+                  <a:txBody>
+                    <a:bodyPr/>
+                    <a:lstStyle/>
+                    <a:p>
+                      <a:pPr indent="0" marL="0">
+                        <a:buNone/>
+                      </a:pPr>
+                      <a:r>
+                        <a:rPr lang="en-US" sz="1200" dirty="0">
+                          <a:solidFill>
+                            <a:srgbClr val="3D3A36"/>
+                          </a:solidFill>
+                          <a:latin typeface="Calibri" pitchFamily="34" charset="0"/>
+                          <a:ea typeface="Calibri" pitchFamily="34" charset="-122"/>
+                          <a:cs typeface="Calibri" pitchFamily="34" charset="-120"/>
+                        </a:rPr>
+                        <a:t>Compressible?</a:t>
+                      </a:r>
+                      <a:endParaRPr lang="en-US" sz="1200" dirty="0">
+                        <a:latin typeface="Calibri" charset="0"/>
+                        <a:ea typeface="Calibri" charset="0"/>
+                        <a:cs typeface="Calibri" charset="0"/>
+                      </a:endParaRPr>
+                    </a:p>
+                  </a:txBody>
+                  <a:tcPr marL="91440" marR="91440" marT="45720" marB="45720">
+                    <a:lnL w="6350" cap="flat" cmpd="sng" algn="ctr">
+                      <a:solidFill>
+                        <a:srgbClr val="E5E2DC"/>
+                      </a:solidFill>
+                      <a:prstDash val="solid"/>
+                      <a:round/>
+                      <a:headEnd type="none" w="med" len="med"/>
+                      <a:tailEnd type="none" w="med" len="med"/>
+                    </a:lnL>
+                    <a:lnR w="6350" cap="flat" cmpd="sng" algn="ctr">
+                      <a:solidFill>
+                        <a:srgbClr val="E5E2DC"/>
+                      </a:solidFill>
+                      <a:prstDash val="solid"/>
+                      <a:round/>
+                      <a:headEnd type="none" w="med" len="med"/>
+                      <a:tailEnd type="none" w="med" len="med"/>
+                    </a:lnR>
+                    <a:lnT w="6350" cap="flat" cmpd="sng" algn="ctr">
+                      <a:solidFill>
+                        <a:srgbClr val="E5E2DC"/>
+                      </a:solidFill>
+                      <a:prstDash val="solid"/>
+                      <a:round/>
+                      <a:headEnd type="none" w="med" len="med"/>
+                      <a:tailEnd type="none" w="med" len="med"/>
+                    </a:lnT>
+                    <a:lnB w="6350" cap="flat" cmpd="sng" algn="ctr">
+                      <a:solidFill>
+                        <a:srgbClr val="E5E2DC"/>
+                      </a:solidFill>
+                      <a:prstDash val="solid"/>
+                      <a:round/>
+                      <a:headEnd type="none" w="med" len="med"/>
+                      <a:tailEnd type="none" w="med" len="med"/>
+                    </a:lnB>
+                    <a:solidFill>
+                      <a:srgbClr val="F8F6F3"/>
+                    </a:solidFill>
+                  </a:tcPr>
+                </a:tc>
+                <a:tc>
+                  <a:txBody>
+                    <a:bodyPr/>
+                    <a:lstStyle/>
+                    <a:p>
+                      <a:pPr indent="0" marL="0">
+                        <a:buNone/>
+                      </a:pPr>
+                      <a:r>
+                        <a:rPr lang="en-US" sz="1200" dirty="0">
+                          <a:solidFill>
+                            <a:srgbClr val="3D3A36"/>
+                          </a:solidFill>
+                          <a:latin typeface="Calibri" pitchFamily="34" charset="0"/>
+                          <a:ea typeface="Calibri" pitchFamily="34" charset="-122"/>
+                          <a:cs typeface="Calibri" pitchFamily="34" charset="-120"/>
+                        </a:rPr>
+                        <a:t>No</a:t>
+                      </a:r>
+                      <a:endParaRPr lang="en-US" sz="1200" dirty="0">
+                        <a:latin typeface="Calibri" charset="0"/>
+                        <a:ea typeface="Calibri" charset="0"/>
+                        <a:cs typeface="Calibri" charset="0"/>
+                      </a:endParaRPr>
+                    </a:p>
+                  </a:txBody>
+                  <a:tcPr marL="91440" marR="91440" marT="45720" marB="45720">
+                    <a:lnL w="6350" cap="flat" cmpd="sng" algn="ctr">
+                      <a:solidFill>
+                        <a:srgbClr val="E5E2DC"/>
+                      </a:solidFill>
+                      <a:prstDash val="solid"/>
+                      <a:round/>
+                      <a:headEnd type="none" w="med" len="med"/>
+                      <a:tailEnd type="none" w="med" len="med"/>
+                    </a:lnL>
+                    <a:lnR w="6350" cap="flat" cmpd="sng" algn="ctr">
+                      <a:solidFill>
+                        <a:srgbClr val="E5E2DC"/>
+                      </a:solidFill>
+                      <a:prstDash val="solid"/>
+                      <a:round/>
+                      <a:headEnd type="none" w="med" len="med"/>
+                      <a:tailEnd type="none" w="med" len="med"/>
+                    </a:lnR>
+                    <a:lnT w="6350" cap="flat" cmpd="sng" algn="ctr">
+                      <a:solidFill>
+                        <a:srgbClr val="E5E2DC"/>
+                      </a:solidFill>
+                      <a:prstDash val="solid"/>
+                      <a:round/>
+                      <a:headEnd type="none" w="med" len="med"/>
+                      <a:tailEnd type="none" w="med" len="med"/>
+                    </a:lnT>
+                    <a:lnB w="6350" cap="flat" cmpd="sng" algn="ctr">
+                      <a:solidFill>
+                        <a:srgbClr val="E5E2DC"/>
+                      </a:solidFill>
+                      <a:prstDash val="solid"/>
+                      <a:round/>
+                      <a:headEnd type="none" w="med" len="med"/>
+                      <a:tailEnd type="none" w="med" len="med"/>
+                    </a:lnB>
+                    <a:solidFill>
+                      <a:srgbClr val="F8F6F3"/>
+                    </a:solidFill>
+                  </a:tcPr>
+                </a:tc>
+                <a:tc>
+                  <a:txBody>
+                    <a:bodyPr/>
+                    <a:lstStyle/>
+                    <a:p>
+                      <a:pPr indent="0" marL="0">
+                        <a:buNone/>
+                      </a:pPr>
+                      <a:r>
+                        <a:rPr lang="en-US" sz="1200" dirty="0">
+                          <a:solidFill>
+                            <a:srgbClr val="3D3A36"/>
+                          </a:solidFill>
+                          <a:latin typeface="Calibri" pitchFamily="34" charset="0"/>
+                          <a:ea typeface="Calibri" pitchFamily="34" charset="-122"/>
+                          <a:cs typeface="Calibri" pitchFamily="34" charset="-120"/>
+                        </a:rPr>
+                        <a:t>Almost no</a:t>
+                      </a:r>
+                      <a:endParaRPr lang="en-US" sz="1200" dirty="0">
+                        <a:latin typeface="Calibri" charset="0"/>
+                        <a:ea typeface="Calibri" charset="0"/>
+                        <a:cs typeface="Calibri" charset="0"/>
+                      </a:endParaRPr>
+                    </a:p>
+                  </a:txBody>
+                  <a:tcPr marL="91440" marR="91440" marT="45720" marB="45720">
+                    <a:lnL w="6350" cap="flat" cmpd="sng" algn="ctr">
+                      <a:solidFill>
+                        <a:srgbClr val="E5E2DC"/>
+                      </a:solidFill>
+                      <a:prstDash val="solid"/>
+                      <a:round/>
+                      <a:headEnd type="none" w="med" len="med"/>
+                      <a:tailEnd type="none" w="med" len="med"/>
+                    </a:lnL>
+                    <a:lnR w="6350" cap="flat" cmpd="sng" algn="ctr">
+                      <a:solidFill>
+                        <a:srgbClr val="E5E2DC"/>
+                      </a:solidFill>
+                      <a:prstDash val="solid"/>
+                      <a:round/>
+                      <a:headEnd type="none" w="med" len="med"/>
+                      <a:tailEnd type="none" w="med" len="med"/>
+                    </a:lnR>
+                    <a:lnT w="6350" cap="flat" cmpd="sng" algn="ctr">
+                      <a:solidFill>
+                        <a:srgbClr val="E5E2DC"/>
+                      </a:solidFill>
+                      <a:prstDash val="solid"/>
+                      <a:round/>
+                      <a:headEnd type="none" w="med" len="med"/>
+                      <a:tailEnd type="none" w="med" len="med"/>
+                    </a:lnT>
+                    <a:lnB w="6350" cap="flat" cmpd="sng" algn="ctr">
+                      <a:solidFill>
+                        <a:srgbClr val="E5E2DC"/>
+                      </a:solidFill>
+                      <a:prstDash val="solid"/>
+                      <a:round/>
+                      <a:headEnd type="none" w="med" len="med"/>
+                      <a:tailEnd type="none" w="med" len="med"/>
+                    </a:lnB>
+                    <a:solidFill>
+                      <a:srgbClr val="F8F6F3"/>
+                    </a:solidFill>
+                  </a:tcPr>
+                </a:tc>
+                <a:tc>
+                  <a:txBody>
+                    <a:bodyPr/>
+                    <a:lstStyle/>
+                    <a:p>
+                      <a:pPr indent="0" marL="0">
+                        <a:buNone/>
+                      </a:pPr>
+                      <a:r>
+                        <a:rPr lang="en-US" sz="1200" dirty="0">
+                          <a:solidFill>
+                            <a:srgbClr val="3D3A36"/>
+                          </a:solidFill>
+                          <a:latin typeface="Calibri" pitchFamily="34" charset="0"/>
+                          <a:ea typeface="Calibri" pitchFamily="34" charset="-122"/>
+                          <a:cs typeface="Calibri" pitchFamily="34" charset="-120"/>
+                        </a:rPr>
+                        <a:t>Yes, easily</a:t>
+                      </a:r>
+                      <a:endParaRPr lang="en-US" sz="1200" dirty="0">
+                        <a:latin typeface="Calibri" charset="0"/>
+                        <a:ea typeface="Calibri" charset="0"/>
+                        <a:cs typeface="Calibri" charset="0"/>
+                      </a:endParaRPr>
+                    </a:p>
+                  </a:txBody>
+                  <a:tcPr marL="91440" marR="91440" marT="45720" marB="45720">
+                    <a:lnL w="6350" cap="flat" cmpd="sng" algn="ctr">
+                      <a:solidFill>
+                        <a:srgbClr val="E5E2DC"/>
+                      </a:solidFill>
+                      <a:prstDash val="solid"/>
+                      <a:round/>
+                      <a:headEnd type="none" w="med" len="med"/>
+                      <a:tailEnd type="none" w="med" len="med"/>
+                    </a:lnL>
+                    <a:lnR w="6350" cap="flat" cmpd="sng" algn="ctr">
+                      <a:solidFill>
+                        <a:srgbClr val="E5E2DC"/>
+                      </a:solidFill>
+                      <a:prstDash val="solid"/>
+                      <a:round/>
+                      <a:headEnd type="none" w="med" len="med"/>
+                      <a:tailEnd type="none" w="med" len="med"/>
+                    </a:lnR>
+                    <a:lnT w="6350" cap="flat" cmpd="sng" algn="ctr">
+                      <a:solidFill>
+                        <a:srgbClr val="E5E2DC"/>
+                      </a:solidFill>
+                      <a:prstDash val="solid"/>
+                      <a:round/>
+                      <a:headEnd type="none" w="med" len="med"/>
+                      <a:tailEnd type="none" w="med" len="med"/>
+                    </a:lnT>
+                    <a:lnB w="6350" cap="flat" cmpd="sng" algn="ctr">
+                      <a:solidFill>
+                        <a:srgbClr val="E5E2DC"/>
+                      </a:solidFill>
+                      <a:prstDash val="solid"/>
+                      <a:round/>
+                      <a:headEnd type="none" w="med" len="med"/>
+                      <a:tailEnd type="none" w="med" len="med"/>
+                    </a:lnB>
+                    <a:solidFill>
+                      <a:srgbClr val="F8F6F3"/>
+                    </a:solidFill>
+                  </a:tcPr>
+                </a:tc>
+              </a:tr>
+              <a:tr h="502920">
+                <a:tc>
+                  <a:txBody>
+                    <a:bodyPr/>
+                    <a:lstStyle/>
+                    <a:p>
+                      <a:pPr indent="0" marL="0">
+                        <a:buNone/>
+                      </a:pPr>
+                      <a:r>
+                        <a:rPr lang="en-US" sz="1200" dirty="0">
+                          <a:solidFill>
+                            <a:srgbClr val="3D3A36"/>
+                          </a:solidFill>
+                          <a:latin typeface="Calibri" pitchFamily="34" charset="0"/>
+                          <a:ea typeface="Calibri" pitchFamily="34" charset="-122"/>
+                          <a:cs typeface="Calibri" pitchFamily="34" charset="-120"/>
+                        </a:rPr>
+                        <a:t>Flow?</a:t>
+                      </a:r>
+                      <a:endParaRPr lang="en-US" sz="1200" dirty="0">
+                        <a:latin typeface="Calibri" charset="0"/>
+                        <a:ea typeface="Calibri" charset="0"/>
+                        <a:cs typeface="Calibri" charset="0"/>
+                      </a:endParaRPr>
+                    </a:p>
+                  </a:txBody>
+                  <a:tcPr marL="91440" marR="91440" marT="45720" marB="45720">
+                    <a:lnL w="6350" cap="flat" cmpd="sng" algn="ctr">
+                      <a:solidFill>
+                        <a:srgbClr val="E5E2DC"/>
+                      </a:solidFill>
+                      <a:prstDash val="solid"/>
+                      <a:round/>
+                      <a:headEnd type="none" w="med" len="med"/>
+                      <a:tailEnd type="none" w="med" len="med"/>
+                    </a:lnL>
+                    <a:lnR w="6350" cap="flat" cmpd="sng" algn="ctr">
+                      <a:solidFill>
+                        <a:srgbClr val="E5E2DC"/>
+                      </a:solidFill>
+                      <a:prstDash val="solid"/>
+                      <a:round/>
+                      <a:headEnd type="none" w="med" len="med"/>
+                      <a:tailEnd type="none" w="med" len="med"/>
+                    </a:lnR>
+                    <a:lnT w="6350" cap="flat" cmpd="sng" algn="ctr">
+                      <a:solidFill>
+                        <a:srgbClr val="E5E2DC"/>
+                      </a:solidFill>
+                      <a:prstDash val="solid"/>
+                      <a:round/>
+                      <a:headEnd type="none" w="med" len="med"/>
+                      <a:tailEnd type="none" w="med" len="med"/>
+                    </a:lnT>
+                    <a:lnB w="6350" cap="flat" cmpd="sng" algn="ctr">
+                      <a:solidFill>
+                        <a:srgbClr val="E5E2DC"/>
+                      </a:solidFill>
+                      <a:prstDash val="solid"/>
+                      <a:round/>
+                      <a:headEnd type="none" w="med" len="med"/>
+                      <a:tailEnd type="none" w="med" len="med"/>
+                    </a:lnB>
+                    <a:solidFill>
+                      <a:srgbClr val="FFFFFF"/>
+                    </a:solidFill>
+                  </a:tcPr>
+                </a:tc>
+                <a:tc>
+                  <a:txBody>
+                    <a:bodyPr/>
+                    <a:lstStyle/>
+                    <a:p>
+                      <a:pPr indent="0" marL="0">
+                        <a:buNone/>
+                      </a:pPr>
+                      <a:r>
+                        <a:rPr lang="en-US" sz="1200" dirty="0">
+                          <a:solidFill>
+                            <a:srgbClr val="3D3A36"/>
+                          </a:solidFill>
+                          <a:latin typeface="Calibri" pitchFamily="34" charset="0"/>
+                          <a:ea typeface="Calibri" pitchFamily="34" charset="-122"/>
+                          <a:cs typeface="Calibri" pitchFamily="34" charset="-120"/>
+                        </a:rPr>
+                        <a:t>No</a:t>
+                      </a:r>
+                      <a:endParaRPr lang="en-US" sz="1200" dirty="0">
+                        <a:latin typeface="Calibri" charset="0"/>
+                        <a:ea typeface="Calibri" charset="0"/>
+                        <a:cs typeface="Calibri" charset="0"/>
+                      </a:endParaRPr>
+                    </a:p>
+                  </a:txBody>
+                  <a:tcPr marL="91440" marR="91440" marT="45720" marB="45720">
+                    <a:lnL w="6350" cap="flat" cmpd="sng" algn="ctr">
+                      <a:solidFill>
+                        <a:srgbClr val="E5E2DC"/>
+                      </a:solidFill>
+                      <a:prstDash val="solid"/>
+                      <a:round/>
+                      <a:headEnd type="none" w="med" len="med"/>
+                      <a:tailEnd type="none" w="med" len="med"/>
+                    </a:lnL>
+                    <a:lnR w="6350" cap="flat" cmpd="sng" algn="ctr">
+                      <a:solidFill>
+                        <a:srgbClr val="E5E2DC"/>
+                      </a:solidFill>
+                      <a:prstDash val="solid"/>
+                      <a:round/>
+                      <a:headEnd type="none" w="med" len="med"/>
+                      <a:tailEnd type="none" w="med" len="med"/>
+                    </a:lnR>
+                    <a:lnT w="6350" cap="flat" cmpd="sng" algn="ctr">
+                      <a:solidFill>
+                        <a:srgbClr val="E5E2DC"/>
+                      </a:solidFill>
+                      <a:prstDash val="solid"/>
+                      <a:round/>
+                      <a:headEnd type="none" w="med" len="med"/>
+                      <a:tailEnd type="none" w="med" len="med"/>
+                    </a:lnT>
+                    <a:lnB w="6350" cap="flat" cmpd="sng" algn="ctr">
+                      <a:solidFill>
+                        <a:srgbClr val="E5E2DC"/>
+                      </a:solidFill>
+                      <a:prstDash val="solid"/>
+                      <a:round/>
+                      <a:headEnd type="none" w="med" len="med"/>
+                      <a:tailEnd type="none" w="med" len="med"/>
+                    </a:lnB>
+                    <a:solidFill>
+                      <a:srgbClr val="FFFFFF"/>
+                    </a:solidFill>
+                  </a:tcPr>
+                </a:tc>
+                <a:tc>
+                  <a:txBody>
+                    <a:bodyPr/>
+                    <a:lstStyle/>
+                    <a:p>
+                      <a:pPr indent="0" marL="0">
+                        <a:buNone/>
+                      </a:pPr>
+                      <a:r>
+                        <a:rPr lang="en-US" sz="1200" dirty="0">
+                          <a:solidFill>
+                            <a:srgbClr val="3D3A36"/>
+                          </a:solidFill>
+                          <a:latin typeface="Calibri" pitchFamily="34" charset="0"/>
+                          <a:ea typeface="Calibri" pitchFamily="34" charset="-122"/>
+                          <a:cs typeface="Calibri" pitchFamily="34" charset="-120"/>
+                        </a:rPr>
+                        <a:t>Yes</a:t>
+                      </a:r>
+                      <a:endParaRPr lang="en-US" sz="1200" dirty="0">
+                        <a:latin typeface="Calibri" charset="0"/>
+                        <a:ea typeface="Calibri" charset="0"/>
+                        <a:cs typeface="Calibri" charset="0"/>
+                      </a:endParaRPr>
+                    </a:p>
+                  </a:txBody>
+                  <a:tcPr marL="91440" marR="91440" marT="45720" marB="45720">
+                    <a:lnL w="6350" cap="flat" cmpd="sng" algn="ctr">
+                      <a:solidFill>
+                        <a:srgbClr val="E5E2DC"/>
+                      </a:solidFill>
+                      <a:prstDash val="solid"/>
+                      <a:round/>
+                      <a:headEnd type="none" w="med" len="med"/>
+                      <a:tailEnd type="none" w="med" len="med"/>
+                    </a:lnL>
+                    <a:lnR w="6350" cap="flat" cmpd="sng" algn="ctr">
+                      <a:solidFill>
+                        <a:srgbClr val="E5E2DC"/>
+                      </a:solidFill>
+                      <a:prstDash val="solid"/>
+                      <a:round/>
+                      <a:headEnd type="none" w="med" len="med"/>
+                      <a:tailEnd type="none" w="med" len="med"/>
+                    </a:lnR>
+                    <a:lnT w="6350" cap="flat" cmpd="sng" algn="ctr">
+                      <a:solidFill>
+                        <a:srgbClr val="E5E2DC"/>
+                      </a:solidFill>
+                      <a:prstDash val="solid"/>
+                      <a:round/>
+                      <a:headEnd type="none" w="med" len="med"/>
+                      <a:tailEnd type="none" w="med" len="med"/>
+                    </a:lnT>
+                    <a:lnB w="6350" cap="flat" cmpd="sng" algn="ctr">
+                      <a:solidFill>
+                        <a:srgbClr val="E5E2DC"/>
+                      </a:solidFill>
+                      <a:prstDash val="solid"/>
+                      <a:round/>
+                      <a:headEnd type="none" w="med" len="med"/>
+                      <a:tailEnd type="none" w="med" len="med"/>
+                    </a:lnB>
+                    <a:solidFill>
+                      <a:srgbClr val="FFFFFF"/>
+                    </a:solidFill>
+                  </a:tcPr>
+                </a:tc>
+                <a:tc>
+                  <a:txBody>
+                    <a:bodyPr/>
+                    <a:lstStyle/>
+                    <a:p>
+                      <a:pPr indent="0" marL="0">
+                        <a:buNone/>
+                      </a:pPr>
+                      <a:r>
+                        <a:rPr lang="en-US" sz="1200" dirty="0">
+                          <a:solidFill>
+                            <a:srgbClr val="3D3A36"/>
+                          </a:solidFill>
+                          <a:latin typeface="Calibri" pitchFamily="34" charset="0"/>
+                          <a:ea typeface="Calibri" pitchFamily="34" charset="-122"/>
+                          <a:cs typeface="Calibri" pitchFamily="34" charset="-120"/>
+                        </a:rPr>
+                        <a:t>Yes</a:t>
+                      </a:r>
+                      <a:endParaRPr lang="en-US" sz="1200" dirty="0">
+                        <a:latin typeface="Calibri" charset="0"/>
+                        <a:ea typeface="Calibri" charset="0"/>
+                        <a:cs typeface="Calibri" charset="0"/>
+                      </a:endParaRPr>
+                    </a:p>
+                  </a:txBody>
+                  <a:tcPr marL="91440" marR="91440" marT="45720" marB="45720">
+                    <a:lnL w="6350" cap="flat" cmpd="sng" algn="ctr">
+                      <a:solidFill>
+                        <a:srgbClr val="E5E2DC"/>
+                      </a:solidFill>
+                      <a:prstDash val="solid"/>
+                      <a:round/>
+                      <a:headEnd type="none" w="med" len="med"/>
+                      <a:tailEnd type="none" w="med" len="med"/>
+                    </a:lnL>
+                    <a:lnR w="6350" cap="flat" cmpd="sng" algn="ctr">
+                      <a:solidFill>
+                        <a:srgbClr val="E5E2DC"/>
+                      </a:solidFill>
+                      <a:prstDash val="solid"/>
+                      <a:round/>
+                      <a:headEnd type="none" w="med" len="med"/>
+                      <a:tailEnd type="none" w="med" len="med"/>
+                    </a:lnR>
+                    <a:lnT w="6350" cap="flat" cmpd="sng" algn="ctr">
+                      <a:solidFill>
+                        <a:srgbClr val="E5E2DC"/>
+                      </a:solidFill>
+                      <a:prstDash val="solid"/>
+                      <a:round/>
+                      <a:headEnd type="none" w="med" len="med"/>
+                      <a:tailEnd type="none" w="med" len="med"/>
+                    </a:lnT>
+                    <a:lnB w="6350" cap="flat" cmpd="sng" algn="ctr">
+                      <a:solidFill>
+                        <a:srgbClr val="E5E2DC"/>
+                      </a:solidFill>
+                      <a:prstDash val="solid"/>
+                      <a:round/>
+                      <a:headEnd type="none" w="med" len="med"/>
+                      <a:tailEnd type="none" w="med" len="med"/>
+                    </a:lnB>
+                    <a:solidFill>
+                      <a:srgbClr val="FFFFFF"/>
+                    </a:solidFill>
+                  </a:tcPr>
+                </a:tc>
+              </a:tr>
+              <a:tr h="502920">
+                <a:tc>
+                  <a:txBody>
+                    <a:bodyPr/>
+                    <a:lstStyle/>
+                    <a:p>
+                      <a:pPr indent="0" marL="0">
+                        <a:buNone/>
+                      </a:pPr>
+                      <a:r>
+                        <a:rPr lang="en-US" sz="1200" dirty="0">
+                          <a:solidFill>
+                            <a:srgbClr val="3D3A36"/>
+                          </a:solidFill>
+                          <a:latin typeface="Calibri" pitchFamily="34" charset="0"/>
+                          <a:ea typeface="Calibri" pitchFamily="34" charset="-122"/>
+                          <a:cs typeface="Calibri" pitchFamily="34" charset="-120"/>
+                        </a:rPr>
+                        <a:t>Particle spacing</a:t>
+                      </a:r>
+                      <a:endParaRPr lang="en-US" sz="1200" dirty="0">
+                        <a:latin typeface="Calibri" charset="0"/>
+                        <a:ea typeface="Calibri" charset="0"/>
+                        <a:cs typeface="Calibri" charset="0"/>
+                      </a:endParaRPr>
+                    </a:p>
+                  </a:txBody>
+                  <a:tcPr marL="91440" marR="91440" marT="45720" marB="45720">
+                    <a:lnL w="6350" cap="flat" cmpd="sng" algn="ctr">
+                      <a:solidFill>
+                        <a:srgbClr val="E5E2DC"/>
+                      </a:solidFill>
+                      <a:prstDash val="solid"/>
+                      <a:round/>
+                      <a:headEnd type="none" w="med" len="med"/>
+                      <a:tailEnd type="none" w="med" len="med"/>
+                    </a:lnL>
+                    <a:lnR w="6350" cap="flat" cmpd="sng" algn="ctr">
+                      <a:solidFill>
+                        <a:srgbClr val="E5E2DC"/>
+                      </a:solidFill>
+                      <a:prstDash val="solid"/>
+                      <a:round/>
+                      <a:headEnd type="none" w="med" len="med"/>
+                      <a:tailEnd type="none" w="med" len="med"/>
+                    </a:lnR>
+                    <a:lnT w="6350" cap="flat" cmpd="sng" algn="ctr">
+                      <a:solidFill>
+                        <a:srgbClr val="E5E2DC"/>
+                      </a:solidFill>
+                      <a:prstDash val="solid"/>
+                      <a:round/>
+                      <a:headEnd type="none" w="med" len="med"/>
+                      <a:tailEnd type="none" w="med" len="med"/>
+                    </a:lnT>
+                    <a:lnB w="6350" cap="flat" cmpd="sng" algn="ctr">
+                      <a:solidFill>
+                        <a:srgbClr val="E5E2DC"/>
+                      </a:solidFill>
+                      <a:prstDash val="solid"/>
+                      <a:round/>
+                      <a:headEnd type="none" w="med" len="med"/>
+                      <a:tailEnd type="none" w="med" len="med"/>
+                    </a:lnB>
+                    <a:solidFill>
+                      <a:srgbClr val="F8F6F3"/>
+                    </a:solidFill>
+                  </a:tcPr>
+                </a:tc>
+                <a:tc>
+                  <a:txBody>
+                    <a:bodyPr/>
+                    <a:lstStyle/>
+                    <a:p>
+                      <a:pPr indent="0" marL="0">
+                        <a:buNone/>
+                      </a:pPr>
+                      <a:r>
+                        <a:rPr lang="en-US" sz="1200" dirty="0">
+                          <a:solidFill>
+                            <a:srgbClr val="3D3A36"/>
+                          </a:solidFill>
+                          <a:latin typeface="Calibri" pitchFamily="34" charset="0"/>
+                          <a:ea typeface="Calibri" pitchFamily="34" charset="-122"/>
+                          <a:cs typeface="Calibri" pitchFamily="34" charset="-120"/>
+                        </a:rPr>
+                        <a:t>Very close</a:t>
+                      </a:r>
+                      <a:endParaRPr lang="en-US" sz="1200" dirty="0">
+                        <a:latin typeface="Calibri" charset="0"/>
+                        <a:ea typeface="Calibri" charset="0"/>
+                        <a:cs typeface="Calibri" charset="0"/>
+                      </a:endParaRPr>
+                    </a:p>
+                  </a:txBody>
+                  <a:tcPr marL="91440" marR="91440" marT="45720" marB="45720">
+                    <a:lnL w="6350" cap="flat" cmpd="sng" algn="ctr">
+                      <a:solidFill>
+                        <a:srgbClr val="E5E2DC"/>
+                      </a:solidFill>
+                      <a:prstDash val="solid"/>
+                      <a:round/>
+                      <a:headEnd type="none" w="med" len="med"/>
+                      <a:tailEnd type="none" w="med" len="med"/>
+                    </a:lnL>
+                    <a:lnR w="6350" cap="flat" cmpd="sng" algn="ctr">
+                      <a:solidFill>
+                        <a:srgbClr val="E5E2DC"/>
+                      </a:solidFill>
+                      <a:prstDash val="solid"/>
+                      <a:round/>
+                      <a:headEnd type="none" w="med" len="med"/>
+                      <a:tailEnd type="none" w="med" len="med"/>
+                    </a:lnR>
+                    <a:lnT w="6350" cap="flat" cmpd="sng" algn="ctr">
+                      <a:solidFill>
+                        <a:srgbClr val="E5E2DC"/>
+                      </a:solidFill>
+                      <a:prstDash val="solid"/>
+                      <a:round/>
+                      <a:headEnd type="none" w="med" len="med"/>
+                      <a:tailEnd type="none" w="med" len="med"/>
+                    </a:lnT>
+                    <a:lnB w="6350" cap="flat" cmpd="sng" algn="ctr">
+                      <a:solidFill>
+                        <a:srgbClr val="E5E2DC"/>
+                      </a:solidFill>
+                      <a:prstDash val="solid"/>
+                      <a:round/>
+                      <a:headEnd type="none" w="med" len="med"/>
+                      <a:tailEnd type="none" w="med" len="med"/>
+                    </a:lnB>
+                    <a:solidFill>
+                      <a:srgbClr val="F8F6F3"/>
+                    </a:solidFill>
+                  </a:tcPr>
+                </a:tc>
+                <a:tc>
+                  <a:txBody>
+                    <a:bodyPr/>
+                    <a:lstStyle/>
+                    <a:p>
+                      <a:pPr indent="0" marL="0">
+                        <a:buNone/>
+                      </a:pPr>
+                      <a:r>
+                        <a:rPr lang="en-US" sz="1200" dirty="0">
+                          <a:solidFill>
+                            <a:srgbClr val="3D3A36"/>
+                          </a:solidFill>
+                          <a:latin typeface="Calibri" pitchFamily="34" charset="0"/>
+                          <a:ea typeface="Calibri" pitchFamily="34" charset="-122"/>
+                          <a:cs typeface="Calibri" pitchFamily="34" charset="-120"/>
+                        </a:rPr>
+                        <a:t>Close</a:t>
+                      </a:r>
+                      <a:endParaRPr lang="en-US" sz="1200" dirty="0">
+                        <a:latin typeface="Calibri" charset="0"/>
+                        <a:ea typeface="Calibri" charset="0"/>
+                        <a:cs typeface="Calibri" charset="0"/>
+                      </a:endParaRPr>
+                    </a:p>
+                  </a:txBody>
+                  <a:tcPr marL="91440" marR="91440" marT="45720" marB="45720">
+                    <a:lnL w="6350" cap="flat" cmpd="sng" algn="ctr">
+                      <a:solidFill>
+                        <a:srgbClr val="E5E2DC"/>
+                      </a:solidFill>
+                      <a:prstDash val="solid"/>
+                      <a:round/>
+                      <a:headEnd type="none" w="med" len="med"/>
+                      <a:tailEnd type="none" w="med" len="med"/>
+                    </a:lnL>
+                    <a:lnR w="6350" cap="flat" cmpd="sng" algn="ctr">
+                      <a:solidFill>
+                        <a:srgbClr val="E5E2DC"/>
+                      </a:solidFill>
+                      <a:prstDash val="solid"/>
+                      <a:round/>
+                      <a:headEnd type="none" w="med" len="med"/>
+                      <a:tailEnd type="none" w="med" len="med"/>
+                    </a:lnR>
+                    <a:lnT w="6350" cap="flat" cmpd="sng" algn="ctr">
+                      <a:solidFill>
+                        <a:srgbClr val="E5E2DC"/>
+                      </a:solidFill>
+                      <a:prstDash val="solid"/>
+                      <a:round/>
+                      <a:headEnd type="none" w="med" len="med"/>
+                      <a:tailEnd type="none" w="med" len="med"/>
+                    </a:lnT>
+                    <a:lnB w="6350" cap="flat" cmpd="sng" algn="ctr">
+                      <a:solidFill>
+                        <a:srgbClr val="E5E2DC"/>
+                      </a:solidFill>
+                      <a:prstDash val="solid"/>
+                      <a:round/>
+                      <a:headEnd type="none" w="med" len="med"/>
+                      <a:tailEnd type="none" w="med" len="med"/>
+                    </a:lnB>
+                    <a:solidFill>
+                      <a:srgbClr val="F8F6F3"/>
+                    </a:solidFill>
+                  </a:tcPr>
+                </a:tc>
+                <a:tc>
+                  <a:txBody>
+                    <a:bodyPr/>
+                    <a:lstStyle/>
+                    <a:p>
+                      <a:pPr indent="0" marL="0">
+                        <a:buNone/>
+                      </a:pPr>
+                      <a:r>
+                        <a:rPr lang="en-US" sz="1200" dirty="0">
+                          <a:solidFill>
+                            <a:srgbClr val="3D3A36"/>
+                          </a:solidFill>
+                          <a:latin typeface="Calibri" pitchFamily="34" charset="0"/>
+                          <a:ea typeface="Calibri" pitchFamily="34" charset="-122"/>
+                          <a:cs typeface="Calibri" pitchFamily="34" charset="-120"/>
+                        </a:rPr>
+                        <a:t>Far apart</a:t>
+                      </a:r>
+                      <a:endParaRPr lang="en-US" sz="1200" dirty="0">
+                        <a:latin typeface="Calibri" charset="0"/>
+                        <a:ea typeface="Calibri" charset="0"/>
+                        <a:cs typeface="Calibri" charset="0"/>
+                      </a:endParaRPr>
+                    </a:p>
+                  </a:txBody>
+                  <a:tcPr marL="91440" marR="91440" marT="45720" marB="45720">
+                    <a:lnL w="6350" cap="flat" cmpd="sng" algn="ctr">
+                      <a:solidFill>
+                        <a:srgbClr val="E5E2DC"/>
+                      </a:solidFill>
+                      <a:prstDash val="solid"/>
+                      <a:round/>
+                      <a:headEnd type="none" w="med" len="med"/>
+                      <a:tailEnd type="none" w="med" len="med"/>
+                    </a:lnL>
+                    <a:lnR w="6350" cap="flat" cmpd="sng" algn="ctr">
+                      <a:solidFill>
+                        <a:srgbClr val="E5E2DC"/>
+                      </a:solidFill>
+                      <a:prstDash val="solid"/>
+                      <a:round/>
+                      <a:headEnd type="none" w="med" len="med"/>
+                      <a:tailEnd type="none" w="med" len="med"/>
+                    </a:lnR>
+                    <a:lnT w="6350" cap="flat" cmpd="sng" algn="ctr">
+                      <a:solidFill>
+                        <a:srgbClr val="E5E2DC"/>
+                      </a:solidFill>
+                      <a:prstDash val="solid"/>
+                      <a:round/>
+                      <a:headEnd type="none" w="med" len="med"/>
+                      <a:tailEnd type="none" w="med" len="med"/>
+                    </a:lnT>
+                    <a:lnB w="6350" cap="flat" cmpd="sng" algn="ctr">
+                      <a:solidFill>
+                        <a:srgbClr val="E5E2DC"/>
+                      </a:solidFill>
+                      <a:prstDash val="solid"/>
+                      <a:round/>
+                      <a:headEnd type="none" w="med" len="med"/>
+                      <a:tailEnd type="none" w="med" len="med"/>
+                    </a:lnB>
+                    <a:solidFill>
+                      <a:srgbClr val="F8F6F3"/>
+                    </a:solidFill>
+                  </a:tcPr>
+                </a:tc>
+              </a:tr>
+            </a:tbl>
+          </a:graphicData>
+        </a:graphic>
+      </p:graphicFrame>
     </p:spTree>
   </p:cSld>
   <p:clrMapOvr>
@@ -2411,7 +4712,47 @@
         <p:spPr>
           <a:xfrm>
             <a:off x="0" y="0"/>
-            <a:ext cx="9144000" cy="54864"/>
+            <a:ext cx="9144000" cy="822960"/>
+          </a:xfrm>
+          <a:prstGeom prst="rect">
+            <a:avLst/>
+          </a:prstGeom>
+          <a:solidFill>
+            <a:srgbClr val="FFFFFF"/>
+          </a:solidFill>
+          <a:ln/>
+        </p:spPr>
+      </p:sp>
+      <p:sp>
+        <p:nvSpPr>
+          <p:cNvPr id="3" name="Shape 1"/>
+          <p:cNvSpPr/>
+          <p:nvPr/>
+        </p:nvSpPr>
+        <p:spPr>
+          <a:xfrm>
+            <a:off x="0" y="804672"/>
+            <a:ext cx="9144000" cy="27432"/>
+          </a:xfrm>
+          <a:prstGeom prst="rect">
+            <a:avLst/>
+          </a:prstGeom>
+          <a:solidFill>
+            <a:srgbClr val="E5E2DC"/>
+          </a:solidFill>
+          <a:ln/>
+        </p:spPr>
+      </p:sp>
+      <p:sp>
+        <p:nvSpPr>
+          <p:cNvPr id="4" name="Shape 2"/>
+          <p:cNvSpPr/>
+          <p:nvPr/>
+        </p:nvSpPr>
+        <p:spPr>
+          <a:xfrm>
+            <a:off x="548640" y="201168"/>
+            <a:ext cx="54864" cy="420624"/>
           </a:xfrm>
           <a:prstGeom prst="rect">
             <a:avLst/>
@@ -2424,14 +4765,14 @@
       </p:sp>
       <p:sp>
         <p:nvSpPr>
-          <p:cNvPr id="3" name="Text 1"/>
-          <p:cNvSpPr/>
-          <p:nvPr/>
-        </p:nvSpPr>
-        <p:spPr>
-          <a:xfrm>
-            <a:off x="7772400" y="4709160"/>
-            <a:ext cx="1097280" cy="320040"/>
+          <p:cNvPr id="5" name="Text 3"/>
+          <p:cNvSpPr/>
+          <p:nvPr/>
+        </p:nvSpPr>
+        <p:spPr>
+          <a:xfrm>
+            <a:off x="777240" y="137160"/>
+            <a:ext cx="7772400" cy="548640"/>
           </a:xfrm>
           <a:prstGeom prst="rect">
             <a:avLst/>
@@ -2440,53 +4781,14 @@
           <a:ln/>
         </p:spPr>
         <p:txBody>
-          <a:bodyPr wrap="square" rtlCol="0" anchor="ctr"/>
-          <a:lstStyle/>
-          <a:p>
-            <a:pPr algn="r" indent="0" marL="0">
-              <a:buNone/>
-            </a:pPr>
-            <a:r>
-              <a:rPr lang="en-US" sz="900" dirty="0">
-                <a:solidFill>
-                  <a:srgbClr val="6B6660"/>
-                </a:solidFill>
-                <a:latin typeface="Calibri" pitchFamily="34" charset="0"/>
-                <a:ea typeface="Calibri" pitchFamily="34" charset="-122"/>
-                <a:cs typeface="Calibri" pitchFamily="34" charset="-120"/>
-              </a:rPr>
-              <a:t>4 / 5</a:t>
-            </a:r>
-            <a:endParaRPr lang="en-US" sz="900" dirty="0"/>
-          </a:p>
-        </p:txBody>
-      </p:sp>
-      <p:sp>
-        <p:nvSpPr>
-          <p:cNvPr id="4" name="Text 2"/>
-          <p:cNvSpPr/>
-          <p:nvPr/>
-        </p:nvSpPr>
-        <p:spPr>
-          <a:xfrm>
-            <a:off x="457200" y="274320"/>
-            <a:ext cx="8229600" cy="640080"/>
-          </a:xfrm>
-          <a:prstGeom prst="rect">
-            <a:avLst/>
-          </a:prstGeom>
-          <a:noFill/>
-          <a:ln/>
-        </p:spPr>
-        <p:txBody>
-          <a:bodyPr wrap="square" rtlCol="0" anchor="ctr"/>
+          <a:bodyPr wrap="square" lIns="0" tIns="0" rIns="0" bIns="0" rtlCol="0" anchor="ctr"/>
           <a:lstStyle/>
           <a:p>
             <a:pPr indent="0" marL="0">
               <a:buNone/>
             </a:pPr>
             <a:r>
-              <a:rPr lang="en-US" sz="2600" b="1" dirty="0">
+              <a:rPr lang="en-US" sz="2000" b="1" dirty="0">
                 <a:solidFill>
                   <a:srgbClr val="1B2A4A"/>
                 </a:solidFill>
@@ -2494,22 +4796,22 @@
                 <a:ea typeface="Georgia" pitchFamily="34" charset="-122"/>
                 <a:cs typeface="Georgia" pitchFamily="34" charset="-120"/>
               </a:rPr>
-              <a:t>Density and the Particle Model</a:t>
-            </a:r>
-            <a:endParaRPr lang="en-US" sz="2600" dirty="0"/>
+              <a:t>Density &amp; the Three States</a:t>
+            </a:r>
+            <a:endParaRPr lang="en-US" sz="2000" dirty="0"/>
           </a:p>
         </p:txBody>
       </p:sp>
       <p:sp>
         <p:nvSpPr>
-          <p:cNvPr id="5" name="Text 3"/>
-          <p:cNvSpPr/>
-          <p:nvPr/>
-        </p:nvSpPr>
-        <p:spPr>
-          <a:xfrm>
-            <a:off x="457200" y="1097280"/>
-            <a:ext cx="8229600" cy="3657600"/>
+          <p:cNvPr id="6" name="Text 4"/>
+          <p:cNvSpPr/>
+          <p:nvPr/>
+        </p:nvSpPr>
+        <p:spPr>
+          <a:xfrm>
+            <a:off x="731520" y="1051560"/>
+            <a:ext cx="7680960" cy="3108960"/>
           </a:xfrm>
           <a:prstGeom prst="rect">
             <a:avLst/>
@@ -2529,7 +4831,7 @@
               <a:buChar char="•"/>
             </a:pPr>
             <a:r>
-              <a:rPr lang="en-US" sz="1400" dirty="0">
+              <a:rPr lang="en-US" sz="1500" dirty="0">
                 <a:solidFill>
                   <a:srgbClr val="3D3A36"/>
                 </a:solidFill>
@@ -2537,9 +4839,9 @@
                 <a:ea typeface="Calibri" pitchFamily="34" charset="-122"/>
                 <a:cs typeface="Calibri" pitchFamily="34" charset="-120"/>
               </a:rPr>
-              <a:t>Density = how much mass is packed into a given volume</a:t>
-            </a:r>
-            <a:endParaRPr lang="en-US" sz="1400" dirty="0"/>
+              <a:t>Density = mass ÷ volume. Unit: g/cm³ or kg/m³.</a:t>
+            </a:r>
+            <a:endParaRPr lang="en-US" sz="1500" dirty="0"/>
           </a:p>
           <a:p>
             <a:pPr marL="342900" indent="-342900">
@@ -2550,7 +4852,7 @@
               <a:buChar char="•"/>
             </a:pPr>
             <a:r>
-              <a:rPr lang="en-US" sz="1400" dirty="0">
+              <a:rPr lang="en-US" sz="1500" dirty="0">
                 <a:solidFill>
                   <a:srgbClr val="3D3A36"/>
                 </a:solidFill>
@@ -2558,9 +4860,9 @@
                 <a:ea typeface="Calibri" pitchFamily="34" charset="-122"/>
                 <a:cs typeface="Calibri" pitchFamily="34" charset="-120"/>
               </a:rPr>
-              <a:t>Density = mass ÷ volume (g/cm³ or kg/m³)</a:t>
-            </a:r>
-            <a:endParaRPr lang="en-US" sz="1400" dirty="0"/>
+              <a:t>Solids are usually the MOST dense — particles packed tightly.</a:t>
+            </a:r>
+            <a:endParaRPr lang="en-US" sz="1500" dirty="0"/>
           </a:p>
           <a:p>
             <a:pPr marL="342900" indent="-342900">
@@ -2571,7 +4873,7 @@
               <a:buChar char="•"/>
             </a:pPr>
             <a:r>
-              <a:rPr lang="en-US" sz="1400" dirty="0">
+              <a:rPr lang="en-US" sz="1500" dirty="0">
                 <a:solidFill>
                   <a:srgbClr val="3D3A36"/>
                 </a:solidFill>
@@ -2579,9 +4881,9 @@
                 <a:ea typeface="Calibri" pitchFamily="34" charset="-122"/>
                 <a:cs typeface="Calibri" pitchFamily="34" charset="-120"/>
               </a:rPr>
-              <a:t>Solids are usually the densest — particles tightly packed</a:t>
-            </a:r>
-            <a:endParaRPr lang="en-US" sz="1400" dirty="0"/>
+              <a:t>Liquids are slightly less dense — particles can move past each other.</a:t>
+            </a:r>
+            <a:endParaRPr lang="en-US" sz="1500" dirty="0"/>
           </a:p>
           <a:p>
             <a:pPr marL="342900" indent="-342900">
@@ -2592,7 +4894,7 @@
               <a:buChar char="•"/>
             </a:pPr>
             <a:r>
-              <a:rPr lang="en-US" sz="1400" dirty="0">
+              <a:rPr lang="en-US" sz="1500" dirty="0">
                 <a:solidFill>
                   <a:srgbClr val="3D3A36"/>
                 </a:solidFill>
@@ -2600,9 +4902,9 @@
                 <a:ea typeface="Calibri" pitchFamily="34" charset="-122"/>
                 <a:cs typeface="Calibri" pitchFamily="34" charset="-120"/>
               </a:rPr>
-              <a:t>Gases are least dense — particles far apart</a:t>
-            </a:r>
-            <a:endParaRPr lang="en-US" sz="1400" dirty="0"/>
+              <a:t>Gases are the LEAST dense — particles spread far apart.</a:t>
+            </a:r>
+            <a:endParaRPr lang="en-US" sz="1500" dirty="0"/>
           </a:p>
           <a:p>
             <a:pPr marL="342900" indent="-342900">
@@ -2613,7 +4915,7 @@
               <a:buChar char="•"/>
             </a:pPr>
             <a:r>
-              <a:rPr lang="en-US" sz="1400" dirty="0">
+              <a:rPr lang="en-US" sz="1500" dirty="0">
                 <a:solidFill>
                   <a:srgbClr val="3D3A36"/>
                 </a:solidFill>
@@ -2621,20 +4923,79 @@
                 <a:ea typeface="Calibri" pitchFamily="34" charset="-122"/>
                 <a:cs typeface="Calibri" pitchFamily="34" charset="-120"/>
               </a:rPr>
-              <a:t>Water is unusual: ice (solid) is LESS dense than liquid water</a:t>
-            </a:r>
-            <a:endParaRPr lang="en-US" sz="1400" dirty="0"/>
-          </a:p>
-          <a:p>
-            <a:pPr marL="342900" indent="-342900">
-              <a:spcAft>
-                <a:spcPts val="800"/>
-              </a:spcAft>
-              <a:buSzPct val="100000"/>
-              <a:buChar char="•"/>
+              <a:t>EXCEPTION: Ice floats on water because ice is LESS dense than liquid water.</a:t>
+            </a:r>
+            <a:endParaRPr lang="en-US" sz="1500" dirty="0"/>
+          </a:p>
+        </p:txBody>
+      </p:sp>
+      <p:sp>
+        <p:nvSpPr>
+          <p:cNvPr id="7" name="Shape 5"/>
+          <p:cNvSpPr/>
+          <p:nvPr/>
+        </p:nvSpPr>
+        <p:spPr>
+          <a:xfrm>
+            <a:off x="731520" y="4206240"/>
+            <a:ext cx="7680960" cy="640080"/>
+          </a:xfrm>
+          <a:prstGeom prst="rect">
+            <a:avLst/>
+          </a:prstGeom>
+          <a:solidFill>
+            <a:srgbClr val="E8F5F3"/>
+          </a:solidFill>
+          <a:ln/>
+          <a:effectLst>
+            <a:outerShdw sx="100000" sy="100000" kx="0" ky="0" algn="bl" rotWithShape="0" blurRad="50800" dist="25400" dir="8100000">
+              <a:srgbClr val="000000">
+                <a:alpha val="10000"/>
+              </a:srgbClr>
+            </a:outerShdw>
+          </a:effectLst>
+        </p:spPr>
+      </p:sp>
+      <p:sp>
+        <p:nvSpPr>
+          <p:cNvPr id="8" name="Text 6"/>
+          <p:cNvSpPr/>
+          <p:nvPr/>
+        </p:nvSpPr>
+        <p:spPr>
+          <a:xfrm>
+            <a:off x="914400" y="4251960"/>
+            <a:ext cx="7315200" cy="548640"/>
+          </a:xfrm>
+          <a:prstGeom prst="rect">
+            <a:avLst/>
+          </a:prstGeom>
+          <a:noFill/>
+          <a:ln/>
+        </p:spPr>
+        <p:txBody>
+          <a:bodyPr wrap="square" rtlCol="0" anchor="ctr"/>
+          <a:lstStyle/>
+          <a:p>
+            <a:pPr indent="0" marL="0">
+              <a:buNone/>
             </a:pPr>
             <a:r>
-              <a:rPr lang="en-US" sz="1400" dirty="0">
+              <a:rPr lang="en-US" sz="1200" b="1" dirty="0">
+                <a:solidFill>
+                  <a:srgbClr val="2A9D8F"/>
+                </a:solidFill>
+                <a:latin typeface="Calibri" pitchFamily="34" charset="0"/>
+                <a:ea typeface="Calibri" pitchFamily="34" charset="-122"/>
+                <a:cs typeface="Calibri" pitchFamily="34" charset="-120"/>
+              </a:rPr>
+              <a:t>Key Idea: </a:t>
+            </a:r>
+            <a:pPr indent="0" marL="0">
+              <a:buNone/>
+            </a:pPr>
+            <a:r>
+              <a:rPr lang="en-US" sz="1200" i="1" dirty="0">
                 <a:solidFill>
                   <a:srgbClr val="3D3A36"/>
                 </a:solidFill>
@@ -2642,30 +5003,9 @@
                 <a:ea typeface="Calibri" pitchFamily="34" charset="-122"/>
                 <a:cs typeface="Calibri" pitchFamily="34" charset="-120"/>
               </a:rPr>
-              <a:t>This is because ice particles form a crystal structure with gaps</a:t>
-            </a:r>
-            <a:endParaRPr lang="en-US" sz="1400" dirty="0"/>
-          </a:p>
-          <a:p>
-            <a:pPr marL="342900" indent="-342900">
-              <a:spcAft>
-                <a:spcPts val="800"/>
-              </a:spcAft>
-              <a:buSzPct val="100000"/>
-              <a:buChar char="•"/>
-            </a:pPr>
-            <a:r>
-              <a:rPr lang="en-US" sz="1400" dirty="0">
-                <a:solidFill>
-                  <a:srgbClr val="3D3A36"/>
-                </a:solidFill>
-                <a:latin typeface="Calibri" pitchFamily="34" charset="0"/>
-                <a:ea typeface="Calibri" pitchFamily="34" charset="-122"/>
-                <a:cs typeface="Calibri" pitchFamily="34" charset="-120"/>
-              </a:rPr>
-              <a:t>This is why ice floats — and why ponds freeze from the top down</a:t>
-            </a:r>
-            <a:endParaRPr lang="en-US" sz="1400" dirty="0"/>
+              <a:t>Ice floating is why fish survive in frozen lakes — the water below stays liquid.</a:t>
+            </a:r>
+            <a:endParaRPr lang="en-US" sz="1200" dirty="0"/>
           </a:p>
         </p:txBody>
       </p:sp>
@@ -2683,7 +5023,7 @@
     <p:bg>
       <p:bgPr>
         <a:solidFill>
-          <a:srgbClr val="1B2A4A"/>
+          <a:srgbClr val="FAF8F5"/>
         </a:solidFill>
       </p:bgPr>
     </p:bg>
@@ -2710,7 +5050,663 @@
         <p:spPr>
           <a:xfrm>
             <a:off x="0" y="0"/>
-            <a:ext cx="109728" cy="5143500"/>
+            <a:ext cx="9144000" cy="822960"/>
+          </a:xfrm>
+          <a:prstGeom prst="rect">
+            <a:avLst/>
+          </a:prstGeom>
+          <a:solidFill>
+            <a:srgbClr val="FFFFFF"/>
+          </a:solidFill>
+          <a:ln/>
+        </p:spPr>
+      </p:sp>
+      <p:sp>
+        <p:nvSpPr>
+          <p:cNvPr id="3" name="Shape 1"/>
+          <p:cNvSpPr/>
+          <p:nvPr/>
+        </p:nvSpPr>
+        <p:spPr>
+          <a:xfrm>
+            <a:off x="0" y="804672"/>
+            <a:ext cx="9144000" cy="27432"/>
+          </a:xfrm>
+          <a:prstGeom prst="rect">
+            <a:avLst/>
+          </a:prstGeom>
+          <a:solidFill>
+            <a:srgbClr val="E5E2DC"/>
+          </a:solidFill>
+          <a:ln/>
+        </p:spPr>
+      </p:sp>
+      <p:sp>
+        <p:nvSpPr>
+          <p:cNvPr id="4" name="Shape 2"/>
+          <p:cNvSpPr/>
+          <p:nvPr/>
+        </p:nvSpPr>
+        <p:spPr>
+          <a:xfrm>
+            <a:off x="548640" y="201168"/>
+            <a:ext cx="54864" cy="420624"/>
+          </a:xfrm>
+          <a:prstGeom prst="rect">
+            <a:avLst/>
+          </a:prstGeom>
+          <a:solidFill>
+            <a:srgbClr val="2A9D8F"/>
+          </a:solidFill>
+          <a:ln/>
+        </p:spPr>
+      </p:sp>
+      <p:sp>
+        <p:nvSpPr>
+          <p:cNvPr id="5" name="Text 3"/>
+          <p:cNvSpPr/>
+          <p:nvPr/>
+        </p:nvSpPr>
+        <p:spPr>
+          <a:xfrm>
+            <a:off x="777240" y="137160"/>
+            <a:ext cx="7772400" cy="548640"/>
+          </a:xfrm>
+          <a:prstGeom prst="rect">
+            <a:avLst/>
+          </a:prstGeom>
+          <a:noFill/>
+          <a:ln/>
+        </p:spPr>
+        <p:txBody>
+          <a:bodyPr wrap="square" lIns="0" tIns="0" rIns="0" bIns="0" rtlCol="0" anchor="ctr"/>
+          <a:lstStyle/>
+          <a:p>
+            <a:pPr indent="0" marL="0">
+              <a:buNone/>
+            </a:pPr>
+            <a:r>
+              <a:rPr lang="en-US" sz="2000" b="1" dirty="0">
+                <a:solidFill>
+                  <a:srgbClr val="1B2A4A"/>
+                </a:solidFill>
+                <a:latin typeface="Georgia" pitchFamily="34" charset="0"/>
+                <a:ea typeface="Georgia" pitchFamily="34" charset="-122"/>
+                <a:cs typeface="Georgia" pitchFamily="34" charset="-120"/>
+              </a:rPr>
+              <a:t>Diffusion — Particles Spreading Out</a:t>
+            </a:r>
+            <a:endParaRPr lang="en-US" sz="2000" dirty="0"/>
+          </a:p>
+        </p:txBody>
+      </p:sp>
+      <p:sp>
+        <p:nvSpPr>
+          <p:cNvPr id="6" name="Text 4"/>
+          <p:cNvSpPr/>
+          <p:nvPr/>
+        </p:nvSpPr>
+        <p:spPr>
+          <a:xfrm>
+            <a:off x="731520" y="1051560"/>
+            <a:ext cx="7680960" cy="3108960"/>
+          </a:xfrm>
+          <a:prstGeom prst="rect">
+            <a:avLst/>
+          </a:prstGeom>
+          <a:noFill/>
+          <a:ln/>
+        </p:spPr>
+        <p:txBody>
+          <a:bodyPr wrap="square" rtlCol="0" anchor="t"/>
+          <a:lstStyle/>
+          <a:p>
+            <a:pPr marL="342900" indent="-342900">
+              <a:spcAft>
+                <a:spcPts val="800"/>
+              </a:spcAft>
+              <a:buSzPct val="100000"/>
+              <a:buChar char="•"/>
+            </a:pPr>
+            <a:r>
+              <a:rPr lang="en-US" sz="1500" dirty="0">
+                <a:solidFill>
+                  <a:srgbClr val="3D3A36"/>
+                </a:solidFill>
+                <a:latin typeface="Calibri" pitchFamily="34" charset="0"/>
+                <a:ea typeface="Calibri" pitchFamily="34" charset="-122"/>
+                <a:cs typeface="Calibri" pitchFamily="34" charset="-120"/>
+              </a:rPr>
+              <a:t>Diffusion is the movement of particles from HIGH to LOW concentration.</a:t>
+            </a:r>
+            <a:endParaRPr lang="en-US" sz="1500" dirty="0"/>
+          </a:p>
+          <a:p>
+            <a:pPr marL="342900" indent="-342900">
+              <a:spcAft>
+                <a:spcPts val="800"/>
+              </a:spcAft>
+              <a:buSzPct val="100000"/>
+              <a:buChar char="•"/>
+            </a:pPr>
+            <a:r>
+              <a:rPr lang="en-US" sz="1500" dirty="0">
+                <a:solidFill>
+                  <a:srgbClr val="3D3A36"/>
+                </a:solidFill>
+                <a:latin typeface="Calibri" pitchFamily="34" charset="0"/>
+                <a:ea typeface="Calibri" pitchFamily="34" charset="-122"/>
+                <a:cs typeface="Calibri" pitchFamily="34" charset="-120"/>
+              </a:rPr>
+              <a:t>It happens because particles move RANDOMLY.</a:t>
+            </a:r>
+            <a:endParaRPr lang="en-US" sz="1500" dirty="0"/>
+          </a:p>
+          <a:p>
+            <a:pPr marL="342900" indent="-342900">
+              <a:spcAft>
+                <a:spcPts val="800"/>
+              </a:spcAft>
+              <a:buSzPct val="100000"/>
+              <a:buChar char="•"/>
+            </a:pPr>
+            <a:r>
+              <a:rPr lang="en-US" sz="1500" dirty="0">
+                <a:solidFill>
+                  <a:srgbClr val="3D3A36"/>
+                </a:solidFill>
+                <a:latin typeface="Calibri" pitchFamily="34" charset="0"/>
+                <a:ea typeface="Calibri" pitchFamily="34" charset="-122"/>
+                <a:cs typeface="Calibri" pitchFamily="34" charset="-120"/>
+              </a:rPr>
+              <a:t>Examples: smell of perfume spreading across a room, tea bag colouring water.</a:t>
+            </a:r>
+            <a:endParaRPr lang="en-US" sz="1500" dirty="0"/>
+          </a:p>
+          <a:p>
+            <a:pPr marL="342900" indent="-342900">
+              <a:spcAft>
+                <a:spcPts val="800"/>
+              </a:spcAft>
+              <a:buSzPct val="100000"/>
+              <a:buChar char="•"/>
+            </a:pPr>
+            <a:r>
+              <a:rPr lang="en-US" sz="1500" dirty="0">
+                <a:solidFill>
+                  <a:srgbClr val="3D3A36"/>
+                </a:solidFill>
+                <a:latin typeface="Calibri" pitchFamily="34" charset="0"/>
+                <a:ea typeface="Calibri" pitchFamily="34" charset="-122"/>
+                <a:cs typeface="Calibri" pitchFamily="34" charset="-120"/>
+              </a:rPr>
+              <a:t>Diffusion is FASTER in gases than liquids (particles move faster).</a:t>
+            </a:r>
+            <a:endParaRPr lang="en-US" sz="1500" dirty="0"/>
+          </a:p>
+          <a:p>
+            <a:pPr marL="342900" indent="-342900">
+              <a:spcAft>
+                <a:spcPts val="800"/>
+              </a:spcAft>
+              <a:buSzPct val="100000"/>
+              <a:buChar char="•"/>
+            </a:pPr>
+            <a:r>
+              <a:rPr lang="en-US" sz="1500" dirty="0">
+                <a:solidFill>
+                  <a:srgbClr val="3D3A36"/>
+                </a:solidFill>
+                <a:latin typeface="Calibri" pitchFamily="34" charset="0"/>
+                <a:ea typeface="Calibri" pitchFamily="34" charset="-122"/>
+                <a:cs typeface="Calibri" pitchFamily="34" charset="-120"/>
+              </a:rPr>
+              <a:t>Diffusion is FASTER at higher temperatures (more energy).</a:t>
+            </a:r>
+            <a:endParaRPr lang="en-US" sz="1500" dirty="0"/>
+          </a:p>
+        </p:txBody>
+      </p:sp>
+      <p:sp>
+        <p:nvSpPr>
+          <p:cNvPr id="7" name="Shape 5"/>
+          <p:cNvSpPr/>
+          <p:nvPr/>
+        </p:nvSpPr>
+        <p:spPr>
+          <a:xfrm>
+            <a:off x="731520" y="4206240"/>
+            <a:ext cx="7680960" cy="640080"/>
+          </a:xfrm>
+          <a:prstGeom prst="rect">
+            <a:avLst/>
+          </a:prstGeom>
+          <a:solidFill>
+            <a:srgbClr val="E8F5F3"/>
+          </a:solidFill>
+          <a:ln/>
+          <a:effectLst>
+            <a:outerShdw sx="100000" sy="100000" kx="0" ky="0" algn="bl" rotWithShape="0" blurRad="50800" dist="25400" dir="8100000">
+              <a:srgbClr val="000000">
+                <a:alpha val="10000"/>
+              </a:srgbClr>
+            </a:outerShdw>
+          </a:effectLst>
+        </p:spPr>
+      </p:sp>
+      <p:sp>
+        <p:nvSpPr>
+          <p:cNvPr id="8" name="Text 6"/>
+          <p:cNvSpPr/>
+          <p:nvPr/>
+        </p:nvSpPr>
+        <p:spPr>
+          <a:xfrm>
+            <a:off x="914400" y="4251960"/>
+            <a:ext cx="7315200" cy="548640"/>
+          </a:xfrm>
+          <a:prstGeom prst="rect">
+            <a:avLst/>
+          </a:prstGeom>
+          <a:noFill/>
+          <a:ln/>
+        </p:spPr>
+        <p:txBody>
+          <a:bodyPr wrap="square" rtlCol="0" anchor="ctr"/>
+          <a:lstStyle/>
+          <a:p>
+            <a:pPr indent="0" marL="0">
+              <a:buNone/>
+            </a:pPr>
+            <a:r>
+              <a:rPr lang="en-US" sz="1200" b="1" dirty="0">
+                <a:solidFill>
+                  <a:srgbClr val="2A9D8F"/>
+                </a:solidFill>
+                <a:latin typeface="Calibri" pitchFamily="34" charset="0"/>
+                <a:ea typeface="Calibri" pitchFamily="34" charset="-122"/>
+                <a:cs typeface="Calibri" pitchFamily="34" charset="-120"/>
+              </a:rPr>
+              <a:t>Key Idea: </a:t>
+            </a:r>
+            <a:pPr indent="0" marL="0">
+              <a:buNone/>
+            </a:pPr>
+            <a:r>
+              <a:rPr lang="en-US" sz="1200" i="1" dirty="0">
+                <a:solidFill>
+                  <a:srgbClr val="3D3A36"/>
+                </a:solidFill>
+                <a:latin typeface="Calibri" pitchFamily="34" charset="0"/>
+                <a:ea typeface="Calibri" pitchFamily="34" charset="-122"/>
+                <a:cs typeface="Calibri" pitchFamily="34" charset="-120"/>
+              </a:rPr>
+              <a:t>Diffusion happens WITHOUT stirring — it is driven by random particle movement.</a:t>
+            </a:r>
+            <a:endParaRPr lang="en-US" sz="1200" dirty="0"/>
+          </a:p>
+        </p:txBody>
+      </p:sp>
+    </p:spTree>
+  </p:cSld>
+  <p:clrMapOvr>
+    <a:masterClrMapping/>
+  </p:clrMapOvr>
+</p:sld>
+</file>
+
+<file path=ppt/slides/slide6.xml><?xml version="1.0" encoding="utf-8"?>
+<p:sld xmlns:a="http://schemas.openxmlformats.org/drawingml/2006/main" xmlns:r="http://schemas.openxmlformats.org/officeDocument/2006/relationships" xmlns:p="http://schemas.openxmlformats.org/presentationml/2006/main">
+  <p:cSld name="Slide 6">
+    <p:bg>
+      <p:bgPr>
+        <a:solidFill>
+          <a:srgbClr val="FAF8F5"/>
+        </a:solidFill>
+      </p:bgPr>
+    </p:bg>
+    <p:spTree>
+      <p:nvGrpSpPr>
+        <p:cNvPr id="1" name=""/>
+        <p:cNvGrpSpPr/>
+        <p:nvPr/>
+      </p:nvGrpSpPr>
+      <p:grpSpPr>
+        <a:xfrm>
+          <a:off x="0" y="0"/>
+          <a:ext cx="0" cy="0"/>
+          <a:chOff x="0" y="0"/>
+          <a:chExt cx="0" cy="0"/>
+        </a:xfrm>
+      </p:grpSpPr>
+      <p:sp>
+        <p:nvSpPr>
+          <p:cNvPr id="2" name="Shape 0"/>
+          <p:cNvSpPr/>
+          <p:nvPr/>
+        </p:nvSpPr>
+        <p:spPr>
+          <a:xfrm>
+            <a:off x="0" y="0"/>
+            <a:ext cx="9144000" cy="822960"/>
+          </a:xfrm>
+          <a:prstGeom prst="rect">
+            <a:avLst/>
+          </a:prstGeom>
+          <a:solidFill>
+            <a:srgbClr val="FFFFFF"/>
+          </a:solidFill>
+          <a:ln/>
+        </p:spPr>
+      </p:sp>
+      <p:sp>
+        <p:nvSpPr>
+          <p:cNvPr id="3" name="Shape 1"/>
+          <p:cNvSpPr/>
+          <p:nvPr/>
+        </p:nvSpPr>
+        <p:spPr>
+          <a:xfrm>
+            <a:off x="0" y="804672"/>
+            <a:ext cx="9144000" cy="27432"/>
+          </a:xfrm>
+          <a:prstGeom prst="rect">
+            <a:avLst/>
+          </a:prstGeom>
+          <a:solidFill>
+            <a:srgbClr val="E5E2DC"/>
+          </a:solidFill>
+          <a:ln/>
+        </p:spPr>
+      </p:sp>
+      <p:sp>
+        <p:nvSpPr>
+          <p:cNvPr id="4" name="Shape 2"/>
+          <p:cNvSpPr/>
+          <p:nvPr/>
+        </p:nvSpPr>
+        <p:spPr>
+          <a:xfrm>
+            <a:off x="548640" y="201168"/>
+            <a:ext cx="54864" cy="420624"/>
+          </a:xfrm>
+          <a:prstGeom prst="rect">
+            <a:avLst/>
+          </a:prstGeom>
+          <a:solidFill>
+            <a:srgbClr val="2A9D8F"/>
+          </a:solidFill>
+          <a:ln/>
+        </p:spPr>
+      </p:sp>
+      <p:sp>
+        <p:nvSpPr>
+          <p:cNvPr id="5" name="Text 3"/>
+          <p:cNvSpPr/>
+          <p:nvPr/>
+        </p:nvSpPr>
+        <p:spPr>
+          <a:xfrm>
+            <a:off x="777240" y="137160"/>
+            <a:ext cx="7772400" cy="548640"/>
+          </a:xfrm>
+          <a:prstGeom prst="rect">
+            <a:avLst/>
+          </a:prstGeom>
+          <a:noFill/>
+          <a:ln/>
+        </p:spPr>
+        <p:txBody>
+          <a:bodyPr wrap="square" lIns="0" tIns="0" rIns="0" bIns="0" rtlCol="0" anchor="ctr"/>
+          <a:lstStyle/>
+          <a:p>
+            <a:pPr indent="0" marL="0">
+              <a:buNone/>
+            </a:pPr>
+            <a:r>
+              <a:rPr lang="en-US" sz="2000" b="1" dirty="0">
+                <a:solidFill>
+                  <a:srgbClr val="1B2A4A"/>
+                </a:solidFill>
+                <a:latin typeface="Georgia" pitchFamily="34" charset="0"/>
+                <a:ea typeface="Georgia" pitchFamily="34" charset="-122"/>
+                <a:cs typeface="Georgia" pitchFamily="34" charset="-120"/>
+              </a:rPr>
+              <a:t>Gas Pressure</a:t>
+            </a:r>
+            <a:endParaRPr lang="en-US" sz="2000" dirty="0"/>
+          </a:p>
+        </p:txBody>
+      </p:sp>
+      <p:sp>
+        <p:nvSpPr>
+          <p:cNvPr id="6" name="Shape 4"/>
+          <p:cNvSpPr/>
+          <p:nvPr/>
+        </p:nvSpPr>
+        <p:spPr>
+          <a:xfrm>
+            <a:off x="548640" y="1051560"/>
+            <a:ext cx="3840480" cy="3474720"/>
+          </a:xfrm>
+          <a:prstGeom prst="rect">
+            <a:avLst/>
+          </a:prstGeom>
+          <a:solidFill>
+            <a:srgbClr val="FFFFFF"/>
+          </a:solidFill>
+          <a:ln/>
+          <a:effectLst>
+            <a:outerShdw sx="100000" sy="100000" kx="0" ky="0" algn="bl" rotWithShape="0" blurRad="50800" dist="25400" dir="8100000">
+              <a:srgbClr val="000000">
+                <a:alpha val="10000"/>
+              </a:srgbClr>
+            </a:outerShdw>
+          </a:effectLst>
+        </p:spPr>
+      </p:sp>
+      <p:sp>
+        <p:nvSpPr>
+          <p:cNvPr id="7" name="Shape 5"/>
+          <p:cNvSpPr/>
+          <p:nvPr/>
+        </p:nvSpPr>
+        <p:spPr>
+          <a:xfrm>
+            <a:off x="548640" y="1051560"/>
+            <a:ext cx="3840480" cy="54864"/>
+          </a:xfrm>
+          <a:prstGeom prst="rect">
+            <a:avLst/>
+          </a:prstGeom>
+          <a:solidFill>
+            <a:srgbClr val="2A9D8F"/>
+          </a:solidFill>
+          <a:ln/>
+        </p:spPr>
+      </p:sp>
+      <p:sp>
+        <p:nvSpPr>
+          <p:cNvPr id="8" name="Text 6"/>
+          <p:cNvSpPr/>
+          <p:nvPr/>
+        </p:nvSpPr>
+        <p:spPr>
+          <a:xfrm>
+            <a:off x="777240" y="1188720"/>
+            <a:ext cx="3383280" cy="457200"/>
+          </a:xfrm>
+          <a:prstGeom prst="rect">
+            <a:avLst/>
+          </a:prstGeom>
+          <a:noFill/>
+          <a:ln/>
+        </p:spPr>
+        <p:txBody>
+          <a:bodyPr wrap="square" lIns="0" tIns="0" rIns="0" bIns="0" rtlCol="0" anchor="ctr"/>
+          <a:lstStyle/>
+          <a:p>
+            <a:pPr indent="0" marL="0">
+              <a:buNone/>
+            </a:pPr>
+            <a:r>
+              <a:rPr lang="en-US" sz="1500" b="1" dirty="0">
+                <a:solidFill>
+                  <a:srgbClr val="1B2A4A"/>
+                </a:solidFill>
+                <a:latin typeface="Georgia" pitchFamily="34" charset="0"/>
+                <a:ea typeface="Georgia" pitchFamily="34" charset="-122"/>
+                <a:cs typeface="Georgia" pitchFamily="34" charset="-120"/>
+              </a:rPr>
+              <a:t>What Is Gas Pressure?</a:t>
+            </a:r>
+            <a:endParaRPr lang="en-US" sz="1500" dirty="0"/>
+          </a:p>
+        </p:txBody>
+      </p:sp>
+      <p:sp>
+        <p:nvSpPr>
+          <p:cNvPr id="9" name="Text 7"/>
+          <p:cNvSpPr/>
+          <p:nvPr/>
+        </p:nvSpPr>
+        <p:spPr>
+          <a:xfrm>
+            <a:off x="777240" y="1691640"/>
+            <a:ext cx="3383280" cy="2651760"/>
+          </a:xfrm>
+          <a:prstGeom prst="rect">
+            <a:avLst/>
+          </a:prstGeom>
+          <a:noFill/>
+          <a:ln/>
+        </p:spPr>
+        <p:txBody>
+          <a:bodyPr wrap="square" rtlCol="0" anchor="t"/>
+          <a:lstStyle/>
+          <a:p>
+            <a:pPr marL="342900" indent="-342900">
+              <a:spcAft>
+                <a:spcPts val="600"/>
+              </a:spcAft>
+              <a:buSzPct val="100000"/>
+              <a:buChar char="•"/>
+            </a:pPr>
+            <a:r>
+              <a:rPr lang="en-US" sz="1300" dirty="0">
+                <a:solidFill>
+                  <a:srgbClr val="3D3A36"/>
+                </a:solidFill>
+                <a:latin typeface="Calibri" pitchFamily="34" charset="0"/>
+                <a:ea typeface="Calibri" pitchFamily="34" charset="-122"/>
+                <a:cs typeface="Calibri" pitchFamily="34" charset="-120"/>
+              </a:rPr>
+              <a:t>Gas particles hit the walls of their container</a:t>
+            </a:r>
+            <a:endParaRPr lang="en-US" sz="1300" dirty="0"/>
+          </a:p>
+          <a:p>
+            <a:pPr marL="342900" indent="-342900">
+              <a:spcAft>
+                <a:spcPts val="600"/>
+              </a:spcAft>
+              <a:buSzPct val="100000"/>
+              <a:buChar char="•"/>
+            </a:pPr>
+            <a:r>
+              <a:rPr lang="en-US" sz="1300" dirty="0">
+                <a:solidFill>
+                  <a:srgbClr val="3D3A36"/>
+                </a:solidFill>
+                <a:latin typeface="Calibri" pitchFamily="34" charset="0"/>
+                <a:ea typeface="Calibri" pitchFamily="34" charset="-122"/>
+                <a:cs typeface="Calibri" pitchFamily="34" charset="-120"/>
+              </a:rPr>
+              <a:t>Each hit exerts a tiny force</a:t>
+            </a:r>
+            <a:endParaRPr lang="en-US" sz="1300" dirty="0"/>
+          </a:p>
+          <a:p>
+            <a:pPr marL="342900" indent="-342900">
+              <a:spcAft>
+                <a:spcPts val="600"/>
+              </a:spcAft>
+              <a:buSzPct val="100000"/>
+              <a:buChar char="•"/>
+            </a:pPr>
+            <a:r>
+              <a:rPr lang="en-US" sz="1300" dirty="0">
+                <a:solidFill>
+                  <a:srgbClr val="3D3A36"/>
+                </a:solidFill>
+                <a:latin typeface="Calibri" pitchFamily="34" charset="0"/>
+                <a:ea typeface="Calibri" pitchFamily="34" charset="-122"/>
+                <a:cs typeface="Calibri" pitchFamily="34" charset="-120"/>
+              </a:rPr>
+              <a:t>Billions of hits per second = pressure</a:t>
+            </a:r>
+            <a:endParaRPr lang="en-US" sz="1300" dirty="0"/>
+          </a:p>
+          <a:p>
+            <a:pPr marL="342900" indent="-342900">
+              <a:spcAft>
+                <a:spcPts val="600"/>
+              </a:spcAft>
+              <a:buSzPct val="100000"/>
+              <a:buChar char="•"/>
+            </a:pPr>
+            <a:r>
+              <a:rPr lang="en-US" sz="1300" dirty="0">
+                <a:solidFill>
+                  <a:srgbClr val="3D3A36"/>
+                </a:solidFill>
+                <a:latin typeface="Calibri" pitchFamily="34" charset="0"/>
+                <a:ea typeface="Calibri" pitchFamily="34" charset="-122"/>
+                <a:cs typeface="Calibri" pitchFamily="34" charset="-120"/>
+              </a:rPr>
+              <a:t>Measured in Pascals (Pa)</a:t>
+            </a:r>
+            <a:endParaRPr lang="en-US" sz="1300" dirty="0"/>
+          </a:p>
+        </p:txBody>
+      </p:sp>
+      <p:sp>
+        <p:nvSpPr>
+          <p:cNvPr id="10" name="Shape 8"/>
+          <p:cNvSpPr/>
+          <p:nvPr/>
+        </p:nvSpPr>
+        <p:spPr>
+          <a:xfrm>
+            <a:off x="4754880" y="1051560"/>
+            <a:ext cx="3840480" cy="3474720"/>
+          </a:xfrm>
+          <a:prstGeom prst="rect">
+            <a:avLst/>
+          </a:prstGeom>
+          <a:solidFill>
+            <a:srgbClr val="FFFFFF"/>
+          </a:solidFill>
+          <a:ln/>
+          <a:effectLst>
+            <a:outerShdw sx="100000" sy="100000" kx="0" ky="0" algn="bl" rotWithShape="0" blurRad="50800" dist="25400" dir="8100000">
+              <a:srgbClr val="000000">
+                <a:alpha val="10000"/>
+              </a:srgbClr>
+            </a:outerShdw>
+          </a:effectLst>
+        </p:spPr>
+      </p:sp>
+      <p:sp>
+        <p:nvSpPr>
+          <p:cNvPr id="11" name="Shape 9"/>
+          <p:cNvSpPr/>
+          <p:nvPr/>
+        </p:nvSpPr>
+        <p:spPr>
+          <a:xfrm>
+            <a:off x="4754880" y="1051560"/>
+            <a:ext cx="3840480" cy="54864"/>
           </a:xfrm>
           <a:prstGeom prst="rect">
             <a:avLst/>
@@ -2723,14 +5719,310 @@
       </p:sp>
       <p:sp>
         <p:nvSpPr>
-          <p:cNvPr id="3" name="Text 1"/>
-          <p:cNvSpPr/>
-          <p:nvPr/>
-        </p:nvSpPr>
-        <p:spPr>
-          <a:xfrm>
-            <a:off x="731520" y="457200"/>
-            <a:ext cx="7772400" cy="731520"/>
+          <p:cNvPr id="12" name="Text 10"/>
+          <p:cNvSpPr/>
+          <p:nvPr/>
+        </p:nvSpPr>
+        <p:spPr>
+          <a:xfrm>
+            <a:off x="4983480" y="1188720"/>
+            <a:ext cx="3383280" cy="457200"/>
+          </a:xfrm>
+          <a:prstGeom prst="rect">
+            <a:avLst/>
+          </a:prstGeom>
+          <a:noFill/>
+          <a:ln/>
+        </p:spPr>
+        <p:txBody>
+          <a:bodyPr wrap="square" lIns="0" tIns="0" rIns="0" bIns="0" rtlCol="0" anchor="ctr"/>
+          <a:lstStyle/>
+          <a:p>
+            <a:pPr indent="0" marL="0">
+              <a:buNone/>
+            </a:pPr>
+            <a:r>
+              <a:rPr lang="en-US" sz="1500" b="1" dirty="0">
+                <a:solidFill>
+                  <a:srgbClr val="1B2A4A"/>
+                </a:solidFill>
+                <a:latin typeface="Georgia" pitchFamily="34" charset="0"/>
+                <a:ea typeface="Georgia" pitchFamily="34" charset="-122"/>
+                <a:cs typeface="Georgia" pitchFamily="34" charset="-120"/>
+              </a:rPr>
+              <a:t>What Affects Gas Pressure?</a:t>
+            </a:r>
+            <a:endParaRPr lang="en-US" sz="1500" dirty="0"/>
+          </a:p>
+        </p:txBody>
+      </p:sp>
+      <p:sp>
+        <p:nvSpPr>
+          <p:cNvPr id="13" name="Text 11"/>
+          <p:cNvSpPr/>
+          <p:nvPr/>
+        </p:nvSpPr>
+        <p:spPr>
+          <a:xfrm>
+            <a:off x="4983480" y="1691640"/>
+            <a:ext cx="3383280" cy="2651760"/>
+          </a:xfrm>
+          <a:prstGeom prst="rect">
+            <a:avLst/>
+          </a:prstGeom>
+          <a:noFill/>
+          <a:ln/>
+        </p:spPr>
+        <p:txBody>
+          <a:bodyPr wrap="square" rtlCol="0" anchor="t"/>
+          <a:lstStyle/>
+          <a:p>
+            <a:pPr marL="342900" indent="-342900">
+              <a:spcAft>
+                <a:spcPts val="600"/>
+              </a:spcAft>
+              <a:buSzPct val="100000"/>
+              <a:buChar char="•"/>
+            </a:pPr>
+            <a:r>
+              <a:rPr lang="en-US" sz="1300" dirty="0">
+                <a:solidFill>
+                  <a:srgbClr val="3D3A36"/>
+                </a:solidFill>
+                <a:latin typeface="Calibri" pitchFamily="34" charset="0"/>
+                <a:ea typeface="Calibri" pitchFamily="34" charset="-122"/>
+                <a:cs typeface="Calibri" pitchFamily="34" charset="-120"/>
+              </a:rPr>
+              <a:t>More particles = more hits = higher pressure</a:t>
+            </a:r>
+            <a:endParaRPr lang="en-US" sz="1300" dirty="0"/>
+          </a:p>
+          <a:p>
+            <a:pPr marL="342900" indent="-342900">
+              <a:spcAft>
+                <a:spcPts val="600"/>
+              </a:spcAft>
+              <a:buSzPct val="100000"/>
+              <a:buChar char="•"/>
+            </a:pPr>
+            <a:r>
+              <a:rPr lang="en-US" sz="1300" dirty="0">
+                <a:solidFill>
+                  <a:srgbClr val="3D3A36"/>
+                </a:solidFill>
+                <a:latin typeface="Calibri" pitchFamily="34" charset="0"/>
+                <a:ea typeface="Calibri" pitchFamily="34" charset="-122"/>
+                <a:cs typeface="Calibri" pitchFamily="34" charset="-120"/>
+              </a:rPr>
+              <a:t>Higher temperature = faster particles = higher pressure</a:t>
+            </a:r>
+            <a:endParaRPr lang="en-US" sz="1300" dirty="0"/>
+          </a:p>
+          <a:p>
+            <a:pPr marL="342900" indent="-342900">
+              <a:spcAft>
+                <a:spcPts val="600"/>
+              </a:spcAft>
+              <a:buSzPct val="100000"/>
+              <a:buChar char="•"/>
+            </a:pPr>
+            <a:r>
+              <a:rPr lang="en-US" sz="1300" dirty="0">
+                <a:solidFill>
+                  <a:srgbClr val="3D3A36"/>
+                </a:solidFill>
+                <a:latin typeface="Calibri" pitchFamily="34" charset="0"/>
+                <a:ea typeface="Calibri" pitchFamily="34" charset="-122"/>
+                <a:cs typeface="Calibri" pitchFamily="34" charset="-120"/>
+              </a:rPr>
+              <a:t>Smaller volume = more frequent hits = higher pressure</a:t>
+            </a:r>
+            <a:endParaRPr lang="en-US" sz="1300" dirty="0"/>
+          </a:p>
+          <a:p>
+            <a:pPr marL="342900" indent="-342900">
+              <a:spcAft>
+                <a:spcPts val="600"/>
+              </a:spcAft>
+              <a:buSzPct val="100000"/>
+              <a:buChar char="•"/>
+            </a:pPr>
+            <a:r>
+              <a:rPr lang="en-US" sz="1300" dirty="0">
+                <a:solidFill>
+                  <a:srgbClr val="3D3A36"/>
+                </a:solidFill>
+                <a:latin typeface="Calibri" pitchFamily="34" charset="0"/>
+                <a:ea typeface="Calibri" pitchFamily="34" charset="-122"/>
+                <a:cs typeface="Calibri" pitchFamily="34" charset="-120"/>
+              </a:rPr>
+              <a:t>This explains why tyres can burst in hot weather</a:t>
+            </a:r>
+            <a:endParaRPr lang="en-US" sz="1300" dirty="0"/>
+          </a:p>
+        </p:txBody>
+      </p:sp>
+    </p:spTree>
+  </p:cSld>
+  <p:clrMapOvr>
+    <a:masterClrMapping/>
+  </p:clrMapOvr>
+</p:sld>
+</file>
+
+<file path=ppt/slides/slide7.xml><?xml version="1.0" encoding="utf-8"?>
+<p:sld xmlns:a="http://schemas.openxmlformats.org/drawingml/2006/main" xmlns:r="http://schemas.openxmlformats.org/officeDocument/2006/relationships" xmlns:p="http://schemas.openxmlformats.org/presentationml/2006/main">
+  <p:cSld name="Slide 7">
+    <p:bg>
+      <p:bgPr>
+        <a:solidFill>
+          <a:srgbClr val="FAF8F5"/>
+        </a:solidFill>
+      </p:bgPr>
+    </p:bg>
+    <p:spTree>
+      <p:nvGrpSpPr>
+        <p:cNvPr id="1" name=""/>
+        <p:cNvGrpSpPr/>
+        <p:nvPr/>
+      </p:nvGrpSpPr>
+      <p:grpSpPr>
+        <a:xfrm>
+          <a:off x="0" y="0"/>
+          <a:ext cx="0" cy="0"/>
+          <a:chOff x="0" y="0"/>
+          <a:chExt cx="0" cy="0"/>
+        </a:xfrm>
+      </p:grpSpPr>
+      <p:sp>
+        <p:nvSpPr>
+          <p:cNvPr id="2" name="Shape 0"/>
+          <p:cNvSpPr/>
+          <p:nvPr/>
+        </p:nvSpPr>
+        <p:spPr>
+          <a:xfrm>
+            <a:off x="0" y="0"/>
+            <a:ext cx="9144000" cy="822960"/>
+          </a:xfrm>
+          <a:prstGeom prst="rect">
+            <a:avLst/>
+          </a:prstGeom>
+          <a:solidFill>
+            <a:srgbClr val="FFFFFF"/>
+          </a:solidFill>
+          <a:ln/>
+        </p:spPr>
+      </p:sp>
+      <p:sp>
+        <p:nvSpPr>
+          <p:cNvPr id="3" name="Shape 1"/>
+          <p:cNvSpPr/>
+          <p:nvPr/>
+        </p:nvSpPr>
+        <p:spPr>
+          <a:xfrm>
+            <a:off x="0" y="804672"/>
+            <a:ext cx="9144000" cy="27432"/>
+          </a:xfrm>
+          <a:prstGeom prst="rect">
+            <a:avLst/>
+          </a:prstGeom>
+          <a:solidFill>
+            <a:srgbClr val="E5E2DC"/>
+          </a:solidFill>
+          <a:ln/>
+        </p:spPr>
+      </p:sp>
+      <p:sp>
+        <p:nvSpPr>
+          <p:cNvPr id="4" name="Shape 2"/>
+          <p:cNvSpPr/>
+          <p:nvPr/>
+        </p:nvSpPr>
+        <p:spPr>
+          <a:xfrm>
+            <a:off x="548640" y="201168"/>
+            <a:ext cx="54864" cy="420624"/>
+          </a:xfrm>
+          <a:prstGeom prst="rect">
+            <a:avLst/>
+          </a:prstGeom>
+          <a:solidFill>
+            <a:srgbClr val="2A9D8F"/>
+          </a:solidFill>
+          <a:ln/>
+        </p:spPr>
+      </p:sp>
+      <p:sp>
+        <p:nvSpPr>
+          <p:cNvPr id="5" name="Text 3"/>
+          <p:cNvSpPr/>
+          <p:nvPr/>
+        </p:nvSpPr>
+        <p:spPr>
+          <a:xfrm>
+            <a:off x="777240" y="137160"/>
+            <a:ext cx="7772400" cy="548640"/>
+          </a:xfrm>
+          <a:prstGeom prst="rect">
+            <a:avLst/>
+          </a:prstGeom>
+          <a:noFill/>
+          <a:ln/>
+        </p:spPr>
+        <p:txBody>
+          <a:bodyPr wrap="square" lIns="0" tIns="0" rIns="0" bIns="0" rtlCol="0" anchor="ctr"/>
+          <a:lstStyle/>
+          <a:p>
+            <a:pPr indent="0" marL="0">
+              <a:buNone/>
+            </a:pPr>
+            <a:r>
+              <a:rPr lang="en-US" sz="2000" b="1" dirty="0">
+                <a:solidFill>
+                  <a:srgbClr val="1B2A4A"/>
+                </a:solidFill>
+                <a:latin typeface="Georgia" pitchFamily="34" charset="0"/>
+                <a:ea typeface="Georgia" pitchFamily="34" charset="-122"/>
+                <a:cs typeface="Georgia" pitchFamily="34" charset="-120"/>
+              </a:rPr>
+              <a:t>Check Your Understanding</a:t>
+            </a:r>
+            <a:endParaRPr lang="en-US" sz="2000" dirty="0"/>
+          </a:p>
+        </p:txBody>
+      </p:sp>
+      <p:sp>
+        <p:nvSpPr>
+          <p:cNvPr id="6" name="Shape 4"/>
+          <p:cNvSpPr/>
+          <p:nvPr/>
+        </p:nvSpPr>
+        <p:spPr>
+          <a:xfrm>
+            <a:off x="731520" y="1051560"/>
+            <a:ext cx="7680960" cy="438912"/>
+          </a:xfrm>
+          <a:prstGeom prst="rect">
+            <a:avLst/>
+          </a:prstGeom>
+          <a:solidFill>
+            <a:srgbClr val="FFFFFF"/>
+          </a:solidFill>
+          <a:ln/>
+        </p:spPr>
+      </p:sp>
+      <p:sp>
+        <p:nvSpPr>
+          <p:cNvPr id="7" name="Text 5"/>
+          <p:cNvSpPr/>
+          <p:nvPr/>
+        </p:nvSpPr>
+        <p:spPr>
+          <a:xfrm>
+            <a:off x="868680" y="1051560"/>
+            <a:ext cx="320040" cy="438912"/>
           </a:xfrm>
           <a:prstGeom prst="rect">
             <a:avLst/>
@@ -2746,7 +6038,629 @@
               <a:buNone/>
             </a:pPr>
             <a:r>
-              <a:rPr lang="en-US" sz="3200" b="1" dirty="0">
+              <a:rPr lang="en-US" sz="1400" dirty="0">
+                <a:solidFill>
+                  <a:srgbClr val="2A9D8F"/>
+                </a:solidFill>
+              </a:rPr>
+              <a:t>☐</a:t>
+            </a:r>
+            <a:endParaRPr lang="en-US" sz="1400" dirty="0"/>
+          </a:p>
+        </p:txBody>
+      </p:sp>
+      <p:sp>
+        <p:nvSpPr>
+          <p:cNvPr id="8" name="Text 6"/>
+          <p:cNvSpPr/>
+          <p:nvPr/>
+        </p:nvSpPr>
+        <p:spPr>
+          <a:xfrm>
+            <a:off x="1234440" y="1051560"/>
+            <a:ext cx="6949440" cy="438912"/>
+          </a:xfrm>
+          <a:prstGeom prst="rect">
+            <a:avLst/>
+          </a:prstGeom>
+          <a:noFill/>
+          <a:ln/>
+        </p:spPr>
+        <p:txBody>
+          <a:bodyPr wrap="square" rtlCol="0" anchor="ctr"/>
+          <a:lstStyle/>
+          <a:p>
+            <a:pPr indent="0" marL="0">
+              <a:buNone/>
+            </a:pPr>
+            <a:r>
+              <a:rPr lang="en-US" sz="1300" dirty="0">
+                <a:solidFill>
+                  <a:srgbClr val="3D3A36"/>
+                </a:solidFill>
+                <a:latin typeface="Calibri" pitchFamily="34" charset="0"/>
+                <a:ea typeface="Calibri" pitchFamily="34" charset="-122"/>
+                <a:cs typeface="Calibri" pitchFamily="34" charset="-120"/>
+              </a:rPr>
+              <a:t>I can describe properties of solids, liquids, and gases</a:t>
+            </a:r>
+            <a:endParaRPr lang="en-US" sz="1300" dirty="0"/>
+          </a:p>
+        </p:txBody>
+      </p:sp>
+      <p:sp>
+        <p:nvSpPr>
+          <p:cNvPr id="9" name="Shape 7"/>
+          <p:cNvSpPr/>
+          <p:nvPr/>
+        </p:nvSpPr>
+        <p:spPr>
+          <a:xfrm>
+            <a:off x="731520" y="1554480"/>
+            <a:ext cx="7680960" cy="438912"/>
+          </a:xfrm>
+          <a:prstGeom prst="rect">
+            <a:avLst/>
+          </a:prstGeom>
+          <a:solidFill>
+            <a:srgbClr val="F8F6F3"/>
+          </a:solidFill>
+          <a:ln/>
+        </p:spPr>
+      </p:sp>
+      <p:sp>
+        <p:nvSpPr>
+          <p:cNvPr id="10" name="Text 8"/>
+          <p:cNvSpPr/>
+          <p:nvPr/>
+        </p:nvSpPr>
+        <p:spPr>
+          <a:xfrm>
+            <a:off x="868680" y="1554480"/>
+            <a:ext cx="320040" cy="438912"/>
+          </a:xfrm>
+          <a:prstGeom prst="rect">
+            <a:avLst/>
+          </a:prstGeom>
+          <a:noFill/>
+          <a:ln/>
+        </p:spPr>
+        <p:txBody>
+          <a:bodyPr wrap="square" rtlCol="0" anchor="ctr"/>
+          <a:lstStyle/>
+          <a:p>
+            <a:pPr indent="0" marL="0">
+              <a:buNone/>
+            </a:pPr>
+            <a:r>
+              <a:rPr lang="en-US" sz="1400" dirty="0">
+                <a:solidFill>
+                  <a:srgbClr val="2A9D8F"/>
+                </a:solidFill>
+              </a:rPr>
+              <a:t>☐</a:t>
+            </a:r>
+            <a:endParaRPr lang="en-US" sz="1400" dirty="0"/>
+          </a:p>
+        </p:txBody>
+      </p:sp>
+      <p:sp>
+        <p:nvSpPr>
+          <p:cNvPr id="11" name="Text 9"/>
+          <p:cNvSpPr/>
+          <p:nvPr/>
+        </p:nvSpPr>
+        <p:spPr>
+          <a:xfrm>
+            <a:off x="1234440" y="1554480"/>
+            <a:ext cx="6949440" cy="438912"/>
+          </a:xfrm>
+          <a:prstGeom prst="rect">
+            <a:avLst/>
+          </a:prstGeom>
+          <a:noFill/>
+          <a:ln/>
+        </p:spPr>
+        <p:txBody>
+          <a:bodyPr wrap="square" rtlCol="0" anchor="ctr"/>
+          <a:lstStyle/>
+          <a:p>
+            <a:pPr indent="0" marL="0">
+              <a:buNone/>
+            </a:pPr>
+            <a:r>
+              <a:rPr lang="en-US" sz="1300" dirty="0">
+                <a:solidFill>
+                  <a:srgbClr val="3D3A36"/>
+                </a:solidFill>
+                <a:latin typeface="Calibri" pitchFamily="34" charset="0"/>
+                <a:ea typeface="Calibri" pitchFamily="34" charset="-122"/>
+                <a:cs typeface="Calibri" pitchFamily="34" charset="-120"/>
+              </a:rPr>
+              <a:t>I understand density and how it relates to states of matter</a:t>
+            </a:r>
+            <a:endParaRPr lang="en-US" sz="1300" dirty="0"/>
+          </a:p>
+        </p:txBody>
+      </p:sp>
+      <p:sp>
+        <p:nvSpPr>
+          <p:cNvPr id="12" name="Shape 10"/>
+          <p:cNvSpPr/>
+          <p:nvPr/>
+        </p:nvSpPr>
+        <p:spPr>
+          <a:xfrm>
+            <a:off x="731520" y="2057400"/>
+            <a:ext cx="7680960" cy="438912"/>
+          </a:xfrm>
+          <a:prstGeom prst="rect">
+            <a:avLst/>
+          </a:prstGeom>
+          <a:solidFill>
+            <a:srgbClr val="FFFFFF"/>
+          </a:solidFill>
+          <a:ln/>
+        </p:spPr>
+      </p:sp>
+      <p:sp>
+        <p:nvSpPr>
+          <p:cNvPr id="13" name="Text 11"/>
+          <p:cNvSpPr/>
+          <p:nvPr/>
+        </p:nvSpPr>
+        <p:spPr>
+          <a:xfrm>
+            <a:off x="868680" y="2057400"/>
+            <a:ext cx="320040" cy="438912"/>
+          </a:xfrm>
+          <a:prstGeom prst="rect">
+            <a:avLst/>
+          </a:prstGeom>
+          <a:noFill/>
+          <a:ln/>
+        </p:spPr>
+        <p:txBody>
+          <a:bodyPr wrap="square" rtlCol="0" anchor="ctr"/>
+          <a:lstStyle/>
+          <a:p>
+            <a:pPr indent="0" marL="0">
+              <a:buNone/>
+            </a:pPr>
+            <a:r>
+              <a:rPr lang="en-US" sz="1400" dirty="0">
+                <a:solidFill>
+                  <a:srgbClr val="2A9D8F"/>
+                </a:solidFill>
+              </a:rPr>
+              <a:t>☐</a:t>
+            </a:r>
+            <a:endParaRPr lang="en-US" sz="1400" dirty="0"/>
+          </a:p>
+        </p:txBody>
+      </p:sp>
+      <p:sp>
+        <p:nvSpPr>
+          <p:cNvPr id="14" name="Text 12"/>
+          <p:cNvSpPr/>
+          <p:nvPr/>
+        </p:nvSpPr>
+        <p:spPr>
+          <a:xfrm>
+            <a:off x="1234440" y="2057400"/>
+            <a:ext cx="6949440" cy="438912"/>
+          </a:xfrm>
+          <a:prstGeom prst="rect">
+            <a:avLst/>
+          </a:prstGeom>
+          <a:noFill/>
+          <a:ln/>
+        </p:spPr>
+        <p:txBody>
+          <a:bodyPr wrap="square" rtlCol="0" anchor="ctr"/>
+          <a:lstStyle/>
+          <a:p>
+            <a:pPr indent="0" marL="0">
+              <a:buNone/>
+            </a:pPr>
+            <a:r>
+              <a:rPr lang="en-US" sz="1300" dirty="0">
+                <a:solidFill>
+                  <a:srgbClr val="3D3A36"/>
+                </a:solidFill>
+                <a:latin typeface="Calibri" pitchFamily="34" charset="0"/>
+                <a:ea typeface="Calibri" pitchFamily="34" charset="-122"/>
+                <a:cs typeface="Calibri" pitchFamily="34" charset="-120"/>
+              </a:rPr>
+              <a:t>I can explain diffusion using the particle model</a:t>
+            </a:r>
+            <a:endParaRPr lang="en-US" sz="1300" dirty="0"/>
+          </a:p>
+        </p:txBody>
+      </p:sp>
+      <p:sp>
+        <p:nvSpPr>
+          <p:cNvPr id="15" name="Shape 13"/>
+          <p:cNvSpPr/>
+          <p:nvPr/>
+        </p:nvSpPr>
+        <p:spPr>
+          <a:xfrm>
+            <a:off x="731520" y="2560320"/>
+            <a:ext cx="7680960" cy="438912"/>
+          </a:xfrm>
+          <a:prstGeom prst="rect">
+            <a:avLst/>
+          </a:prstGeom>
+          <a:solidFill>
+            <a:srgbClr val="F8F6F3"/>
+          </a:solidFill>
+          <a:ln/>
+        </p:spPr>
+      </p:sp>
+      <p:sp>
+        <p:nvSpPr>
+          <p:cNvPr id="16" name="Text 14"/>
+          <p:cNvSpPr/>
+          <p:nvPr/>
+        </p:nvSpPr>
+        <p:spPr>
+          <a:xfrm>
+            <a:off x="868680" y="2560320"/>
+            <a:ext cx="320040" cy="438912"/>
+          </a:xfrm>
+          <a:prstGeom prst="rect">
+            <a:avLst/>
+          </a:prstGeom>
+          <a:noFill/>
+          <a:ln/>
+        </p:spPr>
+        <p:txBody>
+          <a:bodyPr wrap="square" rtlCol="0" anchor="ctr"/>
+          <a:lstStyle/>
+          <a:p>
+            <a:pPr indent="0" marL="0">
+              <a:buNone/>
+            </a:pPr>
+            <a:r>
+              <a:rPr lang="en-US" sz="1400" dirty="0">
+                <a:solidFill>
+                  <a:srgbClr val="2A9D8F"/>
+                </a:solidFill>
+              </a:rPr>
+              <a:t>☐</a:t>
+            </a:r>
+            <a:endParaRPr lang="en-US" sz="1400" dirty="0"/>
+          </a:p>
+        </p:txBody>
+      </p:sp>
+      <p:sp>
+        <p:nvSpPr>
+          <p:cNvPr id="17" name="Text 15"/>
+          <p:cNvSpPr/>
+          <p:nvPr/>
+        </p:nvSpPr>
+        <p:spPr>
+          <a:xfrm>
+            <a:off x="1234440" y="2560320"/>
+            <a:ext cx="6949440" cy="438912"/>
+          </a:xfrm>
+          <a:prstGeom prst="rect">
+            <a:avLst/>
+          </a:prstGeom>
+          <a:noFill/>
+          <a:ln/>
+        </p:spPr>
+        <p:txBody>
+          <a:bodyPr wrap="square" rtlCol="0" anchor="ctr"/>
+          <a:lstStyle/>
+          <a:p>
+            <a:pPr indent="0" marL="0">
+              <a:buNone/>
+            </a:pPr>
+            <a:r>
+              <a:rPr lang="en-US" sz="1300" dirty="0">
+                <a:solidFill>
+                  <a:srgbClr val="3D3A36"/>
+                </a:solidFill>
+                <a:latin typeface="Calibri" pitchFamily="34" charset="0"/>
+                <a:ea typeface="Calibri" pitchFamily="34" charset="-122"/>
+                <a:cs typeface="Calibri" pitchFamily="34" charset="-120"/>
+              </a:rPr>
+              <a:t>I can explain gas pressure using particle theory</a:t>
+            </a:r>
+            <a:endParaRPr lang="en-US" sz="1300" dirty="0"/>
+          </a:p>
+        </p:txBody>
+      </p:sp>
+      <p:sp>
+        <p:nvSpPr>
+          <p:cNvPr id="18" name="Shape 16"/>
+          <p:cNvSpPr/>
+          <p:nvPr/>
+        </p:nvSpPr>
+        <p:spPr>
+          <a:xfrm>
+            <a:off x="731520" y="3063240"/>
+            <a:ext cx="7680960" cy="438912"/>
+          </a:xfrm>
+          <a:prstGeom prst="rect">
+            <a:avLst/>
+          </a:prstGeom>
+          <a:solidFill>
+            <a:srgbClr val="FFFFFF"/>
+          </a:solidFill>
+          <a:ln/>
+        </p:spPr>
+      </p:sp>
+      <p:sp>
+        <p:nvSpPr>
+          <p:cNvPr id="19" name="Text 17"/>
+          <p:cNvSpPr/>
+          <p:nvPr/>
+        </p:nvSpPr>
+        <p:spPr>
+          <a:xfrm>
+            <a:off x="868680" y="3063240"/>
+            <a:ext cx="320040" cy="438912"/>
+          </a:xfrm>
+          <a:prstGeom prst="rect">
+            <a:avLst/>
+          </a:prstGeom>
+          <a:noFill/>
+          <a:ln/>
+        </p:spPr>
+        <p:txBody>
+          <a:bodyPr wrap="square" rtlCol="0" anchor="ctr"/>
+          <a:lstStyle/>
+          <a:p>
+            <a:pPr indent="0" marL="0">
+              <a:buNone/>
+            </a:pPr>
+            <a:r>
+              <a:rPr lang="en-US" sz="1400" dirty="0">
+                <a:solidFill>
+                  <a:srgbClr val="2A9D8F"/>
+                </a:solidFill>
+              </a:rPr>
+              <a:t>☐</a:t>
+            </a:r>
+            <a:endParaRPr lang="en-US" sz="1400" dirty="0"/>
+          </a:p>
+        </p:txBody>
+      </p:sp>
+      <p:sp>
+        <p:nvSpPr>
+          <p:cNvPr id="20" name="Text 18"/>
+          <p:cNvSpPr/>
+          <p:nvPr/>
+        </p:nvSpPr>
+        <p:spPr>
+          <a:xfrm>
+            <a:off x="1234440" y="3063240"/>
+            <a:ext cx="6949440" cy="438912"/>
+          </a:xfrm>
+          <a:prstGeom prst="rect">
+            <a:avLst/>
+          </a:prstGeom>
+          <a:noFill/>
+          <a:ln/>
+        </p:spPr>
+        <p:txBody>
+          <a:bodyPr wrap="square" rtlCol="0" anchor="ctr"/>
+          <a:lstStyle/>
+          <a:p>
+            <a:pPr indent="0" marL="0">
+              <a:buNone/>
+            </a:pPr>
+            <a:r>
+              <a:rPr lang="en-US" sz="1300" dirty="0">
+                <a:solidFill>
+                  <a:srgbClr val="3D3A36"/>
+                </a:solidFill>
+                <a:latin typeface="Calibri" pitchFamily="34" charset="0"/>
+                <a:ea typeface="Calibri" pitchFamily="34" charset="-122"/>
+                <a:cs typeface="Calibri" pitchFamily="34" charset="-120"/>
+              </a:rPr>
+              <a:t>I know why ice is unusual compared to most solids</a:t>
+            </a:r>
+            <a:endParaRPr lang="en-US" sz="1300" dirty="0"/>
+          </a:p>
+        </p:txBody>
+      </p:sp>
+      <p:sp>
+        <p:nvSpPr>
+          <p:cNvPr id="21" name="Shape 19"/>
+          <p:cNvSpPr/>
+          <p:nvPr/>
+        </p:nvSpPr>
+        <p:spPr>
+          <a:xfrm>
+            <a:off x="731520" y="3749040"/>
+            <a:ext cx="7680960" cy="594360"/>
+          </a:xfrm>
+          <a:prstGeom prst="rect">
+            <a:avLst/>
+          </a:prstGeom>
+          <a:solidFill>
+            <a:srgbClr val="E8F5F3"/>
+          </a:solidFill>
+          <a:ln/>
+          <a:effectLst>
+            <a:outerShdw sx="100000" sy="100000" kx="0" ky="0" algn="bl" rotWithShape="0" blurRad="50800" dist="25400" dir="8100000">
+              <a:srgbClr val="000000">
+                <a:alpha val="10000"/>
+              </a:srgbClr>
+            </a:outerShdw>
+          </a:effectLst>
+        </p:spPr>
+      </p:sp>
+      <p:sp>
+        <p:nvSpPr>
+          <p:cNvPr id="22" name="Text 20"/>
+          <p:cNvSpPr/>
+          <p:nvPr/>
+        </p:nvSpPr>
+        <p:spPr>
+          <a:xfrm>
+            <a:off x="914400" y="3749040"/>
+            <a:ext cx="7315200" cy="594360"/>
+          </a:xfrm>
+          <a:prstGeom prst="rect">
+            <a:avLst/>
+          </a:prstGeom>
+          <a:noFill/>
+          <a:ln/>
+        </p:spPr>
+        <p:txBody>
+          <a:bodyPr wrap="square" rtlCol="0" anchor="ctr"/>
+          <a:lstStyle/>
+          <a:p>
+            <a:pPr indent="0" marL="0">
+              <a:buNone/>
+            </a:pPr>
+            <a:r>
+              <a:rPr lang="en-US" sz="1200" b="1" dirty="0">
+                <a:solidFill>
+                  <a:srgbClr val="2A9D8F"/>
+                </a:solidFill>
+                <a:latin typeface="Calibri" pitchFamily="34" charset="0"/>
+                <a:ea typeface="Calibri" pitchFamily="34" charset="-122"/>
+                <a:cs typeface="Calibri" pitchFamily="34" charset="-120"/>
+              </a:rPr>
+              <a:t>Key Idea: </a:t>
+            </a:r>
+            <a:pPr indent="0" marL="0">
+              <a:buNone/>
+            </a:pPr>
+            <a:r>
+              <a:rPr lang="en-US" sz="1200" i="1" dirty="0">
+                <a:solidFill>
+                  <a:srgbClr val="3D3A36"/>
+                </a:solidFill>
+                <a:latin typeface="Calibri" pitchFamily="34" charset="0"/>
+                <a:ea typeface="Calibri" pitchFamily="34" charset="-122"/>
+                <a:cs typeface="Calibri" pitchFamily="34" charset="-120"/>
+              </a:rPr>
+              <a:t>Understanding states of matter helps explain everything from cooking to weather.</a:t>
+            </a:r>
+            <a:endParaRPr lang="en-US" sz="1200" dirty="0"/>
+          </a:p>
+        </p:txBody>
+      </p:sp>
+    </p:spTree>
+  </p:cSld>
+  <p:clrMapOvr>
+    <a:masterClrMapping/>
+  </p:clrMapOvr>
+</p:sld>
+</file>
+
+<file path=ppt/slides/slide8.xml><?xml version="1.0" encoding="utf-8"?>
+<p:sld xmlns:a="http://schemas.openxmlformats.org/drawingml/2006/main" xmlns:r="http://schemas.openxmlformats.org/officeDocument/2006/relationships" xmlns:p="http://schemas.openxmlformats.org/presentationml/2006/main">
+  <p:cSld name="Slide 8">
+    <p:spTree>
+      <p:nvGrpSpPr>
+        <p:cNvPr id="1" name=""/>
+        <p:cNvGrpSpPr/>
+        <p:nvPr/>
+      </p:nvGrpSpPr>
+      <p:grpSpPr>
+        <a:xfrm>
+          <a:off x="0" y="0"/>
+          <a:ext cx="0" cy="0"/>
+          <a:chOff x="0" y="0"/>
+          <a:chExt cx="0" cy="0"/>
+        </a:xfrm>
+      </p:grpSpPr>
+      <p:sp>
+        <p:nvSpPr>
+          <p:cNvPr id="2" name="Shape 0"/>
+          <p:cNvSpPr/>
+          <p:nvPr/>
+        </p:nvSpPr>
+        <p:spPr>
+          <a:xfrm>
+            <a:off x="0" y="0"/>
+            <a:ext cx="9144000" cy="5143500"/>
+          </a:xfrm>
+          <a:prstGeom prst="rect">
+            <a:avLst/>
+          </a:prstGeom>
+          <a:solidFill>
+            <a:srgbClr val="1B2A4A"/>
+          </a:solidFill>
+          <a:ln/>
+        </p:spPr>
+      </p:sp>
+      <p:sp>
+        <p:nvSpPr>
+          <p:cNvPr id="3" name="Shape 1"/>
+          <p:cNvSpPr/>
+          <p:nvPr/>
+        </p:nvSpPr>
+        <p:spPr>
+          <a:xfrm>
+            <a:off x="0" y="4777740"/>
+            <a:ext cx="9144000" cy="365760"/>
+          </a:xfrm>
+          <a:prstGeom prst="rect">
+            <a:avLst/>
+          </a:prstGeom>
+          <a:solidFill>
+            <a:srgbClr val="2A9D8F"/>
+          </a:solidFill>
+          <a:ln/>
+        </p:spPr>
+      </p:sp>
+      <p:sp>
+        <p:nvSpPr>
+          <p:cNvPr id="4" name="Shape 2"/>
+          <p:cNvSpPr/>
+          <p:nvPr/>
+        </p:nvSpPr>
+        <p:spPr>
+          <a:xfrm>
+            <a:off x="-914400" y="-914400"/>
+            <a:ext cx="3657600" cy="3657600"/>
+          </a:xfrm>
+          <a:prstGeom prst="ellipse">
+            <a:avLst/>
+          </a:prstGeom>
+          <a:solidFill>
+            <a:srgbClr val="2A9D8F">
+              <a:alpha val="10000"/>
+            </a:srgbClr>
+          </a:solidFill>
+          <a:ln/>
+        </p:spPr>
+      </p:sp>
+      <p:sp>
+        <p:nvSpPr>
+          <p:cNvPr id="5" name="Text 3"/>
+          <p:cNvSpPr/>
+          <p:nvPr/>
+        </p:nvSpPr>
+        <p:spPr>
+          <a:xfrm>
+            <a:off x="731520" y="1463040"/>
+            <a:ext cx="7680960" cy="822960"/>
+          </a:xfrm>
+          <a:prstGeom prst="rect">
+            <a:avLst/>
+          </a:prstGeom>
+          <a:noFill/>
+          <a:ln/>
+        </p:spPr>
+        <p:txBody>
+          <a:bodyPr wrap="square" rtlCol="0" anchor="ctr"/>
+          <a:lstStyle/>
+          <a:p>
+            <a:pPr algn="ctr" indent="0" marL="0">
+              <a:buNone/>
+            </a:pPr>
+            <a:r>
+              <a:rPr lang="en-US" sz="3400" b="1" dirty="0">
                 <a:solidFill>
                   <a:srgbClr val="FFFFFF"/>
                 </a:solidFill>
@@ -2754,149 +6668,22 @@
                 <a:ea typeface="Georgia" pitchFamily="34" charset="-122"/>
                 <a:cs typeface="Georgia" pitchFamily="34" charset="-120"/>
               </a:rPr>
-              <a:t>Key Takeaways</a:t>
-            </a:r>
-            <a:endParaRPr lang="en-US" sz="3200" dirty="0"/>
+              <a:t>Review &amp; Practise</a:t>
+            </a:r>
+            <a:endParaRPr lang="en-US" sz="3400" dirty="0"/>
           </a:p>
         </p:txBody>
       </p:sp>
       <p:sp>
         <p:nvSpPr>
-          <p:cNvPr id="4" name="Text 2"/>
-          <p:cNvSpPr/>
-          <p:nvPr/>
-        </p:nvSpPr>
-        <p:spPr>
-          <a:xfrm>
-            <a:off x="731520" y="1463040"/>
-            <a:ext cx="7772400" cy="3200400"/>
-          </a:xfrm>
-          <a:prstGeom prst="rect">
-            <a:avLst/>
-          </a:prstGeom>
-          <a:noFill/>
-          <a:ln/>
-        </p:spPr>
-        <p:txBody>
-          <a:bodyPr wrap="square" rtlCol="0" anchor="t"/>
-          <a:lstStyle/>
-          <a:p>
-            <a:pPr marL="342900" indent="-342900">
-              <a:spcAft>
-                <a:spcPts val="1000"/>
-              </a:spcAft>
-              <a:buSzPct val="100000"/>
-              <a:buChar char="•"/>
-            </a:pPr>
-            <a:r>
-              <a:rPr lang="en-US" sz="1500" dirty="0">
-                <a:solidFill>
-                  <a:srgbClr val="CADCFC"/>
-                </a:solidFill>
-                <a:latin typeface="Calibri" pitchFamily="34" charset="0"/>
-                <a:ea typeface="Calibri" pitchFamily="34" charset="-122"/>
-                <a:cs typeface="Calibri" pitchFamily="34" charset="-120"/>
-              </a:rPr>
-              <a:t>Three states: solid (fixed shape + volume), liquid (fixed volume), gas (fills container)</a:t>
-            </a:r>
-            <a:endParaRPr lang="en-US" sz="1500" dirty="0"/>
-          </a:p>
-          <a:p>
-            <a:pPr marL="342900" indent="-342900">
-              <a:spcAft>
-                <a:spcPts val="1000"/>
-              </a:spcAft>
-              <a:buSzPct val="100000"/>
-              <a:buChar char="•"/>
-            </a:pPr>
-            <a:r>
-              <a:rPr lang="en-US" sz="1500" dirty="0">
-                <a:solidFill>
-                  <a:srgbClr val="CADCFC"/>
-                </a:solidFill>
-                <a:latin typeface="Calibri" pitchFamily="34" charset="0"/>
-                <a:ea typeface="Calibri" pitchFamily="34" charset="-122"/>
-                <a:cs typeface="Calibri" pitchFamily="34" charset="-120"/>
-              </a:rPr>
-              <a:t>Forces between particles: solid strongest, gas weakest</a:t>
-            </a:r>
-            <a:endParaRPr lang="en-US" sz="1500" dirty="0"/>
-          </a:p>
-          <a:p>
-            <a:pPr marL="342900" indent="-342900">
-              <a:spcAft>
-                <a:spcPts val="1000"/>
-              </a:spcAft>
-              <a:buSzPct val="100000"/>
-              <a:buChar char="•"/>
-            </a:pPr>
-            <a:r>
-              <a:rPr lang="en-US" sz="1500" dirty="0">
-                <a:solidFill>
-                  <a:srgbClr val="CADCFC"/>
-                </a:solidFill>
-                <a:latin typeface="Calibri" pitchFamily="34" charset="0"/>
-                <a:ea typeface="Calibri" pitchFamily="34" charset="-122"/>
-                <a:cs typeface="Calibri" pitchFamily="34" charset="-120"/>
-              </a:rPr>
-              <a:t>Density = mass ÷ volume</a:t>
-            </a:r>
-            <a:endParaRPr lang="en-US" sz="1500" dirty="0"/>
-          </a:p>
-          <a:p>
-            <a:pPr marL="342900" indent="-342900">
-              <a:spcAft>
-                <a:spcPts val="1000"/>
-              </a:spcAft>
-              <a:buSzPct val="100000"/>
-              <a:buChar char="•"/>
-            </a:pPr>
-            <a:r>
-              <a:rPr lang="en-US" sz="1500" dirty="0">
-                <a:solidFill>
-                  <a:srgbClr val="CADCFC"/>
-                </a:solidFill>
-                <a:latin typeface="Calibri" pitchFamily="34" charset="0"/>
-                <a:ea typeface="Calibri" pitchFamily="34" charset="-122"/>
-                <a:cs typeface="Calibri" pitchFamily="34" charset="-120"/>
-              </a:rPr>
-              <a:t>Solids usually densest, gases least dense</a:t>
-            </a:r>
-            <a:endParaRPr lang="en-US" sz="1500" dirty="0"/>
-          </a:p>
-          <a:p>
-            <a:pPr marL="342900" indent="-342900">
-              <a:spcAft>
-                <a:spcPts val="1000"/>
-              </a:spcAft>
-              <a:buSzPct val="100000"/>
-              <a:buChar char="•"/>
-            </a:pPr>
-            <a:r>
-              <a:rPr lang="en-US" sz="1500" dirty="0">
-                <a:solidFill>
-                  <a:srgbClr val="CADCFC"/>
-                </a:solidFill>
-                <a:latin typeface="Calibri" pitchFamily="34" charset="0"/>
-                <a:ea typeface="Calibri" pitchFamily="34" charset="-122"/>
-                <a:cs typeface="Calibri" pitchFamily="34" charset="-120"/>
-              </a:rPr>
-              <a:t>Ice floats because it is less dense than liquid water</a:t>
-            </a:r>
-            <a:endParaRPr lang="en-US" sz="1500" dirty="0"/>
-          </a:p>
-        </p:txBody>
-      </p:sp>
-      <p:sp>
-        <p:nvSpPr>
-          <p:cNvPr id="5" name="Text 3"/>
-          <p:cNvSpPr/>
-          <p:nvPr/>
-        </p:nvSpPr>
-        <p:spPr>
-          <a:xfrm>
-            <a:off x="731520" y="4572000"/>
-            <a:ext cx="7772400" cy="365760"/>
+          <p:cNvPr id="6" name="Text 4"/>
+          <p:cNvSpPr/>
+          <p:nvPr/>
+        </p:nvSpPr>
+        <p:spPr>
+          <a:xfrm>
+            <a:off x="731520" y="2468880"/>
+            <a:ext cx="7680960" cy="457200"/>
           </a:xfrm>
           <a:prstGeom prst="rect">
             <a:avLst/>
@@ -2908,13 +6695,13 @@
           <a:bodyPr wrap="square" rtlCol="0" anchor="ctr"/>
           <a:lstStyle/>
           <a:p>
-            <a:pPr indent="0" marL="0">
+            <a:pPr algn="ctr" indent="0" marL="0">
               <a:buNone/>
             </a:pPr>
             <a:r>
-              <a:rPr lang="en-US" sz="1100" dirty="0">
+              <a:rPr lang="en-US" sz="1800" dirty="0">
                 <a:solidFill>
-                  <a:srgbClr val="E9C46A"/>
+                  <a:srgbClr val="2A9D8F"/>
                 </a:solidFill>
                 <a:latin typeface="Calibri" pitchFamily="34" charset="0"/>
                 <a:ea typeface="Calibri" pitchFamily="34" charset="-122"/>
@@ -2922,7 +6709,46 @@
               </a:rPr>
               <a:t>mrzocchi.com</a:t>
             </a:r>
-            <a:endParaRPr lang="en-US" sz="1100" dirty="0"/>
+            <a:endParaRPr lang="en-US" sz="1800" dirty="0"/>
+          </a:p>
+        </p:txBody>
+      </p:sp>
+      <p:sp>
+        <p:nvSpPr>
+          <p:cNvPr id="7" name="Text 5"/>
+          <p:cNvSpPr/>
+          <p:nvPr/>
+        </p:nvSpPr>
+        <p:spPr>
+          <a:xfrm>
+            <a:off x="731520" y="3108960"/>
+            <a:ext cx="7680960" cy="457200"/>
+          </a:xfrm>
+          <a:prstGeom prst="rect">
+            <a:avLst/>
+          </a:prstGeom>
+          <a:noFill/>
+          <a:ln/>
+        </p:spPr>
+        <p:txBody>
+          <a:bodyPr wrap="square" rtlCol="0" anchor="ctr"/>
+          <a:lstStyle/>
+          <a:p>
+            <a:pPr algn="ctr" indent="0" marL="0">
+              <a:buNone/>
+            </a:pPr>
+            <a:r>
+              <a:rPr lang="en-US" sz="1300" dirty="0">
+                <a:solidFill>
+                  <a:srgbClr val="9B9690"/>
+                </a:solidFill>
+                <a:latin typeface="Calibri" pitchFamily="34" charset="0"/>
+                <a:ea typeface="Calibri" pitchFamily="34" charset="-122"/>
+                <a:cs typeface="Calibri" pitchFamily="34" charset="-120"/>
+              </a:rPr>
+              <a:t>Use the Self-Quiz, Review Games, and Practice Builder to test yourself.</a:t>
+            </a:r>
+            <a:endParaRPr lang="en-US" sz="1300" dirty="0"/>
           </a:p>
         </p:txBody>
       </p:sp>
